--- a/policy/proposal_013.pptx
+++ b/policy/proposal_013.pptx
@@ -3260,7 +3260,7 @@
     <p:bg>
       <p:bgPr>
         <a:solidFill>
-          <a:srgbClr val="0A0A0A"/>
+          <a:srgbClr val="F5F6F8"/>
         </a:solidFill>
       </p:bgPr>
     </p:bg>
@@ -3305,11 +3305,11 @@
             <a:r>
               <a:rPr lang="en-US" sz="1200" b="1" spc="200" kern="0" dirty="0">
                 <a:solidFill>
-                  <a:srgbClr val="D62828"/>
+                  <a:srgbClr val="C8161D"/>
                 </a:solidFill>
                 <a:latin typeface="Arial" pitchFamily="34" charset="0"/>
-                <a:ea typeface="Arial" pitchFamily="34" charset="-122"/>
-                <a:cs typeface="Arial" pitchFamily="34" charset="-120"/>
+                <a:ea typeface="BIZ UDPGothic" pitchFamily="34" charset="-122"/>
+                <a:cs typeface="BIZ UDPGothic" pitchFamily="34" charset="-120"/>
               </a:rPr>
               <a:t>政策提言プラットフォーム ── 提言 013</a:t>
             </a:r>
@@ -3347,11 +3347,11 @@
             <a:r>
               <a:rPr lang="en-US" sz="3200" b="1" dirty="0">
                 <a:solidFill>
-                  <a:srgbClr val="F5F5F0"/>
-                </a:solidFill>
-                <a:latin typeface="Noto Sans JP" pitchFamily="34" charset="0"/>
-                <a:ea typeface="Noto Sans JP" pitchFamily="34" charset="-122"/>
-                <a:cs typeface="Noto Sans JP" pitchFamily="34" charset="-120"/>
+                  <a:srgbClr val="16181D"/>
+                </a:solidFill>
+                <a:latin typeface="BIZ UDPGothic" pitchFamily="34" charset="0"/>
+                <a:ea typeface="BIZ UDPGothic" pitchFamily="34" charset="-122"/>
+                <a:cs typeface="BIZ UDPGothic" pitchFamily="34" charset="-120"/>
               </a:rPr>
               <a:t>企業補助金の抜本改革と</a:t>
             </a:r>
@@ -3367,11 +3367,11 @@
             <a:r>
               <a:rPr lang="en-US" sz="3200" b="1" dirty="0">
                 <a:solidFill>
-                  <a:srgbClr val="F5F5F0"/>
-                </a:solidFill>
-                <a:latin typeface="Noto Sans JP" pitchFamily="34" charset="0"/>
-                <a:ea typeface="Noto Sans JP" pitchFamily="34" charset="-122"/>
-                <a:cs typeface="Noto Sans JP" pitchFamily="34" charset="-120"/>
+                  <a:srgbClr val="16181D"/>
+                </a:solidFill>
+                <a:latin typeface="BIZ UDPGothic" pitchFamily="34" charset="0"/>
+                <a:ea typeface="BIZ UDPGothic" pitchFamily="34" charset="-122"/>
+                <a:cs typeface="BIZ UDPGothic" pitchFamily="34" charset="-120"/>
               </a:rPr>
               <a:t>未来創出・文化継承への国家投資集中</a:t>
             </a:r>
@@ -3406,13 +3406,13 @@
             <a:r>
               <a:rPr lang="en-US" sz="1400" dirty="0">
                 <a:solidFill>
-                  <a:srgbClr val="F5F5F0">
+                  <a:srgbClr val="16181D">
                     <a:alpha val="70000"/>
                   </a:srgbClr>
                 </a:solidFill>
-                <a:latin typeface="Noto Sans JP" pitchFamily="34" charset="0"/>
-                <a:ea typeface="Noto Sans JP" pitchFamily="34" charset="-122"/>
-                <a:cs typeface="Noto Sans JP" pitchFamily="34" charset="-120"/>
+                <a:latin typeface="BIZ UDPGothic" pitchFamily="34" charset="0"/>
+                <a:ea typeface="BIZ UDPGothic" pitchFamily="34" charset="-122"/>
+                <a:cs typeface="BIZ UDPGothic" pitchFamily="34" charset="-120"/>
               </a:rPr>
               <a:t>〜バラマキ補助金をやめて、未来と伝統を守るお金に変える〜</a:t>
             </a:r>
@@ -3447,13 +3447,13 @@
             <a:r>
               <a:rPr lang="en-US" sz="800" dirty="0">
                 <a:solidFill>
-                  <a:srgbClr val="F5F5F0">
+                  <a:srgbClr val="16181D">
                     <a:alpha val="40000"/>
                   </a:srgbClr>
                 </a:solidFill>
                 <a:latin typeface="Arial" pitchFamily="34" charset="0"/>
-                <a:ea typeface="Arial" pitchFamily="34" charset="-122"/>
-                <a:cs typeface="Arial" pitchFamily="34" charset="-120"/>
+                <a:ea typeface="BIZ UDPGothic" pitchFamily="34" charset="-122"/>
+                <a:cs typeface="BIZ UDPGothic" pitchFamily="34" charset="-120"/>
               </a:rPr>
               <a:t>REBOOT JAPAN ── 政策提言プラットフォーム</a:t>
             </a:r>
@@ -3488,13 +3488,13 @@
             <a:r>
               <a:rPr lang="en-US" sz="800" dirty="0">
                 <a:solidFill>
-                  <a:srgbClr val="F5F5F0">
+                  <a:srgbClr val="16181D">
                     <a:alpha val="40000"/>
                   </a:srgbClr>
                 </a:solidFill>
                 <a:latin typeface="Arial" pitchFamily="34" charset="0"/>
-                <a:ea typeface="Arial" pitchFamily="34" charset="-122"/>
-                <a:cs typeface="Arial" pitchFamily="34" charset="-120"/>
+                <a:ea typeface="BIZ UDPGothic" pitchFamily="34" charset="-122"/>
+                <a:cs typeface="BIZ UDPGothic" pitchFamily="34" charset="-120"/>
               </a:rPr>
               <a:t>1</a:t>
             </a:r>
@@ -3516,7 +3516,7 @@
     <p:bg>
       <p:bgPr>
         <a:solidFill>
-          <a:srgbClr val="0A0A0A"/>
+          <a:srgbClr val="F5F6F8"/>
         </a:solidFill>
       </p:bgPr>
     </p:bg>
@@ -3561,11 +3561,11 @@
             <a:r>
               <a:rPr lang="en-US" sz="1200" b="1" spc="200" kern="0" dirty="0">
                 <a:solidFill>
-                  <a:srgbClr val="D62828"/>
+                  <a:srgbClr val="C8161D"/>
                 </a:solidFill>
                 <a:latin typeface="Arial" pitchFamily="34" charset="0"/>
-                <a:ea typeface="Arial" pitchFamily="34" charset="-122"/>
-                <a:cs typeface="Arial" pitchFamily="34" charset="-120"/>
+                <a:ea typeface="BIZ UDPGothic" pitchFamily="34" charset="-122"/>
+                <a:cs typeface="BIZ UDPGothic" pitchFamily="34" charset="-120"/>
               </a:rPr>
               <a:t>PILLAR 03</a:t>
             </a:r>
@@ -3603,11 +3603,11 @@
             <a:r>
               <a:rPr lang="en-US" sz="2600" b="1" dirty="0">
                 <a:solidFill>
-                  <a:srgbClr val="F5F5F0"/>
-                </a:solidFill>
-                <a:latin typeface="Noto Sans JP" pitchFamily="34" charset="0"/>
-                <a:ea typeface="Noto Sans JP" pitchFamily="34" charset="-122"/>
-                <a:cs typeface="Noto Sans JP" pitchFamily="34" charset="-120"/>
+                  <a:srgbClr val="16181D"/>
+                </a:solidFill>
+                <a:latin typeface="BIZ UDPGothic" pitchFamily="34" charset="0"/>
+                <a:ea typeface="BIZ UDPGothic" pitchFamily="34" charset="-122"/>
+                <a:cs typeface="BIZ UDPGothic" pitchFamily="34" charset="-120"/>
               </a:rPr>
               <a:t>伝統文化は特別に守る</a:t>
             </a:r>
@@ -3645,13 +3645,13 @@
             <a:r>
               <a:rPr lang="en-US" sz="1350" dirty="0">
                 <a:solidFill>
-                  <a:srgbClr val="F5F5F0">
+                  <a:srgbClr val="16181D">
                     <a:alpha val="90000"/>
                   </a:srgbClr>
                 </a:solidFill>
-                <a:latin typeface="Noto Sans JP" pitchFamily="34" charset="0"/>
-                <a:ea typeface="Noto Sans JP" pitchFamily="34" charset="-122"/>
-                <a:cs typeface="Noto Sans JP" pitchFamily="34" charset="-120"/>
+                <a:latin typeface="BIZ UDPGothic" pitchFamily="34" charset="0"/>
+                <a:ea typeface="BIZ UDPGothic" pitchFamily="34" charset="-122"/>
+                <a:cs typeface="BIZ UDPGothic" pitchFamily="34" charset="-120"/>
               </a:rPr>
               <a:t>市場に任せると消えてしまう「日本だけの文化」は、削減対象にせず恒久的な国の約束として守る。</a:t>
             </a:r>
@@ -3676,11 +3676,11 @@
             </a:avLst>
           </a:prstGeom>
           <a:solidFill>
-            <a:srgbClr val="1A1A1A"/>
+            <a:srgbClr val="FFFFFF"/>
           </a:solidFill>
           <a:ln w="12700">
             <a:solidFill>
-              <a:srgbClr val="2E2E2E"/>
+              <a:srgbClr val="DDE0E6"/>
             </a:solidFill>
             <a:prstDash val="solid"/>
           </a:ln>
@@ -3759,11 +3759,11 @@
             <a:r>
               <a:rPr lang="en-US" sz="1250" b="1" dirty="0">
                 <a:solidFill>
-                  <a:srgbClr val="F5F5F0"/>
-                </a:solidFill>
-                <a:latin typeface="Noto Sans JP" pitchFamily="34" charset="0"/>
-                <a:ea typeface="Noto Sans JP" pitchFamily="34" charset="-122"/>
-                <a:cs typeface="Noto Sans JP" pitchFamily="34" charset="-120"/>
+                  <a:srgbClr val="16181D"/>
+                </a:solidFill>
+                <a:latin typeface="BIZ UDPGothic" pitchFamily="34" charset="0"/>
+                <a:ea typeface="BIZ UDPGothic" pitchFamily="34" charset="-122"/>
+                <a:cs typeface="BIZ UDPGothic" pitchFamily="34" charset="-120"/>
               </a:rPr>
               <a:t>伝統的工芸品</a:t>
             </a:r>
@@ -3801,13 +3801,13 @@
             <a:r>
               <a:rPr lang="en-US" sz="950" dirty="0">
                 <a:solidFill>
-                  <a:srgbClr val="F5F5F0">
+                  <a:srgbClr val="16181D">
                     <a:alpha val="75000"/>
                   </a:srgbClr>
                 </a:solidFill>
-                <a:latin typeface="Noto Sans JP" pitchFamily="34" charset="0"/>
-                <a:ea typeface="Noto Sans JP" pitchFamily="34" charset="-122"/>
-                <a:cs typeface="Noto Sans JP" pitchFamily="34" charset="-120"/>
+                <a:latin typeface="BIZ UDPGothic" pitchFamily="34" charset="0"/>
+                <a:ea typeface="BIZ UDPGothic" pitchFamily="34" charset="-122"/>
+                <a:cs typeface="BIZ UDPGothic" pitchFamily="34" charset="-120"/>
               </a:rPr>
               <a:t>後継者づくりと技術の継承を大幅に強化</a:t>
             </a:r>
@@ -3832,11 +3832,11 @@
             </a:avLst>
           </a:prstGeom>
           <a:solidFill>
-            <a:srgbClr val="1A1A1A"/>
+            <a:srgbClr val="FFFFFF"/>
           </a:solidFill>
           <a:ln w="12700">
             <a:solidFill>
-              <a:srgbClr val="2E2E2E"/>
+              <a:srgbClr val="DDE0E6"/>
             </a:solidFill>
             <a:prstDash val="solid"/>
           </a:ln>
@@ -3915,11 +3915,11 @@
             <a:r>
               <a:rPr lang="en-US" sz="1250" b="1" dirty="0">
                 <a:solidFill>
-                  <a:srgbClr val="F5F5F0"/>
-                </a:solidFill>
-                <a:latin typeface="Noto Sans JP" pitchFamily="34" charset="0"/>
-                <a:ea typeface="Noto Sans JP" pitchFamily="34" charset="-122"/>
-                <a:cs typeface="Noto Sans JP" pitchFamily="34" charset="-120"/>
+                  <a:srgbClr val="16181D"/>
+                </a:solidFill>
+                <a:latin typeface="BIZ UDPGothic" pitchFamily="34" charset="0"/>
+                <a:ea typeface="BIZ UDPGothic" pitchFamily="34" charset="-122"/>
+                <a:cs typeface="BIZ UDPGothic" pitchFamily="34" charset="-120"/>
               </a:rPr>
               <a:t>神社仏閣</a:t>
             </a:r>
@@ -3957,13 +3957,13 @@
             <a:r>
               <a:rPr lang="en-US" sz="950" dirty="0">
                 <a:solidFill>
-                  <a:srgbClr val="F5F5F0">
+                  <a:srgbClr val="16181D">
                     <a:alpha val="75000"/>
                   </a:srgbClr>
                 </a:solidFill>
-                <a:latin typeface="Noto Sans JP" pitchFamily="34" charset="0"/>
-                <a:ea typeface="Noto Sans JP" pitchFamily="34" charset="-122"/>
-                <a:cs typeface="Noto Sans JP" pitchFamily="34" charset="-120"/>
+                <a:latin typeface="BIZ UDPGothic" pitchFamily="34" charset="0"/>
+                <a:ea typeface="BIZ UDPGothic" pitchFamily="34" charset="-122"/>
+                <a:cs typeface="BIZ UDPGothic" pitchFamily="34" charset="-120"/>
               </a:rPr>
               <a:t>国宝・重要文化財の修理予算を恒久財源に</a:t>
             </a:r>
@@ -3988,11 +3988,11 @@
             </a:avLst>
           </a:prstGeom>
           <a:solidFill>
-            <a:srgbClr val="1A1A1A"/>
+            <a:srgbClr val="FFFFFF"/>
           </a:solidFill>
           <a:ln w="12700">
             <a:solidFill>
-              <a:srgbClr val="2E2E2E"/>
+              <a:srgbClr val="DDE0E6"/>
             </a:solidFill>
             <a:prstDash val="solid"/>
           </a:ln>
@@ -4071,11 +4071,11 @@
             <a:r>
               <a:rPr lang="en-US" sz="1250" b="1" dirty="0">
                 <a:solidFill>
-                  <a:srgbClr val="F5F5F0"/>
-                </a:solidFill>
-                <a:latin typeface="Noto Sans JP" pitchFamily="34" charset="0"/>
-                <a:ea typeface="Noto Sans JP" pitchFamily="34" charset="-122"/>
-                <a:cs typeface="Noto Sans JP" pitchFamily="34" charset="-120"/>
+                  <a:srgbClr val="16181D"/>
+                </a:solidFill>
+                <a:latin typeface="BIZ UDPGothic" pitchFamily="34" charset="0"/>
+                <a:ea typeface="BIZ UDPGothic" pitchFamily="34" charset="-122"/>
+                <a:cs typeface="BIZ UDPGothic" pitchFamily="34" charset="-120"/>
               </a:rPr>
               <a:t>伝統芸能</a:t>
             </a:r>
@@ -4113,13 +4113,13 @@
             <a:r>
               <a:rPr lang="en-US" sz="950" dirty="0">
                 <a:solidFill>
-                  <a:srgbClr val="F5F5F0">
+                  <a:srgbClr val="16181D">
                     <a:alpha val="75000"/>
                   </a:srgbClr>
                 </a:solidFill>
-                <a:latin typeface="Noto Sans JP" pitchFamily="34" charset="0"/>
-                <a:ea typeface="Noto Sans JP" pitchFamily="34" charset="-122"/>
-                <a:cs typeface="Noto Sans JP" pitchFamily="34" charset="-120"/>
+                <a:latin typeface="BIZ UDPGothic" pitchFamily="34" charset="0"/>
+                <a:ea typeface="BIZ UDPGothic" pitchFamily="34" charset="-122"/>
+                <a:cs typeface="BIZ UDPGothic" pitchFamily="34" charset="-120"/>
               </a:rPr>
               <a:t>歌舞伎・能楽・文楽の運営費を恒久財源に</a:t>
             </a:r>
@@ -4154,13 +4154,13 @@
             <a:r>
               <a:rPr lang="en-US" sz="800" dirty="0">
                 <a:solidFill>
-                  <a:srgbClr val="F5F5F0">
+                  <a:srgbClr val="16181D">
                     <a:alpha val="40000"/>
                   </a:srgbClr>
                 </a:solidFill>
                 <a:latin typeface="Arial" pitchFamily="34" charset="0"/>
-                <a:ea typeface="Arial" pitchFamily="34" charset="-122"/>
-                <a:cs typeface="Arial" pitchFamily="34" charset="-120"/>
+                <a:ea typeface="BIZ UDPGothic" pitchFamily="34" charset="-122"/>
+                <a:cs typeface="BIZ UDPGothic" pitchFamily="34" charset="-120"/>
               </a:rPr>
               <a:t>REBOOT JAPAN ── 政策提言プラットフォーム</a:t>
             </a:r>
@@ -4195,13 +4195,13 @@
             <a:r>
               <a:rPr lang="en-US" sz="800" dirty="0">
                 <a:solidFill>
-                  <a:srgbClr val="F5F5F0">
+                  <a:srgbClr val="16181D">
                     <a:alpha val="40000"/>
                   </a:srgbClr>
                 </a:solidFill>
                 <a:latin typeface="Arial" pitchFamily="34" charset="0"/>
-                <a:ea typeface="Arial" pitchFamily="34" charset="-122"/>
-                <a:cs typeface="Arial" pitchFamily="34" charset="-120"/>
+                <a:ea typeface="BIZ UDPGothic" pitchFamily="34" charset="-122"/>
+                <a:cs typeface="BIZ UDPGothic" pitchFamily="34" charset="-120"/>
               </a:rPr>
               <a:t>10</a:t>
             </a:r>
@@ -4223,7 +4223,7 @@
     <p:bg>
       <p:bgPr>
         <a:solidFill>
-          <a:srgbClr val="0A0A0A"/>
+          <a:srgbClr val="F5F6F8"/>
         </a:solidFill>
       </p:bgPr>
     </p:bg>
@@ -4268,11 +4268,11 @@
             <a:r>
               <a:rPr lang="en-US" sz="1200" b="1" spc="200" kern="0" dirty="0">
                 <a:solidFill>
-                  <a:srgbClr val="D62828"/>
+                  <a:srgbClr val="C8161D"/>
                 </a:solidFill>
                 <a:latin typeface="Arial" pitchFamily="34" charset="0"/>
-                <a:ea typeface="Arial" pitchFamily="34" charset="-122"/>
-                <a:cs typeface="Arial" pitchFamily="34" charset="-120"/>
+                <a:ea typeface="BIZ UDPGothic" pitchFamily="34" charset="-122"/>
+                <a:cs typeface="BIZ UDPGothic" pitchFamily="34" charset="-120"/>
               </a:rPr>
               <a:t>PILLAR 03 — DETAIL</a:t>
             </a:r>
@@ -4310,11 +4310,11 @@
             <a:r>
               <a:rPr lang="en-US" sz="2600" b="1" dirty="0">
                 <a:solidFill>
-                  <a:srgbClr val="F5F5F0"/>
-                </a:solidFill>
-                <a:latin typeface="Noto Sans JP" pitchFamily="34" charset="0"/>
-                <a:ea typeface="Noto Sans JP" pitchFamily="34" charset="-122"/>
-                <a:cs typeface="Noto Sans JP" pitchFamily="34" charset="-120"/>
+                  <a:srgbClr val="16181D"/>
+                </a:solidFill>
+                <a:latin typeface="BIZ UDPGothic" pitchFamily="34" charset="0"/>
+                <a:ea typeface="BIZ UDPGothic" pitchFamily="34" charset="-122"/>
+                <a:cs typeface="BIZ UDPGothic" pitchFamily="34" charset="-120"/>
               </a:rPr>
               <a:t>伝統的工芸品への支援を20倍に</a:t>
             </a:r>
@@ -4352,13 +4352,13 @@
             <a:r>
               <a:rPr lang="en-US" sz="1350" dirty="0">
                 <a:solidFill>
-                  <a:srgbClr val="F5F5F0">
+                  <a:srgbClr val="16181D">
                     <a:alpha val="90000"/>
                   </a:srgbClr>
                 </a:solidFill>
-                <a:latin typeface="Noto Sans JP" pitchFamily="34" charset="0"/>
-                <a:ea typeface="Noto Sans JP" pitchFamily="34" charset="-122"/>
-                <a:cs typeface="Noto Sans JP" pitchFamily="34" charset="-120"/>
+                <a:latin typeface="BIZ UDPGothic" pitchFamily="34" charset="0"/>
+                <a:ea typeface="BIZ UDPGothic" pitchFamily="34" charset="-122"/>
+                <a:cs typeface="BIZ UDPGothic" pitchFamily="34" charset="-120"/>
               </a:rPr>
               <a:t>原材料の確保、若手後継者の育成、海外への販路開拓まで、まとめて手厚くする。</a:t>
             </a:r>
@@ -4383,11 +4383,11 @@
             </a:avLst>
           </a:prstGeom>
           <a:solidFill>
-            <a:srgbClr val="1A1A1A"/>
+            <a:srgbClr val="FFFFFF"/>
           </a:solidFill>
           <a:ln w="12700">
             <a:solidFill>
-              <a:srgbClr val="2E2E2E"/>
+              <a:srgbClr val="DDE0E6"/>
             </a:solidFill>
             <a:prstDash val="solid"/>
           </a:ln>
@@ -4427,11 +4427,11 @@
             <a:r>
               <a:rPr lang="en-US" sz="2400" b="1" dirty="0">
                 <a:solidFill>
-                  <a:srgbClr val="D62828"/>
+                  <a:srgbClr val="C8161D"/>
                 </a:solidFill>
                 <a:latin typeface="Arial" pitchFamily="34" charset="0"/>
-                <a:ea typeface="Arial" pitchFamily="34" charset="-122"/>
-                <a:cs typeface="Arial" pitchFamily="34" charset="-120"/>
+                <a:ea typeface="BIZ UDPGothic" pitchFamily="34" charset="-122"/>
+                <a:cs typeface="BIZ UDPGothic" pitchFamily="34" charset="-120"/>
               </a:rPr>
               <a:t>11億円</a:t>
             </a:r>
@@ -4469,11 +4469,11 @@
             <a:r>
               <a:rPr lang="en-US" sz="1150" b="1" dirty="0">
                 <a:solidFill>
-                  <a:srgbClr val="F5F5F0"/>
-                </a:solidFill>
-                <a:latin typeface="Noto Sans JP" pitchFamily="34" charset="0"/>
-                <a:ea typeface="Noto Sans JP" pitchFamily="34" charset="-122"/>
-                <a:cs typeface="Noto Sans JP" pitchFamily="34" charset="-120"/>
+                  <a:srgbClr val="16181D"/>
+                </a:solidFill>
+                <a:latin typeface="BIZ UDPGothic" pitchFamily="34" charset="0"/>
+                <a:ea typeface="BIZ UDPGothic" pitchFamily="34" charset="-122"/>
+                <a:cs typeface="BIZ UDPGothic" pitchFamily="34" charset="-120"/>
               </a:rPr>
               <a:t>現在の予算</a:t>
             </a:r>
@@ -4511,13 +4511,13 @@
             <a:r>
               <a:rPr lang="en-US" sz="900" dirty="0">
                 <a:solidFill>
-                  <a:srgbClr val="F5F5F0">
+                  <a:srgbClr val="16181D">
                     <a:alpha val="70000"/>
                   </a:srgbClr>
                 </a:solidFill>
-                <a:latin typeface="Noto Sans JP" pitchFamily="34" charset="0"/>
-                <a:ea typeface="Noto Sans JP" pitchFamily="34" charset="-122"/>
-                <a:cs typeface="Noto Sans JP" pitchFamily="34" charset="-120"/>
+                <a:latin typeface="BIZ UDPGothic" pitchFamily="34" charset="0"/>
+                <a:ea typeface="BIZ UDPGothic" pitchFamily="34" charset="-122"/>
+                <a:cs typeface="BIZ UDPGothic" pitchFamily="34" charset="-120"/>
               </a:rPr>
               <a:t>伝統的工芸品産業支援補助金（令和8年度）</a:t>
             </a:r>
@@ -4552,7 +4552,7 @@
             <a:r>
               <a:rPr lang="en-US" sz="3200" dirty="0">
                 <a:solidFill>
-                  <a:srgbClr val="F5F5F0"/>
+                  <a:srgbClr val="16181D"/>
                 </a:solidFill>
               </a:rPr>
               <a:t>→</a:t>
@@ -4578,11 +4578,11 @@
             </a:avLst>
           </a:prstGeom>
           <a:solidFill>
-            <a:srgbClr val="1A1A1A"/>
+            <a:srgbClr val="FFFFFF"/>
           </a:solidFill>
           <a:ln w="12700">
             <a:solidFill>
-              <a:srgbClr val="2E2E2E"/>
+              <a:srgbClr val="DDE0E6"/>
             </a:solidFill>
             <a:prstDash val="solid"/>
           </a:ln>
@@ -4622,11 +4622,11 @@
             <a:r>
               <a:rPr lang="en-US" sz="2400" b="1" dirty="0">
                 <a:solidFill>
-                  <a:srgbClr val="D62828"/>
+                  <a:srgbClr val="C8161D"/>
                 </a:solidFill>
                 <a:latin typeface="Arial" pitchFamily="34" charset="0"/>
-                <a:ea typeface="Arial" pitchFamily="34" charset="-122"/>
-                <a:cs typeface="Arial" pitchFamily="34" charset="-120"/>
+                <a:ea typeface="BIZ UDPGothic" pitchFamily="34" charset="-122"/>
+                <a:cs typeface="BIZ UDPGothic" pitchFamily="34" charset="-120"/>
               </a:rPr>
               <a:t>220億円</a:t>
             </a:r>
@@ -4664,11 +4664,11 @@
             <a:r>
               <a:rPr lang="en-US" sz="1150" b="1" dirty="0">
                 <a:solidFill>
-                  <a:srgbClr val="F5F5F0"/>
-                </a:solidFill>
-                <a:latin typeface="Noto Sans JP" pitchFamily="34" charset="0"/>
-                <a:ea typeface="Noto Sans JP" pitchFamily="34" charset="-122"/>
-                <a:cs typeface="Noto Sans JP" pitchFamily="34" charset="-120"/>
+                  <a:srgbClr val="16181D"/>
+                </a:solidFill>
+                <a:latin typeface="BIZ UDPGothic" pitchFamily="34" charset="0"/>
+                <a:ea typeface="BIZ UDPGothic" pitchFamily="34" charset="-122"/>
+                <a:cs typeface="BIZ UDPGothic" pitchFamily="34" charset="-120"/>
               </a:rPr>
               <a:t>目標の予算</a:t>
             </a:r>
@@ -4706,13 +4706,13 @@
             <a:r>
               <a:rPr lang="en-US" sz="900" dirty="0">
                 <a:solidFill>
-                  <a:srgbClr val="F5F5F0">
+                  <a:srgbClr val="16181D">
                     <a:alpha val="70000"/>
                   </a:srgbClr>
                 </a:solidFill>
-                <a:latin typeface="Noto Sans JP" pitchFamily="34" charset="0"/>
-                <a:ea typeface="Noto Sans JP" pitchFamily="34" charset="-122"/>
-                <a:cs typeface="Noto Sans JP" pitchFamily="34" charset="-120"/>
+                <a:latin typeface="BIZ UDPGothic" pitchFamily="34" charset="0"/>
+                <a:ea typeface="BIZ UDPGothic" pitchFamily="34" charset="-122"/>
+                <a:cs typeface="BIZ UDPGothic" pitchFamily="34" charset="-120"/>
               </a:rPr>
               <a:t>現行の約20倍。恒久財源として法的に位置づける</a:t>
             </a:r>
@@ -4737,11 +4737,11 @@
             </a:avLst>
           </a:prstGeom>
           <a:solidFill>
-            <a:srgbClr val="1A1A1A"/>
+            <a:srgbClr val="FFFFFF"/>
           </a:solidFill>
           <a:ln w="12700">
             <a:solidFill>
-              <a:srgbClr val="2E2E2E"/>
+              <a:srgbClr val="DDE0E6"/>
             </a:solidFill>
             <a:prstDash val="solid"/>
           </a:ln>
@@ -4781,11 +4781,11 @@
             <a:r>
               <a:rPr lang="en-US" sz="1500" b="1" dirty="0">
                 <a:solidFill>
-                  <a:srgbClr val="D62828"/>
+                  <a:srgbClr val="C8161D"/>
                 </a:solidFill>
                 <a:latin typeface="Arial" pitchFamily="34" charset="0"/>
-                <a:ea typeface="Arial" pitchFamily="34" charset="-122"/>
-                <a:cs typeface="Arial" pitchFamily="34" charset="-120"/>
+                <a:ea typeface="BIZ UDPGothic" pitchFamily="34" charset="-122"/>
+                <a:cs typeface="BIZ UDPGothic" pitchFamily="34" charset="-120"/>
               </a:rPr>
               <a:t>+209億円</a:t>
             </a:r>
@@ -4820,13 +4820,13 @@
             <a:r>
               <a:rPr lang="en-US" sz="1000" dirty="0">
                 <a:solidFill>
-                  <a:srgbClr val="F5F5F0">
+                  <a:srgbClr val="16181D">
                     <a:alpha val="80000"/>
                   </a:srgbClr>
                 </a:solidFill>
-                <a:latin typeface="Noto Sans JP" pitchFamily="34" charset="0"/>
-                <a:ea typeface="Noto Sans JP" pitchFamily="34" charset="-122"/>
-                <a:cs typeface="Noto Sans JP" pitchFamily="34" charset="-120"/>
+                <a:latin typeface="BIZ UDPGothic" pitchFamily="34" charset="0"/>
+                <a:ea typeface="BIZ UDPGothic" pitchFamily="34" charset="-122"/>
+                <a:cs typeface="BIZ UDPGothic" pitchFamily="34" charset="-120"/>
               </a:rPr>
               <a:t>純増額</a:t>
             </a:r>
@@ -4861,13 +4861,13 @@
             <a:r>
               <a:rPr lang="en-US" sz="800" dirty="0">
                 <a:solidFill>
-                  <a:srgbClr val="F5F5F0">
+                  <a:srgbClr val="16181D">
                     <a:alpha val="40000"/>
                   </a:srgbClr>
                 </a:solidFill>
                 <a:latin typeface="Arial" pitchFamily="34" charset="0"/>
-                <a:ea typeface="Arial" pitchFamily="34" charset="-122"/>
-                <a:cs typeface="Arial" pitchFamily="34" charset="-120"/>
+                <a:ea typeface="BIZ UDPGothic" pitchFamily="34" charset="-122"/>
+                <a:cs typeface="BIZ UDPGothic" pitchFamily="34" charset="-120"/>
               </a:rPr>
               <a:t>REBOOT JAPAN ── 政策提言プラットフォーム</a:t>
             </a:r>
@@ -4902,13 +4902,13 @@
             <a:r>
               <a:rPr lang="en-US" sz="800" dirty="0">
                 <a:solidFill>
-                  <a:srgbClr val="F5F5F0">
+                  <a:srgbClr val="16181D">
                     <a:alpha val="40000"/>
                   </a:srgbClr>
                 </a:solidFill>
                 <a:latin typeface="Arial" pitchFamily="34" charset="0"/>
-                <a:ea typeface="Arial" pitchFamily="34" charset="-122"/>
-                <a:cs typeface="Arial" pitchFamily="34" charset="-120"/>
+                <a:ea typeface="BIZ UDPGothic" pitchFamily="34" charset="-122"/>
+                <a:cs typeface="BIZ UDPGothic" pitchFamily="34" charset="-120"/>
               </a:rPr>
               <a:t>11</a:t>
             </a:r>
@@ -4930,7 +4930,7 @@
     <p:bg>
       <p:bgPr>
         <a:solidFill>
-          <a:srgbClr val="0A0A0A"/>
+          <a:srgbClr val="F5F6F8"/>
         </a:solidFill>
       </p:bgPr>
     </p:bg>
@@ -4975,11 +4975,11 @@
             <a:r>
               <a:rPr lang="en-US" sz="1200" b="1" spc="200" kern="0" dirty="0">
                 <a:solidFill>
-                  <a:srgbClr val="D62828"/>
+                  <a:srgbClr val="C8161D"/>
                 </a:solidFill>
                 <a:latin typeface="Arial" pitchFamily="34" charset="0"/>
-                <a:ea typeface="Arial" pitchFamily="34" charset="-122"/>
-                <a:cs typeface="Arial" pitchFamily="34" charset="-120"/>
+                <a:ea typeface="BIZ UDPGothic" pitchFamily="34" charset="-122"/>
+                <a:cs typeface="BIZ UDPGothic" pitchFamily="34" charset="-120"/>
               </a:rPr>
               <a:t>PILLAR 03 — DETAIL</a:t>
             </a:r>
@@ -5017,11 +5017,11 @@
             <a:r>
               <a:rPr lang="en-US" sz="2300" b="1" dirty="0">
                 <a:solidFill>
-                  <a:srgbClr val="F5F5F0"/>
-                </a:solidFill>
-                <a:latin typeface="Noto Sans JP" pitchFamily="34" charset="0"/>
-                <a:ea typeface="Noto Sans JP" pitchFamily="34" charset="-122"/>
-                <a:cs typeface="Noto Sans JP" pitchFamily="34" charset="-120"/>
+                  <a:srgbClr val="16181D"/>
+                </a:solidFill>
+                <a:latin typeface="BIZ UDPGothic" pitchFamily="34" charset="0"/>
+                <a:ea typeface="BIZ UDPGothic" pitchFamily="34" charset="-122"/>
+                <a:cs typeface="BIZ UDPGothic" pitchFamily="34" charset="-120"/>
               </a:rPr>
               <a:t>神社仏閣・伝統芸能も恒久的に守る</a:t>
             </a:r>
@@ -5046,11 +5046,11 @@
             </a:avLst>
           </a:prstGeom>
           <a:solidFill>
-            <a:srgbClr val="1A1A1A"/>
+            <a:srgbClr val="FFFFFF"/>
           </a:solidFill>
           <a:ln w="12700">
             <a:solidFill>
-              <a:srgbClr val="2E2E2E"/>
+              <a:srgbClr val="DDE0E6"/>
             </a:solidFill>
             <a:prstDash val="solid"/>
           </a:ln>
@@ -5090,11 +5090,11 @@
             <a:r>
               <a:rPr lang="en-US" sz="1350" b="1" dirty="0">
                 <a:solidFill>
-                  <a:srgbClr val="F5F5F0"/>
-                </a:solidFill>
-                <a:latin typeface="Noto Sans JP" pitchFamily="34" charset="0"/>
-                <a:ea typeface="Noto Sans JP" pitchFamily="34" charset="-122"/>
-                <a:cs typeface="Noto Sans JP" pitchFamily="34" charset="-120"/>
+                  <a:srgbClr val="16181D"/>
+                </a:solidFill>
+                <a:latin typeface="BIZ UDPGothic" pitchFamily="34" charset="0"/>
+                <a:ea typeface="BIZ UDPGothic" pitchFamily="34" charset="-122"/>
+                <a:cs typeface="BIZ UDPGothic" pitchFamily="34" charset="-120"/>
               </a:rPr>
               <a:t>⛩️ 神社仏閣（国宝・重要文化財の建造物を中心に）</a:t>
             </a:r>
@@ -5132,13 +5132,13 @@
             <a:r>
               <a:rPr lang="en-US" sz="1150" dirty="0">
                 <a:solidFill>
-                  <a:srgbClr val="F5F5F0">
+                  <a:srgbClr val="16181D">
                     <a:alpha val="85000"/>
                   </a:srgbClr>
                 </a:solidFill>
-                <a:latin typeface="Noto Sans JP" pitchFamily="34" charset="0"/>
-                <a:ea typeface="Noto Sans JP" pitchFamily="34" charset="-122"/>
-                <a:cs typeface="Noto Sans JP" pitchFamily="34" charset="-120"/>
+                <a:latin typeface="BIZ UDPGothic" pitchFamily="34" charset="0"/>
+                <a:ea typeface="BIZ UDPGothic" pitchFamily="34" charset="-122"/>
+                <a:cs typeface="BIZ UDPGothic" pitchFamily="34" charset="-120"/>
               </a:rPr>
               <a:t>現在すでに574億円規模の修理予算がある。金額を増やすことよりも、「毎年必ず出す」という恒久的な国の約束として法律に明記することが目的。</a:t>
             </a:r>
@@ -5163,11 +5163,11 @@
             </a:avLst>
           </a:prstGeom>
           <a:solidFill>
-            <a:srgbClr val="1A1A1A"/>
+            <a:srgbClr val="FFFFFF"/>
           </a:solidFill>
           <a:ln w="12700">
             <a:solidFill>
-              <a:srgbClr val="2E2E2E"/>
+              <a:srgbClr val="DDE0E6"/>
             </a:solidFill>
             <a:prstDash val="solid"/>
           </a:ln>
@@ -5207,11 +5207,11 @@
             <a:r>
               <a:rPr lang="en-US" sz="1350" b="1" dirty="0">
                 <a:solidFill>
-                  <a:srgbClr val="F5F5F0"/>
-                </a:solidFill>
-                <a:latin typeface="Noto Sans JP" pitchFamily="34" charset="0"/>
-                <a:ea typeface="Noto Sans JP" pitchFamily="34" charset="-122"/>
-                <a:cs typeface="Noto Sans JP" pitchFamily="34" charset="-120"/>
+                  <a:srgbClr val="16181D"/>
+                </a:solidFill>
+                <a:latin typeface="BIZ UDPGothic" pitchFamily="34" charset="0"/>
+                <a:ea typeface="BIZ UDPGothic" pitchFamily="34" charset="-122"/>
+                <a:cs typeface="BIZ UDPGothic" pitchFamily="34" charset="-120"/>
               </a:rPr>
               <a:t>🎭 伝統芸能（歌舞伎・能楽・文楽など）</a:t>
             </a:r>
@@ -5249,13 +5249,13 @@
             <a:r>
               <a:rPr lang="en-US" sz="1150" dirty="0">
                 <a:solidFill>
-                  <a:srgbClr val="F5F5F0">
+                  <a:srgbClr val="16181D">
                     <a:alpha val="85000"/>
                   </a:srgbClr>
                 </a:solidFill>
-                <a:latin typeface="Noto Sans JP" pitchFamily="34" charset="0"/>
-                <a:ea typeface="Noto Sans JP" pitchFamily="34" charset="-122"/>
-                <a:cs typeface="Noto Sans JP" pitchFamily="34" charset="-120"/>
+                <a:latin typeface="BIZ UDPGothic" pitchFamily="34" charset="0"/>
+                <a:ea typeface="BIZ UDPGothic" pitchFamily="34" charset="-122"/>
+                <a:cs typeface="BIZ UDPGothic" pitchFamily="34" charset="-120"/>
               </a:rPr>
               <a:t>複数の基金・補助金に予算が分かれていて、専用額を単独で示す公式統計がない。国立劇場等の運営費・後継者養成費を恒久財源として位置づけ、具体額は今後精査する。</a:t>
             </a:r>
@@ -5290,13 +5290,13 @@
             <a:r>
               <a:rPr lang="en-US" sz="800" dirty="0">
                 <a:solidFill>
-                  <a:srgbClr val="F5F5F0">
+                  <a:srgbClr val="16181D">
                     <a:alpha val="40000"/>
                   </a:srgbClr>
                 </a:solidFill>
                 <a:latin typeface="Arial" pitchFamily="34" charset="0"/>
-                <a:ea typeface="Arial" pitchFamily="34" charset="-122"/>
-                <a:cs typeface="Arial" pitchFamily="34" charset="-120"/>
+                <a:ea typeface="BIZ UDPGothic" pitchFamily="34" charset="-122"/>
+                <a:cs typeface="BIZ UDPGothic" pitchFamily="34" charset="-120"/>
               </a:rPr>
               <a:t>REBOOT JAPAN ── 政策提言プラットフォーム</a:t>
             </a:r>
@@ -5331,13 +5331,13 @@
             <a:r>
               <a:rPr lang="en-US" sz="800" dirty="0">
                 <a:solidFill>
-                  <a:srgbClr val="F5F5F0">
+                  <a:srgbClr val="16181D">
                     <a:alpha val="40000"/>
                   </a:srgbClr>
                 </a:solidFill>
                 <a:latin typeface="Arial" pitchFamily="34" charset="0"/>
-                <a:ea typeface="Arial" pitchFamily="34" charset="-122"/>
-                <a:cs typeface="Arial" pitchFamily="34" charset="-120"/>
+                <a:ea typeface="BIZ UDPGothic" pitchFamily="34" charset="-122"/>
+                <a:cs typeface="BIZ UDPGothic" pitchFamily="34" charset="-120"/>
               </a:rPr>
               <a:t>12</a:t>
             </a:r>
@@ -5359,7 +5359,7 @@
     <p:bg>
       <p:bgPr>
         <a:solidFill>
-          <a:srgbClr val="0A0A0A"/>
+          <a:srgbClr val="F5F6F8"/>
         </a:solidFill>
       </p:bgPr>
     </p:bg>
@@ -5404,11 +5404,11 @@
             <a:r>
               <a:rPr lang="en-US" sz="1200" b="1" spc="200" kern="0" dirty="0">
                 <a:solidFill>
-                  <a:srgbClr val="D62828"/>
+                  <a:srgbClr val="C8161D"/>
                 </a:solidFill>
                 <a:latin typeface="Arial" pitchFamily="34" charset="0"/>
-                <a:ea typeface="Arial" pitchFamily="34" charset="-122"/>
-                <a:cs typeface="Arial" pitchFamily="34" charset="-120"/>
+                <a:ea typeface="BIZ UDPGothic" pitchFamily="34" charset="-122"/>
+                <a:cs typeface="BIZ UDPGothic" pitchFamily="34" charset="-120"/>
               </a:rPr>
               <a:t>PILLAR 04</a:t>
             </a:r>
@@ -5446,11 +5446,11 @@
             <a:r>
               <a:rPr lang="en-US" sz="2600" b="1" dirty="0">
                 <a:solidFill>
-                  <a:srgbClr val="F5F5F0"/>
-                </a:solidFill>
-                <a:latin typeface="Noto Sans JP" pitchFamily="34" charset="0"/>
-                <a:ea typeface="Noto Sans JP" pitchFamily="34" charset="-122"/>
-                <a:cs typeface="Noto Sans JP" pitchFamily="34" charset="-120"/>
+                  <a:srgbClr val="16181D"/>
+                </a:solidFill>
+                <a:latin typeface="BIZ UDPGothic" pitchFamily="34" charset="0"/>
+                <a:ea typeface="BIZ UDPGothic" pitchFamily="34" charset="-122"/>
+                <a:cs typeface="BIZ UDPGothic" pitchFamily="34" charset="-120"/>
               </a:rPr>
               <a:t>補助金をもらうための3つの厳しいルール</a:t>
             </a:r>
@@ -5475,11 +5475,11 @@
             </a:avLst>
           </a:prstGeom>
           <a:solidFill>
-            <a:srgbClr val="1A1A1A"/>
+            <a:srgbClr val="FFFFFF"/>
           </a:solidFill>
           <a:ln w="12700">
             <a:solidFill>
-              <a:srgbClr val="2E2E2E"/>
+              <a:srgbClr val="DDE0E6"/>
             </a:solidFill>
             <a:prstDash val="solid"/>
           </a:ln>
@@ -5558,11 +5558,11 @@
             <a:r>
               <a:rPr lang="en-US" sz="1250" b="1" dirty="0">
                 <a:solidFill>
-                  <a:srgbClr val="F5F5F0"/>
-                </a:solidFill>
-                <a:latin typeface="Noto Sans JP" pitchFamily="34" charset="0"/>
-                <a:ea typeface="Noto Sans JP" pitchFamily="34" charset="-122"/>
-                <a:cs typeface="Noto Sans JP" pitchFamily="34" charset="-120"/>
+                  <a:srgbClr val="16181D"/>
+                </a:solidFill>
+                <a:latin typeface="BIZ UDPGothic" pitchFamily="34" charset="0"/>
+                <a:ea typeface="BIZ UDPGothic" pitchFamily="34" charset="-122"/>
+                <a:cs typeface="BIZ UDPGothic" pitchFamily="34" charset="-120"/>
               </a:rPr>
               <a:t>Made in Japan</a:t>
             </a:r>
@@ -5578,11 +5578,11 @@
             <a:r>
               <a:rPr lang="en-US" sz="1250" b="1" dirty="0">
                 <a:solidFill>
-                  <a:srgbClr val="F5F5F0"/>
-                </a:solidFill>
-                <a:latin typeface="Noto Sans JP" pitchFamily="34" charset="0"/>
-                <a:ea typeface="Noto Sans JP" pitchFamily="34" charset="-122"/>
-                <a:cs typeface="Noto Sans JP" pitchFamily="34" charset="-120"/>
+                  <a:srgbClr val="16181D"/>
+                </a:solidFill>
+                <a:latin typeface="BIZ UDPGothic" pitchFamily="34" charset="0"/>
+                <a:ea typeface="BIZ UDPGothic" pitchFamily="34" charset="-122"/>
+                <a:cs typeface="BIZ UDPGothic" pitchFamily="34" charset="-120"/>
               </a:rPr>
               <a:t>加点ルール</a:t>
             </a:r>
@@ -5620,13 +5620,13 @@
             <a:r>
               <a:rPr lang="en-US" sz="950" dirty="0">
                 <a:solidFill>
-                  <a:srgbClr val="F5F5F0">
+                  <a:srgbClr val="16181D">
                     <a:alpha val="75000"/>
                   </a:srgbClr>
                 </a:solidFill>
-                <a:latin typeface="Noto Sans JP" pitchFamily="34" charset="0"/>
-                <a:ea typeface="Noto Sans JP" pitchFamily="34" charset="-122"/>
-                <a:cs typeface="Noto Sans JP" pitchFamily="34" charset="-120"/>
+                <a:latin typeface="BIZ UDPGothic" pitchFamily="34" charset="0"/>
+                <a:ea typeface="BIZ UDPGothic" pitchFamily="34" charset="-122"/>
+                <a:cs typeface="BIZ UDPGothic" pitchFamily="34" charset="-120"/>
               </a:rPr>
               <a:t>日本製を使うほど補助率が上がる仕組みに（必須ではなく加点）</a:t>
             </a:r>
@@ -5651,11 +5651,11 @@
             </a:avLst>
           </a:prstGeom>
           <a:solidFill>
-            <a:srgbClr val="1A1A1A"/>
+            <a:srgbClr val="FFFFFF"/>
           </a:solidFill>
           <a:ln w="12700">
             <a:solidFill>
-              <a:srgbClr val="2E2E2E"/>
+              <a:srgbClr val="DDE0E6"/>
             </a:solidFill>
             <a:prstDash val="solid"/>
           </a:ln>
@@ -5734,11 +5734,11 @@
             <a:r>
               <a:rPr lang="en-US" sz="1250" b="1" dirty="0">
                 <a:solidFill>
-                  <a:srgbClr val="F5F5F0"/>
-                </a:solidFill>
-                <a:latin typeface="Noto Sans JP" pitchFamily="34" charset="0"/>
-                <a:ea typeface="Noto Sans JP" pitchFamily="34" charset="-122"/>
-                <a:cs typeface="Noto Sans JP" pitchFamily="34" charset="-120"/>
+                  <a:srgbClr val="16181D"/>
+                </a:solidFill>
+                <a:latin typeface="BIZ UDPGothic" pitchFamily="34" charset="0"/>
+                <a:ea typeface="BIZ UDPGothic" pitchFamily="34" charset="-122"/>
+                <a:cs typeface="BIZ UDPGothic" pitchFamily="34" charset="-120"/>
               </a:rPr>
               <a:t>倒産回避の</a:t>
             </a:r>
@@ -5754,11 +5754,11 @@
             <a:r>
               <a:rPr lang="en-US" sz="1250" b="1" dirty="0">
                 <a:solidFill>
-                  <a:srgbClr val="F5F5F0"/>
-                </a:solidFill>
-                <a:latin typeface="Noto Sans JP" pitchFamily="34" charset="0"/>
-                <a:ea typeface="Noto Sans JP" pitchFamily="34" charset="-122"/>
-                <a:cs typeface="Noto Sans JP" pitchFamily="34" charset="-120"/>
+                  <a:srgbClr val="16181D"/>
+                </a:solidFill>
+                <a:latin typeface="BIZ UDPGothic" pitchFamily="34" charset="0"/>
+                <a:ea typeface="BIZ UDPGothic" pitchFamily="34" charset="-122"/>
+                <a:cs typeface="BIZ UDPGothic" pitchFamily="34" charset="-120"/>
               </a:rPr>
               <a:t>補助金は廃止</a:t>
             </a:r>
@@ -5796,13 +5796,13 @@
             <a:r>
               <a:rPr lang="en-US" sz="950" dirty="0">
                 <a:solidFill>
-                  <a:srgbClr val="F5F5F0">
+                  <a:srgbClr val="16181D">
                     <a:alpha val="75000"/>
                   </a:srgbClr>
                 </a:solidFill>
-                <a:latin typeface="Noto Sans JP" pitchFamily="34" charset="0"/>
-                <a:ea typeface="Noto Sans JP" pitchFamily="34" charset="-122"/>
-                <a:cs typeface="Noto Sans JP" pitchFamily="34" charset="-120"/>
+                <a:latin typeface="BIZ UDPGothic" pitchFamily="34" charset="0"/>
+                <a:ea typeface="BIZ UDPGothic" pitchFamily="34" charset="-122"/>
+                <a:cs typeface="BIZ UDPGothic" pitchFamily="34" charset="-120"/>
               </a:rPr>
               <a:t>経営破綻を避けるための救済目的の支援はやめる</a:t>
             </a:r>
@@ -5827,11 +5827,11 @@
             </a:avLst>
           </a:prstGeom>
           <a:solidFill>
-            <a:srgbClr val="1A1A1A"/>
+            <a:srgbClr val="FFFFFF"/>
           </a:solidFill>
           <a:ln w="12700">
             <a:solidFill>
-              <a:srgbClr val="2E2E2E"/>
+              <a:srgbClr val="DDE0E6"/>
             </a:solidFill>
             <a:prstDash val="solid"/>
           </a:ln>
@@ -5910,11 +5910,11 @@
             <a:r>
               <a:rPr lang="en-US" sz="1250" b="1" dirty="0">
                 <a:solidFill>
-                  <a:srgbClr val="F5F5F0"/>
-                </a:solidFill>
-                <a:latin typeface="Noto Sans JP" pitchFamily="34" charset="0"/>
-                <a:ea typeface="Noto Sans JP" pitchFamily="34" charset="-122"/>
-                <a:cs typeface="Noto Sans JP" pitchFamily="34" charset="-120"/>
+                  <a:srgbClr val="16181D"/>
+                </a:solidFill>
+                <a:latin typeface="BIZ UDPGothic" pitchFamily="34" charset="0"/>
+                <a:ea typeface="BIZ UDPGothic" pitchFamily="34" charset="-122"/>
+                <a:cs typeface="BIZ UDPGothic" pitchFamily="34" charset="-120"/>
               </a:rPr>
               <a:t>雇用支援は</a:t>
             </a:r>
@@ -5930,11 +5930,11 @@
             <a:r>
               <a:rPr lang="en-US" sz="1250" b="1" dirty="0">
                 <a:solidFill>
-                  <a:srgbClr val="F5F5F0"/>
-                </a:solidFill>
-                <a:latin typeface="Noto Sans JP" pitchFamily="34" charset="0"/>
-                <a:ea typeface="Noto Sans JP" pitchFamily="34" charset="-122"/>
-                <a:cs typeface="Noto Sans JP" pitchFamily="34" charset="-120"/>
+                  <a:srgbClr val="16181D"/>
+                </a:solidFill>
+                <a:latin typeface="BIZ UDPGothic" pitchFamily="34" charset="0"/>
+                <a:ea typeface="BIZ UDPGothic" pitchFamily="34" charset="-122"/>
+                <a:cs typeface="BIZ UDPGothic" pitchFamily="34" charset="-120"/>
               </a:rPr>
               <a:t>障害者雇用のみ</a:t>
             </a:r>
@@ -5972,13 +5972,13 @@
             <a:r>
               <a:rPr lang="en-US" sz="950" dirty="0">
                 <a:solidFill>
-                  <a:srgbClr val="F5F5F0">
+                  <a:srgbClr val="16181D">
                     <a:alpha val="75000"/>
                   </a:srgbClr>
                 </a:solidFill>
-                <a:latin typeface="Noto Sans JP" pitchFamily="34" charset="0"/>
-                <a:ea typeface="Noto Sans JP" pitchFamily="34" charset="-122"/>
-                <a:cs typeface="Noto Sans JP" pitchFamily="34" charset="-120"/>
+                <a:latin typeface="BIZ UDPGothic" pitchFamily="34" charset="0"/>
+                <a:ea typeface="BIZ UDPGothic" pitchFamily="34" charset="-122"/>
+                <a:cs typeface="BIZ UDPGothic" pitchFamily="34" charset="-120"/>
               </a:rPr>
               <a:t>一般的な雇用維持や外国人雇用の補助金は廃止</a:t>
             </a:r>
@@ -6013,13 +6013,13 @@
             <a:r>
               <a:rPr lang="en-US" sz="800" dirty="0">
                 <a:solidFill>
-                  <a:srgbClr val="F5F5F0">
+                  <a:srgbClr val="16181D">
                     <a:alpha val="40000"/>
                   </a:srgbClr>
                 </a:solidFill>
                 <a:latin typeface="Arial" pitchFamily="34" charset="0"/>
-                <a:ea typeface="Arial" pitchFamily="34" charset="-122"/>
-                <a:cs typeface="Arial" pitchFamily="34" charset="-120"/>
+                <a:ea typeface="BIZ UDPGothic" pitchFamily="34" charset="-122"/>
+                <a:cs typeface="BIZ UDPGothic" pitchFamily="34" charset="-120"/>
               </a:rPr>
               <a:t>REBOOT JAPAN ── 政策提言プラットフォーム</a:t>
             </a:r>
@@ -6054,13 +6054,13 @@
             <a:r>
               <a:rPr lang="en-US" sz="800" dirty="0">
                 <a:solidFill>
-                  <a:srgbClr val="F5F5F0">
+                  <a:srgbClr val="16181D">
                     <a:alpha val="40000"/>
                   </a:srgbClr>
                 </a:solidFill>
                 <a:latin typeface="Arial" pitchFamily="34" charset="0"/>
-                <a:ea typeface="Arial" pitchFamily="34" charset="-122"/>
-                <a:cs typeface="Arial" pitchFamily="34" charset="-120"/>
+                <a:ea typeface="BIZ UDPGothic" pitchFamily="34" charset="-122"/>
+                <a:cs typeface="BIZ UDPGothic" pitchFamily="34" charset="-120"/>
               </a:rPr>
               <a:t>13</a:t>
             </a:r>
@@ -6082,7 +6082,7 @@
     <p:bg>
       <p:bgPr>
         <a:solidFill>
-          <a:srgbClr val="0A0A0A"/>
+          <a:srgbClr val="F5F6F8"/>
         </a:solidFill>
       </p:bgPr>
     </p:bg>
@@ -6127,11 +6127,11 @@
             <a:r>
               <a:rPr lang="en-US" sz="1200" b="1" spc="200" kern="0" dirty="0">
                 <a:solidFill>
-                  <a:srgbClr val="D62828"/>
+                  <a:srgbClr val="C8161D"/>
                 </a:solidFill>
                 <a:latin typeface="Arial" pitchFamily="34" charset="0"/>
-                <a:ea typeface="Arial" pitchFamily="34" charset="-122"/>
-                <a:cs typeface="Arial" pitchFamily="34" charset="-120"/>
+                <a:ea typeface="BIZ UDPGothic" pitchFamily="34" charset="-122"/>
+                <a:cs typeface="BIZ UDPGothic" pitchFamily="34" charset="-120"/>
               </a:rPr>
               <a:t>PILLAR 04 — DETAIL</a:t>
             </a:r>
@@ -6169,11 +6169,11 @@
             <a:r>
               <a:rPr lang="en-US" sz="2200" b="1" dirty="0">
                 <a:solidFill>
-                  <a:srgbClr val="F5F5F0"/>
-                </a:solidFill>
-                <a:latin typeface="Noto Sans JP" pitchFamily="34" charset="0"/>
-                <a:ea typeface="Noto Sans JP" pitchFamily="34" charset="-122"/>
-                <a:cs typeface="Noto Sans JP" pitchFamily="34" charset="-120"/>
+                  <a:srgbClr val="16181D"/>
+                </a:solidFill>
+                <a:latin typeface="BIZ UDPGothic" pitchFamily="34" charset="0"/>
+                <a:ea typeface="BIZ UDPGothic" pitchFamily="34" charset="-122"/>
+                <a:cs typeface="BIZ UDPGothic" pitchFamily="34" charset="-120"/>
               </a:rPr>
               <a:t>「必須」にしない、賢いMade in Japanルール</a:t>
             </a:r>
@@ -6198,11 +6198,11 @@
             </a:avLst>
           </a:prstGeom>
           <a:solidFill>
-            <a:srgbClr val="1A1A1A"/>
+            <a:srgbClr val="FFFFFF"/>
           </a:solidFill>
           <a:ln w="19050">
             <a:solidFill>
-              <a:srgbClr val="D62828"/>
+              <a:srgbClr val="C8161D"/>
             </a:solidFill>
             <a:prstDash val="solid"/>
           </a:ln>
@@ -6242,11 +6242,11 @@
             <a:r>
               <a:rPr lang="en-US" sz="1500" b="1" dirty="0">
                 <a:solidFill>
-                  <a:srgbClr val="D62828"/>
-                </a:solidFill>
-                <a:latin typeface="Noto Sans JP" pitchFamily="34" charset="0"/>
-                <a:ea typeface="Noto Sans JP" pitchFamily="34" charset="-122"/>
-                <a:cs typeface="Noto Sans JP" pitchFamily="34" charset="-120"/>
+                  <a:srgbClr val="C8161D"/>
+                </a:solidFill>
+                <a:latin typeface="BIZ UDPGothic" pitchFamily="34" charset="0"/>
+                <a:ea typeface="BIZ UDPGothic" pitchFamily="34" charset="-122"/>
+                <a:cs typeface="BIZ UDPGothic" pitchFamily="34" charset="-120"/>
               </a:rPr>
               <a:t>⚠️ なぜ「必須」にできないのか</a:t>
             </a:r>
@@ -6288,13 +6288,13 @@
             <a:r>
               <a:rPr lang="en-US" sz="1200" dirty="0">
                 <a:solidFill>
-                  <a:srgbClr val="F5F5F0">
+                  <a:srgbClr val="16181D">
                     <a:alpha val="90000"/>
                   </a:srgbClr>
                 </a:solidFill>
-                <a:latin typeface="Noto Sans JP" pitchFamily="34" charset="0"/>
-                <a:ea typeface="Noto Sans JP" pitchFamily="34" charset="-122"/>
-                <a:cs typeface="Noto Sans JP" pitchFamily="34" charset="-120"/>
+                <a:latin typeface="BIZ UDPGothic" pitchFamily="34" charset="0"/>
+                <a:ea typeface="BIZ UDPGothic" pitchFamily="34" charset="-122"/>
+                <a:cs typeface="BIZ UDPGothic" pitchFamily="34" charset="-120"/>
               </a:rPr>
               <a:t>世界の貿易ルール（WTO補助金協定）は、「国産品を使うことを補助金の条件にする」ことをはっきり禁止している。</a:t>
             </a:r>
@@ -6314,13 +6314,13 @@
             <a:r>
               <a:rPr lang="en-US" sz="1200" dirty="0">
                 <a:solidFill>
-                  <a:srgbClr val="F5F5F0">
+                  <a:srgbClr val="16181D">
                     <a:alpha val="90000"/>
                   </a:srgbClr>
                 </a:solidFill>
-                <a:latin typeface="Noto Sans JP" pitchFamily="34" charset="0"/>
-                <a:ea typeface="Noto Sans JP" pitchFamily="34" charset="-122"/>
-                <a:cs typeface="Noto Sans JP" pitchFamily="34" charset="-120"/>
+                <a:latin typeface="BIZ UDPGothic" pitchFamily="34" charset="0"/>
+                <a:ea typeface="BIZ UDPGothic" pitchFamily="34" charset="-122"/>
+                <a:cs typeface="BIZ UDPGothic" pitchFamily="34" charset="-120"/>
               </a:rPr>
               <a:t>この条文をそのまま「必須」にすると、他の国から違反だと訴えられ、日本がほぼ確実に負けてしまう。</a:t>
             </a:r>
@@ -6345,11 +6345,11 @@
             </a:avLst>
           </a:prstGeom>
           <a:solidFill>
-            <a:srgbClr val="1A1A1A"/>
+            <a:srgbClr val="FFFFFF"/>
           </a:solidFill>
           <a:ln w="12700">
             <a:solidFill>
-              <a:srgbClr val="2E2E2E"/>
+              <a:srgbClr val="DDE0E6"/>
             </a:solidFill>
             <a:prstDash val="solid"/>
           </a:ln>
@@ -6389,11 +6389,11 @@
             <a:r>
               <a:rPr lang="en-US" sz="1400" b="1" dirty="0">
                 <a:solidFill>
-                  <a:srgbClr val="F5F5F0"/>
-                </a:solidFill>
-                <a:latin typeface="Noto Sans JP" pitchFamily="34" charset="0"/>
-                <a:ea typeface="Noto Sans JP" pitchFamily="34" charset="-122"/>
-                <a:cs typeface="Noto Sans JP" pitchFamily="34" charset="-120"/>
+                  <a:srgbClr val="16181D"/>
+                </a:solidFill>
+                <a:latin typeface="BIZ UDPGothic" pitchFamily="34" charset="0"/>
+                <a:ea typeface="BIZ UDPGothic" pitchFamily="34" charset="-122"/>
+                <a:cs typeface="BIZ UDPGothic" pitchFamily="34" charset="-120"/>
               </a:rPr>
               <a:t>✅ 解決策：義務ではなく「加点」にする</a:t>
             </a:r>
@@ -6431,13 +6431,13 @@
             <a:r>
               <a:rPr lang="en-US" sz="1150" dirty="0">
                 <a:solidFill>
-                  <a:srgbClr val="F5F5F0">
+                  <a:srgbClr val="16181D">
                     <a:alpha val="85000"/>
                   </a:srgbClr>
                 </a:solidFill>
-                <a:latin typeface="Noto Sans JP" pitchFamily="34" charset="0"/>
-                <a:ea typeface="Noto Sans JP" pitchFamily="34" charset="-122"/>
-                <a:cs typeface="Noto Sans JP" pitchFamily="34" charset="-120"/>
+                <a:latin typeface="BIZ UDPGothic" pitchFamily="34" charset="0"/>
+                <a:ea typeface="BIZ UDPGothic" pitchFamily="34" charset="-122"/>
+                <a:cs typeface="BIZ UDPGothic" pitchFamily="34" charset="-120"/>
               </a:rPr>
               <a:t>「日本製部品を必ず使うこと」ではなく、「国内調達の割合に応じて補助率を上乗せする」という、任意のボーナス方式に変える。国費の海外流出は防ぎつつ、世界のルール違反にならない設計にする。</a:t>
             </a:r>
@@ -6472,13 +6472,13 @@
             <a:r>
               <a:rPr lang="en-US" sz="800" dirty="0">
                 <a:solidFill>
-                  <a:srgbClr val="F5F5F0">
+                  <a:srgbClr val="16181D">
                     <a:alpha val="40000"/>
                   </a:srgbClr>
                 </a:solidFill>
                 <a:latin typeface="Arial" pitchFamily="34" charset="0"/>
-                <a:ea typeface="Arial" pitchFamily="34" charset="-122"/>
-                <a:cs typeface="Arial" pitchFamily="34" charset="-120"/>
+                <a:ea typeface="BIZ UDPGothic" pitchFamily="34" charset="-122"/>
+                <a:cs typeface="BIZ UDPGothic" pitchFamily="34" charset="-120"/>
               </a:rPr>
               <a:t>REBOOT JAPAN ── 政策提言プラットフォーム</a:t>
             </a:r>
@@ -6513,13 +6513,13 @@
             <a:r>
               <a:rPr lang="en-US" sz="800" dirty="0">
                 <a:solidFill>
-                  <a:srgbClr val="F5F5F0">
+                  <a:srgbClr val="16181D">
                     <a:alpha val="40000"/>
                   </a:srgbClr>
                 </a:solidFill>
                 <a:latin typeface="Arial" pitchFamily="34" charset="0"/>
-                <a:ea typeface="Arial" pitchFamily="34" charset="-122"/>
-                <a:cs typeface="Arial" pitchFamily="34" charset="-120"/>
+                <a:ea typeface="BIZ UDPGothic" pitchFamily="34" charset="-122"/>
+                <a:cs typeface="BIZ UDPGothic" pitchFamily="34" charset="-120"/>
               </a:rPr>
               <a:t>14</a:t>
             </a:r>
@@ -6541,7 +6541,7 @@
     <p:bg>
       <p:bgPr>
         <a:solidFill>
-          <a:srgbClr val="0A0A0A"/>
+          <a:srgbClr val="F5F6F8"/>
         </a:solidFill>
       </p:bgPr>
     </p:bg>
@@ -6586,11 +6586,11 @@
             <a:r>
               <a:rPr lang="en-US" sz="1200" b="1" spc="200" kern="0" dirty="0">
                 <a:solidFill>
-                  <a:srgbClr val="D62828"/>
+                  <a:srgbClr val="C8161D"/>
                 </a:solidFill>
                 <a:latin typeface="Arial" pitchFamily="34" charset="0"/>
-                <a:ea typeface="Arial" pitchFamily="34" charset="-122"/>
-                <a:cs typeface="Arial" pitchFamily="34" charset="-120"/>
+                <a:ea typeface="BIZ UDPGothic" pitchFamily="34" charset="-122"/>
+                <a:cs typeface="BIZ UDPGothic" pitchFamily="34" charset="-120"/>
               </a:rPr>
               <a:t>PILLAR 04 — DETAIL</a:t>
             </a:r>
@@ -6628,11 +6628,11 @@
             <a:r>
               <a:rPr lang="en-US" sz="2600" b="1" dirty="0">
                 <a:solidFill>
-                  <a:srgbClr val="F5F5F0"/>
-                </a:solidFill>
-                <a:latin typeface="Noto Sans JP" pitchFamily="34" charset="0"/>
-                <a:ea typeface="Noto Sans JP" pitchFamily="34" charset="-122"/>
-                <a:cs typeface="Noto Sans JP" pitchFamily="34" charset="-120"/>
+                  <a:srgbClr val="16181D"/>
+                </a:solidFill>
+                <a:latin typeface="BIZ UDPGothic" pitchFamily="34" charset="0"/>
+                <a:ea typeface="BIZ UDPGothic" pitchFamily="34" charset="-122"/>
+                <a:cs typeface="BIZ UDPGothic" pitchFamily="34" charset="-120"/>
               </a:rPr>
               <a:t>雇用の補助金は障害者雇用だけに絞る</a:t>
             </a:r>
@@ -6670,13 +6670,13 @@
             <a:r>
               <a:rPr lang="en-US" sz="1350" dirty="0">
                 <a:solidFill>
-                  <a:srgbClr val="F5F5F0">
+                  <a:srgbClr val="16181D">
                     <a:alpha val="90000"/>
                   </a:srgbClr>
                 </a:solidFill>
-                <a:latin typeface="Noto Sans JP" pitchFamily="34" charset="0"/>
-                <a:ea typeface="Noto Sans JP" pitchFamily="34" charset="-122"/>
-                <a:cs typeface="Noto Sans JP" pitchFamily="34" charset="-120"/>
+                <a:latin typeface="BIZ UDPGothic" pitchFamily="34" charset="0"/>
+                <a:ea typeface="BIZ UDPGothic" pitchFamily="34" charset="-122"/>
+                <a:cs typeface="BIZ UDPGothic" pitchFamily="34" charset="-120"/>
               </a:rPr>
               <a:t>「雇用を守るための補助金」から「本当に支援が必要な人への補助金」へ切り替える。</a:t>
             </a:r>
@@ -6701,11 +6701,11 @@
             </a:avLst>
           </a:prstGeom>
           <a:solidFill>
-            <a:srgbClr val="1A1A1A"/>
+            <a:srgbClr val="FFFFFF"/>
           </a:solidFill>
           <a:ln w="12700">
             <a:solidFill>
-              <a:srgbClr val="2E2E2E"/>
+              <a:srgbClr val="DDE0E6"/>
             </a:solidFill>
             <a:prstDash val="solid"/>
           </a:ln>
@@ -6781,11 +6781,11 @@
             <a:r>
               <a:rPr lang="en-US" sz="1300" b="1" dirty="0">
                 <a:solidFill>
-                  <a:srgbClr val="F5F5F0"/>
-                </a:solidFill>
-                <a:latin typeface="Noto Sans JP" pitchFamily="34" charset="0"/>
-                <a:ea typeface="Noto Sans JP" pitchFamily="34" charset="-122"/>
-                <a:cs typeface="Noto Sans JP" pitchFamily="34" charset="-120"/>
+                  <a:srgbClr val="16181D"/>
+                </a:solidFill>
+                <a:latin typeface="BIZ UDPGothic" pitchFamily="34" charset="0"/>
+                <a:ea typeface="BIZ UDPGothic" pitchFamily="34" charset="-122"/>
+                <a:cs typeface="BIZ UDPGothic" pitchFamily="34" charset="-120"/>
               </a:rPr>
               <a:t>廃止するもの</a:t>
             </a:r>
@@ -6823,13 +6823,13 @@
             <a:r>
               <a:rPr lang="en-US" sz="1150" dirty="0">
                 <a:solidFill>
-                  <a:srgbClr val="F5F5F0">
+                  <a:srgbClr val="16181D">
                     <a:alpha val="85000"/>
                   </a:srgbClr>
                 </a:solidFill>
-                <a:latin typeface="Noto Sans JP" pitchFamily="34" charset="0"/>
-                <a:ea typeface="Noto Sans JP" pitchFamily="34" charset="-122"/>
-                <a:cs typeface="Noto Sans JP" pitchFamily="34" charset="-120"/>
+                <a:latin typeface="BIZ UDPGothic" pitchFamily="34" charset="0"/>
+                <a:ea typeface="BIZ UDPGothic" pitchFamily="34" charset="-122"/>
+                <a:cs typeface="BIZ UDPGothic" pitchFamily="34" charset="-120"/>
               </a:rPr>
               <a:t>雇用調整助成金など、一般的な雇用維持のための補助金。外国人雇用の促進補助金も含む。</a:t>
             </a:r>
@@ -6854,11 +6854,11 @@
             </a:avLst>
           </a:prstGeom>
           <a:solidFill>
-            <a:srgbClr val="1A1A1A"/>
+            <a:srgbClr val="FFFFFF"/>
           </a:solidFill>
           <a:ln w="19050">
             <a:solidFill>
-              <a:srgbClr val="D62828"/>
+              <a:srgbClr val="C8161D"/>
             </a:solidFill>
             <a:prstDash val="solid"/>
           </a:ln>
@@ -6934,11 +6934,11 @@
             <a:r>
               <a:rPr lang="en-US" sz="1300" b="1" dirty="0">
                 <a:solidFill>
-                  <a:srgbClr val="D62828"/>
-                </a:solidFill>
-                <a:latin typeface="Noto Sans JP" pitchFamily="34" charset="0"/>
-                <a:ea typeface="Noto Sans JP" pitchFamily="34" charset="-122"/>
-                <a:cs typeface="Noto Sans JP" pitchFamily="34" charset="-120"/>
+                  <a:srgbClr val="C8161D"/>
+                </a:solidFill>
+                <a:latin typeface="BIZ UDPGothic" pitchFamily="34" charset="0"/>
+                <a:ea typeface="BIZ UDPGothic" pitchFamily="34" charset="-122"/>
+                <a:cs typeface="BIZ UDPGothic" pitchFamily="34" charset="-120"/>
               </a:rPr>
               <a:t>存続させるもの</a:t>
             </a:r>
@@ -6976,13 +6976,13 @@
             <a:r>
               <a:rPr lang="en-US" sz="1150" dirty="0">
                 <a:solidFill>
-                  <a:srgbClr val="F5F5F0">
+                  <a:srgbClr val="16181D">
                     <a:alpha val="85000"/>
                   </a:srgbClr>
                 </a:solidFill>
-                <a:latin typeface="Noto Sans JP" pitchFamily="34" charset="0"/>
-                <a:ea typeface="Noto Sans JP" pitchFamily="34" charset="-122"/>
-                <a:cs typeface="Noto Sans JP" pitchFamily="34" charset="-120"/>
+                <a:latin typeface="BIZ UDPGothic" pitchFamily="34" charset="0"/>
+                <a:ea typeface="BIZ UDPGothic" pitchFamily="34" charset="-122"/>
+                <a:cs typeface="BIZ UDPGothic" pitchFamily="34" charset="-120"/>
               </a:rPr>
               <a:t>障害者雇用に対する支援だけは残す。特定求職者雇用開発助成金のうち、この分だけを存続させる。</a:t>
             </a:r>
@@ -7017,13 +7017,13 @@
             <a:r>
               <a:rPr lang="en-US" sz="800" dirty="0">
                 <a:solidFill>
-                  <a:srgbClr val="F5F5F0">
+                  <a:srgbClr val="16181D">
                     <a:alpha val="40000"/>
                   </a:srgbClr>
                 </a:solidFill>
                 <a:latin typeface="Arial" pitchFamily="34" charset="0"/>
-                <a:ea typeface="Arial" pitchFamily="34" charset="-122"/>
-                <a:cs typeface="Arial" pitchFamily="34" charset="-120"/>
+                <a:ea typeface="BIZ UDPGothic" pitchFamily="34" charset="-122"/>
+                <a:cs typeface="BIZ UDPGothic" pitchFamily="34" charset="-120"/>
               </a:rPr>
               <a:t>REBOOT JAPAN ── 政策提言プラットフォーム</a:t>
             </a:r>
@@ -7058,13 +7058,13 @@
             <a:r>
               <a:rPr lang="en-US" sz="800" dirty="0">
                 <a:solidFill>
-                  <a:srgbClr val="F5F5F0">
+                  <a:srgbClr val="16181D">
                     <a:alpha val="40000"/>
                   </a:srgbClr>
                 </a:solidFill>
                 <a:latin typeface="Arial" pitchFamily="34" charset="0"/>
-                <a:ea typeface="Arial" pitchFamily="34" charset="-122"/>
-                <a:cs typeface="Arial" pitchFamily="34" charset="-120"/>
+                <a:ea typeface="BIZ UDPGothic" pitchFamily="34" charset="-122"/>
+                <a:cs typeface="BIZ UDPGothic" pitchFamily="34" charset="-120"/>
               </a:rPr>
               <a:t>15</a:t>
             </a:r>
@@ -7086,7 +7086,7 @@
     <p:bg>
       <p:bgPr>
         <a:solidFill>
-          <a:srgbClr val="0A0A0A"/>
+          <a:srgbClr val="F5F6F8"/>
         </a:solidFill>
       </p:bgPr>
     </p:bg>
@@ -7131,11 +7131,11 @@
             <a:r>
               <a:rPr lang="en-US" sz="1200" b="1" spc="200" kern="0" dirty="0">
                 <a:solidFill>
-                  <a:srgbClr val="D62828"/>
+                  <a:srgbClr val="C8161D"/>
                 </a:solidFill>
                 <a:latin typeface="Arial" pitchFamily="34" charset="0"/>
-                <a:ea typeface="Arial" pitchFamily="34" charset="-122"/>
-                <a:cs typeface="Arial" pitchFamily="34" charset="-120"/>
+                <a:ea typeface="BIZ UDPGothic" pitchFamily="34" charset="-122"/>
+                <a:cs typeface="BIZ UDPGothic" pitchFamily="34" charset="-120"/>
               </a:rPr>
               <a:t>PILLAR 05</a:t>
             </a:r>
@@ -7173,11 +7173,11 @@
             <a:r>
               <a:rPr lang="en-US" sz="2600" b="1" dirty="0">
                 <a:solidFill>
-                  <a:srgbClr val="F5F5F0"/>
-                </a:solidFill>
-                <a:latin typeface="Noto Sans JP" pitchFamily="34" charset="0"/>
-                <a:ea typeface="Noto Sans JP" pitchFamily="34" charset="-122"/>
-                <a:cs typeface="Noto Sans JP" pitchFamily="34" charset="-120"/>
+                  <a:srgbClr val="16181D"/>
+                </a:solidFill>
+                <a:latin typeface="BIZ UDPGothic" pitchFamily="34" charset="0"/>
+                <a:ea typeface="BIZ UDPGothic" pitchFamily="34" charset="-122"/>
+                <a:cs typeface="BIZ UDPGothic" pitchFamily="34" charset="-120"/>
               </a:rPr>
               <a:t>辞めた人への再就職支援（新しい柱）</a:t>
             </a:r>
@@ -7215,13 +7215,13 @@
             <a:r>
               <a:rPr lang="en-US" sz="1350" dirty="0">
                 <a:solidFill>
-                  <a:srgbClr val="F5F5F0">
+                  <a:srgbClr val="16181D">
                     <a:alpha val="90000"/>
                   </a:srgbClr>
                 </a:solidFill>
-                <a:latin typeface="Noto Sans JP" pitchFamily="34" charset="0"/>
-                <a:ea typeface="Noto Sans JP" pitchFamily="34" charset="-122"/>
-                <a:cs typeface="Noto Sans JP" pitchFamily="34" charset="-120"/>
+                <a:latin typeface="BIZ UDPGothic" pitchFamily="34" charset="0"/>
+                <a:ea typeface="BIZ UDPGothic" pitchFamily="34" charset="-122"/>
+                <a:cs typeface="BIZ UDPGothic" pitchFamily="34" charset="-120"/>
               </a:rPr>
               <a:t>雇用を「固定する」補助金から、離職した人が次の仕事に移るのを支える仕組みへ。</a:t>
             </a:r>
@@ -7246,11 +7246,11 @@
             </a:avLst>
           </a:prstGeom>
           <a:solidFill>
-            <a:srgbClr val="1A1A1A"/>
+            <a:srgbClr val="FFFFFF"/>
           </a:solidFill>
           <a:ln w="12700">
             <a:solidFill>
-              <a:srgbClr val="2E2E2E"/>
+              <a:srgbClr val="DDE0E6"/>
             </a:solidFill>
             <a:prstDash val="solid"/>
           </a:ln>
@@ -7326,11 +7326,11 @@
             <a:r>
               <a:rPr lang="en-US" sz="1500" b="1" dirty="0">
                 <a:solidFill>
-                  <a:srgbClr val="F5F5F0"/>
-                </a:solidFill>
-                <a:latin typeface="Noto Sans JP" pitchFamily="34" charset="0"/>
-                <a:ea typeface="Noto Sans JP" pitchFamily="34" charset="-122"/>
-                <a:cs typeface="Noto Sans JP" pitchFamily="34" charset="-120"/>
+                  <a:srgbClr val="16181D"/>
+                </a:solidFill>
+                <a:latin typeface="BIZ UDPGothic" pitchFamily="34" charset="0"/>
+                <a:ea typeface="BIZ UDPGothic" pitchFamily="34" charset="-122"/>
+                <a:cs typeface="BIZ UDPGothic" pitchFamily="34" charset="-120"/>
               </a:rPr>
               <a:t>財源：大規模成長投資補助金を丸ごと転用</a:t>
             </a:r>
@@ -7368,13 +7368,13 @@
             <a:r>
               <a:rPr lang="en-US" sz="1200" dirty="0">
                 <a:solidFill>
-                  <a:srgbClr val="F5F5F0">
+                  <a:srgbClr val="16181D">
                     <a:alpha val="90000"/>
                   </a:srgbClr>
                 </a:solidFill>
-                <a:latin typeface="Noto Sans JP" pitchFamily="34" charset="0"/>
-                <a:ea typeface="Noto Sans JP" pitchFamily="34" charset="-122"/>
-                <a:cs typeface="Noto Sans JP" pitchFamily="34" charset="-120"/>
+                <a:latin typeface="BIZ UDPGothic" pitchFamily="34" charset="0"/>
+                <a:ea typeface="BIZ UDPGothic" pitchFamily="34" charset="-122"/>
+                <a:cs typeface="BIZ UDPGothic" pitchFamily="34" charset="-120"/>
               </a:rPr>
               <a:t>これまで「賃上げを条件に大規模な設備投資を支援する」制度だった大規模成長投資補助金（4,121億円）を廃止し、同額を離職後の再就職支援の財源にあてる。企業は人員整理をしやすくなる一方、辞めた人には手厚い再就職支援を用意する。財政的には収支ゼロの「付け替え」。</a:t>
             </a:r>
@@ -7409,13 +7409,13 @@
             <a:r>
               <a:rPr lang="en-US" sz="800" dirty="0">
                 <a:solidFill>
-                  <a:srgbClr val="F5F5F0">
+                  <a:srgbClr val="16181D">
                     <a:alpha val="40000"/>
                   </a:srgbClr>
                 </a:solidFill>
                 <a:latin typeface="Arial" pitchFamily="34" charset="0"/>
-                <a:ea typeface="Arial" pitchFamily="34" charset="-122"/>
-                <a:cs typeface="Arial" pitchFamily="34" charset="-120"/>
+                <a:ea typeface="BIZ UDPGothic" pitchFamily="34" charset="-122"/>
+                <a:cs typeface="BIZ UDPGothic" pitchFamily="34" charset="-120"/>
               </a:rPr>
               <a:t>REBOOT JAPAN ── 政策提言プラットフォーム</a:t>
             </a:r>
@@ -7450,13 +7450,13 @@
             <a:r>
               <a:rPr lang="en-US" sz="800" dirty="0">
                 <a:solidFill>
-                  <a:srgbClr val="F5F5F0">
+                  <a:srgbClr val="16181D">
                     <a:alpha val="40000"/>
                   </a:srgbClr>
                 </a:solidFill>
                 <a:latin typeface="Arial" pitchFamily="34" charset="0"/>
-                <a:ea typeface="Arial" pitchFamily="34" charset="-122"/>
-                <a:cs typeface="Arial" pitchFamily="34" charset="-120"/>
+                <a:ea typeface="BIZ UDPGothic" pitchFamily="34" charset="-122"/>
+                <a:cs typeface="BIZ UDPGothic" pitchFamily="34" charset="-120"/>
               </a:rPr>
               <a:t>16</a:t>
             </a:r>
@@ -7478,7 +7478,7 @@
     <p:bg>
       <p:bgPr>
         <a:solidFill>
-          <a:srgbClr val="0A0A0A"/>
+          <a:srgbClr val="F5F6F8"/>
         </a:solidFill>
       </p:bgPr>
     </p:bg>
@@ -7523,11 +7523,11 @@
             <a:r>
               <a:rPr lang="en-US" sz="1200" b="1" spc="200" kern="0" dirty="0">
                 <a:solidFill>
-                  <a:srgbClr val="D62828"/>
+                  <a:srgbClr val="C8161D"/>
                 </a:solidFill>
                 <a:latin typeface="Arial" pitchFamily="34" charset="0"/>
-                <a:ea typeface="Arial" pitchFamily="34" charset="-122"/>
-                <a:cs typeface="Arial" pitchFamily="34" charset="-120"/>
+                <a:ea typeface="BIZ UDPGothic" pitchFamily="34" charset="-122"/>
+                <a:cs typeface="BIZ UDPGothic" pitchFamily="34" charset="-120"/>
               </a:rPr>
               <a:t>EXTRA</a:t>
             </a:r>
@@ -7565,11 +7565,11 @@
             <a:r>
               <a:rPr lang="en-US" sz="2600" b="1" dirty="0">
                 <a:solidFill>
-                  <a:srgbClr val="F5F5F0"/>
-                </a:solidFill>
-                <a:latin typeface="Noto Sans JP" pitchFamily="34" charset="0"/>
-                <a:ea typeface="Noto Sans JP" pitchFamily="34" charset="-122"/>
-                <a:cs typeface="Noto Sans JP" pitchFamily="34" charset="-120"/>
+                  <a:srgbClr val="16181D"/>
+                </a:solidFill>
+                <a:latin typeface="BIZ UDPGothic" pitchFamily="34" charset="0"/>
+                <a:ea typeface="BIZ UDPGothic" pitchFamily="34" charset="-122"/>
+                <a:cs typeface="BIZ UDPGothic" pitchFamily="34" charset="-120"/>
               </a:rPr>
               <a:t>基礎研究は大学にまとめる</a:t>
             </a:r>
@@ -7604,11 +7604,11 @@
             <a:r>
               <a:rPr lang="en-US" sz="2200" b="1" dirty="0">
                 <a:solidFill>
-                  <a:srgbClr val="D62828"/>
+                  <a:srgbClr val="C8161D"/>
                 </a:solidFill>
                 <a:latin typeface="Arial" pitchFamily="34" charset="0"/>
-                <a:ea typeface="Arial" pitchFamily="34" charset="-122"/>
-                <a:cs typeface="Arial" pitchFamily="34" charset="-120"/>
+                <a:ea typeface="BIZ UDPGothic" pitchFamily="34" charset="-122"/>
+                <a:cs typeface="BIZ UDPGothic" pitchFamily="34" charset="-120"/>
               </a:rPr>
               <a:t>01</a:t>
             </a:r>
@@ -7643,11 +7643,11 @@
             <a:r>
               <a:rPr lang="en-US" sz="1500" b="1" dirty="0">
                 <a:solidFill>
-                  <a:srgbClr val="F5F5F0"/>
-                </a:solidFill>
-                <a:latin typeface="Noto Sans JP" pitchFamily="34" charset="0"/>
-                <a:ea typeface="Noto Sans JP" pitchFamily="34" charset="-122"/>
-                <a:cs typeface="Noto Sans JP" pitchFamily="34" charset="-120"/>
+                  <a:srgbClr val="16181D"/>
+                </a:solidFill>
+                <a:latin typeface="BIZ UDPGothic" pitchFamily="34" charset="0"/>
+                <a:ea typeface="BIZ UDPGothic" pitchFamily="34" charset="-122"/>
+                <a:cs typeface="BIZ UDPGothic" pitchFamily="34" charset="-120"/>
               </a:rPr>
               <a:t>企業向け基礎研究補助金は廃止</a:t>
             </a:r>
@@ -7685,13 +7685,13 @@
             <a:r>
               <a:rPr lang="en-US" sz="1150" dirty="0">
                 <a:solidFill>
-                  <a:srgbClr val="F5F5F0">
+                  <a:srgbClr val="16181D">
                     <a:alpha val="85000"/>
                   </a:srgbClr>
                 </a:solidFill>
-                <a:latin typeface="Noto Sans JP" pitchFamily="34" charset="0"/>
-                <a:ea typeface="Noto Sans JP" pitchFamily="34" charset="-122"/>
-                <a:cs typeface="Noto Sans JP" pitchFamily="34" charset="-120"/>
+                <a:latin typeface="BIZ UDPGothic" pitchFamily="34" charset="0"/>
+                <a:ea typeface="BIZ UDPGothic" pitchFamily="34" charset="-122"/>
+                <a:cs typeface="BIZ UDPGothic" pitchFamily="34" charset="-120"/>
               </a:rPr>
               <a:t>会社の中だけで閉じた基礎研究への国の支援は打ち切る。</a:t>
             </a:r>
@@ -7726,11 +7726,11 @@
             <a:r>
               <a:rPr lang="en-US" sz="2200" b="1" dirty="0">
                 <a:solidFill>
-                  <a:srgbClr val="D62828"/>
+                  <a:srgbClr val="C8161D"/>
                 </a:solidFill>
                 <a:latin typeface="Arial" pitchFamily="34" charset="0"/>
-                <a:ea typeface="Arial" pitchFamily="34" charset="-122"/>
-                <a:cs typeface="Arial" pitchFamily="34" charset="-120"/>
+                <a:ea typeface="BIZ UDPGothic" pitchFamily="34" charset="-122"/>
+                <a:cs typeface="BIZ UDPGothic" pitchFamily="34" charset="-120"/>
               </a:rPr>
               <a:t>02</a:t>
             </a:r>
@@ -7765,11 +7765,11 @@
             <a:r>
               <a:rPr lang="en-US" sz="1500" b="1" dirty="0">
                 <a:solidFill>
-                  <a:srgbClr val="F5F5F0"/>
-                </a:solidFill>
-                <a:latin typeface="Noto Sans JP" pitchFamily="34" charset="0"/>
-                <a:ea typeface="Noto Sans JP" pitchFamily="34" charset="-122"/>
-                <a:cs typeface="Noto Sans JP" pitchFamily="34" charset="-120"/>
+                  <a:srgbClr val="16181D"/>
+                </a:solidFill>
+                <a:latin typeface="BIZ UDPGothic" pitchFamily="34" charset="0"/>
+                <a:ea typeface="BIZ UDPGothic" pitchFamily="34" charset="-122"/>
+                <a:cs typeface="BIZ UDPGothic" pitchFamily="34" charset="-120"/>
               </a:rPr>
               <a:t>研究機能は大学に集約する</a:t>
             </a:r>
@@ -7807,13 +7807,13 @@
             <a:r>
               <a:rPr lang="en-US" sz="1150" dirty="0">
                 <a:solidFill>
-                  <a:srgbClr val="F5F5F0">
+                  <a:srgbClr val="16181D">
                     <a:alpha val="85000"/>
                   </a:srgbClr>
                 </a:solidFill>
-                <a:latin typeface="Noto Sans JP" pitchFamily="34" charset="0"/>
-                <a:ea typeface="Noto Sans JP" pitchFamily="34" charset="-122"/>
-                <a:cs typeface="Noto Sans JP" pitchFamily="34" charset="-120"/>
+                <a:latin typeface="BIZ UDPGothic" pitchFamily="34" charset="0"/>
+                <a:ea typeface="BIZ UDPGothic" pitchFamily="34" charset="-122"/>
+                <a:cs typeface="BIZ UDPGothic" pitchFamily="34" charset="-120"/>
               </a:rPr>
               <a:t>企業が大学へ寄付や共同研究費を出しやすいよう、税制優遇を拡充する。</a:t>
             </a:r>
@@ -7848,11 +7848,11 @@
             <a:r>
               <a:rPr lang="en-US" sz="2200" b="1" dirty="0">
                 <a:solidFill>
-                  <a:srgbClr val="D62828"/>
+                  <a:srgbClr val="C8161D"/>
                 </a:solidFill>
                 <a:latin typeface="Arial" pitchFamily="34" charset="0"/>
-                <a:ea typeface="Arial" pitchFamily="34" charset="-122"/>
-                <a:cs typeface="Arial" pitchFamily="34" charset="-120"/>
+                <a:ea typeface="BIZ UDPGothic" pitchFamily="34" charset="-122"/>
+                <a:cs typeface="BIZ UDPGothic" pitchFamily="34" charset="-120"/>
               </a:rPr>
               <a:t>03</a:t>
             </a:r>
@@ -7887,11 +7887,11 @@
             <a:r>
               <a:rPr lang="en-US" sz="1500" b="1" dirty="0">
                 <a:solidFill>
-                  <a:srgbClr val="F5F5F0"/>
-                </a:solidFill>
-                <a:latin typeface="Noto Sans JP" pitchFamily="34" charset="0"/>
-                <a:ea typeface="Noto Sans JP" pitchFamily="34" charset="-122"/>
-                <a:cs typeface="Noto Sans JP" pitchFamily="34" charset="-120"/>
+                  <a:srgbClr val="16181D"/>
+                </a:solidFill>
+                <a:latin typeface="BIZ UDPGothic" pitchFamily="34" charset="0"/>
+                <a:ea typeface="BIZ UDPGothic" pitchFamily="34" charset="-122"/>
+                <a:cs typeface="BIZ UDPGothic" pitchFamily="34" charset="-120"/>
               </a:rPr>
               <a:t>実用化までの橋渡しも用意する</a:t>
             </a:r>
@@ -7929,13 +7929,13 @@
             <a:r>
               <a:rPr lang="en-US" sz="1150" dirty="0">
                 <a:solidFill>
-                  <a:srgbClr val="F5F5F0">
+                  <a:srgbClr val="16181D">
                     <a:alpha val="85000"/>
                   </a:srgbClr>
                 </a:solidFill>
-                <a:latin typeface="Noto Sans JP" pitchFamily="34" charset="0"/>
-                <a:ea typeface="Noto Sans JP" pitchFamily="34" charset="-122"/>
-                <a:cs typeface="Noto Sans JP" pitchFamily="34" charset="-120"/>
+                <a:latin typeface="BIZ UDPGothic" pitchFamily="34" charset="0"/>
+                <a:ea typeface="BIZ UDPGothic" pitchFamily="34" charset="-122"/>
+                <a:cs typeface="BIZ UDPGothic" pitchFamily="34" charset="-120"/>
               </a:rPr>
               <a:t>大学と企業のスピードの差は、産学連携税制と①のフロンティア投資審査での優先採択で埋める。</a:t>
             </a:r>
@@ -7970,13 +7970,13 @@
             <a:r>
               <a:rPr lang="en-US" sz="800" dirty="0">
                 <a:solidFill>
-                  <a:srgbClr val="F5F5F0">
+                  <a:srgbClr val="16181D">
                     <a:alpha val="40000"/>
                   </a:srgbClr>
                 </a:solidFill>
                 <a:latin typeface="Arial" pitchFamily="34" charset="0"/>
-                <a:ea typeface="Arial" pitchFamily="34" charset="-122"/>
-                <a:cs typeface="Arial" pitchFamily="34" charset="-120"/>
+                <a:ea typeface="BIZ UDPGothic" pitchFamily="34" charset="-122"/>
+                <a:cs typeface="BIZ UDPGothic" pitchFamily="34" charset="-120"/>
               </a:rPr>
               <a:t>REBOOT JAPAN ── 政策提言プラットフォーム</a:t>
             </a:r>
@@ -8011,13 +8011,13 @@
             <a:r>
               <a:rPr lang="en-US" sz="800" dirty="0">
                 <a:solidFill>
-                  <a:srgbClr val="F5F5F0">
+                  <a:srgbClr val="16181D">
                     <a:alpha val="40000"/>
                   </a:srgbClr>
                 </a:solidFill>
                 <a:latin typeface="Arial" pitchFamily="34" charset="0"/>
-                <a:ea typeface="Arial" pitchFamily="34" charset="-122"/>
-                <a:cs typeface="Arial" pitchFamily="34" charset="-120"/>
+                <a:ea typeface="BIZ UDPGothic" pitchFamily="34" charset="-122"/>
+                <a:cs typeface="BIZ UDPGothic" pitchFamily="34" charset="-120"/>
               </a:rPr>
               <a:t>17</a:t>
             </a:r>
@@ -8039,7 +8039,7 @@
     <p:bg>
       <p:bgPr>
         <a:solidFill>
-          <a:srgbClr val="0A0A0A"/>
+          <a:srgbClr val="F5F6F8"/>
         </a:solidFill>
       </p:bgPr>
     </p:bg>
@@ -8084,11 +8084,11 @@
             <a:r>
               <a:rPr lang="en-US" sz="1200" b="1" spc="200" kern="0" dirty="0">
                 <a:solidFill>
-                  <a:srgbClr val="D62828"/>
+                  <a:srgbClr val="C8161D"/>
                 </a:solidFill>
                 <a:latin typeface="Arial" pitchFamily="34" charset="0"/>
-                <a:ea typeface="Arial" pitchFamily="34" charset="-122"/>
-                <a:cs typeface="Arial" pitchFamily="34" charset="-120"/>
+                <a:ea typeface="BIZ UDPGothic" pitchFamily="34" charset="-122"/>
+                <a:cs typeface="BIZ UDPGothic" pitchFamily="34" charset="-120"/>
               </a:rPr>
               <a:t>FINANCE</a:t>
             </a:r>
@@ -8126,11 +8126,11 @@
             <a:r>
               <a:rPr lang="en-US" sz="2600" b="1" dirty="0">
                 <a:solidFill>
-                  <a:srgbClr val="F5F5F0"/>
-                </a:solidFill>
-                <a:latin typeface="Noto Sans JP" pitchFamily="34" charset="0"/>
-                <a:ea typeface="Noto Sans JP" pitchFamily="34" charset="-122"/>
-                <a:cs typeface="Noto Sans JP" pitchFamily="34" charset="-120"/>
+                  <a:srgbClr val="16181D"/>
+                </a:solidFill>
+                <a:latin typeface="BIZ UDPGothic" pitchFamily="34" charset="0"/>
+                <a:ea typeface="BIZ UDPGothic" pitchFamily="34" charset="-122"/>
+                <a:cs typeface="BIZ UDPGothic" pitchFamily="34" charset="-120"/>
               </a:rPr>
               <a:t>お金の流れ全体図</a:t>
             </a:r>
@@ -8168,13 +8168,13 @@
             <a:r>
               <a:rPr lang="en-US" sz="1350" dirty="0">
                 <a:solidFill>
-                  <a:srgbClr val="F5F5F0">
+                  <a:srgbClr val="16181D">
                     <a:alpha val="90000"/>
                   </a:srgbClr>
                 </a:solidFill>
-                <a:latin typeface="Noto Sans JP" pitchFamily="34" charset="0"/>
-                <a:ea typeface="Noto Sans JP" pitchFamily="34" charset="-122"/>
-                <a:cs typeface="Noto Sans JP" pitchFamily="34" charset="-120"/>
+                <a:latin typeface="BIZ UDPGothic" pitchFamily="34" charset="0"/>
+                <a:ea typeface="BIZ UDPGothic" pitchFamily="34" charset="-122"/>
+                <a:cs typeface="BIZ UDPGothic" pitchFamily="34" charset="-120"/>
               </a:rPr>
               <a:t>新しい増税はせず、既存の補助金予算を組み替えるだけで実現する。</a:t>
             </a:r>
@@ -8221,25 +8221,25 @@
                       <a:r>
                         <a:rPr lang="en-US" sz="1200" b="1" dirty="0">
                           <a:solidFill>
-                            <a:srgbClr val="F5F5F0"/>
+                            <a:srgbClr val="FFFFFF"/>
                           </a:solidFill>
-                          <a:latin typeface="Noto Sans JP" pitchFamily="34" charset="0"/>
-                          <a:ea typeface="Noto Sans JP" pitchFamily="34" charset="-122"/>
-                          <a:cs typeface="Noto Sans JP" pitchFamily="34" charset="-120"/>
+                          <a:latin typeface="BIZ UDPGothic" pitchFamily="34" charset="0"/>
+                          <a:ea typeface="BIZ UDPGothic" pitchFamily="34" charset="-122"/>
+                          <a:cs typeface="BIZ UDPGothic" pitchFamily="34" charset="-120"/>
                         </a:rPr>
                         <a:t>流れ</a:t>
                       </a:r>
                       <a:endParaRPr lang="en-US" sz="1200" dirty="0">
-                        <a:latin typeface="Noto Sans JP" charset="0"/>
-                        <a:ea typeface="Noto Sans JP" charset="0"/>
-                        <a:cs typeface="Noto Sans JP" charset="0"/>
+                        <a:latin typeface="BIZ UDPGothic" charset="0"/>
+                        <a:ea typeface="BIZ UDPGothic" charset="0"/>
+                        <a:cs typeface="BIZ UDPGothic" charset="0"/>
                       </a:endParaRPr>
                     </a:p>
                   </a:txBody>
                   <a:tcPr marL="101600" marR="101600" marT="50800" marB="50800" anchor="ctr">
                     <a:lnL w="6350" cap="flat" cmpd="sng" algn="ctr">
                       <a:solidFill>
-                        <a:srgbClr val="2E2E2E"/>
+                        <a:srgbClr val="DDE0E6"/>
                       </a:solidFill>
                       <a:prstDash val="solid"/>
                       <a:round/>
@@ -8248,7 +8248,7 @@
                     </a:lnL>
                     <a:lnR w="6350" cap="flat" cmpd="sng" algn="ctr">
                       <a:solidFill>
-                        <a:srgbClr val="2E2E2E"/>
+                        <a:srgbClr val="DDE0E6"/>
                       </a:solidFill>
                       <a:prstDash val="solid"/>
                       <a:round/>
@@ -8257,7 +8257,7 @@
                     </a:lnR>
                     <a:lnT w="6350" cap="flat" cmpd="sng" algn="ctr">
                       <a:solidFill>
-                        <a:srgbClr val="2E2E2E"/>
+                        <a:srgbClr val="DDE0E6"/>
                       </a:solidFill>
                       <a:prstDash val="solid"/>
                       <a:round/>
@@ -8266,7 +8266,7 @@
                     </a:lnT>
                     <a:lnB w="6350" cap="flat" cmpd="sng" algn="ctr">
                       <a:solidFill>
-                        <a:srgbClr val="2E2E2E"/>
+                        <a:srgbClr val="DDE0E6"/>
                       </a:solidFill>
                       <a:prstDash val="solid"/>
                       <a:round/>
@@ -8274,7 +8274,7 @@
                       <a:tailEnd type="none" w="med" len="med"/>
                     </a:lnB>
                     <a:solidFill>
-                      <a:srgbClr val="D62828"/>
+                      <a:srgbClr val="C8161D"/>
                     </a:solidFill>
                   </a:tcPr>
                 </a:tc>
@@ -8289,25 +8289,25 @@
                       <a:r>
                         <a:rPr lang="en-US" sz="1200" b="1" dirty="0">
                           <a:solidFill>
-                            <a:srgbClr val="F5F5F0"/>
+                            <a:srgbClr val="FFFFFF"/>
                           </a:solidFill>
-                          <a:latin typeface="Noto Sans JP" pitchFamily="34" charset="0"/>
-                          <a:ea typeface="Noto Sans JP" pitchFamily="34" charset="-122"/>
-                          <a:cs typeface="Noto Sans JP" pitchFamily="34" charset="-120"/>
+                          <a:latin typeface="BIZ UDPGothic" pitchFamily="34" charset="0"/>
+                          <a:ea typeface="BIZ UDPGothic" pitchFamily="34" charset="-122"/>
+                          <a:cs typeface="BIZ UDPGothic" pitchFamily="34" charset="-120"/>
                         </a:rPr>
                         <a:t>金額</a:t>
                       </a:r>
                       <a:endParaRPr lang="en-US" sz="1200" dirty="0">
-                        <a:latin typeface="Noto Sans JP" charset="0"/>
-                        <a:ea typeface="Noto Sans JP" charset="0"/>
-                        <a:cs typeface="Noto Sans JP" charset="0"/>
+                        <a:latin typeface="BIZ UDPGothic" charset="0"/>
+                        <a:ea typeface="BIZ UDPGothic" charset="0"/>
+                        <a:cs typeface="BIZ UDPGothic" charset="0"/>
                       </a:endParaRPr>
                     </a:p>
                   </a:txBody>
                   <a:tcPr marL="101600" marR="101600" marT="50800" marB="50800" anchor="ctr">
                     <a:lnL w="6350" cap="flat" cmpd="sng" algn="ctr">
                       <a:solidFill>
-                        <a:srgbClr val="2E2E2E"/>
+                        <a:srgbClr val="DDE0E6"/>
                       </a:solidFill>
                       <a:prstDash val="solid"/>
                       <a:round/>
@@ -8316,7 +8316,7 @@
                     </a:lnL>
                     <a:lnR w="6350" cap="flat" cmpd="sng" algn="ctr">
                       <a:solidFill>
-                        <a:srgbClr val="2E2E2E"/>
+                        <a:srgbClr val="DDE0E6"/>
                       </a:solidFill>
                       <a:prstDash val="solid"/>
                       <a:round/>
@@ -8325,7 +8325,7 @@
                     </a:lnR>
                     <a:lnT w="6350" cap="flat" cmpd="sng" algn="ctr">
                       <a:solidFill>
-                        <a:srgbClr val="2E2E2E"/>
+                        <a:srgbClr val="DDE0E6"/>
                       </a:solidFill>
                       <a:prstDash val="solid"/>
                       <a:round/>
@@ -8334,7 +8334,7 @@
                     </a:lnT>
                     <a:lnB w="6350" cap="flat" cmpd="sng" algn="ctr">
                       <a:solidFill>
-                        <a:srgbClr val="2E2E2E"/>
+                        <a:srgbClr val="DDE0E6"/>
                       </a:solidFill>
                       <a:prstDash val="solid"/>
                       <a:round/>
@@ -8342,7 +8342,7 @@
                       <a:tailEnd type="none" w="med" len="med"/>
                     </a:lnB>
                     <a:solidFill>
-                      <a:srgbClr val="D62828"/>
+                      <a:srgbClr val="C8161D"/>
                     </a:solidFill>
                   </a:tcPr>
                 </a:tc>
@@ -8357,25 +8357,25 @@
                       <a:r>
                         <a:rPr lang="en-US" sz="1200" b="1" dirty="0">
                           <a:solidFill>
-                            <a:srgbClr val="F5F5F0"/>
+                            <a:srgbClr val="FFFFFF"/>
                           </a:solidFill>
-                          <a:latin typeface="Noto Sans JP" pitchFamily="34" charset="0"/>
-                          <a:ea typeface="Noto Sans JP" pitchFamily="34" charset="-122"/>
-                          <a:cs typeface="Noto Sans JP" pitchFamily="34" charset="-120"/>
+                          <a:latin typeface="BIZ UDPGothic" pitchFamily="34" charset="0"/>
+                          <a:ea typeface="BIZ UDPGothic" pitchFamily="34" charset="-122"/>
+                          <a:cs typeface="BIZ UDPGothic" pitchFamily="34" charset="-120"/>
                         </a:rPr>
                         <a:t>移動先</a:t>
                       </a:r>
                       <a:endParaRPr lang="en-US" sz="1200" dirty="0">
-                        <a:latin typeface="Noto Sans JP" charset="0"/>
-                        <a:ea typeface="Noto Sans JP" charset="0"/>
-                        <a:cs typeface="Noto Sans JP" charset="0"/>
+                        <a:latin typeface="BIZ UDPGothic" charset="0"/>
+                        <a:ea typeface="BIZ UDPGothic" charset="0"/>
+                        <a:cs typeface="BIZ UDPGothic" charset="0"/>
                       </a:endParaRPr>
                     </a:p>
                   </a:txBody>
                   <a:tcPr marL="101600" marR="101600" marT="50800" marB="50800" anchor="ctr">
                     <a:lnL w="6350" cap="flat" cmpd="sng" algn="ctr">
                       <a:solidFill>
-                        <a:srgbClr val="2E2E2E"/>
+                        <a:srgbClr val="DDE0E6"/>
                       </a:solidFill>
                       <a:prstDash val="solid"/>
                       <a:round/>
@@ -8384,7 +8384,7 @@
                     </a:lnL>
                     <a:lnR w="6350" cap="flat" cmpd="sng" algn="ctr">
                       <a:solidFill>
-                        <a:srgbClr val="2E2E2E"/>
+                        <a:srgbClr val="DDE0E6"/>
                       </a:solidFill>
                       <a:prstDash val="solid"/>
                       <a:round/>
@@ -8393,7 +8393,7 @@
                     </a:lnR>
                     <a:lnT w="6350" cap="flat" cmpd="sng" algn="ctr">
                       <a:solidFill>
-                        <a:srgbClr val="2E2E2E"/>
+                        <a:srgbClr val="DDE0E6"/>
                       </a:solidFill>
                       <a:prstDash val="solid"/>
                       <a:round/>
@@ -8402,7 +8402,7 @@
                     </a:lnT>
                     <a:lnB w="6350" cap="flat" cmpd="sng" algn="ctr">
                       <a:solidFill>
-                        <a:srgbClr val="2E2E2E"/>
+                        <a:srgbClr val="DDE0E6"/>
                       </a:solidFill>
                       <a:prstDash val="solid"/>
                       <a:round/>
@@ -8410,7 +8410,7 @@
                       <a:tailEnd type="none" w="med" len="med"/>
                     </a:lnB>
                     <a:solidFill>
-                      <a:srgbClr val="D62828"/>
+                      <a:srgbClr val="C8161D"/>
                     </a:solidFill>
                   </a:tcPr>
                 </a:tc>
@@ -8427,25 +8427,25 @@
                       <a:r>
                         <a:rPr lang="en-US" sz="1150" dirty="0">
                           <a:solidFill>
-                            <a:srgbClr val="F5F5F0"/>
+                            <a:srgbClr val="16181D"/>
                           </a:solidFill>
-                          <a:latin typeface="Noto Sans JP" pitchFamily="34" charset="0"/>
-                          <a:ea typeface="Noto Sans JP" pitchFamily="34" charset="-122"/>
-                          <a:cs typeface="Noto Sans JP" pitchFamily="34" charset="-120"/>
+                          <a:latin typeface="BIZ UDPGothic" pitchFamily="34" charset="0"/>
+                          <a:ea typeface="BIZ UDPGothic" pitchFamily="34" charset="-122"/>
+                          <a:cs typeface="BIZ UDPGothic" pitchFamily="34" charset="-120"/>
                         </a:rPr>
                         <a:t>① 古い補助金の全廃</a:t>
                       </a:r>
                       <a:endParaRPr lang="en-US" sz="1150" dirty="0">
-                        <a:latin typeface="Noto Sans JP" charset="0"/>
-                        <a:ea typeface="Noto Sans JP" charset="0"/>
-                        <a:cs typeface="Noto Sans JP" charset="0"/>
+                        <a:latin typeface="BIZ UDPGothic" charset="0"/>
+                        <a:ea typeface="BIZ UDPGothic" charset="0"/>
+                        <a:cs typeface="BIZ UDPGothic" charset="0"/>
                       </a:endParaRPr>
                     </a:p>
                   </a:txBody>
                   <a:tcPr marL="101600" marR="101600" marT="50800" marB="50800" anchor="ctr">
                     <a:lnL w="6350" cap="flat" cmpd="sng" algn="ctr">
                       <a:solidFill>
-                        <a:srgbClr val="2E2E2E"/>
+                        <a:srgbClr val="DDE0E6"/>
                       </a:solidFill>
                       <a:prstDash val="solid"/>
                       <a:round/>
@@ -8454,7 +8454,7 @@
                     </a:lnL>
                     <a:lnR w="6350" cap="flat" cmpd="sng" algn="ctr">
                       <a:solidFill>
-                        <a:srgbClr val="2E2E2E"/>
+                        <a:srgbClr val="DDE0E6"/>
                       </a:solidFill>
                       <a:prstDash val="solid"/>
                       <a:round/>
@@ -8463,7 +8463,7 @@
                     </a:lnR>
                     <a:lnT w="6350" cap="flat" cmpd="sng" algn="ctr">
                       <a:solidFill>
-                        <a:srgbClr val="2E2E2E"/>
+                        <a:srgbClr val="DDE0E6"/>
                       </a:solidFill>
                       <a:prstDash val="solid"/>
                       <a:round/>
@@ -8472,7 +8472,7 @@
                     </a:lnT>
                     <a:lnB w="6350" cap="flat" cmpd="sng" algn="ctr">
                       <a:solidFill>
-                        <a:srgbClr val="2E2E2E"/>
+                        <a:srgbClr val="DDE0E6"/>
                       </a:solidFill>
                       <a:prstDash val="solid"/>
                       <a:round/>
@@ -8480,7 +8480,7 @@
                       <a:tailEnd type="none" w="med" len="med"/>
                     </a:lnB>
                     <a:solidFill>
-                      <a:srgbClr val="1A1A1A"/>
+                      <a:srgbClr val="FFFFFF"/>
                     </a:solidFill>
                   </a:tcPr>
                 </a:tc>
@@ -8495,25 +8495,25 @@
                       <a:r>
                         <a:rPr lang="en-US" sz="1150" dirty="0">
                           <a:solidFill>
-                            <a:srgbClr val="F5F5F0"/>
+                            <a:srgbClr val="16181D"/>
                           </a:solidFill>
-                          <a:latin typeface="Noto Sans JP" pitchFamily="34" charset="0"/>
-                          <a:ea typeface="Noto Sans JP" pitchFamily="34" charset="-122"/>
-                          <a:cs typeface="Noto Sans JP" pitchFamily="34" charset="-120"/>
+                          <a:latin typeface="BIZ UDPGothic" pitchFamily="34" charset="0"/>
+                          <a:ea typeface="BIZ UDPGothic" pitchFamily="34" charset="-122"/>
+                          <a:cs typeface="BIZ UDPGothic" pitchFamily="34" charset="-120"/>
                         </a:rPr>
                         <a:t>約4,064億円</a:t>
                       </a:r>
                       <a:endParaRPr lang="en-US" sz="1150" dirty="0">
-                        <a:latin typeface="Noto Sans JP" charset="0"/>
-                        <a:ea typeface="Noto Sans JP" charset="0"/>
-                        <a:cs typeface="Noto Sans JP" charset="0"/>
+                        <a:latin typeface="BIZ UDPGothic" charset="0"/>
+                        <a:ea typeface="BIZ UDPGothic" charset="0"/>
+                        <a:cs typeface="BIZ UDPGothic" charset="0"/>
                       </a:endParaRPr>
                     </a:p>
                   </a:txBody>
                   <a:tcPr marL="101600" marR="101600" marT="50800" marB="50800" anchor="ctr">
                     <a:lnL w="6350" cap="flat" cmpd="sng" algn="ctr">
                       <a:solidFill>
-                        <a:srgbClr val="2E2E2E"/>
+                        <a:srgbClr val="DDE0E6"/>
                       </a:solidFill>
                       <a:prstDash val="solid"/>
                       <a:round/>
@@ -8522,7 +8522,7 @@
                     </a:lnL>
                     <a:lnR w="6350" cap="flat" cmpd="sng" algn="ctr">
                       <a:solidFill>
-                        <a:srgbClr val="2E2E2E"/>
+                        <a:srgbClr val="DDE0E6"/>
                       </a:solidFill>
                       <a:prstDash val="solid"/>
                       <a:round/>
@@ -8531,7 +8531,7 @@
                     </a:lnR>
                     <a:lnT w="6350" cap="flat" cmpd="sng" algn="ctr">
                       <a:solidFill>
-                        <a:srgbClr val="2E2E2E"/>
+                        <a:srgbClr val="DDE0E6"/>
                       </a:solidFill>
                       <a:prstDash val="solid"/>
                       <a:round/>
@@ -8540,7 +8540,7 @@
                     </a:lnT>
                     <a:lnB w="6350" cap="flat" cmpd="sng" algn="ctr">
                       <a:solidFill>
-                        <a:srgbClr val="2E2E2E"/>
+                        <a:srgbClr val="DDE0E6"/>
                       </a:solidFill>
                       <a:prstDash val="solid"/>
                       <a:round/>
@@ -8548,7 +8548,7 @@
                       <a:tailEnd type="none" w="med" len="med"/>
                     </a:lnB>
                     <a:solidFill>
-                      <a:srgbClr val="1A1A1A"/>
+                      <a:srgbClr val="FFFFFF"/>
                     </a:solidFill>
                   </a:tcPr>
                 </a:tc>
@@ -8563,25 +8563,25 @@
                       <a:r>
                         <a:rPr lang="en-US" sz="1150" dirty="0">
                           <a:solidFill>
-                            <a:srgbClr val="F5F5F0"/>
+                            <a:srgbClr val="16181D"/>
                           </a:solidFill>
-                          <a:latin typeface="Noto Sans JP" pitchFamily="34" charset="0"/>
-                          <a:ea typeface="Noto Sans JP" pitchFamily="34" charset="-122"/>
-                          <a:cs typeface="Noto Sans JP" pitchFamily="34" charset="-120"/>
+                          <a:latin typeface="BIZ UDPGothic" pitchFamily="34" charset="0"/>
+                          <a:ea typeface="BIZ UDPGothic" pitchFamily="34" charset="-122"/>
+                          <a:cs typeface="BIZ UDPGothic" pitchFamily="34" charset="-120"/>
                         </a:rPr>
                         <a:t>④ 未来への投資へ</a:t>
                       </a:r>
                       <a:endParaRPr lang="en-US" sz="1150" dirty="0">
-                        <a:latin typeface="Noto Sans JP" charset="0"/>
-                        <a:ea typeface="Noto Sans JP" charset="0"/>
-                        <a:cs typeface="Noto Sans JP" charset="0"/>
+                        <a:latin typeface="BIZ UDPGothic" charset="0"/>
+                        <a:ea typeface="BIZ UDPGothic" charset="0"/>
+                        <a:cs typeface="BIZ UDPGothic" charset="0"/>
                       </a:endParaRPr>
                     </a:p>
                   </a:txBody>
                   <a:tcPr marL="101600" marR="101600" marT="50800" marB="50800" anchor="ctr">
                     <a:lnL w="6350" cap="flat" cmpd="sng" algn="ctr">
                       <a:solidFill>
-                        <a:srgbClr val="2E2E2E"/>
+                        <a:srgbClr val="DDE0E6"/>
                       </a:solidFill>
                       <a:prstDash val="solid"/>
                       <a:round/>
@@ -8590,7 +8590,7 @@
                     </a:lnL>
                     <a:lnR w="6350" cap="flat" cmpd="sng" algn="ctr">
                       <a:solidFill>
-                        <a:srgbClr val="2E2E2E"/>
+                        <a:srgbClr val="DDE0E6"/>
                       </a:solidFill>
                       <a:prstDash val="solid"/>
                       <a:round/>
@@ -8599,7 +8599,7 @@
                     </a:lnR>
                     <a:lnT w="6350" cap="flat" cmpd="sng" algn="ctr">
                       <a:solidFill>
-                        <a:srgbClr val="2E2E2E"/>
+                        <a:srgbClr val="DDE0E6"/>
                       </a:solidFill>
                       <a:prstDash val="solid"/>
                       <a:round/>
@@ -8608,7 +8608,7 @@
                     </a:lnT>
                     <a:lnB w="6350" cap="flat" cmpd="sng" algn="ctr">
                       <a:solidFill>
-                        <a:srgbClr val="2E2E2E"/>
+                        <a:srgbClr val="DDE0E6"/>
                       </a:solidFill>
                       <a:prstDash val="solid"/>
                       <a:round/>
@@ -8616,7 +8616,7 @@
                       <a:tailEnd type="none" w="med" len="med"/>
                     </a:lnB>
                     <a:solidFill>
-                      <a:srgbClr val="1A1A1A"/>
+                      <a:srgbClr val="FFFFFF"/>
                     </a:solidFill>
                   </a:tcPr>
                 </a:tc>
@@ -8633,25 +8633,25 @@
                       <a:r>
                         <a:rPr lang="en-US" sz="1150" dirty="0">
                           <a:solidFill>
-                            <a:srgbClr val="F5F5F0"/>
+                            <a:srgbClr val="16181D"/>
                           </a:solidFill>
-                          <a:latin typeface="Noto Sans JP" pitchFamily="34" charset="0"/>
-                          <a:ea typeface="Noto Sans JP" pitchFamily="34" charset="-122"/>
-                          <a:cs typeface="Noto Sans JP" pitchFamily="34" charset="-120"/>
+                          <a:latin typeface="BIZ UDPGothic" pitchFamily="34" charset="0"/>
+                          <a:ea typeface="BIZ UDPGothic" pitchFamily="34" charset="-122"/>
+                          <a:cs typeface="BIZ UDPGothic" pitchFamily="34" charset="-120"/>
                         </a:rPr>
                         <a:t>② 大規模成長投資補助金の転用</a:t>
                       </a:r>
                       <a:endParaRPr lang="en-US" sz="1150" dirty="0">
-                        <a:latin typeface="Noto Sans JP" charset="0"/>
-                        <a:ea typeface="Noto Sans JP" charset="0"/>
-                        <a:cs typeface="Noto Sans JP" charset="0"/>
+                        <a:latin typeface="BIZ UDPGothic" charset="0"/>
+                        <a:ea typeface="BIZ UDPGothic" charset="0"/>
+                        <a:cs typeface="BIZ UDPGothic" charset="0"/>
                       </a:endParaRPr>
                     </a:p>
                   </a:txBody>
                   <a:tcPr marL="101600" marR="101600" marT="50800" marB="50800" anchor="ctr">
                     <a:lnL w="6350" cap="flat" cmpd="sng" algn="ctr">
                       <a:solidFill>
-                        <a:srgbClr val="2E2E2E"/>
+                        <a:srgbClr val="DDE0E6"/>
                       </a:solidFill>
                       <a:prstDash val="solid"/>
                       <a:round/>
@@ -8660,7 +8660,7 @@
                     </a:lnL>
                     <a:lnR w="6350" cap="flat" cmpd="sng" algn="ctr">
                       <a:solidFill>
-                        <a:srgbClr val="2E2E2E"/>
+                        <a:srgbClr val="DDE0E6"/>
                       </a:solidFill>
                       <a:prstDash val="solid"/>
                       <a:round/>
@@ -8669,7 +8669,7 @@
                     </a:lnR>
                     <a:lnT w="6350" cap="flat" cmpd="sng" algn="ctr">
                       <a:solidFill>
-                        <a:srgbClr val="2E2E2E"/>
+                        <a:srgbClr val="DDE0E6"/>
                       </a:solidFill>
                       <a:prstDash val="solid"/>
                       <a:round/>
@@ -8678,7 +8678,7 @@
                     </a:lnT>
                     <a:lnB w="6350" cap="flat" cmpd="sng" algn="ctr">
                       <a:solidFill>
-                        <a:srgbClr val="2E2E2E"/>
+                        <a:srgbClr val="DDE0E6"/>
                       </a:solidFill>
                       <a:prstDash val="solid"/>
                       <a:round/>
@@ -8686,7 +8686,7 @@
                       <a:tailEnd type="none" w="med" len="med"/>
                     </a:lnB>
                     <a:solidFill>
-                      <a:srgbClr val="151515"/>
+                      <a:srgbClr val="FFFFFF"/>
                     </a:solidFill>
                   </a:tcPr>
                 </a:tc>
@@ -8701,25 +8701,25 @@
                       <a:r>
                         <a:rPr lang="en-US" sz="1150" dirty="0">
                           <a:solidFill>
-                            <a:srgbClr val="F5F5F0"/>
+                            <a:srgbClr val="16181D"/>
                           </a:solidFill>
-                          <a:latin typeface="Noto Sans JP" pitchFamily="34" charset="0"/>
-                          <a:ea typeface="Noto Sans JP" pitchFamily="34" charset="-122"/>
-                          <a:cs typeface="Noto Sans JP" pitchFamily="34" charset="-120"/>
+                          <a:latin typeface="BIZ UDPGothic" pitchFamily="34" charset="0"/>
+                          <a:ea typeface="BIZ UDPGothic" pitchFamily="34" charset="-122"/>
+                          <a:cs typeface="BIZ UDPGothic" pitchFamily="34" charset="-120"/>
                         </a:rPr>
                         <a:t>4,121億円</a:t>
                       </a:r>
                       <a:endParaRPr lang="en-US" sz="1150" dirty="0">
-                        <a:latin typeface="Noto Sans JP" charset="0"/>
-                        <a:ea typeface="Noto Sans JP" charset="0"/>
-                        <a:cs typeface="Noto Sans JP" charset="0"/>
+                        <a:latin typeface="BIZ UDPGothic" charset="0"/>
+                        <a:ea typeface="BIZ UDPGothic" charset="0"/>
+                        <a:cs typeface="BIZ UDPGothic" charset="0"/>
                       </a:endParaRPr>
                     </a:p>
                   </a:txBody>
                   <a:tcPr marL="101600" marR="101600" marT="50800" marB="50800" anchor="ctr">
                     <a:lnL w="6350" cap="flat" cmpd="sng" algn="ctr">
                       <a:solidFill>
-                        <a:srgbClr val="2E2E2E"/>
+                        <a:srgbClr val="DDE0E6"/>
                       </a:solidFill>
                       <a:prstDash val="solid"/>
                       <a:round/>
@@ -8728,7 +8728,7 @@
                     </a:lnL>
                     <a:lnR w="6350" cap="flat" cmpd="sng" algn="ctr">
                       <a:solidFill>
-                        <a:srgbClr val="2E2E2E"/>
+                        <a:srgbClr val="DDE0E6"/>
                       </a:solidFill>
                       <a:prstDash val="solid"/>
                       <a:round/>
@@ -8737,7 +8737,7 @@
                     </a:lnR>
                     <a:lnT w="6350" cap="flat" cmpd="sng" algn="ctr">
                       <a:solidFill>
-                        <a:srgbClr val="2E2E2E"/>
+                        <a:srgbClr val="DDE0E6"/>
                       </a:solidFill>
                       <a:prstDash val="solid"/>
                       <a:round/>
@@ -8746,7 +8746,7 @@
                     </a:lnT>
                     <a:lnB w="6350" cap="flat" cmpd="sng" algn="ctr">
                       <a:solidFill>
-                        <a:srgbClr val="2E2E2E"/>
+                        <a:srgbClr val="DDE0E6"/>
                       </a:solidFill>
                       <a:prstDash val="solid"/>
                       <a:round/>
@@ -8754,7 +8754,7 @@
                       <a:tailEnd type="none" w="med" len="med"/>
                     </a:lnB>
                     <a:solidFill>
-                      <a:srgbClr val="151515"/>
+                      <a:srgbClr val="FFFFFF"/>
                     </a:solidFill>
                   </a:tcPr>
                 </a:tc>
@@ -8769,25 +8769,25 @@
                       <a:r>
                         <a:rPr lang="en-US" sz="1150" dirty="0">
                           <a:solidFill>
-                            <a:srgbClr val="F5F5F0"/>
+                            <a:srgbClr val="16181D"/>
                           </a:solidFill>
-                          <a:latin typeface="Noto Sans JP" pitchFamily="34" charset="0"/>
-                          <a:ea typeface="Noto Sans JP" pitchFamily="34" charset="-122"/>
-                          <a:cs typeface="Noto Sans JP" pitchFamily="34" charset="-120"/>
+                          <a:latin typeface="BIZ UDPGothic" pitchFamily="34" charset="0"/>
+                          <a:ea typeface="BIZ UDPGothic" pitchFamily="34" charset="-122"/>
+                          <a:cs typeface="BIZ UDPGothic" pitchFamily="34" charset="-120"/>
                         </a:rPr>
                         <a:t>⑤ 再就職支援へ（収支中立）</a:t>
                       </a:r>
                       <a:endParaRPr lang="en-US" sz="1150" dirty="0">
-                        <a:latin typeface="Noto Sans JP" charset="0"/>
-                        <a:ea typeface="Noto Sans JP" charset="0"/>
-                        <a:cs typeface="Noto Sans JP" charset="0"/>
+                        <a:latin typeface="BIZ UDPGothic" charset="0"/>
+                        <a:ea typeface="BIZ UDPGothic" charset="0"/>
+                        <a:cs typeface="BIZ UDPGothic" charset="0"/>
                       </a:endParaRPr>
                     </a:p>
                   </a:txBody>
                   <a:tcPr marL="101600" marR="101600" marT="50800" marB="50800" anchor="ctr">
                     <a:lnL w="6350" cap="flat" cmpd="sng" algn="ctr">
                       <a:solidFill>
-                        <a:srgbClr val="2E2E2E"/>
+                        <a:srgbClr val="DDE0E6"/>
                       </a:solidFill>
                       <a:prstDash val="solid"/>
                       <a:round/>
@@ -8796,7 +8796,7 @@
                     </a:lnL>
                     <a:lnR w="6350" cap="flat" cmpd="sng" algn="ctr">
                       <a:solidFill>
-                        <a:srgbClr val="2E2E2E"/>
+                        <a:srgbClr val="DDE0E6"/>
                       </a:solidFill>
                       <a:prstDash val="solid"/>
                       <a:round/>
@@ -8805,7 +8805,7 @@
                     </a:lnR>
                     <a:lnT w="6350" cap="flat" cmpd="sng" algn="ctr">
                       <a:solidFill>
-                        <a:srgbClr val="2E2E2E"/>
+                        <a:srgbClr val="DDE0E6"/>
                       </a:solidFill>
                       <a:prstDash val="solid"/>
                       <a:round/>
@@ -8814,7 +8814,7 @@
                     </a:lnT>
                     <a:lnB w="6350" cap="flat" cmpd="sng" algn="ctr">
                       <a:solidFill>
-                        <a:srgbClr val="2E2E2E"/>
+                        <a:srgbClr val="DDE0E6"/>
                       </a:solidFill>
                       <a:prstDash val="solid"/>
                       <a:round/>
@@ -8822,7 +8822,7 @@
                       <a:tailEnd type="none" w="med" len="med"/>
                     </a:lnB>
                     <a:solidFill>
-                      <a:srgbClr val="151515"/>
+                      <a:srgbClr val="FFFFFF"/>
                     </a:solidFill>
                   </a:tcPr>
                 </a:tc>
@@ -8839,25 +8839,25 @@
                       <a:r>
                         <a:rPr lang="en-US" sz="1150" dirty="0">
                           <a:solidFill>
-                            <a:srgbClr val="F5F5F0"/>
+                            <a:srgbClr val="16181D"/>
                           </a:solidFill>
-                          <a:latin typeface="Noto Sans JP" pitchFamily="34" charset="0"/>
-                          <a:ea typeface="Noto Sans JP" pitchFamily="34" charset="-122"/>
-                          <a:cs typeface="Noto Sans JP" pitchFamily="34" charset="-120"/>
+                          <a:latin typeface="BIZ UDPGothic" pitchFamily="34" charset="0"/>
+                          <a:ea typeface="BIZ UDPGothic" pitchFamily="34" charset="-122"/>
+                          <a:cs typeface="BIZ UDPGothic" pitchFamily="34" charset="-120"/>
                         </a:rPr>
                         <a:t>③ 伝統文化保護の純増</a:t>
                       </a:r>
                       <a:endParaRPr lang="en-US" sz="1150" dirty="0">
-                        <a:latin typeface="Noto Sans JP" charset="0"/>
-                        <a:ea typeface="Noto Sans JP" charset="0"/>
-                        <a:cs typeface="Noto Sans JP" charset="0"/>
+                        <a:latin typeface="BIZ UDPGothic" charset="0"/>
+                        <a:ea typeface="BIZ UDPGothic" charset="0"/>
+                        <a:cs typeface="BIZ UDPGothic" charset="0"/>
                       </a:endParaRPr>
                     </a:p>
                   </a:txBody>
                   <a:tcPr marL="101600" marR="101600" marT="50800" marB="50800" anchor="ctr">
                     <a:lnL w="6350" cap="flat" cmpd="sng" algn="ctr">
                       <a:solidFill>
-                        <a:srgbClr val="2E2E2E"/>
+                        <a:srgbClr val="DDE0E6"/>
                       </a:solidFill>
                       <a:prstDash val="solid"/>
                       <a:round/>
@@ -8866,7 +8866,7 @@
                     </a:lnL>
                     <a:lnR w="6350" cap="flat" cmpd="sng" algn="ctr">
                       <a:solidFill>
-                        <a:srgbClr val="2E2E2E"/>
+                        <a:srgbClr val="DDE0E6"/>
                       </a:solidFill>
                       <a:prstDash val="solid"/>
                       <a:round/>
@@ -8875,7 +8875,7 @@
                     </a:lnR>
                     <a:lnT w="6350" cap="flat" cmpd="sng" algn="ctr">
                       <a:solidFill>
-                        <a:srgbClr val="2E2E2E"/>
+                        <a:srgbClr val="DDE0E6"/>
                       </a:solidFill>
                       <a:prstDash val="solid"/>
                       <a:round/>
@@ -8884,7 +8884,7 @@
                     </a:lnT>
                     <a:lnB w="6350" cap="flat" cmpd="sng" algn="ctr">
                       <a:solidFill>
-                        <a:srgbClr val="2E2E2E"/>
+                        <a:srgbClr val="DDE0E6"/>
                       </a:solidFill>
                       <a:prstDash val="solid"/>
                       <a:round/>
@@ -8892,7 +8892,7 @@
                       <a:tailEnd type="none" w="med" len="med"/>
                     </a:lnB>
                     <a:solidFill>
-                      <a:srgbClr val="1A1A1A"/>
+                      <a:srgbClr val="FFFFFF"/>
                     </a:solidFill>
                   </a:tcPr>
                 </a:tc>
@@ -8907,25 +8907,25 @@
                       <a:r>
                         <a:rPr lang="en-US" sz="1150" dirty="0">
                           <a:solidFill>
-                            <a:srgbClr val="F5F5F0"/>
+                            <a:srgbClr val="16181D"/>
                           </a:solidFill>
-                          <a:latin typeface="Noto Sans JP" pitchFamily="34" charset="0"/>
-                          <a:ea typeface="Noto Sans JP" pitchFamily="34" charset="-122"/>
-                          <a:cs typeface="Noto Sans JP" pitchFamily="34" charset="-120"/>
+                          <a:latin typeface="BIZ UDPGothic" pitchFamily="34" charset="0"/>
+                          <a:ea typeface="BIZ UDPGothic" pitchFamily="34" charset="-122"/>
+                          <a:cs typeface="BIZ UDPGothic" pitchFamily="34" charset="-120"/>
                         </a:rPr>
                         <a:t>+209億円</a:t>
                       </a:r>
                       <a:endParaRPr lang="en-US" sz="1150" dirty="0">
-                        <a:latin typeface="Noto Sans JP" charset="0"/>
-                        <a:ea typeface="Noto Sans JP" charset="0"/>
-                        <a:cs typeface="Noto Sans JP" charset="0"/>
+                        <a:latin typeface="BIZ UDPGothic" charset="0"/>
+                        <a:ea typeface="BIZ UDPGothic" charset="0"/>
+                        <a:cs typeface="BIZ UDPGothic" charset="0"/>
                       </a:endParaRPr>
                     </a:p>
                   </a:txBody>
                   <a:tcPr marL="101600" marR="101600" marT="50800" marB="50800" anchor="ctr">
                     <a:lnL w="6350" cap="flat" cmpd="sng" algn="ctr">
                       <a:solidFill>
-                        <a:srgbClr val="2E2E2E"/>
+                        <a:srgbClr val="DDE0E6"/>
                       </a:solidFill>
                       <a:prstDash val="solid"/>
                       <a:round/>
@@ -8934,7 +8934,7 @@
                     </a:lnL>
                     <a:lnR w="6350" cap="flat" cmpd="sng" algn="ctr">
                       <a:solidFill>
-                        <a:srgbClr val="2E2E2E"/>
+                        <a:srgbClr val="DDE0E6"/>
                       </a:solidFill>
                       <a:prstDash val="solid"/>
                       <a:round/>
@@ -8943,7 +8943,7 @@
                     </a:lnR>
                     <a:lnT w="6350" cap="flat" cmpd="sng" algn="ctr">
                       <a:solidFill>
-                        <a:srgbClr val="2E2E2E"/>
+                        <a:srgbClr val="DDE0E6"/>
                       </a:solidFill>
                       <a:prstDash val="solid"/>
                       <a:round/>
@@ -8952,7 +8952,7 @@
                     </a:lnT>
                     <a:lnB w="6350" cap="flat" cmpd="sng" algn="ctr">
                       <a:solidFill>
-                        <a:srgbClr val="2E2E2E"/>
+                        <a:srgbClr val="DDE0E6"/>
                       </a:solidFill>
                       <a:prstDash val="solid"/>
                       <a:round/>
@@ -8960,7 +8960,7 @@
                       <a:tailEnd type="none" w="med" len="med"/>
                     </a:lnB>
                     <a:solidFill>
-                      <a:srgbClr val="1A1A1A"/>
+                      <a:srgbClr val="FFFFFF"/>
                     </a:solidFill>
                   </a:tcPr>
                 </a:tc>
@@ -8975,25 +8975,25 @@
                       <a:r>
                         <a:rPr lang="en-US" sz="1150" dirty="0">
                           <a:solidFill>
-                            <a:srgbClr val="F5F5F0"/>
+                            <a:srgbClr val="16181D"/>
                           </a:solidFill>
-                          <a:latin typeface="Noto Sans JP" pitchFamily="34" charset="0"/>
-                          <a:ea typeface="Noto Sans JP" pitchFamily="34" charset="-122"/>
-                          <a:cs typeface="Noto Sans JP" pitchFamily="34" charset="-120"/>
+                          <a:latin typeface="BIZ UDPGothic" pitchFamily="34" charset="0"/>
+                          <a:ea typeface="BIZ UDPGothic" pitchFamily="34" charset="-122"/>
+                          <a:cs typeface="BIZ UDPGothic" pitchFamily="34" charset="-120"/>
                         </a:rPr>
                         <a:t>工芸支援の恒久財源として</a:t>
                       </a:r>
                       <a:endParaRPr lang="en-US" sz="1150" dirty="0">
-                        <a:latin typeface="Noto Sans JP" charset="0"/>
-                        <a:ea typeface="Noto Sans JP" charset="0"/>
-                        <a:cs typeface="Noto Sans JP" charset="0"/>
+                        <a:latin typeface="BIZ UDPGothic" charset="0"/>
+                        <a:ea typeface="BIZ UDPGothic" charset="0"/>
+                        <a:cs typeface="BIZ UDPGothic" charset="0"/>
                       </a:endParaRPr>
                     </a:p>
                   </a:txBody>
                   <a:tcPr marL="101600" marR="101600" marT="50800" marB="50800" anchor="ctr">
                     <a:lnL w="6350" cap="flat" cmpd="sng" algn="ctr">
                       <a:solidFill>
-                        <a:srgbClr val="2E2E2E"/>
+                        <a:srgbClr val="DDE0E6"/>
                       </a:solidFill>
                       <a:prstDash val="solid"/>
                       <a:round/>
@@ -9002,7 +9002,7 @@
                     </a:lnL>
                     <a:lnR w="6350" cap="flat" cmpd="sng" algn="ctr">
                       <a:solidFill>
-                        <a:srgbClr val="2E2E2E"/>
+                        <a:srgbClr val="DDE0E6"/>
                       </a:solidFill>
                       <a:prstDash val="solid"/>
                       <a:round/>
@@ -9011,7 +9011,7 @@
                     </a:lnR>
                     <a:lnT w="6350" cap="flat" cmpd="sng" algn="ctr">
                       <a:solidFill>
-                        <a:srgbClr val="2E2E2E"/>
+                        <a:srgbClr val="DDE0E6"/>
                       </a:solidFill>
                       <a:prstDash val="solid"/>
                       <a:round/>
@@ -9020,7 +9020,7 @@
                     </a:lnT>
                     <a:lnB w="6350" cap="flat" cmpd="sng" algn="ctr">
                       <a:solidFill>
-                        <a:srgbClr val="2E2E2E"/>
+                        <a:srgbClr val="DDE0E6"/>
                       </a:solidFill>
                       <a:prstDash val="solid"/>
                       <a:round/>
@@ -9028,7 +9028,7 @@
                       <a:tailEnd type="none" w="med" len="med"/>
                     </a:lnB>
                     <a:solidFill>
-                      <a:srgbClr val="1A1A1A"/>
+                      <a:srgbClr val="FFFFFF"/>
                     </a:solidFill>
                   </a:tcPr>
                 </a:tc>
@@ -9067,13 +9067,13 @@
             <a:r>
               <a:rPr lang="en-US" sz="1250" dirty="0">
                 <a:solidFill>
-                  <a:srgbClr val="F5F5F0">
+                  <a:srgbClr val="16181D">
                     <a:alpha val="90000"/>
                   </a:srgbClr>
                 </a:solidFill>
-                <a:latin typeface="Noto Sans JP" pitchFamily="34" charset="0"/>
-                <a:ea typeface="Noto Sans JP" pitchFamily="34" charset="-122"/>
-                <a:cs typeface="Noto Sans JP" pitchFamily="34" charset="-120"/>
+                <a:latin typeface="BIZ UDPGothic" pitchFamily="34" charset="0"/>
+                <a:ea typeface="BIZ UDPGothic" pitchFamily="34" charset="-122"/>
+                <a:cs typeface="BIZ UDPGothic" pitchFamily="34" charset="-120"/>
               </a:rPr>
               <a:t>フロンティア投資は年間4,000億円規模の新規原資を獲得。国民負担の純増は数百億円規模にとどまる。</a:t>
             </a:r>
@@ -9108,13 +9108,13 @@
             <a:r>
               <a:rPr lang="en-US" sz="800" dirty="0">
                 <a:solidFill>
-                  <a:srgbClr val="F5F5F0">
+                  <a:srgbClr val="16181D">
                     <a:alpha val="40000"/>
                   </a:srgbClr>
                 </a:solidFill>
                 <a:latin typeface="Arial" pitchFamily="34" charset="0"/>
-                <a:ea typeface="Arial" pitchFamily="34" charset="-122"/>
-                <a:cs typeface="Arial" pitchFamily="34" charset="-120"/>
+                <a:ea typeface="BIZ UDPGothic" pitchFamily="34" charset="-122"/>
+                <a:cs typeface="BIZ UDPGothic" pitchFamily="34" charset="-120"/>
               </a:rPr>
               <a:t>REBOOT JAPAN ── 政策提言プラットフォーム</a:t>
             </a:r>
@@ -9149,13 +9149,13 @@
             <a:r>
               <a:rPr lang="en-US" sz="800" dirty="0">
                 <a:solidFill>
-                  <a:srgbClr val="F5F5F0">
+                  <a:srgbClr val="16181D">
                     <a:alpha val="40000"/>
                   </a:srgbClr>
                 </a:solidFill>
                 <a:latin typeface="Arial" pitchFamily="34" charset="0"/>
-                <a:ea typeface="Arial" pitchFamily="34" charset="-122"/>
-                <a:cs typeface="Arial" pitchFamily="34" charset="-120"/>
+                <a:ea typeface="BIZ UDPGothic" pitchFamily="34" charset="-122"/>
+                <a:cs typeface="BIZ UDPGothic" pitchFamily="34" charset="-120"/>
               </a:rPr>
               <a:t>18</a:t>
             </a:r>
@@ -9177,7 +9177,7 @@
     <p:bg>
       <p:bgPr>
         <a:solidFill>
-          <a:srgbClr val="0A0A0A"/>
+          <a:srgbClr val="F5F6F8"/>
         </a:solidFill>
       </p:bgPr>
     </p:bg>
@@ -9222,11 +9222,11 @@
             <a:r>
               <a:rPr lang="en-US" sz="1200" b="1" spc="200" kern="0" dirty="0">
                 <a:solidFill>
-                  <a:srgbClr val="D62828"/>
+                  <a:srgbClr val="C8161D"/>
                 </a:solidFill>
                 <a:latin typeface="Arial" pitchFamily="34" charset="0"/>
-                <a:ea typeface="Arial" pitchFamily="34" charset="-122"/>
-                <a:cs typeface="Arial" pitchFamily="34" charset="-120"/>
+                <a:ea typeface="BIZ UDPGothic" pitchFamily="34" charset="-122"/>
+                <a:cs typeface="BIZ UDPGothic" pitchFamily="34" charset="-120"/>
               </a:rPr>
               <a:t>FINANCE — DETAIL</a:t>
             </a:r>
@@ -9264,11 +9264,11 @@
             <a:r>
               <a:rPr lang="en-US" sz="2500" b="1" dirty="0">
                 <a:solidFill>
-                  <a:srgbClr val="F5F5F0"/>
-                </a:solidFill>
-                <a:latin typeface="Noto Sans JP" pitchFamily="34" charset="0"/>
-                <a:ea typeface="Noto Sans JP" pitchFamily="34" charset="-122"/>
-                <a:cs typeface="Noto Sans JP" pitchFamily="34" charset="-120"/>
+                  <a:srgbClr val="16181D"/>
+                </a:solidFill>
+                <a:latin typeface="BIZ UDPGothic" pitchFamily="34" charset="0"/>
+                <a:ea typeface="BIZ UDPGothic" pitchFamily="34" charset="-122"/>
+                <a:cs typeface="BIZ UDPGothic" pitchFamily="34" charset="-120"/>
               </a:rPr>
               <a:t>古い補助金をやめて浮くお金</a:t>
             </a:r>
@@ -9293,11 +9293,11 @@
             </a:avLst>
           </a:prstGeom>
           <a:solidFill>
-            <a:srgbClr val="1A1A1A"/>
+            <a:srgbClr val="FFFFFF"/>
           </a:solidFill>
           <a:ln w="12700">
             <a:solidFill>
-              <a:srgbClr val="2E2E2E"/>
+              <a:srgbClr val="DDE0E6"/>
             </a:solidFill>
             <a:prstDash val="solid"/>
           </a:ln>
@@ -9337,11 +9337,11 @@
             <a:r>
               <a:rPr lang="en-US" sz="2400" b="1" dirty="0">
                 <a:solidFill>
-                  <a:srgbClr val="D62828"/>
+                  <a:srgbClr val="C8161D"/>
                 </a:solidFill>
                 <a:latin typeface="Arial" pitchFamily="34" charset="0"/>
-                <a:ea typeface="Arial" pitchFamily="34" charset="-122"/>
-                <a:cs typeface="Arial" pitchFamily="34" charset="-120"/>
+                <a:ea typeface="BIZ UDPGothic" pitchFamily="34" charset="-122"/>
+                <a:cs typeface="BIZ UDPGothic" pitchFamily="34" charset="-120"/>
               </a:rPr>
               <a:t>約4,064億円</a:t>
             </a:r>
@@ -9379,11 +9379,11 @@
             <a:r>
               <a:rPr lang="en-US" sz="1150" b="1" dirty="0">
                 <a:solidFill>
-                  <a:srgbClr val="F5F5F0"/>
-                </a:solidFill>
-                <a:latin typeface="Noto Sans JP" pitchFamily="34" charset="0"/>
-                <a:ea typeface="Noto Sans JP" pitchFamily="34" charset="-122"/>
-                <a:cs typeface="Noto Sans JP" pitchFamily="34" charset="-120"/>
+                  <a:srgbClr val="16181D"/>
+                </a:solidFill>
+                <a:latin typeface="BIZ UDPGothic" pitchFamily="34" charset="0"/>
+                <a:ea typeface="BIZ UDPGothic" pitchFamily="34" charset="-122"/>
+                <a:cs typeface="BIZ UDPGothic" pitchFamily="34" charset="-120"/>
               </a:rPr>
               <a:t>レガシー補助金の廃止額（合計）</a:t>
             </a:r>
@@ -9421,13 +9421,13 @@
             <a:r>
               <a:rPr lang="en-US" sz="900" dirty="0">
                 <a:solidFill>
-                  <a:srgbClr val="F5F5F0">
+                  <a:srgbClr val="16181D">
                     <a:alpha val="70000"/>
                   </a:srgbClr>
                 </a:solidFill>
-                <a:latin typeface="Noto Sans JP" pitchFamily="34" charset="0"/>
-                <a:ea typeface="Noto Sans JP" pitchFamily="34" charset="-122"/>
-                <a:cs typeface="Noto Sans JP" pitchFamily="34" charset="-120"/>
+                <a:latin typeface="BIZ UDPGothic" pitchFamily="34" charset="0"/>
+                <a:ea typeface="BIZ UDPGothic" pitchFamily="34" charset="-122"/>
+                <a:cs typeface="BIZ UDPGothic" pitchFamily="34" charset="-120"/>
               </a:rPr>
               <a:t>生産性革命推進事業・雇用調整助成金・特定求職者雇用開発助成金・信用補完事業の4制度</a:t>
             </a:r>
@@ -9452,11 +9452,11 @@
             </a:avLst>
           </a:prstGeom>
           <a:solidFill>
-            <a:srgbClr val="1A1A1A"/>
+            <a:srgbClr val="FFFFFF"/>
           </a:solidFill>
           <a:ln w="12700">
             <a:solidFill>
-              <a:srgbClr val="2E2E2E"/>
+              <a:srgbClr val="DDE0E6"/>
             </a:solidFill>
             <a:prstDash val="solid"/>
           </a:ln>
@@ -9496,11 +9496,11 @@
             <a:r>
               <a:rPr lang="en-US" sz="1300" b="1" dirty="0">
                 <a:solidFill>
-                  <a:srgbClr val="F5F5F0"/>
-                </a:solidFill>
-                <a:latin typeface="Noto Sans JP" pitchFamily="34" charset="0"/>
-                <a:ea typeface="Noto Sans JP" pitchFamily="34" charset="-122"/>
-                <a:cs typeface="Noto Sans JP" pitchFamily="34" charset="-120"/>
+                  <a:srgbClr val="16181D"/>
+                </a:solidFill>
+                <a:latin typeface="BIZ UDPGothic" pitchFamily="34" charset="0"/>
+                <a:ea typeface="BIZ UDPGothic" pitchFamily="34" charset="-122"/>
+                <a:cs typeface="BIZ UDPGothic" pitchFamily="34" charset="-120"/>
               </a:rPr>
               <a:t>この4,064億円は…</a:t>
             </a:r>
@@ -9538,13 +9538,13 @@
             <a:r>
               <a:rPr lang="en-US" sz="1150" dirty="0">
                 <a:solidFill>
-                  <a:srgbClr val="F5F5F0">
+                  <a:srgbClr val="16181D">
                     <a:alpha val="85000"/>
                   </a:srgbClr>
                 </a:solidFill>
-                <a:latin typeface="Noto Sans JP" pitchFamily="34" charset="0"/>
-                <a:ea typeface="Noto Sans JP" pitchFamily="34" charset="-122"/>
-                <a:cs typeface="Noto Sans JP" pitchFamily="34" charset="-120"/>
+                <a:latin typeface="BIZ UDPGothic" pitchFamily="34" charset="0"/>
+                <a:ea typeface="BIZ UDPGothic" pitchFamily="34" charset="-122"/>
+                <a:cs typeface="BIZ UDPGothic" pitchFamily="34" charset="-120"/>
               </a:rPr>
               <a:t>そのまま①フロンティア投資（量子・宇宙・海洋資源・フィジカルAI等）へ振り替えられる。事業再構築補助金（過去に最大1.1兆円規模）は年度変動が大きいため試算から除外し、制度改革の論点として別途扱う。</a:t>
             </a:r>
@@ -9579,13 +9579,13 @@
             <a:r>
               <a:rPr lang="en-US" sz="800" dirty="0">
                 <a:solidFill>
-                  <a:srgbClr val="F5F5F0">
+                  <a:srgbClr val="16181D">
                     <a:alpha val="40000"/>
                   </a:srgbClr>
                 </a:solidFill>
                 <a:latin typeface="Arial" pitchFamily="34" charset="0"/>
-                <a:ea typeface="Arial" pitchFamily="34" charset="-122"/>
-                <a:cs typeface="Arial" pitchFamily="34" charset="-120"/>
+                <a:ea typeface="BIZ UDPGothic" pitchFamily="34" charset="-122"/>
+                <a:cs typeface="BIZ UDPGothic" pitchFamily="34" charset="-120"/>
               </a:rPr>
               <a:t>REBOOT JAPAN ── 政策提言プラットフォーム</a:t>
             </a:r>
@@ -9620,13 +9620,13 @@
             <a:r>
               <a:rPr lang="en-US" sz="800" dirty="0">
                 <a:solidFill>
-                  <a:srgbClr val="F5F5F0">
+                  <a:srgbClr val="16181D">
                     <a:alpha val="40000"/>
                   </a:srgbClr>
                 </a:solidFill>
                 <a:latin typeface="Arial" pitchFamily="34" charset="0"/>
-                <a:ea typeface="Arial" pitchFamily="34" charset="-122"/>
-                <a:cs typeface="Arial" pitchFamily="34" charset="-120"/>
+                <a:ea typeface="BIZ UDPGothic" pitchFamily="34" charset="-122"/>
+                <a:cs typeface="BIZ UDPGothic" pitchFamily="34" charset="-120"/>
               </a:rPr>
               <a:t>19</a:t>
             </a:r>
@@ -9648,7 +9648,7 @@
     <p:bg>
       <p:bgPr>
         <a:solidFill>
-          <a:srgbClr val="0A0A0A"/>
+          <a:srgbClr val="F5F6F8"/>
         </a:solidFill>
       </p:bgPr>
     </p:bg>
@@ -9693,11 +9693,11 @@
             <a:r>
               <a:rPr lang="en-US" sz="1200" b="1" spc="200" kern="0" dirty="0">
                 <a:solidFill>
-                  <a:srgbClr val="D62828"/>
+                  <a:srgbClr val="C8161D"/>
                 </a:solidFill>
                 <a:latin typeface="Arial" pitchFamily="34" charset="0"/>
-                <a:ea typeface="Arial" pitchFamily="34" charset="-122"/>
-                <a:cs typeface="Arial" pitchFamily="34" charset="-120"/>
+                <a:ea typeface="BIZ UDPGothic" pitchFamily="34" charset="-122"/>
+                <a:cs typeface="BIZ UDPGothic" pitchFamily="34" charset="-120"/>
               </a:rPr>
               <a:t>PROBLEM</a:t>
             </a:r>
@@ -9735,11 +9735,11 @@
             <a:r>
               <a:rPr lang="en-US" sz="2600" b="1" dirty="0">
                 <a:solidFill>
-                  <a:srgbClr val="F5F5F0"/>
-                </a:solidFill>
-                <a:latin typeface="Noto Sans JP" pitchFamily="34" charset="0"/>
-                <a:ea typeface="Noto Sans JP" pitchFamily="34" charset="-122"/>
-                <a:cs typeface="Noto Sans JP" pitchFamily="34" charset="-120"/>
+                  <a:srgbClr val="16181D"/>
+                </a:solidFill>
+                <a:latin typeface="BIZ UDPGothic" pitchFamily="34" charset="0"/>
+                <a:ea typeface="BIZ UDPGothic" pitchFamily="34" charset="-122"/>
+                <a:cs typeface="BIZ UDPGothic" pitchFamily="34" charset="-120"/>
               </a:rPr>
               <a:t>なぜ今、この問題なのか？</a:t>
             </a:r>
@@ -9774,11 +9774,11 @@
             <a:r>
               <a:rPr lang="en-US" sz="2200" b="1" dirty="0">
                 <a:solidFill>
-                  <a:srgbClr val="D62828"/>
+                  <a:srgbClr val="C8161D"/>
                 </a:solidFill>
                 <a:latin typeface="Arial" pitchFamily="34" charset="0"/>
-                <a:ea typeface="Arial" pitchFamily="34" charset="-122"/>
-                <a:cs typeface="Arial" pitchFamily="34" charset="-120"/>
+                <a:ea typeface="BIZ UDPGothic" pitchFamily="34" charset="-122"/>
+                <a:cs typeface="BIZ UDPGothic" pitchFamily="34" charset="-120"/>
               </a:rPr>
               <a:t>01</a:t>
             </a:r>
@@ -9813,11 +9813,11 @@
             <a:r>
               <a:rPr lang="en-US" sz="1500" b="1" dirty="0">
                 <a:solidFill>
-                  <a:srgbClr val="F5F5F0"/>
-                </a:solidFill>
-                <a:latin typeface="Noto Sans JP" pitchFamily="34" charset="0"/>
-                <a:ea typeface="Noto Sans JP" pitchFamily="34" charset="-122"/>
-                <a:cs typeface="Noto Sans JP" pitchFamily="34" charset="-120"/>
+                  <a:srgbClr val="16181D"/>
+                </a:solidFill>
+                <a:latin typeface="BIZ UDPGothic" pitchFamily="34" charset="0"/>
+                <a:ea typeface="BIZ UDPGothic" pitchFamily="34" charset="-122"/>
+                <a:cs typeface="BIZ UDPGothic" pitchFamily="34" charset="-120"/>
               </a:rPr>
               <a:t>バラマキ補助金が「延命」に使われている</a:t>
             </a:r>
@@ -9855,13 +9855,13 @@
             <a:r>
               <a:rPr lang="en-US" sz="1150" dirty="0">
                 <a:solidFill>
-                  <a:srgbClr val="F5F5F0">
+                  <a:srgbClr val="16181D">
                     <a:alpha val="85000"/>
                   </a:srgbClr>
                 </a:solidFill>
-                <a:latin typeface="Noto Sans JP" pitchFamily="34" charset="0"/>
-                <a:ea typeface="Noto Sans JP" pitchFamily="34" charset="-122"/>
-                <a:cs typeface="Noto Sans JP" pitchFamily="34" charset="-120"/>
+                <a:latin typeface="BIZ UDPGothic" pitchFamily="34" charset="0"/>
+                <a:ea typeface="BIZ UDPGothic" pitchFamily="34" charset="-122"/>
+                <a:cs typeface="BIZ UDPGothic" pitchFamily="34" charset="-120"/>
               </a:rPr>
               <a:t>もう十分に大きくなった業界にも、毎年同じような補助金が配られ続けている。</a:t>
             </a:r>
@@ -9896,11 +9896,11 @@
             <a:r>
               <a:rPr lang="en-US" sz="2200" b="1" dirty="0">
                 <a:solidFill>
-                  <a:srgbClr val="D62828"/>
+                  <a:srgbClr val="C8161D"/>
                 </a:solidFill>
                 <a:latin typeface="Arial" pitchFamily="34" charset="0"/>
-                <a:ea typeface="Arial" pitchFamily="34" charset="-122"/>
-                <a:cs typeface="Arial" pitchFamily="34" charset="-120"/>
+                <a:ea typeface="BIZ UDPGothic" pitchFamily="34" charset="-122"/>
+                <a:cs typeface="BIZ UDPGothic" pitchFamily="34" charset="-120"/>
               </a:rPr>
               <a:t>02</a:t>
             </a:r>
@@ -9935,11 +9935,11 @@
             <a:r>
               <a:rPr lang="en-US" sz="1500" b="1" dirty="0">
                 <a:solidFill>
-                  <a:srgbClr val="F5F5F0"/>
-                </a:solidFill>
-                <a:latin typeface="Noto Sans JP" pitchFamily="34" charset="0"/>
-                <a:ea typeface="Noto Sans JP" pitchFamily="34" charset="-122"/>
-                <a:cs typeface="Noto Sans JP" pitchFamily="34" charset="-120"/>
+                  <a:srgbClr val="16181D"/>
+                </a:solidFill>
+                <a:latin typeface="BIZ UDPGothic" pitchFamily="34" charset="0"/>
+                <a:ea typeface="BIZ UDPGothic" pitchFamily="34" charset="-122"/>
+                <a:cs typeface="BIZ UDPGothic" pitchFamily="34" charset="-120"/>
               </a:rPr>
               <a:t>「未来をつくる投資」への集中が足りない</a:t>
             </a:r>
@@ -9977,13 +9977,13 @@
             <a:r>
               <a:rPr lang="en-US" sz="1150" dirty="0">
                 <a:solidFill>
-                  <a:srgbClr val="F5F5F0">
+                  <a:srgbClr val="16181D">
                     <a:alpha val="85000"/>
                   </a:srgbClr>
                 </a:solidFill>
-                <a:latin typeface="Noto Sans JP" pitchFamily="34" charset="0"/>
-                <a:ea typeface="Noto Sans JP" pitchFamily="34" charset="-122"/>
-                <a:cs typeface="Noto Sans JP" pitchFamily="34" charset="-120"/>
+                <a:latin typeface="BIZ UDPGothic" pitchFamily="34" charset="0"/>
+                <a:ea typeface="BIZ UDPGothic" pitchFamily="34" charset="-122"/>
+                <a:cs typeface="BIZ UDPGothic" pitchFamily="34" charset="-120"/>
               </a:rPr>
               <a:t>量子コンピュータや宇宙開発など、10年後の日本を左右する分野への投資はまだ小さい。</a:t>
             </a:r>
@@ -10018,11 +10018,11 @@
             <a:r>
               <a:rPr lang="en-US" sz="2200" b="1" dirty="0">
                 <a:solidFill>
-                  <a:srgbClr val="D62828"/>
+                  <a:srgbClr val="C8161D"/>
                 </a:solidFill>
                 <a:latin typeface="Arial" pitchFamily="34" charset="0"/>
-                <a:ea typeface="Arial" pitchFamily="34" charset="-122"/>
-                <a:cs typeface="Arial" pitchFamily="34" charset="-120"/>
+                <a:ea typeface="BIZ UDPGothic" pitchFamily="34" charset="-122"/>
+                <a:cs typeface="BIZ UDPGothic" pitchFamily="34" charset="-120"/>
               </a:rPr>
               <a:t>03</a:t>
             </a:r>
@@ -10057,11 +10057,11 @@
             <a:r>
               <a:rPr lang="en-US" sz="1500" b="1" dirty="0">
                 <a:solidFill>
-                  <a:srgbClr val="F5F5F0"/>
-                </a:solidFill>
-                <a:latin typeface="Noto Sans JP" pitchFamily="34" charset="0"/>
-                <a:ea typeface="Noto Sans JP" pitchFamily="34" charset="-122"/>
-                <a:cs typeface="Noto Sans JP" pitchFamily="34" charset="-120"/>
+                  <a:srgbClr val="16181D"/>
+                </a:solidFill>
+                <a:latin typeface="BIZ UDPGothic" pitchFamily="34" charset="0"/>
+                <a:ea typeface="BIZ UDPGothic" pitchFamily="34" charset="-122"/>
+                <a:cs typeface="BIZ UDPGothic" pitchFamily="34" charset="-120"/>
               </a:rPr>
               <a:t>補助金が人の「転職」を妨げている</a:t>
             </a:r>
@@ -10099,13 +10099,13 @@
             <a:r>
               <a:rPr lang="en-US" sz="1150" dirty="0">
                 <a:solidFill>
-                  <a:srgbClr val="F5F5F0">
+                  <a:srgbClr val="16181D">
                     <a:alpha val="85000"/>
                   </a:srgbClr>
                 </a:solidFill>
-                <a:latin typeface="Noto Sans JP" pitchFamily="34" charset="0"/>
-                <a:ea typeface="Noto Sans JP" pitchFamily="34" charset="-122"/>
-                <a:cs typeface="Noto Sans JP" pitchFamily="34" charset="-120"/>
+                <a:latin typeface="BIZ UDPGothic" pitchFamily="34" charset="0"/>
+                <a:ea typeface="BIZ UDPGothic" pitchFamily="34" charset="-122"/>
+                <a:cs typeface="BIZ UDPGothic" pitchFamily="34" charset="-120"/>
               </a:rPr>
               <a:t>雇用を守るための補助金が、かえって成長分野への人の移動を止めてしまっている。</a:t>
             </a:r>
@@ -10140,13 +10140,13 @@
             <a:r>
               <a:rPr lang="en-US" sz="800" dirty="0">
                 <a:solidFill>
-                  <a:srgbClr val="F5F5F0">
+                  <a:srgbClr val="16181D">
                     <a:alpha val="40000"/>
                   </a:srgbClr>
                 </a:solidFill>
                 <a:latin typeface="Arial" pitchFamily="34" charset="0"/>
-                <a:ea typeface="Arial" pitchFamily="34" charset="-122"/>
-                <a:cs typeface="Arial" pitchFamily="34" charset="-120"/>
+                <a:ea typeface="BIZ UDPGothic" pitchFamily="34" charset="-122"/>
+                <a:cs typeface="BIZ UDPGothic" pitchFamily="34" charset="-120"/>
               </a:rPr>
               <a:t>REBOOT JAPAN ── 政策提言プラットフォーム</a:t>
             </a:r>
@@ -10181,13 +10181,13 @@
             <a:r>
               <a:rPr lang="en-US" sz="800" dirty="0">
                 <a:solidFill>
-                  <a:srgbClr val="F5F5F0">
+                  <a:srgbClr val="16181D">
                     <a:alpha val="40000"/>
                   </a:srgbClr>
                 </a:solidFill>
                 <a:latin typeface="Arial" pitchFamily="34" charset="0"/>
-                <a:ea typeface="Arial" pitchFamily="34" charset="-122"/>
-                <a:cs typeface="Arial" pitchFamily="34" charset="-120"/>
+                <a:ea typeface="BIZ UDPGothic" pitchFamily="34" charset="-122"/>
+                <a:cs typeface="BIZ UDPGothic" pitchFamily="34" charset="-120"/>
               </a:rPr>
               <a:t>2</a:t>
             </a:r>
@@ -10209,7 +10209,7 @@
     <p:bg>
       <p:bgPr>
         <a:solidFill>
-          <a:srgbClr val="0A0A0A"/>
+          <a:srgbClr val="F5F6F8"/>
         </a:solidFill>
       </p:bgPr>
     </p:bg>
@@ -10254,11 +10254,11 @@
             <a:r>
               <a:rPr lang="en-US" sz="1200" b="1" spc="200" kern="0" dirty="0">
                 <a:solidFill>
-                  <a:srgbClr val="D62828"/>
+                  <a:srgbClr val="C8161D"/>
                 </a:solidFill>
                 <a:latin typeface="Arial" pitchFamily="34" charset="0"/>
-                <a:ea typeface="Arial" pitchFamily="34" charset="-122"/>
-                <a:cs typeface="Arial" pitchFamily="34" charset="-120"/>
+                <a:ea typeface="BIZ UDPGothic" pitchFamily="34" charset="-122"/>
+                <a:cs typeface="BIZ UDPGothic" pitchFamily="34" charset="-120"/>
               </a:rPr>
               <a:t>FINANCE — DETAIL</a:t>
             </a:r>
@@ -10296,11 +10296,11 @@
             <a:r>
               <a:rPr lang="en-US" sz="2400" b="1" dirty="0">
                 <a:solidFill>
-                  <a:srgbClr val="F5F5F0"/>
-                </a:solidFill>
-                <a:latin typeface="Noto Sans JP" pitchFamily="34" charset="0"/>
-                <a:ea typeface="Noto Sans JP" pitchFamily="34" charset="-122"/>
-                <a:cs typeface="Noto Sans JP" pitchFamily="34" charset="-120"/>
+                  <a:srgbClr val="16181D"/>
+                </a:solidFill>
+                <a:latin typeface="BIZ UDPGothic" pitchFamily="34" charset="0"/>
+                <a:ea typeface="BIZ UDPGothic" pitchFamily="34" charset="-122"/>
+                <a:cs typeface="BIZ UDPGothic" pitchFamily="34" charset="-120"/>
               </a:rPr>
               <a:t>大規模成長投資補助金の付け替え</a:t>
             </a:r>
@@ -10325,11 +10325,11 @@
             </a:avLst>
           </a:prstGeom>
           <a:solidFill>
-            <a:srgbClr val="1A1A1A"/>
+            <a:srgbClr val="FFFFFF"/>
           </a:solidFill>
           <a:ln w="12700">
             <a:solidFill>
-              <a:srgbClr val="2E2E2E"/>
+              <a:srgbClr val="DDE0E6"/>
             </a:solidFill>
             <a:prstDash val="solid"/>
           </a:ln>
@@ -10369,11 +10369,11 @@
             <a:r>
               <a:rPr lang="en-US" sz="2400" b="1" dirty="0">
                 <a:solidFill>
-                  <a:srgbClr val="D62828"/>
+                  <a:srgbClr val="C8161D"/>
                 </a:solidFill>
                 <a:latin typeface="Arial" pitchFamily="34" charset="0"/>
-                <a:ea typeface="Arial" pitchFamily="34" charset="-122"/>
-                <a:cs typeface="Arial" pitchFamily="34" charset="-120"/>
+                <a:ea typeface="BIZ UDPGothic" pitchFamily="34" charset="-122"/>
+                <a:cs typeface="BIZ UDPGothic" pitchFamily="34" charset="-120"/>
               </a:rPr>
               <a:t>4,121億円</a:t>
             </a:r>
@@ -10411,11 +10411,11 @@
             <a:r>
               <a:rPr lang="en-US" sz="1150" b="1" dirty="0">
                 <a:solidFill>
-                  <a:srgbClr val="F5F5F0"/>
-                </a:solidFill>
-                <a:latin typeface="Noto Sans JP" pitchFamily="34" charset="0"/>
-                <a:ea typeface="Noto Sans JP" pitchFamily="34" charset="-122"/>
-                <a:cs typeface="Noto Sans JP" pitchFamily="34" charset="-120"/>
+                  <a:srgbClr val="16181D"/>
+                </a:solidFill>
+                <a:latin typeface="BIZ UDPGothic" pitchFamily="34" charset="0"/>
+                <a:ea typeface="BIZ UDPGothic" pitchFamily="34" charset="-122"/>
+                <a:cs typeface="BIZ UDPGothic" pitchFamily="34" charset="-120"/>
               </a:rPr>
               <a:t>大規模成長投資補助金（廃止）</a:t>
             </a:r>
@@ -10453,13 +10453,13 @@
             <a:r>
               <a:rPr lang="en-US" sz="900" dirty="0">
                 <a:solidFill>
-                  <a:srgbClr val="F5F5F0">
+                  <a:srgbClr val="16181D">
                     <a:alpha val="70000"/>
                   </a:srgbClr>
                 </a:solidFill>
-                <a:latin typeface="Noto Sans JP" pitchFamily="34" charset="0"/>
-                <a:ea typeface="Noto Sans JP" pitchFamily="34" charset="-122"/>
-                <a:cs typeface="Noto Sans JP" pitchFamily="34" charset="-120"/>
+                <a:latin typeface="BIZ UDPGothic" pitchFamily="34" charset="0"/>
+                <a:ea typeface="BIZ UDPGothic" pitchFamily="34" charset="-122"/>
+                <a:cs typeface="BIZ UDPGothic" pitchFamily="34" charset="-120"/>
               </a:rPr>
               <a:t>賃上げを条件に大規模設備投資を支援していた制度</a:t>
             </a:r>
@@ -10484,11 +10484,11 @@
             </a:avLst>
           </a:prstGeom>
           <a:solidFill>
-            <a:srgbClr val="1A1A1A"/>
+            <a:srgbClr val="FFFFFF"/>
           </a:solidFill>
           <a:ln w="19050">
             <a:solidFill>
-              <a:srgbClr val="D62828"/>
+              <a:srgbClr val="C8161D"/>
             </a:solidFill>
             <a:prstDash val="solid"/>
           </a:ln>
@@ -10528,11 +10528,11 @@
             <a:r>
               <a:rPr lang="en-US" sz="1300" b="1" dirty="0">
                 <a:solidFill>
-                  <a:srgbClr val="D62828"/>
-                </a:solidFill>
-                <a:latin typeface="Noto Sans JP" pitchFamily="34" charset="0"/>
-                <a:ea typeface="Noto Sans JP" pitchFamily="34" charset="-122"/>
-                <a:cs typeface="Noto Sans JP" pitchFamily="34" charset="-120"/>
+                  <a:srgbClr val="C8161D"/>
+                </a:solidFill>
+                <a:latin typeface="BIZ UDPGothic" pitchFamily="34" charset="0"/>
+                <a:ea typeface="BIZ UDPGothic" pitchFamily="34" charset="-122"/>
+                <a:cs typeface="BIZ UDPGothic" pitchFamily="34" charset="-120"/>
               </a:rPr>
               <a:t>収支は中立（ネット増減ゼロ）</a:t>
             </a:r>
@@ -10570,13 +10570,13 @@
             <a:r>
               <a:rPr lang="en-US" sz="1200" dirty="0">
                 <a:solidFill>
-                  <a:srgbClr val="F5F5F0">
+                  <a:srgbClr val="16181D">
                     <a:alpha val="85000"/>
                   </a:srgbClr>
                 </a:solidFill>
-                <a:latin typeface="Noto Sans JP" pitchFamily="34" charset="0"/>
-                <a:ea typeface="Noto Sans JP" pitchFamily="34" charset="-122"/>
-                <a:cs typeface="Noto Sans JP" pitchFamily="34" charset="-120"/>
+                <a:latin typeface="BIZ UDPGothic" pitchFamily="34" charset="0"/>
+                <a:ea typeface="BIZ UDPGothic" pitchFamily="34" charset="-122"/>
+                <a:cs typeface="BIZ UDPGothic" pitchFamily="34" charset="-120"/>
               </a:rPr>
               <a:t>廃止した金額をそのまま⑤離職後再就職支援の財源にあてるだけなので、新たな財源は必要ない。「雇用維持」から「労働移動支援」への使い道の転換そのものが目的。</a:t>
             </a:r>
@@ -10611,13 +10611,13 @@
             <a:r>
               <a:rPr lang="en-US" sz="800" dirty="0">
                 <a:solidFill>
-                  <a:srgbClr val="F5F5F0">
+                  <a:srgbClr val="16181D">
                     <a:alpha val="40000"/>
                   </a:srgbClr>
                 </a:solidFill>
                 <a:latin typeface="Arial" pitchFamily="34" charset="0"/>
-                <a:ea typeface="Arial" pitchFamily="34" charset="-122"/>
-                <a:cs typeface="Arial" pitchFamily="34" charset="-120"/>
+                <a:ea typeface="BIZ UDPGothic" pitchFamily="34" charset="-122"/>
+                <a:cs typeface="BIZ UDPGothic" pitchFamily="34" charset="-120"/>
               </a:rPr>
               <a:t>REBOOT JAPAN ── 政策提言プラットフォーム</a:t>
             </a:r>
@@ -10652,13 +10652,13 @@
             <a:r>
               <a:rPr lang="en-US" sz="800" dirty="0">
                 <a:solidFill>
-                  <a:srgbClr val="F5F5F0">
+                  <a:srgbClr val="16181D">
                     <a:alpha val="40000"/>
                   </a:srgbClr>
                 </a:solidFill>
                 <a:latin typeface="Arial" pitchFamily="34" charset="0"/>
-                <a:ea typeface="Arial" pitchFamily="34" charset="-122"/>
-                <a:cs typeface="Arial" pitchFamily="34" charset="-120"/>
+                <a:ea typeface="BIZ UDPGothic" pitchFamily="34" charset="-122"/>
+                <a:cs typeface="BIZ UDPGothic" pitchFamily="34" charset="-120"/>
               </a:rPr>
               <a:t>20</a:t>
             </a:r>
@@ -10680,7 +10680,7 @@
     <p:bg>
       <p:bgPr>
         <a:solidFill>
-          <a:srgbClr val="0A0A0A"/>
+          <a:srgbClr val="F5F6F8"/>
         </a:solidFill>
       </p:bgPr>
     </p:bg>
@@ -10725,11 +10725,11 @@
             <a:r>
               <a:rPr lang="en-US" sz="1200" b="1" spc="200" kern="0" dirty="0">
                 <a:solidFill>
-                  <a:srgbClr val="D62828"/>
+                  <a:srgbClr val="C8161D"/>
                 </a:solidFill>
                 <a:latin typeface="Arial" pitchFamily="34" charset="0"/>
-                <a:ea typeface="Arial" pitchFamily="34" charset="-122"/>
-                <a:cs typeface="Arial" pitchFamily="34" charset="-120"/>
+                <a:ea typeface="BIZ UDPGothic" pitchFamily="34" charset="-122"/>
+                <a:cs typeface="BIZ UDPGothic" pitchFamily="34" charset="-120"/>
               </a:rPr>
               <a:t>FINANCE — DETAIL</a:t>
             </a:r>
@@ -10767,11 +10767,11 @@
             <a:r>
               <a:rPr lang="en-US" sz="2300" b="1" dirty="0">
                 <a:solidFill>
-                  <a:srgbClr val="F5F5F0"/>
-                </a:solidFill>
-                <a:latin typeface="Noto Sans JP" pitchFamily="34" charset="0"/>
-                <a:ea typeface="Noto Sans JP" pitchFamily="34" charset="-122"/>
-                <a:cs typeface="Noto Sans JP" pitchFamily="34" charset="-120"/>
+                  <a:srgbClr val="16181D"/>
+                </a:solidFill>
+                <a:latin typeface="BIZ UDPGothic" pitchFamily="34" charset="0"/>
+                <a:ea typeface="BIZ UDPGothic" pitchFamily="34" charset="-122"/>
+                <a:cs typeface="BIZ UDPGothic" pitchFamily="34" charset="-120"/>
               </a:rPr>
               <a:t>伝統文化を守るために増える予算</a:t>
             </a:r>
@@ -10819,25 +10819,25 @@
                       <a:r>
                         <a:rPr lang="en-US" sz="1200" b="1" dirty="0">
                           <a:solidFill>
-                            <a:srgbClr val="F5F5F0"/>
+                            <a:srgbClr val="FFFFFF"/>
                           </a:solidFill>
-                          <a:latin typeface="Noto Sans JP" pitchFamily="34" charset="0"/>
-                          <a:ea typeface="Noto Sans JP" pitchFamily="34" charset="-122"/>
-                          <a:cs typeface="Noto Sans JP" pitchFamily="34" charset="-120"/>
+                          <a:latin typeface="BIZ UDPGothic" pitchFamily="34" charset="0"/>
+                          <a:ea typeface="BIZ UDPGothic" pitchFamily="34" charset="-122"/>
+                          <a:cs typeface="BIZ UDPGothic" pitchFamily="34" charset="-120"/>
                         </a:rPr>
                         <a:t>項目</a:t>
                       </a:r>
                       <a:endParaRPr lang="en-US" sz="1200" dirty="0">
-                        <a:latin typeface="Noto Sans JP" charset="0"/>
-                        <a:ea typeface="Noto Sans JP" charset="0"/>
-                        <a:cs typeface="Noto Sans JP" charset="0"/>
+                        <a:latin typeface="BIZ UDPGothic" charset="0"/>
+                        <a:ea typeface="BIZ UDPGothic" charset="0"/>
+                        <a:cs typeface="BIZ UDPGothic" charset="0"/>
                       </a:endParaRPr>
                     </a:p>
                   </a:txBody>
                   <a:tcPr marL="101600" marR="101600" marT="50800" marB="50800" anchor="ctr">
                     <a:lnL w="6350" cap="flat" cmpd="sng" algn="ctr">
                       <a:solidFill>
-                        <a:srgbClr val="2E2E2E"/>
+                        <a:srgbClr val="DDE0E6"/>
                       </a:solidFill>
                       <a:prstDash val="solid"/>
                       <a:round/>
@@ -10846,7 +10846,7 @@
                     </a:lnL>
                     <a:lnR w="6350" cap="flat" cmpd="sng" algn="ctr">
                       <a:solidFill>
-                        <a:srgbClr val="2E2E2E"/>
+                        <a:srgbClr val="DDE0E6"/>
                       </a:solidFill>
                       <a:prstDash val="solid"/>
                       <a:round/>
@@ -10855,7 +10855,7 @@
                     </a:lnR>
                     <a:lnT w="6350" cap="flat" cmpd="sng" algn="ctr">
                       <a:solidFill>
-                        <a:srgbClr val="2E2E2E"/>
+                        <a:srgbClr val="DDE0E6"/>
                       </a:solidFill>
                       <a:prstDash val="solid"/>
                       <a:round/>
@@ -10864,7 +10864,7 @@
                     </a:lnT>
                     <a:lnB w="6350" cap="flat" cmpd="sng" algn="ctr">
                       <a:solidFill>
-                        <a:srgbClr val="2E2E2E"/>
+                        <a:srgbClr val="DDE0E6"/>
                       </a:solidFill>
                       <a:prstDash val="solid"/>
                       <a:round/>
@@ -10872,7 +10872,7 @@
                       <a:tailEnd type="none" w="med" len="med"/>
                     </a:lnB>
                     <a:solidFill>
-                      <a:srgbClr val="D62828"/>
+                      <a:srgbClr val="C8161D"/>
                     </a:solidFill>
                   </a:tcPr>
                 </a:tc>
@@ -10887,25 +10887,25 @@
                       <a:r>
                         <a:rPr lang="en-US" sz="1200" b="1" dirty="0">
                           <a:solidFill>
-                            <a:srgbClr val="F5F5F0"/>
+                            <a:srgbClr val="FFFFFF"/>
                           </a:solidFill>
-                          <a:latin typeface="Noto Sans JP" pitchFamily="34" charset="0"/>
-                          <a:ea typeface="Noto Sans JP" pitchFamily="34" charset="-122"/>
-                          <a:cs typeface="Noto Sans JP" pitchFamily="34" charset="-120"/>
+                          <a:latin typeface="BIZ UDPGothic" pitchFamily="34" charset="0"/>
+                          <a:ea typeface="BIZ UDPGothic" pitchFamily="34" charset="-122"/>
+                          <a:cs typeface="BIZ UDPGothic" pitchFamily="34" charset="-120"/>
                         </a:rPr>
                         <a:t>現状</a:t>
                       </a:r>
                       <a:endParaRPr lang="en-US" sz="1200" dirty="0">
-                        <a:latin typeface="Noto Sans JP" charset="0"/>
-                        <a:ea typeface="Noto Sans JP" charset="0"/>
-                        <a:cs typeface="Noto Sans JP" charset="0"/>
+                        <a:latin typeface="BIZ UDPGothic" charset="0"/>
+                        <a:ea typeface="BIZ UDPGothic" charset="0"/>
+                        <a:cs typeface="BIZ UDPGothic" charset="0"/>
                       </a:endParaRPr>
                     </a:p>
                   </a:txBody>
                   <a:tcPr marL="101600" marR="101600" marT="50800" marB="50800" anchor="ctr">
                     <a:lnL w="6350" cap="flat" cmpd="sng" algn="ctr">
                       <a:solidFill>
-                        <a:srgbClr val="2E2E2E"/>
+                        <a:srgbClr val="DDE0E6"/>
                       </a:solidFill>
                       <a:prstDash val="solid"/>
                       <a:round/>
@@ -10914,7 +10914,7 @@
                     </a:lnL>
                     <a:lnR w="6350" cap="flat" cmpd="sng" algn="ctr">
                       <a:solidFill>
-                        <a:srgbClr val="2E2E2E"/>
+                        <a:srgbClr val="DDE0E6"/>
                       </a:solidFill>
                       <a:prstDash val="solid"/>
                       <a:round/>
@@ -10923,7 +10923,7 @@
                     </a:lnR>
                     <a:lnT w="6350" cap="flat" cmpd="sng" algn="ctr">
                       <a:solidFill>
-                        <a:srgbClr val="2E2E2E"/>
+                        <a:srgbClr val="DDE0E6"/>
                       </a:solidFill>
                       <a:prstDash val="solid"/>
                       <a:round/>
@@ -10932,7 +10932,7 @@
                     </a:lnT>
                     <a:lnB w="6350" cap="flat" cmpd="sng" algn="ctr">
                       <a:solidFill>
-                        <a:srgbClr val="2E2E2E"/>
+                        <a:srgbClr val="DDE0E6"/>
                       </a:solidFill>
                       <a:prstDash val="solid"/>
                       <a:round/>
@@ -10940,7 +10940,7 @@
                       <a:tailEnd type="none" w="med" len="med"/>
                     </a:lnB>
                     <a:solidFill>
-                      <a:srgbClr val="D62828"/>
+                      <a:srgbClr val="C8161D"/>
                     </a:solidFill>
                   </a:tcPr>
                 </a:tc>
@@ -10955,25 +10955,25 @@
                       <a:r>
                         <a:rPr lang="en-US" sz="1200" b="1" dirty="0">
                           <a:solidFill>
-                            <a:srgbClr val="F5F5F0"/>
+                            <a:srgbClr val="FFFFFF"/>
                           </a:solidFill>
-                          <a:latin typeface="Noto Sans JP" pitchFamily="34" charset="0"/>
-                          <a:ea typeface="Noto Sans JP" pitchFamily="34" charset="-122"/>
-                          <a:cs typeface="Noto Sans JP" pitchFamily="34" charset="-120"/>
+                          <a:latin typeface="BIZ UDPGothic" pitchFamily="34" charset="0"/>
+                          <a:ea typeface="BIZ UDPGothic" pitchFamily="34" charset="-122"/>
+                          <a:cs typeface="BIZ UDPGothic" pitchFamily="34" charset="-120"/>
                         </a:rPr>
                         <a:t>目標</a:t>
                       </a:r>
                       <a:endParaRPr lang="en-US" sz="1200" dirty="0">
-                        <a:latin typeface="Noto Sans JP" charset="0"/>
-                        <a:ea typeface="Noto Sans JP" charset="0"/>
-                        <a:cs typeface="Noto Sans JP" charset="0"/>
+                        <a:latin typeface="BIZ UDPGothic" charset="0"/>
+                        <a:ea typeface="BIZ UDPGothic" charset="0"/>
+                        <a:cs typeface="BIZ UDPGothic" charset="0"/>
                       </a:endParaRPr>
                     </a:p>
                   </a:txBody>
                   <a:tcPr marL="101600" marR="101600" marT="50800" marB="50800" anchor="ctr">
                     <a:lnL w="6350" cap="flat" cmpd="sng" algn="ctr">
                       <a:solidFill>
-                        <a:srgbClr val="2E2E2E"/>
+                        <a:srgbClr val="DDE0E6"/>
                       </a:solidFill>
                       <a:prstDash val="solid"/>
                       <a:round/>
@@ -10982,7 +10982,7 @@
                     </a:lnL>
                     <a:lnR w="6350" cap="flat" cmpd="sng" algn="ctr">
                       <a:solidFill>
-                        <a:srgbClr val="2E2E2E"/>
+                        <a:srgbClr val="DDE0E6"/>
                       </a:solidFill>
                       <a:prstDash val="solid"/>
                       <a:round/>
@@ -10991,7 +10991,7 @@
                     </a:lnR>
                     <a:lnT w="6350" cap="flat" cmpd="sng" algn="ctr">
                       <a:solidFill>
-                        <a:srgbClr val="2E2E2E"/>
+                        <a:srgbClr val="DDE0E6"/>
                       </a:solidFill>
                       <a:prstDash val="solid"/>
                       <a:round/>
@@ -11000,7 +11000,7 @@
                     </a:lnT>
                     <a:lnB w="6350" cap="flat" cmpd="sng" algn="ctr">
                       <a:solidFill>
-                        <a:srgbClr val="2E2E2E"/>
+                        <a:srgbClr val="DDE0E6"/>
                       </a:solidFill>
                       <a:prstDash val="solid"/>
                       <a:round/>
@@ -11008,7 +11008,7 @@
                       <a:tailEnd type="none" w="med" len="med"/>
                     </a:lnB>
                     <a:solidFill>
-                      <a:srgbClr val="D62828"/>
+                      <a:srgbClr val="C8161D"/>
                     </a:solidFill>
                   </a:tcPr>
                 </a:tc>
@@ -11023,25 +11023,25 @@
                       <a:r>
                         <a:rPr lang="en-US" sz="1200" b="1" dirty="0">
                           <a:solidFill>
-                            <a:srgbClr val="F5F5F0"/>
+                            <a:srgbClr val="FFFFFF"/>
                           </a:solidFill>
-                          <a:latin typeface="Noto Sans JP" pitchFamily="34" charset="0"/>
-                          <a:ea typeface="Noto Sans JP" pitchFamily="34" charset="-122"/>
-                          <a:cs typeface="Noto Sans JP" pitchFamily="34" charset="-120"/>
+                          <a:latin typeface="BIZ UDPGothic" pitchFamily="34" charset="0"/>
+                          <a:ea typeface="BIZ UDPGothic" pitchFamily="34" charset="-122"/>
+                          <a:cs typeface="BIZ UDPGothic" pitchFamily="34" charset="-120"/>
                         </a:rPr>
                         <a:t>純増額</a:t>
                       </a:r>
                       <a:endParaRPr lang="en-US" sz="1200" dirty="0">
-                        <a:latin typeface="Noto Sans JP" charset="0"/>
-                        <a:ea typeface="Noto Sans JP" charset="0"/>
-                        <a:cs typeface="Noto Sans JP" charset="0"/>
+                        <a:latin typeface="BIZ UDPGothic" charset="0"/>
+                        <a:ea typeface="BIZ UDPGothic" charset="0"/>
+                        <a:cs typeface="BIZ UDPGothic" charset="0"/>
                       </a:endParaRPr>
                     </a:p>
                   </a:txBody>
                   <a:tcPr marL="101600" marR="101600" marT="50800" marB="50800" anchor="ctr">
                     <a:lnL w="6350" cap="flat" cmpd="sng" algn="ctr">
                       <a:solidFill>
-                        <a:srgbClr val="2E2E2E"/>
+                        <a:srgbClr val="DDE0E6"/>
                       </a:solidFill>
                       <a:prstDash val="solid"/>
                       <a:round/>
@@ -11050,7 +11050,7 @@
                     </a:lnL>
                     <a:lnR w="6350" cap="flat" cmpd="sng" algn="ctr">
                       <a:solidFill>
-                        <a:srgbClr val="2E2E2E"/>
+                        <a:srgbClr val="DDE0E6"/>
                       </a:solidFill>
                       <a:prstDash val="solid"/>
                       <a:round/>
@@ -11059,7 +11059,7 @@
                     </a:lnR>
                     <a:lnT w="6350" cap="flat" cmpd="sng" algn="ctr">
                       <a:solidFill>
-                        <a:srgbClr val="2E2E2E"/>
+                        <a:srgbClr val="DDE0E6"/>
                       </a:solidFill>
                       <a:prstDash val="solid"/>
                       <a:round/>
@@ -11068,7 +11068,7 @@
                     </a:lnT>
                     <a:lnB w="6350" cap="flat" cmpd="sng" algn="ctr">
                       <a:solidFill>
-                        <a:srgbClr val="2E2E2E"/>
+                        <a:srgbClr val="DDE0E6"/>
                       </a:solidFill>
                       <a:prstDash val="solid"/>
                       <a:round/>
@@ -11076,7 +11076,7 @@
                       <a:tailEnd type="none" w="med" len="med"/>
                     </a:lnB>
                     <a:solidFill>
-                      <a:srgbClr val="D62828"/>
+                      <a:srgbClr val="C8161D"/>
                     </a:solidFill>
                   </a:tcPr>
                 </a:tc>
@@ -11093,25 +11093,25 @@
                       <a:r>
                         <a:rPr lang="en-US" sz="1150" dirty="0">
                           <a:solidFill>
-                            <a:srgbClr val="F5F5F0"/>
+                            <a:srgbClr val="16181D"/>
                           </a:solidFill>
-                          <a:latin typeface="Noto Sans JP" pitchFamily="34" charset="0"/>
-                          <a:ea typeface="Noto Sans JP" pitchFamily="34" charset="-122"/>
-                          <a:cs typeface="Noto Sans JP" pitchFamily="34" charset="-120"/>
+                          <a:latin typeface="BIZ UDPGothic" pitchFamily="34" charset="0"/>
+                          <a:ea typeface="BIZ UDPGothic" pitchFamily="34" charset="-122"/>
+                          <a:cs typeface="BIZ UDPGothic" pitchFamily="34" charset="-120"/>
                         </a:rPr>
                         <a:t>伝統的工芸品産業支援</a:t>
                       </a:r>
                       <a:endParaRPr lang="en-US" sz="1150" dirty="0">
-                        <a:latin typeface="Noto Sans JP" charset="0"/>
-                        <a:ea typeface="Noto Sans JP" charset="0"/>
-                        <a:cs typeface="Noto Sans JP" charset="0"/>
+                        <a:latin typeface="BIZ UDPGothic" charset="0"/>
+                        <a:ea typeface="BIZ UDPGothic" charset="0"/>
+                        <a:cs typeface="BIZ UDPGothic" charset="0"/>
                       </a:endParaRPr>
                     </a:p>
                   </a:txBody>
                   <a:tcPr marL="101600" marR="101600" marT="50800" marB="50800" anchor="ctr">
                     <a:lnL w="6350" cap="flat" cmpd="sng" algn="ctr">
                       <a:solidFill>
-                        <a:srgbClr val="2E2E2E"/>
+                        <a:srgbClr val="DDE0E6"/>
                       </a:solidFill>
                       <a:prstDash val="solid"/>
                       <a:round/>
@@ -11120,7 +11120,7 @@
                     </a:lnL>
                     <a:lnR w="6350" cap="flat" cmpd="sng" algn="ctr">
                       <a:solidFill>
-                        <a:srgbClr val="2E2E2E"/>
+                        <a:srgbClr val="DDE0E6"/>
                       </a:solidFill>
                       <a:prstDash val="solid"/>
                       <a:round/>
@@ -11129,7 +11129,7 @@
                     </a:lnR>
                     <a:lnT w="6350" cap="flat" cmpd="sng" algn="ctr">
                       <a:solidFill>
-                        <a:srgbClr val="2E2E2E"/>
+                        <a:srgbClr val="DDE0E6"/>
                       </a:solidFill>
                       <a:prstDash val="solid"/>
                       <a:round/>
@@ -11138,7 +11138,7 @@
                     </a:lnT>
                     <a:lnB w="6350" cap="flat" cmpd="sng" algn="ctr">
                       <a:solidFill>
-                        <a:srgbClr val="2E2E2E"/>
+                        <a:srgbClr val="DDE0E6"/>
                       </a:solidFill>
                       <a:prstDash val="solid"/>
                       <a:round/>
@@ -11146,7 +11146,7 @@
                       <a:tailEnd type="none" w="med" len="med"/>
                     </a:lnB>
                     <a:solidFill>
-                      <a:srgbClr val="1A1A1A"/>
+                      <a:srgbClr val="FFFFFF"/>
                     </a:solidFill>
                   </a:tcPr>
                 </a:tc>
@@ -11161,25 +11161,25 @@
                       <a:r>
                         <a:rPr lang="en-US" sz="1150" dirty="0">
                           <a:solidFill>
-                            <a:srgbClr val="F5F5F0"/>
+                            <a:srgbClr val="16181D"/>
                           </a:solidFill>
-                          <a:latin typeface="Noto Sans JP" pitchFamily="34" charset="0"/>
-                          <a:ea typeface="Noto Sans JP" pitchFamily="34" charset="-122"/>
-                          <a:cs typeface="Noto Sans JP" pitchFamily="34" charset="-120"/>
+                          <a:latin typeface="BIZ UDPGothic" pitchFamily="34" charset="0"/>
+                          <a:ea typeface="BIZ UDPGothic" pitchFamily="34" charset="-122"/>
+                          <a:cs typeface="BIZ UDPGothic" pitchFamily="34" charset="-120"/>
                         </a:rPr>
                         <a:t>11億円</a:t>
                       </a:r>
                       <a:endParaRPr lang="en-US" sz="1150" dirty="0">
-                        <a:latin typeface="Noto Sans JP" charset="0"/>
-                        <a:ea typeface="Noto Sans JP" charset="0"/>
-                        <a:cs typeface="Noto Sans JP" charset="0"/>
+                        <a:latin typeface="BIZ UDPGothic" charset="0"/>
+                        <a:ea typeface="BIZ UDPGothic" charset="0"/>
+                        <a:cs typeface="BIZ UDPGothic" charset="0"/>
                       </a:endParaRPr>
                     </a:p>
                   </a:txBody>
                   <a:tcPr marL="101600" marR="101600" marT="50800" marB="50800" anchor="ctr">
                     <a:lnL w="6350" cap="flat" cmpd="sng" algn="ctr">
                       <a:solidFill>
-                        <a:srgbClr val="2E2E2E"/>
+                        <a:srgbClr val="DDE0E6"/>
                       </a:solidFill>
                       <a:prstDash val="solid"/>
                       <a:round/>
@@ -11188,7 +11188,7 @@
                     </a:lnL>
                     <a:lnR w="6350" cap="flat" cmpd="sng" algn="ctr">
                       <a:solidFill>
-                        <a:srgbClr val="2E2E2E"/>
+                        <a:srgbClr val="DDE0E6"/>
                       </a:solidFill>
                       <a:prstDash val="solid"/>
                       <a:round/>
@@ -11197,7 +11197,7 @@
                     </a:lnR>
                     <a:lnT w="6350" cap="flat" cmpd="sng" algn="ctr">
                       <a:solidFill>
-                        <a:srgbClr val="2E2E2E"/>
+                        <a:srgbClr val="DDE0E6"/>
                       </a:solidFill>
                       <a:prstDash val="solid"/>
                       <a:round/>
@@ -11206,7 +11206,7 @@
                     </a:lnT>
                     <a:lnB w="6350" cap="flat" cmpd="sng" algn="ctr">
                       <a:solidFill>
-                        <a:srgbClr val="2E2E2E"/>
+                        <a:srgbClr val="DDE0E6"/>
                       </a:solidFill>
                       <a:prstDash val="solid"/>
                       <a:round/>
@@ -11214,7 +11214,7 @@
                       <a:tailEnd type="none" w="med" len="med"/>
                     </a:lnB>
                     <a:solidFill>
-                      <a:srgbClr val="1A1A1A"/>
+                      <a:srgbClr val="FFFFFF"/>
                     </a:solidFill>
                   </a:tcPr>
                 </a:tc>
@@ -11229,25 +11229,25 @@
                       <a:r>
                         <a:rPr lang="en-US" sz="1150" dirty="0">
                           <a:solidFill>
-                            <a:srgbClr val="F5F5F0"/>
+                            <a:srgbClr val="16181D"/>
                           </a:solidFill>
-                          <a:latin typeface="Noto Sans JP" pitchFamily="34" charset="0"/>
-                          <a:ea typeface="Noto Sans JP" pitchFamily="34" charset="-122"/>
-                          <a:cs typeface="Noto Sans JP" pitchFamily="34" charset="-120"/>
+                          <a:latin typeface="BIZ UDPGothic" pitchFamily="34" charset="0"/>
+                          <a:ea typeface="BIZ UDPGothic" pitchFamily="34" charset="-122"/>
+                          <a:cs typeface="BIZ UDPGothic" pitchFamily="34" charset="-120"/>
                         </a:rPr>
                         <a:t>220億円</a:t>
                       </a:r>
                       <a:endParaRPr lang="en-US" sz="1150" dirty="0">
-                        <a:latin typeface="Noto Sans JP" charset="0"/>
-                        <a:ea typeface="Noto Sans JP" charset="0"/>
-                        <a:cs typeface="Noto Sans JP" charset="0"/>
+                        <a:latin typeface="BIZ UDPGothic" charset="0"/>
+                        <a:ea typeface="BIZ UDPGothic" charset="0"/>
+                        <a:cs typeface="BIZ UDPGothic" charset="0"/>
                       </a:endParaRPr>
                     </a:p>
                   </a:txBody>
                   <a:tcPr marL="101600" marR="101600" marT="50800" marB="50800" anchor="ctr">
                     <a:lnL w="6350" cap="flat" cmpd="sng" algn="ctr">
                       <a:solidFill>
-                        <a:srgbClr val="2E2E2E"/>
+                        <a:srgbClr val="DDE0E6"/>
                       </a:solidFill>
                       <a:prstDash val="solid"/>
                       <a:round/>
@@ -11256,7 +11256,7 @@
                     </a:lnL>
                     <a:lnR w="6350" cap="flat" cmpd="sng" algn="ctr">
                       <a:solidFill>
-                        <a:srgbClr val="2E2E2E"/>
+                        <a:srgbClr val="DDE0E6"/>
                       </a:solidFill>
                       <a:prstDash val="solid"/>
                       <a:round/>
@@ -11265,7 +11265,7 @@
                     </a:lnR>
                     <a:lnT w="6350" cap="flat" cmpd="sng" algn="ctr">
                       <a:solidFill>
-                        <a:srgbClr val="2E2E2E"/>
+                        <a:srgbClr val="DDE0E6"/>
                       </a:solidFill>
                       <a:prstDash val="solid"/>
                       <a:round/>
@@ -11274,7 +11274,7 @@
                     </a:lnT>
                     <a:lnB w="6350" cap="flat" cmpd="sng" algn="ctr">
                       <a:solidFill>
-                        <a:srgbClr val="2E2E2E"/>
+                        <a:srgbClr val="DDE0E6"/>
                       </a:solidFill>
                       <a:prstDash val="solid"/>
                       <a:round/>
@@ -11282,7 +11282,7 @@
                       <a:tailEnd type="none" w="med" len="med"/>
                     </a:lnB>
                     <a:solidFill>
-                      <a:srgbClr val="1A1A1A"/>
+                      <a:srgbClr val="FFFFFF"/>
                     </a:solidFill>
                   </a:tcPr>
                 </a:tc>
@@ -11297,25 +11297,25 @@
                       <a:r>
                         <a:rPr lang="en-US" sz="1150" dirty="0">
                           <a:solidFill>
-                            <a:srgbClr val="F5F5F0"/>
+                            <a:srgbClr val="16181D"/>
                           </a:solidFill>
-                          <a:latin typeface="Noto Sans JP" pitchFamily="34" charset="0"/>
-                          <a:ea typeface="Noto Sans JP" pitchFamily="34" charset="-122"/>
-                          <a:cs typeface="Noto Sans JP" pitchFamily="34" charset="-120"/>
+                          <a:latin typeface="BIZ UDPGothic" pitchFamily="34" charset="0"/>
+                          <a:ea typeface="BIZ UDPGothic" pitchFamily="34" charset="-122"/>
+                          <a:cs typeface="BIZ UDPGothic" pitchFamily="34" charset="-120"/>
                         </a:rPr>
                         <a:t>+209億円</a:t>
                       </a:r>
                       <a:endParaRPr lang="en-US" sz="1150" dirty="0">
-                        <a:latin typeface="Noto Sans JP" charset="0"/>
-                        <a:ea typeface="Noto Sans JP" charset="0"/>
-                        <a:cs typeface="Noto Sans JP" charset="0"/>
+                        <a:latin typeface="BIZ UDPGothic" charset="0"/>
+                        <a:ea typeface="BIZ UDPGothic" charset="0"/>
+                        <a:cs typeface="BIZ UDPGothic" charset="0"/>
                       </a:endParaRPr>
                     </a:p>
                   </a:txBody>
                   <a:tcPr marL="101600" marR="101600" marT="50800" marB="50800" anchor="ctr">
                     <a:lnL w="6350" cap="flat" cmpd="sng" algn="ctr">
                       <a:solidFill>
-                        <a:srgbClr val="2E2E2E"/>
+                        <a:srgbClr val="DDE0E6"/>
                       </a:solidFill>
                       <a:prstDash val="solid"/>
                       <a:round/>
@@ -11324,7 +11324,7 @@
                     </a:lnL>
                     <a:lnR w="6350" cap="flat" cmpd="sng" algn="ctr">
                       <a:solidFill>
-                        <a:srgbClr val="2E2E2E"/>
+                        <a:srgbClr val="DDE0E6"/>
                       </a:solidFill>
                       <a:prstDash val="solid"/>
                       <a:round/>
@@ -11333,7 +11333,7 @@
                     </a:lnR>
                     <a:lnT w="6350" cap="flat" cmpd="sng" algn="ctr">
                       <a:solidFill>
-                        <a:srgbClr val="2E2E2E"/>
+                        <a:srgbClr val="DDE0E6"/>
                       </a:solidFill>
                       <a:prstDash val="solid"/>
                       <a:round/>
@@ -11342,7 +11342,7 @@
                     </a:lnT>
                     <a:lnB w="6350" cap="flat" cmpd="sng" algn="ctr">
                       <a:solidFill>
-                        <a:srgbClr val="2E2E2E"/>
+                        <a:srgbClr val="DDE0E6"/>
                       </a:solidFill>
                       <a:prstDash val="solid"/>
                       <a:round/>
@@ -11350,7 +11350,7 @@
                       <a:tailEnd type="none" w="med" len="med"/>
                     </a:lnB>
                     <a:solidFill>
-                      <a:srgbClr val="1A1A1A"/>
+                      <a:srgbClr val="FFFFFF"/>
                     </a:solidFill>
                   </a:tcPr>
                 </a:tc>
@@ -11367,25 +11367,25 @@
                       <a:r>
                         <a:rPr lang="en-US" sz="1150" dirty="0">
                           <a:solidFill>
-                            <a:srgbClr val="F5F5F0"/>
+                            <a:srgbClr val="16181D"/>
                           </a:solidFill>
-                          <a:latin typeface="Noto Sans JP" pitchFamily="34" charset="0"/>
-                          <a:ea typeface="Noto Sans JP" pitchFamily="34" charset="-122"/>
-                          <a:cs typeface="Noto Sans JP" pitchFamily="34" charset="-120"/>
+                          <a:latin typeface="BIZ UDPGothic" pitchFamily="34" charset="0"/>
+                          <a:ea typeface="BIZ UDPGothic" pitchFamily="34" charset="-122"/>
+                          <a:cs typeface="BIZ UDPGothic" pitchFamily="34" charset="-120"/>
                         </a:rPr>
                         <a:t>神社仏閣保護（国宝・重文建造物）</a:t>
                       </a:r>
                       <a:endParaRPr lang="en-US" sz="1150" dirty="0">
-                        <a:latin typeface="Noto Sans JP" charset="0"/>
-                        <a:ea typeface="Noto Sans JP" charset="0"/>
-                        <a:cs typeface="Noto Sans JP" charset="0"/>
+                        <a:latin typeface="BIZ UDPGothic" charset="0"/>
+                        <a:ea typeface="BIZ UDPGothic" charset="0"/>
+                        <a:cs typeface="BIZ UDPGothic" charset="0"/>
                       </a:endParaRPr>
                     </a:p>
                   </a:txBody>
                   <a:tcPr marL="101600" marR="101600" marT="50800" marB="50800" anchor="ctr">
                     <a:lnL w="6350" cap="flat" cmpd="sng" algn="ctr">
                       <a:solidFill>
-                        <a:srgbClr val="2E2E2E"/>
+                        <a:srgbClr val="DDE0E6"/>
                       </a:solidFill>
                       <a:prstDash val="solid"/>
                       <a:round/>
@@ -11394,7 +11394,7 @@
                     </a:lnL>
                     <a:lnR w="6350" cap="flat" cmpd="sng" algn="ctr">
                       <a:solidFill>
-                        <a:srgbClr val="2E2E2E"/>
+                        <a:srgbClr val="DDE0E6"/>
                       </a:solidFill>
                       <a:prstDash val="solid"/>
                       <a:round/>
@@ -11403,7 +11403,7 @@
                     </a:lnR>
                     <a:lnT w="6350" cap="flat" cmpd="sng" algn="ctr">
                       <a:solidFill>
-                        <a:srgbClr val="2E2E2E"/>
+                        <a:srgbClr val="DDE0E6"/>
                       </a:solidFill>
                       <a:prstDash val="solid"/>
                       <a:round/>
@@ -11412,7 +11412,7 @@
                     </a:lnT>
                     <a:lnB w="6350" cap="flat" cmpd="sng" algn="ctr">
                       <a:solidFill>
-                        <a:srgbClr val="2E2E2E"/>
+                        <a:srgbClr val="DDE0E6"/>
                       </a:solidFill>
                       <a:prstDash val="solid"/>
                       <a:round/>
@@ -11420,7 +11420,7 @@
                       <a:tailEnd type="none" w="med" len="med"/>
                     </a:lnB>
                     <a:solidFill>
-                      <a:srgbClr val="151515"/>
+                      <a:srgbClr val="FFFFFF"/>
                     </a:solidFill>
                   </a:tcPr>
                 </a:tc>
@@ -11435,25 +11435,25 @@
                       <a:r>
                         <a:rPr lang="en-US" sz="1150" dirty="0">
                           <a:solidFill>
-                            <a:srgbClr val="F5F5F0"/>
+                            <a:srgbClr val="16181D"/>
                           </a:solidFill>
-                          <a:latin typeface="Noto Sans JP" pitchFamily="34" charset="0"/>
-                          <a:ea typeface="Noto Sans JP" pitchFamily="34" charset="-122"/>
-                          <a:cs typeface="Noto Sans JP" pitchFamily="34" charset="-120"/>
+                          <a:latin typeface="BIZ UDPGothic" pitchFamily="34" charset="0"/>
+                          <a:ea typeface="BIZ UDPGothic" pitchFamily="34" charset="-122"/>
+                          <a:cs typeface="BIZ UDPGothic" pitchFamily="34" charset="-120"/>
                         </a:rPr>
                         <a:t>574億円</a:t>
                       </a:r>
                       <a:endParaRPr lang="en-US" sz="1150" dirty="0">
-                        <a:latin typeface="Noto Sans JP" charset="0"/>
-                        <a:ea typeface="Noto Sans JP" charset="0"/>
-                        <a:cs typeface="Noto Sans JP" charset="0"/>
+                        <a:latin typeface="BIZ UDPGothic" charset="0"/>
+                        <a:ea typeface="BIZ UDPGothic" charset="0"/>
+                        <a:cs typeface="BIZ UDPGothic" charset="0"/>
                       </a:endParaRPr>
                     </a:p>
                   </a:txBody>
                   <a:tcPr marL="101600" marR="101600" marT="50800" marB="50800" anchor="ctr">
                     <a:lnL w="6350" cap="flat" cmpd="sng" algn="ctr">
                       <a:solidFill>
-                        <a:srgbClr val="2E2E2E"/>
+                        <a:srgbClr val="DDE0E6"/>
                       </a:solidFill>
                       <a:prstDash val="solid"/>
                       <a:round/>
@@ -11462,7 +11462,7 @@
                     </a:lnL>
                     <a:lnR w="6350" cap="flat" cmpd="sng" algn="ctr">
                       <a:solidFill>
-                        <a:srgbClr val="2E2E2E"/>
+                        <a:srgbClr val="DDE0E6"/>
                       </a:solidFill>
                       <a:prstDash val="solid"/>
                       <a:round/>
@@ -11471,7 +11471,7 @@
                     </a:lnR>
                     <a:lnT w="6350" cap="flat" cmpd="sng" algn="ctr">
                       <a:solidFill>
-                        <a:srgbClr val="2E2E2E"/>
+                        <a:srgbClr val="DDE0E6"/>
                       </a:solidFill>
                       <a:prstDash val="solid"/>
                       <a:round/>
@@ -11480,7 +11480,7 @@
                     </a:lnT>
                     <a:lnB w="6350" cap="flat" cmpd="sng" algn="ctr">
                       <a:solidFill>
-                        <a:srgbClr val="2E2E2E"/>
+                        <a:srgbClr val="DDE0E6"/>
                       </a:solidFill>
                       <a:prstDash val="solid"/>
                       <a:round/>
@@ -11488,7 +11488,7 @@
                       <a:tailEnd type="none" w="med" len="med"/>
                     </a:lnB>
                     <a:solidFill>
-                      <a:srgbClr val="151515"/>
+                      <a:srgbClr val="FFFFFF"/>
                     </a:solidFill>
                   </a:tcPr>
                 </a:tc>
@@ -11503,25 +11503,25 @@
                       <a:r>
                         <a:rPr lang="en-US" sz="1150" dirty="0">
                           <a:solidFill>
-                            <a:srgbClr val="F5F5F0"/>
+                            <a:srgbClr val="16181D"/>
                           </a:solidFill>
-                          <a:latin typeface="Noto Sans JP" pitchFamily="34" charset="0"/>
-                          <a:ea typeface="Noto Sans JP" pitchFamily="34" charset="-122"/>
-                          <a:cs typeface="Noto Sans JP" pitchFamily="34" charset="-120"/>
+                          <a:latin typeface="BIZ UDPGothic" pitchFamily="34" charset="0"/>
+                          <a:ea typeface="BIZ UDPGothic" pitchFamily="34" charset="-122"/>
+                          <a:cs typeface="BIZ UDPGothic" pitchFamily="34" charset="-120"/>
                         </a:rPr>
                         <a:t>574億円（恒久財源化）</a:t>
                       </a:r>
                       <a:endParaRPr lang="en-US" sz="1150" dirty="0">
-                        <a:latin typeface="Noto Sans JP" charset="0"/>
-                        <a:ea typeface="Noto Sans JP" charset="0"/>
-                        <a:cs typeface="Noto Sans JP" charset="0"/>
+                        <a:latin typeface="BIZ UDPGothic" charset="0"/>
+                        <a:ea typeface="BIZ UDPGothic" charset="0"/>
+                        <a:cs typeface="BIZ UDPGothic" charset="0"/>
                       </a:endParaRPr>
                     </a:p>
                   </a:txBody>
                   <a:tcPr marL="101600" marR="101600" marT="50800" marB="50800" anchor="ctr">
                     <a:lnL w="6350" cap="flat" cmpd="sng" algn="ctr">
                       <a:solidFill>
-                        <a:srgbClr val="2E2E2E"/>
+                        <a:srgbClr val="DDE0E6"/>
                       </a:solidFill>
                       <a:prstDash val="solid"/>
                       <a:round/>
@@ -11530,7 +11530,7 @@
                     </a:lnL>
                     <a:lnR w="6350" cap="flat" cmpd="sng" algn="ctr">
                       <a:solidFill>
-                        <a:srgbClr val="2E2E2E"/>
+                        <a:srgbClr val="DDE0E6"/>
                       </a:solidFill>
                       <a:prstDash val="solid"/>
                       <a:round/>
@@ -11539,7 +11539,7 @@
                     </a:lnR>
                     <a:lnT w="6350" cap="flat" cmpd="sng" algn="ctr">
                       <a:solidFill>
-                        <a:srgbClr val="2E2E2E"/>
+                        <a:srgbClr val="DDE0E6"/>
                       </a:solidFill>
                       <a:prstDash val="solid"/>
                       <a:round/>
@@ -11548,7 +11548,7 @@
                     </a:lnT>
                     <a:lnB w="6350" cap="flat" cmpd="sng" algn="ctr">
                       <a:solidFill>
-                        <a:srgbClr val="2E2E2E"/>
+                        <a:srgbClr val="DDE0E6"/>
                       </a:solidFill>
                       <a:prstDash val="solid"/>
                       <a:round/>
@@ -11556,7 +11556,7 @@
                       <a:tailEnd type="none" w="med" len="med"/>
                     </a:lnB>
                     <a:solidFill>
-                      <a:srgbClr val="151515"/>
+                      <a:srgbClr val="FFFFFF"/>
                     </a:solidFill>
                   </a:tcPr>
                 </a:tc>
@@ -11571,25 +11571,25 @@
                       <a:r>
                         <a:rPr lang="en-US" sz="1150" dirty="0">
                           <a:solidFill>
-                            <a:srgbClr val="F5F5F0"/>
+                            <a:srgbClr val="16181D"/>
                           </a:solidFill>
-                          <a:latin typeface="Noto Sans JP" pitchFamily="34" charset="0"/>
-                          <a:ea typeface="Noto Sans JP" pitchFamily="34" charset="-122"/>
-                          <a:cs typeface="Noto Sans JP" pitchFamily="34" charset="-120"/>
+                          <a:latin typeface="BIZ UDPGothic" pitchFamily="34" charset="0"/>
+                          <a:ea typeface="BIZ UDPGothic" pitchFamily="34" charset="-122"/>
+                          <a:cs typeface="BIZ UDPGothic" pitchFamily="34" charset="-120"/>
                         </a:rPr>
                         <a:t>±0</a:t>
                       </a:r>
                       <a:endParaRPr lang="en-US" sz="1150" dirty="0">
-                        <a:latin typeface="Noto Sans JP" charset="0"/>
-                        <a:ea typeface="Noto Sans JP" charset="0"/>
-                        <a:cs typeface="Noto Sans JP" charset="0"/>
+                        <a:latin typeface="BIZ UDPGothic" charset="0"/>
+                        <a:ea typeface="BIZ UDPGothic" charset="0"/>
+                        <a:cs typeface="BIZ UDPGothic" charset="0"/>
                       </a:endParaRPr>
                     </a:p>
                   </a:txBody>
                   <a:tcPr marL="101600" marR="101600" marT="50800" marB="50800" anchor="ctr">
                     <a:lnL w="6350" cap="flat" cmpd="sng" algn="ctr">
                       <a:solidFill>
-                        <a:srgbClr val="2E2E2E"/>
+                        <a:srgbClr val="DDE0E6"/>
                       </a:solidFill>
                       <a:prstDash val="solid"/>
                       <a:round/>
@@ -11598,7 +11598,7 @@
                     </a:lnL>
                     <a:lnR w="6350" cap="flat" cmpd="sng" algn="ctr">
                       <a:solidFill>
-                        <a:srgbClr val="2E2E2E"/>
+                        <a:srgbClr val="DDE0E6"/>
                       </a:solidFill>
                       <a:prstDash val="solid"/>
                       <a:round/>
@@ -11607,7 +11607,7 @@
                     </a:lnR>
                     <a:lnT w="6350" cap="flat" cmpd="sng" algn="ctr">
                       <a:solidFill>
-                        <a:srgbClr val="2E2E2E"/>
+                        <a:srgbClr val="DDE0E6"/>
                       </a:solidFill>
                       <a:prstDash val="solid"/>
                       <a:round/>
@@ -11616,7 +11616,7 @@
                     </a:lnT>
                     <a:lnB w="6350" cap="flat" cmpd="sng" algn="ctr">
                       <a:solidFill>
-                        <a:srgbClr val="2E2E2E"/>
+                        <a:srgbClr val="DDE0E6"/>
                       </a:solidFill>
                       <a:prstDash val="solid"/>
                       <a:round/>
@@ -11624,7 +11624,7 @@
                       <a:tailEnd type="none" w="med" len="med"/>
                     </a:lnB>
                     <a:solidFill>
-                      <a:srgbClr val="151515"/>
+                      <a:srgbClr val="FFFFFF"/>
                     </a:solidFill>
                   </a:tcPr>
                 </a:tc>
@@ -11641,25 +11641,25 @@
                       <a:r>
                         <a:rPr lang="en-US" sz="1150" dirty="0">
                           <a:solidFill>
-                            <a:srgbClr val="F5F5F0"/>
+                            <a:srgbClr val="16181D"/>
                           </a:solidFill>
-                          <a:latin typeface="Noto Sans JP" pitchFamily="34" charset="0"/>
-                          <a:ea typeface="Noto Sans JP" pitchFamily="34" charset="-122"/>
-                          <a:cs typeface="Noto Sans JP" pitchFamily="34" charset="-120"/>
+                          <a:latin typeface="BIZ UDPGothic" pitchFamily="34" charset="0"/>
+                          <a:ea typeface="BIZ UDPGothic" pitchFamily="34" charset="-122"/>
+                          <a:cs typeface="BIZ UDPGothic" pitchFamily="34" charset="-120"/>
                         </a:rPr>
                         <a:t>伝統芸能（歌舞伎・能楽・文楽等）</a:t>
                       </a:r>
                       <a:endParaRPr lang="en-US" sz="1150" dirty="0">
-                        <a:latin typeface="Noto Sans JP" charset="0"/>
-                        <a:ea typeface="Noto Sans JP" charset="0"/>
-                        <a:cs typeface="Noto Sans JP" charset="0"/>
+                        <a:latin typeface="BIZ UDPGothic" charset="0"/>
+                        <a:ea typeface="BIZ UDPGothic" charset="0"/>
+                        <a:cs typeface="BIZ UDPGothic" charset="0"/>
                       </a:endParaRPr>
                     </a:p>
                   </a:txBody>
                   <a:tcPr marL="101600" marR="101600" marT="50800" marB="50800" anchor="ctr">
                     <a:lnL w="6350" cap="flat" cmpd="sng" algn="ctr">
                       <a:solidFill>
-                        <a:srgbClr val="2E2E2E"/>
+                        <a:srgbClr val="DDE0E6"/>
                       </a:solidFill>
                       <a:prstDash val="solid"/>
                       <a:round/>
@@ -11668,7 +11668,7 @@
                     </a:lnL>
                     <a:lnR w="6350" cap="flat" cmpd="sng" algn="ctr">
                       <a:solidFill>
-                        <a:srgbClr val="2E2E2E"/>
+                        <a:srgbClr val="DDE0E6"/>
                       </a:solidFill>
                       <a:prstDash val="solid"/>
                       <a:round/>
@@ -11677,7 +11677,7 @@
                     </a:lnR>
                     <a:lnT w="6350" cap="flat" cmpd="sng" algn="ctr">
                       <a:solidFill>
-                        <a:srgbClr val="2E2E2E"/>
+                        <a:srgbClr val="DDE0E6"/>
                       </a:solidFill>
                       <a:prstDash val="solid"/>
                       <a:round/>
@@ -11686,7 +11686,7 @@
                     </a:lnT>
                     <a:lnB w="6350" cap="flat" cmpd="sng" algn="ctr">
                       <a:solidFill>
-                        <a:srgbClr val="2E2E2E"/>
+                        <a:srgbClr val="DDE0E6"/>
                       </a:solidFill>
                       <a:prstDash val="solid"/>
                       <a:round/>
@@ -11694,7 +11694,7 @@
                       <a:tailEnd type="none" w="med" len="med"/>
                     </a:lnB>
                     <a:solidFill>
-                      <a:srgbClr val="1A1A1A"/>
+                      <a:srgbClr val="FFFFFF"/>
                     </a:solidFill>
                   </a:tcPr>
                 </a:tc>
@@ -11709,25 +11709,25 @@
                       <a:r>
                         <a:rPr lang="en-US" sz="1150" dirty="0">
                           <a:solidFill>
-                            <a:srgbClr val="F5F5F0"/>
+                            <a:srgbClr val="16181D"/>
                           </a:solidFill>
-                          <a:latin typeface="Noto Sans JP" pitchFamily="34" charset="0"/>
-                          <a:ea typeface="Noto Sans JP" pitchFamily="34" charset="-122"/>
-                          <a:cs typeface="Noto Sans JP" pitchFamily="34" charset="-120"/>
+                          <a:latin typeface="BIZ UDPGothic" pitchFamily="34" charset="0"/>
+                          <a:ea typeface="BIZ UDPGothic" pitchFamily="34" charset="-122"/>
+                          <a:cs typeface="BIZ UDPGothic" pitchFamily="34" charset="-120"/>
                         </a:rPr>
                         <a:t>分散し単離困難</a:t>
                       </a:r>
                       <a:endParaRPr lang="en-US" sz="1150" dirty="0">
-                        <a:latin typeface="Noto Sans JP" charset="0"/>
-                        <a:ea typeface="Noto Sans JP" charset="0"/>
-                        <a:cs typeface="Noto Sans JP" charset="0"/>
+                        <a:latin typeface="BIZ UDPGothic" charset="0"/>
+                        <a:ea typeface="BIZ UDPGothic" charset="0"/>
+                        <a:cs typeface="BIZ UDPGothic" charset="0"/>
                       </a:endParaRPr>
                     </a:p>
                   </a:txBody>
                   <a:tcPr marL="101600" marR="101600" marT="50800" marB="50800" anchor="ctr">
                     <a:lnL w="6350" cap="flat" cmpd="sng" algn="ctr">
                       <a:solidFill>
-                        <a:srgbClr val="2E2E2E"/>
+                        <a:srgbClr val="DDE0E6"/>
                       </a:solidFill>
                       <a:prstDash val="solid"/>
                       <a:round/>
@@ -11736,7 +11736,7 @@
                     </a:lnL>
                     <a:lnR w="6350" cap="flat" cmpd="sng" algn="ctr">
                       <a:solidFill>
-                        <a:srgbClr val="2E2E2E"/>
+                        <a:srgbClr val="DDE0E6"/>
                       </a:solidFill>
                       <a:prstDash val="solid"/>
                       <a:round/>
@@ -11745,7 +11745,7 @@
                     </a:lnR>
                     <a:lnT w="6350" cap="flat" cmpd="sng" algn="ctr">
                       <a:solidFill>
-                        <a:srgbClr val="2E2E2E"/>
+                        <a:srgbClr val="DDE0E6"/>
                       </a:solidFill>
                       <a:prstDash val="solid"/>
                       <a:round/>
@@ -11754,7 +11754,7 @@
                     </a:lnT>
                     <a:lnB w="6350" cap="flat" cmpd="sng" algn="ctr">
                       <a:solidFill>
-                        <a:srgbClr val="2E2E2E"/>
+                        <a:srgbClr val="DDE0E6"/>
                       </a:solidFill>
                       <a:prstDash val="solid"/>
                       <a:round/>
@@ -11762,7 +11762,7 @@
                       <a:tailEnd type="none" w="med" len="med"/>
                     </a:lnB>
                     <a:solidFill>
-                      <a:srgbClr val="1A1A1A"/>
+                      <a:srgbClr val="FFFFFF"/>
                     </a:solidFill>
                   </a:tcPr>
                 </a:tc>
@@ -11777,25 +11777,25 @@
                       <a:r>
                         <a:rPr lang="en-US" sz="1150" dirty="0">
                           <a:solidFill>
-                            <a:srgbClr val="F5F5F0"/>
+                            <a:srgbClr val="16181D"/>
                           </a:solidFill>
-                          <a:latin typeface="Noto Sans JP" pitchFamily="34" charset="0"/>
-                          <a:ea typeface="Noto Sans JP" pitchFamily="34" charset="-122"/>
-                          <a:cs typeface="Noto Sans JP" pitchFamily="34" charset="-120"/>
+                          <a:latin typeface="BIZ UDPGothic" pitchFamily="34" charset="0"/>
+                          <a:ea typeface="BIZ UDPGothic" pitchFamily="34" charset="-122"/>
+                          <a:cs typeface="BIZ UDPGothic" pitchFamily="34" charset="-120"/>
                         </a:rPr>
                         <a:t>運営費を恒久財源化</a:t>
                       </a:r>
                       <a:endParaRPr lang="en-US" sz="1150" dirty="0">
-                        <a:latin typeface="Noto Sans JP" charset="0"/>
-                        <a:ea typeface="Noto Sans JP" charset="0"/>
-                        <a:cs typeface="Noto Sans JP" charset="0"/>
+                        <a:latin typeface="BIZ UDPGothic" charset="0"/>
+                        <a:ea typeface="BIZ UDPGothic" charset="0"/>
+                        <a:cs typeface="BIZ UDPGothic" charset="0"/>
                       </a:endParaRPr>
                     </a:p>
                   </a:txBody>
                   <a:tcPr marL="101600" marR="101600" marT="50800" marB="50800" anchor="ctr">
                     <a:lnL w="6350" cap="flat" cmpd="sng" algn="ctr">
                       <a:solidFill>
-                        <a:srgbClr val="2E2E2E"/>
+                        <a:srgbClr val="DDE0E6"/>
                       </a:solidFill>
                       <a:prstDash val="solid"/>
                       <a:round/>
@@ -11804,7 +11804,7 @@
                     </a:lnL>
                     <a:lnR w="6350" cap="flat" cmpd="sng" algn="ctr">
                       <a:solidFill>
-                        <a:srgbClr val="2E2E2E"/>
+                        <a:srgbClr val="DDE0E6"/>
                       </a:solidFill>
                       <a:prstDash val="solid"/>
                       <a:round/>
@@ -11813,7 +11813,7 @@
                     </a:lnR>
                     <a:lnT w="6350" cap="flat" cmpd="sng" algn="ctr">
                       <a:solidFill>
-                        <a:srgbClr val="2E2E2E"/>
+                        <a:srgbClr val="DDE0E6"/>
                       </a:solidFill>
                       <a:prstDash val="solid"/>
                       <a:round/>
@@ -11822,7 +11822,7 @@
                     </a:lnT>
                     <a:lnB w="6350" cap="flat" cmpd="sng" algn="ctr">
                       <a:solidFill>
-                        <a:srgbClr val="2E2E2E"/>
+                        <a:srgbClr val="DDE0E6"/>
                       </a:solidFill>
                       <a:prstDash val="solid"/>
                       <a:round/>
@@ -11830,7 +11830,7 @@
                       <a:tailEnd type="none" w="med" len="med"/>
                     </a:lnB>
                     <a:solidFill>
-                      <a:srgbClr val="1A1A1A"/>
+                      <a:srgbClr val="FFFFFF"/>
                     </a:solidFill>
                   </a:tcPr>
                 </a:tc>
@@ -11845,25 +11845,25 @@
                       <a:r>
                         <a:rPr lang="en-US" sz="1150" dirty="0">
                           <a:solidFill>
-                            <a:srgbClr val="F5F5F0"/>
+                            <a:srgbClr val="16181D"/>
                           </a:solidFill>
-                          <a:latin typeface="Noto Sans JP" pitchFamily="34" charset="0"/>
-                          <a:ea typeface="Noto Sans JP" pitchFamily="34" charset="-122"/>
-                          <a:cs typeface="Noto Sans JP" pitchFamily="34" charset="-120"/>
+                          <a:latin typeface="BIZ UDPGothic" pitchFamily="34" charset="0"/>
+                          <a:ea typeface="BIZ UDPGothic" pitchFamily="34" charset="-122"/>
+                          <a:cs typeface="BIZ UDPGothic" pitchFamily="34" charset="-120"/>
                         </a:rPr>
                         <a:t>精査中</a:t>
                       </a:r>
                       <a:endParaRPr lang="en-US" sz="1150" dirty="0">
-                        <a:latin typeface="Noto Sans JP" charset="0"/>
-                        <a:ea typeface="Noto Sans JP" charset="0"/>
-                        <a:cs typeface="Noto Sans JP" charset="0"/>
+                        <a:latin typeface="BIZ UDPGothic" charset="0"/>
+                        <a:ea typeface="BIZ UDPGothic" charset="0"/>
+                        <a:cs typeface="BIZ UDPGothic" charset="0"/>
                       </a:endParaRPr>
                     </a:p>
                   </a:txBody>
                   <a:tcPr marL="101600" marR="101600" marT="50800" marB="50800" anchor="ctr">
                     <a:lnL w="6350" cap="flat" cmpd="sng" algn="ctr">
                       <a:solidFill>
-                        <a:srgbClr val="2E2E2E"/>
+                        <a:srgbClr val="DDE0E6"/>
                       </a:solidFill>
                       <a:prstDash val="solid"/>
                       <a:round/>
@@ -11872,7 +11872,7 @@
                     </a:lnL>
                     <a:lnR w="6350" cap="flat" cmpd="sng" algn="ctr">
                       <a:solidFill>
-                        <a:srgbClr val="2E2E2E"/>
+                        <a:srgbClr val="DDE0E6"/>
                       </a:solidFill>
                       <a:prstDash val="solid"/>
                       <a:round/>
@@ -11881,7 +11881,7 @@
                     </a:lnR>
                     <a:lnT w="6350" cap="flat" cmpd="sng" algn="ctr">
                       <a:solidFill>
-                        <a:srgbClr val="2E2E2E"/>
+                        <a:srgbClr val="DDE0E6"/>
                       </a:solidFill>
                       <a:prstDash val="solid"/>
                       <a:round/>
@@ -11890,7 +11890,7 @@
                     </a:lnT>
                     <a:lnB w="6350" cap="flat" cmpd="sng" algn="ctr">
                       <a:solidFill>
-                        <a:srgbClr val="2E2E2E"/>
+                        <a:srgbClr val="DDE0E6"/>
                       </a:solidFill>
                       <a:prstDash val="solid"/>
                       <a:round/>
@@ -11898,7 +11898,7 @@
                       <a:tailEnd type="none" w="med" len="med"/>
                     </a:lnB>
                     <a:solidFill>
-                      <a:srgbClr val="1A1A1A"/>
+                      <a:srgbClr val="FFFFFF"/>
                     </a:solidFill>
                   </a:tcPr>
                 </a:tc>
@@ -11934,11 +11934,11 @@
             <a:r>
               <a:rPr lang="en-US" sz="1250" b="1" dirty="0">
                 <a:solidFill>
-                  <a:srgbClr val="D62828"/>
-                </a:solidFill>
-                <a:latin typeface="Noto Sans JP" pitchFamily="34" charset="0"/>
-                <a:ea typeface="Noto Sans JP" pitchFamily="34" charset="-122"/>
-                <a:cs typeface="Noto Sans JP" pitchFamily="34" charset="-120"/>
+                  <a:srgbClr val="C8161D"/>
+                </a:solidFill>
+                <a:latin typeface="BIZ UDPGothic" pitchFamily="34" charset="0"/>
+                <a:ea typeface="BIZ UDPGothic" pitchFamily="34" charset="-122"/>
+                <a:cs typeface="BIZ UDPGothic" pitchFamily="34" charset="-120"/>
               </a:rPr>
               <a:t>国民の新たな負担として確定しているのは、伝統的工芸品分の209億円のみ。</a:t>
             </a:r>
@@ -11973,13 +11973,13 @@
             <a:r>
               <a:rPr lang="en-US" sz="800" dirty="0">
                 <a:solidFill>
-                  <a:srgbClr val="F5F5F0">
+                  <a:srgbClr val="16181D">
                     <a:alpha val="40000"/>
                   </a:srgbClr>
                 </a:solidFill>
                 <a:latin typeface="Arial" pitchFamily="34" charset="0"/>
-                <a:ea typeface="Arial" pitchFamily="34" charset="-122"/>
-                <a:cs typeface="Arial" pitchFamily="34" charset="-120"/>
+                <a:ea typeface="BIZ UDPGothic" pitchFamily="34" charset="-122"/>
+                <a:cs typeface="BIZ UDPGothic" pitchFamily="34" charset="-120"/>
               </a:rPr>
               <a:t>REBOOT JAPAN ── 政策提言プラットフォーム</a:t>
             </a:r>
@@ -12014,13 +12014,13 @@
             <a:r>
               <a:rPr lang="en-US" sz="800" dirty="0">
                 <a:solidFill>
-                  <a:srgbClr val="F5F5F0">
+                  <a:srgbClr val="16181D">
                     <a:alpha val="40000"/>
                   </a:srgbClr>
                 </a:solidFill>
                 <a:latin typeface="Arial" pitchFamily="34" charset="0"/>
-                <a:ea typeface="Arial" pitchFamily="34" charset="-122"/>
-                <a:cs typeface="Arial" pitchFamily="34" charset="-120"/>
+                <a:ea typeface="BIZ UDPGothic" pitchFamily="34" charset="-122"/>
+                <a:cs typeface="BIZ UDPGothic" pitchFamily="34" charset="-120"/>
               </a:rPr>
               <a:t>21</a:t>
             </a:r>
@@ -12042,7 +12042,7 @@
     <p:bg>
       <p:bgPr>
         <a:solidFill>
-          <a:srgbClr val="0A0A0A"/>
+          <a:srgbClr val="F5F6F8"/>
         </a:solidFill>
       </p:bgPr>
     </p:bg>
@@ -12087,11 +12087,11 @@
             <a:r>
               <a:rPr lang="en-US" sz="1200" b="1" spc="200" kern="0" dirty="0">
                 <a:solidFill>
-                  <a:srgbClr val="D62828"/>
+                  <a:srgbClr val="C8161D"/>
                 </a:solidFill>
                 <a:latin typeface="Arial" pitchFamily="34" charset="0"/>
-                <a:ea typeface="Arial" pitchFamily="34" charset="-122"/>
-                <a:cs typeface="Arial" pitchFamily="34" charset="-120"/>
+                <a:ea typeface="BIZ UDPGothic" pitchFamily="34" charset="-122"/>
+                <a:cs typeface="BIZ UDPGothic" pitchFamily="34" charset="-120"/>
               </a:rPr>
               <a:t>FINANCE — SCENARIO</a:t>
             </a:r>
@@ -12129,11 +12129,11 @@
             <a:r>
               <a:rPr lang="en-US" sz="2600" b="1" dirty="0">
                 <a:solidFill>
-                  <a:srgbClr val="F5F5F0"/>
-                </a:solidFill>
-                <a:latin typeface="Noto Sans JP" pitchFamily="34" charset="0"/>
-                <a:ea typeface="Noto Sans JP" pitchFamily="34" charset="-122"/>
-                <a:cs typeface="Noto Sans JP" pitchFamily="34" charset="-120"/>
+                  <a:srgbClr val="16181D"/>
+                </a:solidFill>
+                <a:latin typeface="BIZ UDPGothic" pitchFamily="34" charset="0"/>
+                <a:ea typeface="BIZ UDPGothic" pitchFamily="34" charset="-122"/>
+                <a:cs typeface="BIZ UDPGothic" pitchFamily="34" charset="-120"/>
               </a:rPr>
               <a:t>保守的シナリオ・楽観的シナリオ</a:t>
             </a:r>
@@ -12178,16 +12178,16 @@
                         <a:buNone/>
                       </a:pPr>
                       <a:endParaRPr lang="en-US" sz="1200" dirty="0">
-                        <a:latin typeface="Noto Sans JP" charset="0"/>
-                        <a:ea typeface="Noto Sans JP" charset="0"/>
-                        <a:cs typeface="Noto Sans JP" charset="0"/>
+                        <a:latin typeface="BIZ UDPGothic" charset="0"/>
+                        <a:ea typeface="BIZ UDPGothic" charset="0"/>
+                        <a:cs typeface="BIZ UDPGothic" charset="0"/>
                       </a:endParaRPr>
                     </a:p>
                   </a:txBody>
                   <a:tcPr marL="101600" marR="101600" marT="50800" marB="50800" anchor="ctr">
                     <a:lnL w="6350" cap="flat" cmpd="sng" algn="ctr">
                       <a:solidFill>
-                        <a:srgbClr val="2E2E2E"/>
+                        <a:srgbClr val="DDE0E6"/>
                       </a:solidFill>
                       <a:prstDash val="solid"/>
                       <a:round/>
@@ -12196,7 +12196,7 @@
                     </a:lnL>
                     <a:lnR w="6350" cap="flat" cmpd="sng" algn="ctr">
                       <a:solidFill>
-                        <a:srgbClr val="2E2E2E"/>
+                        <a:srgbClr val="DDE0E6"/>
                       </a:solidFill>
                       <a:prstDash val="solid"/>
                       <a:round/>
@@ -12205,7 +12205,7 @@
                     </a:lnR>
                     <a:lnT w="6350" cap="flat" cmpd="sng" algn="ctr">
                       <a:solidFill>
-                        <a:srgbClr val="2E2E2E"/>
+                        <a:srgbClr val="DDE0E6"/>
                       </a:solidFill>
                       <a:prstDash val="solid"/>
                       <a:round/>
@@ -12214,7 +12214,7 @@
                     </a:lnT>
                     <a:lnB w="6350" cap="flat" cmpd="sng" algn="ctr">
                       <a:solidFill>
-                        <a:srgbClr val="2E2E2E"/>
+                        <a:srgbClr val="DDE0E6"/>
                       </a:solidFill>
                       <a:prstDash val="solid"/>
                       <a:round/>
@@ -12222,7 +12222,7 @@
                       <a:tailEnd type="none" w="med" len="med"/>
                     </a:lnB>
                     <a:solidFill>
-                      <a:srgbClr val="D62828"/>
+                      <a:srgbClr val="C8161D"/>
                     </a:solidFill>
                   </a:tcPr>
                 </a:tc>
@@ -12237,25 +12237,25 @@
                       <a:r>
                         <a:rPr lang="en-US" sz="1200" b="1" dirty="0">
                           <a:solidFill>
-                            <a:srgbClr val="F5F5F0"/>
+                            <a:srgbClr val="FFFFFF"/>
                           </a:solidFill>
-                          <a:latin typeface="Noto Sans JP" pitchFamily="34" charset="0"/>
-                          <a:ea typeface="Noto Sans JP" pitchFamily="34" charset="-122"/>
-                          <a:cs typeface="Noto Sans JP" pitchFamily="34" charset="-120"/>
+                          <a:latin typeface="BIZ UDPGothic" pitchFamily="34" charset="0"/>
+                          <a:ea typeface="BIZ UDPGothic" pitchFamily="34" charset="-122"/>
+                          <a:cs typeface="BIZ UDPGothic" pitchFamily="34" charset="-120"/>
                         </a:rPr>
                         <a:t>保守的シナリオ</a:t>
                       </a:r>
                       <a:endParaRPr lang="en-US" sz="1200" dirty="0">
-                        <a:latin typeface="Noto Sans JP" charset="0"/>
-                        <a:ea typeface="Noto Sans JP" charset="0"/>
-                        <a:cs typeface="Noto Sans JP" charset="0"/>
+                        <a:latin typeface="BIZ UDPGothic" charset="0"/>
+                        <a:ea typeface="BIZ UDPGothic" charset="0"/>
+                        <a:cs typeface="BIZ UDPGothic" charset="0"/>
                       </a:endParaRPr>
                     </a:p>
                   </a:txBody>
                   <a:tcPr marL="101600" marR="101600" marT="50800" marB="50800" anchor="ctr">
                     <a:lnL w="6350" cap="flat" cmpd="sng" algn="ctr">
                       <a:solidFill>
-                        <a:srgbClr val="2E2E2E"/>
+                        <a:srgbClr val="DDE0E6"/>
                       </a:solidFill>
                       <a:prstDash val="solid"/>
                       <a:round/>
@@ -12264,7 +12264,7 @@
                     </a:lnL>
                     <a:lnR w="6350" cap="flat" cmpd="sng" algn="ctr">
                       <a:solidFill>
-                        <a:srgbClr val="2E2E2E"/>
+                        <a:srgbClr val="DDE0E6"/>
                       </a:solidFill>
                       <a:prstDash val="solid"/>
                       <a:round/>
@@ -12273,7 +12273,7 @@
                     </a:lnR>
                     <a:lnT w="6350" cap="flat" cmpd="sng" algn="ctr">
                       <a:solidFill>
-                        <a:srgbClr val="2E2E2E"/>
+                        <a:srgbClr val="DDE0E6"/>
                       </a:solidFill>
                       <a:prstDash val="solid"/>
                       <a:round/>
@@ -12282,7 +12282,7 @@
                     </a:lnT>
                     <a:lnB w="6350" cap="flat" cmpd="sng" algn="ctr">
                       <a:solidFill>
-                        <a:srgbClr val="2E2E2E"/>
+                        <a:srgbClr val="DDE0E6"/>
                       </a:solidFill>
                       <a:prstDash val="solid"/>
                       <a:round/>
@@ -12290,7 +12290,7 @@
                       <a:tailEnd type="none" w="med" len="med"/>
                     </a:lnB>
                     <a:solidFill>
-                      <a:srgbClr val="D62828"/>
+                      <a:srgbClr val="C8161D"/>
                     </a:solidFill>
                   </a:tcPr>
                 </a:tc>
@@ -12305,25 +12305,25 @@
                       <a:r>
                         <a:rPr lang="en-US" sz="1200" b="1" dirty="0">
                           <a:solidFill>
-                            <a:srgbClr val="F5F5F0"/>
+                            <a:srgbClr val="FFFFFF"/>
                           </a:solidFill>
-                          <a:latin typeface="Noto Sans JP" pitchFamily="34" charset="0"/>
-                          <a:ea typeface="Noto Sans JP" pitchFamily="34" charset="-122"/>
-                          <a:cs typeface="Noto Sans JP" pitchFamily="34" charset="-120"/>
+                          <a:latin typeface="BIZ UDPGothic" pitchFamily="34" charset="0"/>
+                          <a:ea typeface="BIZ UDPGothic" pitchFamily="34" charset="-122"/>
+                          <a:cs typeface="BIZ UDPGothic" pitchFamily="34" charset="-120"/>
                         </a:rPr>
                         <a:t>楽観的シナリオ</a:t>
                       </a:r>
                       <a:endParaRPr lang="en-US" sz="1200" dirty="0">
-                        <a:latin typeface="Noto Sans JP" charset="0"/>
-                        <a:ea typeface="Noto Sans JP" charset="0"/>
-                        <a:cs typeface="Noto Sans JP" charset="0"/>
+                        <a:latin typeface="BIZ UDPGothic" charset="0"/>
+                        <a:ea typeface="BIZ UDPGothic" charset="0"/>
+                        <a:cs typeface="BIZ UDPGothic" charset="0"/>
                       </a:endParaRPr>
                     </a:p>
                   </a:txBody>
                   <a:tcPr marL="101600" marR="101600" marT="50800" marB="50800" anchor="ctr">
                     <a:lnL w="6350" cap="flat" cmpd="sng" algn="ctr">
                       <a:solidFill>
-                        <a:srgbClr val="2E2E2E"/>
+                        <a:srgbClr val="DDE0E6"/>
                       </a:solidFill>
                       <a:prstDash val="solid"/>
                       <a:round/>
@@ -12332,7 +12332,7 @@
                     </a:lnL>
                     <a:lnR w="6350" cap="flat" cmpd="sng" algn="ctr">
                       <a:solidFill>
-                        <a:srgbClr val="2E2E2E"/>
+                        <a:srgbClr val="DDE0E6"/>
                       </a:solidFill>
                       <a:prstDash val="solid"/>
                       <a:round/>
@@ -12341,7 +12341,7 @@
                     </a:lnR>
                     <a:lnT w="6350" cap="flat" cmpd="sng" algn="ctr">
                       <a:solidFill>
-                        <a:srgbClr val="2E2E2E"/>
+                        <a:srgbClr val="DDE0E6"/>
                       </a:solidFill>
                       <a:prstDash val="solid"/>
                       <a:round/>
@@ -12350,7 +12350,7 @@
                     </a:lnT>
                     <a:lnB w="6350" cap="flat" cmpd="sng" algn="ctr">
                       <a:solidFill>
-                        <a:srgbClr val="2E2E2E"/>
+                        <a:srgbClr val="DDE0E6"/>
                       </a:solidFill>
                       <a:prstDash val="solid"/>
                       <a:round/>
@@ -12358,7 +12358,7 @@
                       <a:tailEnd type="none" w="med" len="med"/>
                     </a:lnB>
                     <a:solidFill>
-                      <a:srgbClr val="D62828"/>
+                      <a:srgbClr val="C8161D"/>
                     </a:solidFill>
                   </a:tcPr>
                 </a:tc>
@@ -12375,25 +12375,25 @@
                       <a:r>
                         <a:rPr lang="en-US" sz="1150" dirty="0">
                           <a:solidFill>
-                            <a:srgbClr val="F5F5F0"/>
+                            <a:srgbClr val="16181D"/>
                           </a:solidFill>
-                          <a:latin typeface="Noto Sans JP" pitchFamily="34" charset="0"/>
-                          <a:ea typeface="Noto Sans JP" pitchFamily="34" charset="-122"/>
-                          <a:cs typeface="Noto Sans JP" pitchFamily="34" charset="-120"/>
+                          <a:latin typeface="BIZ UDPGothic" pitchFamily="34" charset="0"/>
+                          <a:ea typeface="BIZ UDPGothic" pitchFamily="34" charset="-122"/>
+                          <a:cs typeface="BIZ UDPGothic" pitchFamily="34" charset="-120"/>
                         </a:rPr>
                         <a:t>レガシー廃止による原資</a:t>
                       </a:r>
                       <a:endParaRPr lang="en-US" sz="1150" dirty="0">
-                        <a:latin typeface="Noto Sans JP" charset="0"/>
-                        <a:ea typeface="Noto Sans JP" charset="0"/>
-                        <a:cs typeface="Noto Sans JP" charset="0"/>
+                        <a:latin typeface="BIZ UDPGothic" charset="0"/>
+                        <a:ea typeface="BIZ UDPGothic" charset="0"/>
+                        <a:cs typeface="BIZ UDPGothic" charset="0"/>
                       </a:endParaRPr>
                     </a:p>
                   </a:txBody>
                   <a:tcPr marL="101600" marR="101600" marT="50800" marB="50800" anchor="ctr">
                     <a:lnL w="6350" cap="flat" cmpd="sng" algn="ctr">
                       <a:solidFill>
-                        <a:srgbClr val="2E2E2E"/>
+                        <a:srgbClr val="DDE0E6"/>
                       </a:solidFill>
                       <a:prstDash val="solid"/>
                       <a:round/>
@@ -12402,7 +12402,7 @@
                     </a:lnL>
                     <a:lnR w="6350" cap="flat" cmpd="sng" algn="ctr">
                       <a:solidFill>
-                        <a:srgbClr val="2E2E2E"/>
+                        <a:srgbClr val="DDE0E6"/>
                       </a:solidFill>
                       <a:prstDash val="solid"/>
                       <a:round/>
@@ -12411,7 +12411,7 @@
                     </a:lnR>
                     <a:lnT w="6350" cap="flat" cmpd="sng" algn="ctr">
                       <a:solidFill>
-                        <a:srgbClr val="2E2E2E"/>
+                        <a:srgbClr val="DDE0E6"/>
                       </a:solidFill>
                       <a:prstDash val="solid"/>
                       <a:round/>
@@ -12420,7 +12420,7 @@
                     </a:lnT>
                     <a:lnB w="6350" cap="flat" cmpd="sng" algn="ctr">
                       <a:solidFill>
-                        <a:srgbClr val="2E2E2E"/>
+                        <a:srgbClr val="DDE0E6"/>
                       </a:solidFill>
                       <a:prstDash val="solid"/>
                       <a:round/>
@@ -12428,7 +12428,7 @@
                       <a:tailEnd type="none" w="med" len="med"/>
                     </a:lnB>
                     <a:solidFill>
-                      <a:srgbClr val="1A1A1A"/>
+                      <a:srgbClr val="FFFFFF"/>
                     </a:solidFill>
                   </a:tcPr>
                 </a:tc>
@@ -12443,25 +12443,25 @@
                       <a:r>
                         <a:rPr lang="en-US" sz="1150" dirty="0">
                           <a:solidFill>
-                            <a:srgbClr val="F5F5F0"/>
+                            <a:srgbClr val="16181D"/>
                           </a:solidFill>
-                          <a:latin typeface="Noto Sans JP" pitchFamily="34" charset="0"/>
-                          <a:ea typeface="Noto Sans JP" pitchFamily="34" charset="-122"/>
-                          <a:cs typeface="Noto Sans JP" pitchFamily="34" charset="-120"/>
+                          <a:latin typeface="BIZ UDPGothic" pitchFamily="34" charset="0"/>
+                          <a:ea typeface="BIZ UDPGothic" pitchFamily="34" charset="-122"/>
+                          <a:cs typeface="BIZ UDPGothic" pitchFamily="34" charset="-120"/>
                         </a:rPr>
                         <a:t>約3,800億円</a:t>
                       </a:r>
                       <a:endParaRPr lang="en-US" sz="1150" dirty="0">
-                        <a:latin typeface="Noto Sans JP" charset="0"/>
-                        <a:ea typeface="Noto Sans JP" charset="0"/>
-                        <a:cs typeface="Noto Sans JP" charset="0"/>
+                        <a:latin typeface="BIZ UDPGothic" charset="0"/>
+                        <a:ea typeface="BIZ UDPGothic" charset="0"/>
+                        <a:cs typeface="BIZ UDPGothic" charset="0"/>
                       </a:endParaRPr>
                     </a:p>
                   </a:txBody>
                   <a:tcPr marL="101600" marR="101600" marT="50800" marB="50800" anchor="ctr">
                     <a:lnL w="6350" cap="flat" cmpd="sng" algn="ctr">
                       <a:solidFill>
-                        <a:srgbClr val="2E2E2E"/>
+                        <a:srgbClr val="DDE0E6"/>
                       </a:solidFill>
                       <a:prstDash val="solid"/>
                       <a:round/>
@@ -12470,7 +12470,7 @@
                     </a:lnL>
                     <a:lnR w="6350" cap="flat" cmpd="sng" algn="ctr">
                       <a:solidFill>
-                        <a:srgbClr val="2E2E2E"/>
+                        <a:srgbClr val="DDE0E6"/>
                       </a:solidFill>
                       <a:prstDash val="solid"/>
                       <a:round/>
@@ -12479,7 +12479,7 @@
                     </a:lnR>
                     <a:lnT w="6350" cap="flat" cmpd="sng" algn="ctr">
                       <a:solidFill>
-                        <a:srgbClr val="2E2E2E"/>
+                        <a:srgbClr val="DDE0E6"/>
                       </a:solidFill>
                       <a:prstDash val="solid"/>
                       <a:round/>
@@ -12488,7 +12488,7 @@
                     </a:lnT>
                     <a:lnB w="6350" cap="flat" cmpd="sng" algn="ctr">
                       <a:solidFill>
-                        <a:srgbClr val="2E2E2E"/>
+                        <a:srgbClr val="DDE0E6"/>
                       </a:solidFill>
                       <a:prstDash val="solid"/>
                       <a:round/>
@@ -12496,7 +12496,7 @@
                       <a:tailEnd type="none" w="med" len="med"/>
                     </a:lnB>
                     <a:solidFill>
-                      <a:srgbClr val="1A1A1A"/>
+                      <a:srgbClr val="FFFFFF"/>
                     </a:solidFill>
                   </a:tcPr>
                 </a:tc>
@@ -12511,25 +12511,25 @@
                       <a:r>
                         <a:rPr lang="en-US" sz="1150" dirty="0">
                           <a:solidFill>
-                            <a:srgbClr val="F5F5F0"/>
+                            <a:srgbClr val="16181D"/>
                           </a:solidFill>
-                          <a:latin typeface="Noto Sans JP" pitchFamily="34" charset="0"/>
-                          <a:ea typeface="Noto Sans JP" pitchFamily="34" charset="-122"/>
-                          <a:cs typeface="Noto Sans JP" pitchFamily="34" charset="-120"/>
+                          <a:latin typeface="BIZ UDPGothic" pitchFamily="34" charset="0"/>
+                          <a:ea typeface="BIZ UDPGothic" pitchFamily="34" charset="-122"/>
+                          <a:cs typeface="BIZ UDPGothic" pitchFamily="34" charset="-120"/>
                         </a:rPr>
                         <a:t>約4,064億円（上限値）</a:t>
                       </a:r>
                       <a:endParaRPr lang="en-US" sz="1150" dirty="0">
-                        <a:latin typeface="Noto Sans JP" charset="0"/>
-                        <a:ea typeface="Noto Sans JP" charset="0"/>
-                        <a:cs typeface="Noto Sans JP" charset="0"/>
+                        <a:latin typeface="BIZ UDPGothic" charset="0"/>
+                        <a:ea typeface="BIZ UDPGothic" charset="0"/>
+                        <a:cs typeface="BIZ UDPGothic" charset="0"/>
                       </a:endParaRPr>
                     </a:p>
                   </a:txBody>
                   <a:tcPr marL="101600" marR="101600" marT="50800" marB="50800" anchor="ctr">
                     <a:lnL w="6350" cap="flat" cmpd="sng" algn="ctr">
                       <a:solidFill>
-                        <a:srgbClr val="2E2E2E"/>
+                        <a:srgbClr val="DDE0E6"/>
                       </a:solidFill>
                       <a:prstDash val="solid"/>
                       <a:round/>
@@ -12538,7 +12538,7 @@
                     </a:lnL>
                     <a:lnR w="6350" cap="flat" cmpd="sng" algn="ctr">
                       <a:solidFill>
-                        <a:srgbClr val="2E2E2E"/>
+                        <a:srgbClr val="DDE0E6"/>
                       </a:solidFill>
                       <a:prstDash val="solid"/>
                       <a:round/>
@@ -12547,7 +12547,7 @@
                     </a:lnR>
                     <a:lnT w="6350" cap="flat" cmpd="sng" algn="ctr">
                       <a:solidFill>
-                        <a:srgbClr val="2E2E2E"/>
+                        <a:srgbClr val="DDE0E6"/>
                       </a:solidFill>
                       <a:prstDash val="solid"/>
                       <a:round/>
@@ -12556,7 +12556,7 @@
                     </a:lnT>
                     <a:lnB w="6350" cap="flat" cmpd="sng" algn="ctr">
                       <a:solidFill>
-                        <a:srgbClr val="2E2E2E"/>
+                        <a:srgbClr val="DDE0E6"/>
                       </a:solidFill>
                       <a:prstDash val="solid"/>
                       <a:round/>
@@ -12564,7 +12564,7 @@
                       <a:tailEnd type="none" w="med" len="med"/>
                     </a:lnB>
                     <a:solidFill>
-                      <a:srgbClr val="1A1A1A"/>
+                      <a:srgbClr val="FFFFFF"/>
                     </a:solidFill>
                   </a:tcPr>
                 </a:tc>
@@ -12581,25 +12581,25 @@
                       <a:r>
                         <a:rPr lang="en-US" sz="1150" dirty="0">
                           <a:solidFill>
-                            <a:srgbClr val="F5F5F0"/>
+                            <a:srgbClr val="16181D"/>
                           </a:solidFill>
-                          <a:latin typeface="Noto Sans JP" pitchFamily="34" charset="0"/>
-                          <a:ea typeface="Noto Sans JP" pitchFamily="34" charset="-122"/>
-                          <a:cs typeface="Noto Sans JP" pitchFamily="34" charset="-120"/>
+                          <a:latin typeface="BIZ UDPGothic" pitchFamily="34" charset="0"/>
+                          <a:ea typeface="BIZ UDPGothic" pitchFamily="34" charset="-122"/>
+                          <a:cs typeface="BIZ UDPGothic" pitchFamily="34" charset="-120"/>
                         </a:rPr>
                         <a:t>フロンティア投資への追加投入額</a:t>
                       </a:r>
                       <a:endParaRPr lang="en-US" sz="1150" dirty="0">
-                        <a:latin typeface="Noto Sans JP" charset="0"/>
-                        <a:ea typeface="Noto Sans JP" charset="0"/>
-                        <a:cs typeface="Noto Sans JP" charset="0"/>
+                        <a:latin typeface="BIZ UDPGothic" charset="0"/>
+                        <a:ea typeface="BIZ UDPGothic" charset="0"/>
+                        <a:cs typeface="BIZ UDPGothic" charset="0"/>
                       </a:endParaRPr>
                     </a:p>
                   </a:txBody>
                   <a:tcPr marL="101600" marR="101600" marT="50800" marB="50800" anchor="ctr">
                     <a:lnL w="6350" cap="flat" cmpd="sng" algn="ctr">
                       <a:solidFill>
-                        <a:srgbClr val="2E2E2E"/>
+                        <a:srgbClr val="DDE0E6"/>
                       </a:solidFill>
                       <a:prstDash val="solid"/>
                       <a:round/>
@@ -12608,7 +12608,7 @@
                     </a:lnL>
                     <a:lnR w="6350" cap="flat" cmpd="sng" algn="ctr">
                       <a:solidFill>
-                        <a:srgbClr val="2E2E2E"/>
+                        <a:srgbClr val="DDE0E6"/>
                       </a:solidFill>
                       <a:prstDash val="solid"/>
                       <a:round/>
@@ -12617,7 +12617,7 @@
                     </a:lnR>
                     <a:lnT w="6350" cap="flat" cmpd="sng" algn="ctr">
                       <a:solidFill>
-                        <a:srgbClr val="2E2E2E"/>
+                        <a:srgbClr val="DDE0E6"/>
                       </a:solidFill>
                       <a:prstDash val="solid"/>
                       <a:round/>
@@ -12626,7 +12626,7 @@
                     </a:lnT>
                     <a:lnB w="6350" cap="flat" cmpd="sng" algn="ctr">
                       <a:solidFill>
-                        <a:srgbClr val="2E2E2E"/>
+                        <a:srgbClr val="DDE0E6"/>
                       </a:solidFill>
                       <a:prstDash val="solid"/>
                       <a:round/>
@@ -12634,7 +12634,7 @@
                       <a:tailEnd type="none" w="med" len="med"/>
                     </a:lnB>
                     <a:solidFill>
-                      <a:srgbClr val="151515"/>
+                      <a:srgbClr val="FFFFFF"/>
                     </a:solidFill>
                   </a:tcPr>
                 </a:tc>
@@ -12649,25 +12649,25 @@
                       <a:r>
                         <a:rPr lang="en-US" sz="1150" dirty="0">
                           <a:solidFill>
-                            <a:srgbClr val="F5F5F0"/>
+                            <a:srgbClr val="16181D"/>
                           </a:solidFill>
-                          <a:latin typeface="Noto Sans JP" pitchFamily="34" charset="0"/>
-                          <a:ea typeface="Noto Sans JP" pitchFamily="34" charset="-122"/>
-                          <a:cs typeface="Noto Sans JP" pitchFamily="34" charset="-120"/>
+                          <a:latin typeface="BIZ UDPGothic" pitchFamily="34" charset="0"/>
+                          <a:ea typeface="BIZ UDPGothic" pitchFamily="34" charset="-122"/>
+                          <a:cs typeface="BIZ UDPGothic" pitchFamily="34" charset="-120"/>
                         </a:rPr>
                         <a:t>約3,800億円/年</a:t>
                       </a:r>
                       <a:endParaRPr lang="en-US" sz="1150" dirty="0">
-                        <a:latin typeface="Noto Sans JP" charset="0"/>
-                        <a:ea typeface="Noto Sans JP" charset="0"/>
-                        <a:cs typeface="Noto Sans JP" charset="0"/>
+                        <a:latin typeface="BIZ UDPGothic" charset="0"/>
+                        <a:ea typeface="BIZ UDPGothic" charset="0"/>
+                        <a:cs typeface="BIZ UDPGothic" charset="0"/>
                       </a:endParaRPr>
                     </a:p>
                   </a:txBody>
                   <a:tcPr marL="101600" marR="101600" marT="50800" marB="50800" anchor="ctr">
                     <a:lnL w="6350" cap="flat" cmpd="sng" algn="ctr">
                       <a:solidFill>
-                        <a:srgbClr val="2E2E2E"/>
+                        <a:srgbClr val="DDE0E6"/>
                       </a:solidFill>
                       <a:prstDash val="solid"/>
                       <a:round/>
@@ -12676,7 +12676,7 @@
                     </a:lnL>
                     <a:lnR w="6350" cap="flat" cmpd="sng" algn="ctr">
                       <a:solidFill>
-                        <a:srgbClr val="2E2E2E"/>
+                        <a:srgbClr val="DDE0E6"/>
                       </a:solidFill>
                       <a:prstDash val="solid"/>
                       <a:round/>
@@ -12685,7 +12685,7 @@
                     </a:lnR>
                     <a:lnT w="6350" cap="flat" cmpd="sng" algn="ctr">
                       <a:solidFill>
-                        <a:srgbClr val="2E2E2E"/>
+                        <a:srgbClr val="DDE0E6"/>
                       </a:solidFill>
                       <a:prstDash val="solid"/>
                       <a:round/>
@@ -12694,7 +12694,7 @@
                     </a:lnT>
                     <a:lnB w="6350" cap="flat" cmpd="sng" algn="ctr">
                       <a:solidFill>
-                        <a:srgbClr val="2E2E2E"/>
+                        <a:srgbClr val="DDE0E6"/>
                       </a:solidFill>
                       <a:prstDash val="solid"/>
                       <a:round/>
@@ -12702,7 +12702,7 @@
                       <a:tailEnd type="none" w="med" len="med"/>
                     </a:lnB>
                     <a:solidFill>
-                      <a:srgbClr val="151515"/>
+                      <a:srgbClr val="FFFFFF"/>
                     </a:solidFill>
                   </a:tcPr>
                 </a:tc>
@@ -12717,25 +12717,25 @@
                       <a:r>
                         <a:rPr lang="en-US" sz="1150" dirty="0">
                           <a:solidFill>
-                            <a:srgbClr val="F5F5F0"/>
+                            <a:srgbClr val="16181D"/>
                           </a:solidFill>
-                          <a:latin typeface="Noto Sans JP" pitchFamily="34" charset="0"/>
-                          <a:ea typeface="Noto Sans JP" pitchFamily="34" charset="-122"/>
-                          <a:cs typeface="Noto Sans JP" pitchFamily="34" charset="-120"/>
+                          <a:latin typeface="BIZ UDPGothic" pitchFamily="34" charset="0"/>
+                          <a:ea typeface="BIZ UDPGothic" pitchFamily="34" charset="-122"/>
+                          <a:cs typeface="BIZ UDPGothic" pitchFamily="34" charset="-120"/>
                         </a:rPr>
                         <a:t>約4,064億円/年</a:t>
                       </a:r>
                       <a:endParaRPr lang="en-US" sz="1150" dirty="0">
-                        <a:latin typeface="Noto Sans JP" charset="0"/>
-                        <a:ea typeface="Noto Sans JP" charset="0"/>
-                        <a:cs typeface="Noto Sans JP" charset="0"/>
+                        <a:latin typeface="BIZ UDPGothic" charset="0"/>
+                        <a:ea typeface="BIZ UDPGothic" charset="0"/>
+                        <a:cs typeface="BIZ UDPGothic" charset="0"/>
                       </a:endParaRPr>
                     </a:p>
                   </a:txBody>
                   <a:tcPr marL="101600" marR="101600" marT="50800" marB="50800" anchor="ctr">
                     <a:lnL w="6350" cap="flat" cmpd="sng" algn="ctr">
                       <a:solidFill>
-                        <a:srgbClr val="2E2E2E"/>
+                        <a:srgbClr val="DDE0E6"/>
                       </a:solidFill>
                       <a:prstDash val="solid"/>
                       <a:round/>
@@ -12744,7 +12744,7 @@
                     </a:lnL>
                     <a:lnR w="6350" cap="flat" cmpd="sng" algn="ctr">
                       <a:solidFill>
-                        <a:srgbClr val="2E2E2E"/>
+                        <a:srgbClr val="DDE0E6"/>
                       </a:solidFill>
                       <a:prstDash val="solid"/>
                       <a:round/>
@@ -12753,7 +12753,7 @@
                     </a:lnR>
                     <a:lnT w="6350" cap="flat" cmpd="sng" algn="ctr">
                       <a:solidFill>
-                        <a:srgbClr val="2E2E2E"/>
+                        <a:srgbClr val="DDE0E6"/>
                       </a:solidFill>
                       <a:prstDash val="solid"/>
                       <a:round/>
@@ -12762,7 +12762,7 @@
                     </a:lnT>
                     <a:lnB w="6350" cap="flat" cmpd="sng" algn="ctr">
                       <a:solidFill>
-                        <a:srgbClr val="2E2E2E"/>
+                        <a:srgbClr val="DDE0E6"/>
                       </a:solidFill>
                       <a:prstDash val="solid"/>
                       <a:round/>
@@ -12770,7 +12770,7 @@
                       <a:tailEnd type="none" w="med" len="med"/>
                     </a:lnB>
                     <a:solidFill>
-                      <a:srgbClr val="151515"/>
+                      <a:srgbClr val="FFFFFF"/>
                     </a:solidFill>
                   </a:tcPr>
                 </a:tc>
@@ -12787,25 +12787,25 @@
                       <a:r>
                         <a:rPr lang="en-US" sz="1150" dirty="0">
                           <a:solidFill>
-                            <a:srgbClr val="F5F5F0"/>
+                            <a:srgbClr val="16181D"/>
                           </a:solidFill>
-                          <a:latin typeface="Noto Sans JP" pitchFamily="34" charset="0"/>
-                          <a:ea typeface="Noto Sans JP" pitchFamily="34" charset="-122"/>
-                          <a:cs typeface="Noto Sans JP" pitchFamily="34" charset="-120"/>
+                          <a:latin typeface="BIZ UDPGothic" pitchFamily="34" charset="0"/>
+                          <a:ea typeface="BIZ UDPGothic" pitchFamily="34" charset="-122"/>
+                          <a:cs typeface="BIZ UDPGothic" pitchFamily="34" charset="-120"/>
                         </a:rPr>
                         <a:t>財政負担の純増</a:t>
                       </a:r>
                       <a:endParaRPr lang="en-US" sz="1150" dirty="0">
-                        <a:latin typeface="Noto Sans JP" charset="0"/>
-                        <a:ea typeface="Noto Sans JP" charset="0"/>
-                        <a:cs typeface="Noto Sans JP" charset="0"/>
+                        <a:latin typeface="BIZ UDPGothic" charset="0"/>
+                        <a:ea typeface="BIZ UDPGothic" charset="0"/>
+                        <a:cs typeface="BIZ UDPGothic" charset="0"/>
                       </a:endParaRPr>
                     </a:p>
                   </a:txBody>
                   <a:tcPr marL="101600" marR="101600" marT="50800" marB="50800" anchor="ctr">
                     <a:lnL w="6350" cap="flat" cmpd="sng" algn="ctr">
                       <a:solidFill>
-                        <a:srgbClr val="2E2E2E"/>
+                        <a:srgbClr val="DDE0E6"/>
                       </a:solidFill>
                       <a:prstDash val="solid"/>
                       <a:round/>
@@ -12814,7 +12814,7 @@
                     </a:lnL>
                     <a:lnR w="6350" cap="flat" cmpd="sng" algn="ctr">
                       <a:solidFill>
-                        <a:srgbClr val="2E2E2E"/>
+                        <a:srgbClr val="DDE0E6"/>
                       </a:solidFill>
                       <a:prstDash val="solid"/>
                       <a:round/>
@@ -12823,7 +12823,7 @@
                     </a:lnR>
                     <a:lnT w="6350" cap="flat" cmpd="sng" algn="ctr">
                       <a:solidFill>
-                        <a:srgbClr val="2E2E2E"/>
+                        <a:srgbClr val="DDE0E6"/>
                       </a:solidFill>
                       <a:prstDash val="solid"/>
                       <a:round/>
@@ -12832,7 +12832,7 @@
                     </a:lnT>
                     <a:lnB w="6350" cap="flat" cmpd="sng" algn="ctr">
                       <a:solidFill>
-                        <a:srgbClr val="2E2E2E"/>
+                        <a:srgbClr val="DDE0E6"/>
                       </a:solidFill>
                       <a:prstDash val="solid"/>
                       <a:round/>
@@ -12840,7 +12840,7 @@
                       <a:tailEnd type="none" w="med" len="med"/>
                     </a:lnB>
                     <a:solidFill>
-                      <a:srgbClr val="1A1A1A"/>
+                      <a:srgbClr val="FFFFFF"/>
                     </a:solidFill>
                   </a:tcPr>
                 </a:tc>
@@ -12855,25 +12855,25 @@
                       <a:r>
                         <a:rPr lang="en-US" sz="1150" dirty="0">
                           <a:solidFill>
-                            <a:srgbClr val="F5F5F0"/>
+                            <a:srgbClr val="16181D"/>
                           </a:solidFill>
-                          <a:latin typeface="Noto Sans JP" pitchFamily="34" charset="0"/>
-                          <a:ea typeface="Noto Sans JP" pitchFamily="34" charset="-122"/>
-                          <a:cs typeface="Noto Sans JP" pitchFamily="34" charset="-120"/>
+                          <a:latin typeface="BIZ UDPGothic" pitchFamily="34" charset="0"/>
+                          <a:ea typeface="BIZ UDPGothic" pitchFamily="34" charset="-122"/>
+                          <a:cs typeface="BIZ UDPGothic" pitchFamily="34" charset="-120"/>
                         </a:rPr>
                         <a:t>209億円（工芸分のみ）</a:t>
                       </a:r>
                       <a:endParaRPr lang="en-US" sz="1150" dirty="0">
-                        <a:latin typeface="Noto Sans JP" charset="0"/>
-                        <a:ea typeface="Noto Sans JP" charset="0"/>
-                        <a:cs typeface="Noto Sans JP" charset="0"/>
+                        <a:latin typeface="BIZ UDPGothic" charset="0"/>
+                        <a:ea typeface="BIZ UDPGothic" charset="0"/>
+                        <a:cs typeface="BIZ UDPGothic" charset="0"/>
                       </a:endParaRPr>
                     </a:p>
                   </a:txBody>
                   <a:tcPr marL="101600" marR="101600" marT="50800" marB="50800" anchor="ctr">
                     <a:lnL w="6350" cap="flat" cmpd="sng" algn="ctr">
                       <a:solidFill>
-                        <a:srgbClr val="2E2E2E"/>
+                        <a:srgbClr val="DDE0E6"/>
                       </a:solidFill>
                       <a:prstDash val="solid"/>
                       <a:round/>
@@ -12882,7 +12882,7 @@
                     </a:lnL>
                     <a:lnR w="6350" cap="flat" cmpd="sng" algn="ctr">
                       <a:solidFill>
-                        <a:srgbClr val="2E2E2E"/>
+                        <a:srgbClr val="DDE0E6"/>
                       </a:solidFill>
                       <a:prstDash val="solid"/>
                       <a:round/>
@@ -12891,7 +12891,7 @@
                     </a:lnR>
                     <a:lnT w="6350" cap="flat" cmpd="sng" algn="ctr">
                       <a:solidFill>
-                        <a:srgbClr val="2E2E2E"/>
+                        <a:srgbClr val="DDE0E6"/>
                       </a:solidFill>
                       <a:prstDash val="solid"/>
                       <a:round/>
@@ -12900,7 +12900,7 @@
                     </a:lnT>
                     <a:lnB w="6350" cap="flat" cmpd="sng" algn="ctr">
                       <a:solidFill>
-                        <a:srgbClr val="2E2E2E"/>
+                        <a:srgbClr val="DDE0E6"/>
                       </a:solidFill>
                       <a:prstDash val="solid"/>
                       <a:round/>
@@ -12908,7 +12908,7 @@
                       <a:tailEnd type="none" w="med" len="med"/>
                     </a:lnB>
                     <a:solidFill>
-                      <a:srgbClr val="1A1A1A"/>
+                      <a:srgbClr val="FFFFFF"/>
                     </a:solidFill>
                   </a:tcPr>
                 </a:tc>
@@ -12923,25 +12923,25 @@
                       <a:r>
                         <a:rPr lang="en-US" sz="1150" dirty="0">
                           <a:solidFill>
-                            <a:srgbClr val="F5F5F0"/>
+                            <a:srgbClr val="16181D"/>
                           </a:solidFill>
-                          <a:latin typeface="Noto Sans JP" pitchFamily="34" charset="0"/>
-                          <a:ea typeface="Noto Sans JP" pitchFamily="34" charset="-122"/>
-                          <a:cs typeface="Noto Sans JP" pitchFamily="34" charset="-120"/>
+                          <a:latin typeface="BIZ UDPGothic" pitchFamily="34" charset="0"/>
+                          <a:ea typeface="BIZ UDPGothic" pitchFamily="34" charset="-122"/>
+                          <a:cs typeface="BIZ UDPGothic" pitchFamily="34" charset="-120"/>
                         </a:rPr>
                         <a:t>209億円＋伝統芸能分（精査後確定）</a:t>
                       </a:r>
                       <a:endParaRPr lang="en-US" sz="1150" dirty="0">
-                        <a:latin typeface="Noto Sans JP" charset="0"/>
-                        <a:ea typeface="Noto Sans JP" charset="0"/>
-                        <a:cs typeface="Noto Sans JP" charset="0"/>
+                        <a:latin typeface="BIZ UDPGothic" charset="0"/>
+                        <a:ea typeface="BIZ UDPGothic" charset="0"/>
+                        <a:cs typeface="BIZ UDPGothic" charset="0"/>
                       </a:endParaRPr>
                     </a:p>
                   </a:txBody>
                   <a:tcPr marL="101600" marR="101600" marT="50800" marB="50800" anchor="ctr">
                     <a:lnL w="6350" cap="flat" cmpd="sng" algn="ctr">
                       <a:solidFill>
-                        <a:srgbClr val="2E2E2E"/>
+                        <a:srgbClr val="DDE0E6"/>
                       </a:solidFill>
                       <a:prstDash val="solid"/>
                       <a:round/>
@@ -12950,7 +12950,7 @@
                     </a:lnL>
                     <a:lnR w="6350" cap="flat" cmpd="sng" algn="ctr">
                       <a:solidFill>
-                        <a:srgbClr val="2E2E2E"/>
+                        <a:srgbClr val="DDE0E6"/>
                       </a:solidFill>
                       <a:prstDash val="solid"/>
                       <a:round/>
@@ -12959,7 +12959,7 @@
                     </a:lnR>
                     <a:lnT w="6350" cap="flat" cmpd="sng" algn="ctr">
                       <a:solidFill>
-                        <a:srgbClr val="2E2E2E"/>
+                        <a:srgbClr val="DDE0E6"/>
                       </a:solidFill>
                       <a:prstDash val="solid"/>
                       <a:round/>
@@ -12968,7 +12968,7 @@
                     </a:lnT>
                     <a:lnB w="6350" cap="flat" cmpd="sng" algn="ctr">
                       <a:solidFill>
-                        <a:srgbClr val="2E2E2E"/>
+                        <a:srgbClr val="DDE0E6"/>
                       </a:solidFill>
                       <a:prstDash val="solid"/>
                       <a:round/>
@@ -12976,7 +12976,7 @@
                       <a:tailEnd type="none" w="med" len="med"/>
                     </a:lnB>
                     <a:solidFill>
-                      <a:srgbClr val="1A1A1A"/>
+                      <a:srgbClr val="FFFFFF"/>
                     </a:solidFill>
                   </a:tcPr>
                 </a:tc>
@@ -13015,13 +13015,13 @@
             <a:r>
               <a:rPr lang="en-US" sz="1200" dirty="0">
                 <a:solidFill>
-                  <a:srgbClr val="F5F5F0">
+                  <a:srgbClr val="16181D">
                     <a:alpha val="90000"/>
                   </a:srgbClr>
                 </a:solidFill>
-                <a:latin typeface="Noto Sans JP" pitchFamily="34" charset="0"/>
-                <a:ea typeface="Noto Sans JP" pitchFamily="34" charset="-122"/>
-                <a:cs typeface="Noto Sans JP" pitchFamily="34" charset="-120"/>
+                <a:latin typeface="BIZ UDPGothic" pitchFamily="34" charset="0"/>
+                <a:ea typeface="BIZ UDPGothic" pitchFamily="34" charset="-122"/>
+                <a:cs typeface="BIZ UDPGothic" pitchFamily="34" charset="-120"/>
               </a:rPr>
               <a:t>いずれのシナリオでも、フロンティア投資は年4,000億円規模の新規原資を得る一方、国民負担の純増は数百億円規模に収まる。</a:t>
             </a:r>
@@ -13056,13 +13056,13 @@
             <a:r>
               <a:rPr lang="en-US" sz="800" dirty="0">
                 <a:solidFill>
-                  <a:srgbClr val="F5F5F0">
+                  <a:srgbClr val="16181D">
                     <a:alpha val="40000"/>
                   </a:srgbClr>
                 </a:solidFill>
                 <a:latin typeface="Arial" pitchFamily="34" charset="0"/>
-                <a:ea typeface="Arial" pitchFamily="34" charset="-122"/>
-                <a:cs typeface="Arial" pitchFamily="34" charset="-120"/>
+                <a:ea typeface="BIZ UDPGothic" pitchFamily="34" charset="-122"/>
+                <a:cs typeface="BIZ UDPGothic" pitchFamily="34" charset="-120"/>
               </a:rPr>
               <a:t>REBOOT JAPAN ── 政策提言プラットフォーム</a:t>
             </a:r>
@@ -13097,13 +13097,13 @@
             <a:r>
               <a:rPr lang="en-US" sz="800" dirty="0">
                 <a:solidFill>
-                  <a:srgbClr val="F5F5F0">
+                  <a:srgbClr val="16181D">
                     <a:alpha val="40000"/>
                   </a:srgbClr>
                 </a:solidFill>
                 <a:latin typeface="Arial" pitchFamily="34" charset="0"/>
-                <a:ea typeface="Arial" pitchFamily="34" charset="-122"/>
-                <a:cs typeface="Arial" pitchFamily="34" charset="-120"/>
+                <a:ea typeface="BIZ UDPGothic" pitchFamily="34" charset="-122"/>
+                <a:cs typeface="BIZ UDPGothic" pitchFamily="34" charset="-120"/>
               </a:rPr>
               <a:t>22</a:t>
             </a:r>
@@ -13125,7 +13125,7 @@
     <p:bg>
       <p:bgPr>
         <a:solidFill>
-          <a:srgbClr val="0A0A0A"/>
+          <a:srgbClr val="F5F6F8"/>
         </a:solidFill>
       </p:bgPr>
     </p:bg>
@@ -13170,11 +13170,11 @@
             <a:r>
               <a:rPr lang="en-US" sz="1200" b="1" spc="200" kern="0" dirty="0">
                 <a:solidFill>
-                  <a:srgbClr val="D62828"/>
+                  <a:srgbClr val="C8161D"/>
                 </a:solidFill>
                 <a:latin typeface="Arial" pitchFamily="34" charset="0"/>
-                <a:ea typeface="Arial" pitchFamily="34" charset="-122"/>
-                <a:cs typeface="Arial" pitchFamily="34" charset="-120"/>
+                <a:ea typeface="BIZ UDPGothic" pitchFamily="34" charset="-122"/>
+                <a:cs typeface="BIZ UDPGothic" pitchFamily="34" charset="-120"/>
               </a:rPr>
               <a:t>ROADMAP</a:t>
             </a:r>
@@ -13212,11 +13212,11 @@
             <a:r>
               <a:rPr lang="en-US" sz="2600" b="1" dirty="0">
                 <a:solidFill>
-                  <a:srgbClr val="F5F5F0"/>
-                </a:solidFill>
-                <a:latin typeface="Noto Sans JP" pitchFamily="34" charset="0"/>
-                <a:ea typeface="Noto Sans JP" pitchFamily="34" charset="-122"/>
-                <a:cs typeface="Noto Sans JP" pitchFamily="34" charset="-120"/>
+                  <a:srgbClr val="16181D"/>
+                </a:solidFill>
+                <a:latin typeface="BIZ UDPGothic" pitchFamily="34" charset="0"/>
+                <a:ea typeface="BIZ UDPGothic" pitchFamily="34" charset="-122"/>
+                <a:cs typeface="BIZ UDPGothic" pitchFamily="34" charset="-120"/>
               </a:rPr>
               <a:t>実行ロードマップ：1年目</a:t>
             </a:r>
@@ -13251,11 +13251,11 @@
             <a:r>
               <a:rPr lang="en-US" sz="2200" b="1" dirty="0">
                 <a:solidFill>
-                  <a:srgbClr val="D62828"/>
+                  <a:srgbClr val="C8161D"/>
                 </a:solidFill>
                 <a:latin typeface="Arial" pitchFamily="34" charset="0"/>
-                <a:ea typeface="Arial" pitchFamily="34" charset="-122"/>
-                <a:cs typeface="Arial" pitchFamily="34" charset="-120"/>
+                <a:ea typeface="BIZ UDPGothic" pitchFamily="34" charset="-122"/>
+                <a:cs typeface="BIZ UDPGothic" pitchFamily="34" charset="-120"/>
               </a:rPr>
               <a:t>01</a:t>
             </a:r>
@@ -13290,11 +13290,11 @@
             <a:r>
               <a:rPr lang="en-US" sz="1500" b="1" dirty="0">
                 <a:solidFill>
-                  <a:srgbClr val="F5F5F0"/>
-                </a:solidFill>
-                <a:latin typeface="Noto Sans JP" pitchFamily="34" charset="0"/>
-                <a:ea typeface="Noto Sans JP" pitchFamily="34" charset="-122"/>
-                <a:cs typeface="Noto Sans JP" pitchFamily="34" charset="-120"/>
+                  <a:srgbClr val="16181D"/>
+                </a:solidFill>
+                <a:latin typeface="BIZ UDPGothic" pitchFamily="34" charset="0"/>
+                <a:ea typeface="BIZ UDPGothic" pitchFamily="34" charset="-122"/>
+                <a:cs typeface="BIZ UDPGothic" pitchFamily="34" charset="-120"/>
               </a:rPr>
               <a:t>既存補助金制度の全廃・棚卸し</a:t>
             </a:r>
@@ -13332,13 +13332,13 @@
             <a:r>
               <a:rPr lang="en-US" sz="1150" dirty="0">
                 <a:solidFill>
-                  <a:srgbClr val="F5F5F0">
+                  <a:srgbClr val="16181D">
                     <a:alpha val="85000"/>
                   </a:srgbClr>
                 </a:solidFill>
-                <a:latin typeface="Noto Sans JP" pitchFamily="34" charset="0"/>
-                <a:ea typeface="Noto Sans JP" pitchFamily="34" charset="-122"/>
-                <a:cs typeface="Noto Sans JP" pitchFamily="34" charset="-120"/>
+                <a:latin typeface="BIZ UDPGothic" pitchFamily="34" charset="0"/>
+                <a:ea typeface="BIZ UDPGothic" pitchFamily="34" charset="-122"/>
+                <a:cs typeface="BIZ UDPGothic" pitchFamily="34" charset="-120"/>
               </a:rPr>
               <a:t>成熟産業支援・倒産回避目的・一般雇用助成金を一括廃止する法改正を行う。</a:t>
             </a:r>
@@ -13373,11 +13373,11 @@
             <a:r>
               <a:rPr lang="en-US" sz="2200" b="1" dirty="0">
                 <a:solidFill>
-                  <a:srgbClr val="D62828"/>
+                  <a:srgbClr val="C8161D"/>
                 </a:solidFill>
                 <a:latin typeface="Arial" pitchFamily="34" charset="0"/>
-                <a:ea typeface="Arial" pitchFamily="34" charset="-122"/>
-                <a:cs typeface="Arial" pitchFamily="34" charset="-120"/>
+                <a:ea typeface="BIZ UDPGothic" pitchFamily="34" charset="-122"/>
+                <a:cs typeface="BIZ UDPGothic" pitchFamily="34" charset="-120"/>
               </a:rPr>
               <a:t>02</a:t>
             </a:r>
@@ -13412,11 +13412,11 @@
             <a:r>
               <a:rPr lang="en-US" sz="1500" b="1" dirty="0">
                 <a:solidFill>
-                  <a:srgbClr val="F5F5F0"/>
-                </a:solidFill>
-                <a:latin typeface="Noto Sans JP" pitchFamily="34" charset="0"/>
-                <a:ea typeface="Noto Sans JP" pitchFamily="34" charset="-122"/>
-                <a:cs typeface="Noto Sans JP" pitchFamily="34" charset="-120"/>
+                  <a:srgbClr val="16181D"/>
+                </a:solidFill>
+                <a:latin typeface="BIZ UDPGothic" pitchFamily="34" charset="0"/>
+                <a:ea typeface="BIZ UDPGothic" pitchFamily="34" charset="-122"/>
+                <a:cs typeface="BIZ UDPGothic" pitchFamily="34" charset="-120"/>
               </a:rPr>
               <a:t>大規模成長投資補助金の転用を制度設計</a:t>
             </a:r>
@@ -13454,13 +13454,13 @@
             <a:r>
               <a:rPr lang="en-US" sz="1150" dirty="0">
                 <a:solidFill>
-                  <a:srgbClr val="F5F5F0">
+                  <a:srgbClr val="16181D">
                     <a:alpha val="85000"/>
                   </a:srgbClr>
                 </a:solidFill>
-                <a:latin typeface="Noto Sans JP" pitchFamily="34" charset="0"/>
-                <a:ea typeface="Noto Sans JP" pitchFamily="34" charset="-122"/>
-                <a:cs typeface="Noto Sans JP" pitchFamily="34" charset="-120"/>
+                <a:latin typeface="BIZ UDPGothic" pitchFamily="34" charset="0"/>
+                <a:ea typeface="BIZ UDPGothic" pitchFamily="34" charset="-122"/>
+                <a:cs typeface="BIZ UDPGothic" pitchFamily="34" charset="-120"/>
               </a:rPr>
               <a:t>離職後再就職支援へ切り替えるための具体的な制度づくりを開始する。</a:t>
             </a:r>
@@ -13495,13 +13495,13 @@
             <a:r>
               <a:rPr lang="en-US" sz="800" dirty="0">
                 <a:solidFill>
-                  <a:srgbClr val="F5F5F0">
+                  <a:srgbClr val="16181D">
                     <a:alpha val="40000"/>
                   </a:srgbClr>
                 </a:solidFill>
                 <a:latin typeface="Arial" pitchFamily="34" charset="0"/>
-                <a:ea typeface="Arial" pitchFamily="34" charset="-122"/>
-                <a:cs typeface="Arial" pitchFamily="34" charset="-120"/>
+                <a:ea typeface="BIZ UDPGothic" pitchFamily="34" charset="-122"/>
+                <a:cs typeface="BIZ UDPGothic" pitchFamily="34" charset="-120"/>
               </a:rPr>
               <a:t>REBOOT JAPAN ── 政策提言プラットフォーム</a:t>
             </a:r>
@@ -13536,13 +13536,13 @@
             <a:r>
               <a:rPr lang="en-US" sz="800" dirty="0">
                 <a:solidFill>
-                  <a:srgbClr val="F5F5F0">
+                  <a:srgbClr val="16181D">
                     <a:alpha val="40000"/>
                   </a:srgbClr>
                 </a:solidFill>
                 <a:latin typeface="Arial" pitchFamily="34" charset="0"/>
-                <a:ea typeface="Arial" pitchFamily="34" charset="-122"/>
-                <a:cs typeface="Arial" pitchFamily="34" charset="-120"/>
+                <a:ea typeface="BIZ UDPGothic" pitchFamily="34" charset="-122"/>
+                <a:cs typeface="BIZ UDPGothic" pitchFamily="34" charset="-120"/>
               </a:rPr>
               <a:t>23</a:t>
             </a:r>
@@ -13564,7 +13564,7 @@
     <p:bg>
       <p:bgPr>
         <a:solidFill>
-          <a:srgbClr val="0A0A0A"/>
+          <a:srgbClr val="F5F6F8"/>
         </a:solidFill>
       </p:bgPr>
     </p:bg>
@@ -13609,11 +13609,11 @@
             <a:r>
               <a:rPr lang="en-US" sz="1200" b="1" spc="200" kern="0" dirty="0">
                 <a:solidFill>
-                  <a:srgbClr val="D62828"/>
+                  <a:srgbClr val="C8161D"/>
                 </a:solidFill>
                 <a:latin typeface="Arial" pitchFamily="34" charset="0"/>
-                <a:ea typeface="Arial" pitchFamily="34" charset="-122"/>
-                <a:cs typeface="Arial" pitchFamily="34" charset="-120"/>
+                <a:ea typeface="BIZ UDPGothic" pitchFamily="34" charset="-122"/>
+                <a:cs typeface="BIZ UDPGothic" pitchFamily="34" charset="-120"/>
               </a:rPr>
               <a:t>ROADMAP</a:t>
             </a:r>
@@ -13651,11 +13651,11 @@
             <a:r>
               <a:rPr lang="en-US" sz="2600" b="1" dirty="0">
                 <a:solidFill>
-                  <a:srgbClr val="F5F5F0"/>
-                </a:solidFill>
-                <a:latin typeface="Noto Sans JP" pitchFamily="34" charset="0"/>
-                <a:ea typeface="Noto Sans JP" pitchFamily="34" charset="-122"/>
-                <a:cs typeface="Noto Sans JP" pitchFamily="34" charset="-120"/>
+                  <a:srgbClr val="16181D"/>
+                </a:solidFill>
+                <a:latin typeface="BIZ UDPGothic" pitchFamily="34" charset="0"/>
+                <a:ea typeface="BIZ UDPGothic" pitchFamily="34" charset="-122"/>
+                <a:cs typeface="BIZ UDPGothic" pitchFamily="34" charset="-120"/>
               </a:rPr>
               <a:t>実行ロードマップ：2年目</a:t>
             </a:r>
@@ -13690,11 +13690,11 @@
             <a:r>
               <a:rPr lang="en-US" sz="2200" b="1" dirty="0">
                 <a:solidFill>
-                  <a:srgbClr val="D62828"/>
+                  <a:srgbClr val="C8161D"/>
                 </a:solidFill>
                 <a:latin typeface="Arial" pitchFamily="34" charset="0"/>
-                <a:ea typeface="Arial" pitchFamily="34" charset="-122"/>
-                <a:cs typeface="Arial" pitchFamily="34" charset="-120"/>
+                <a:ea typeface="BIZ UDPGothic" pitchFamily="34" charset="-122"/>
+                <a:cs typeface="BIZ UDPGothic" pitchFamily="34" charset="-120"/>
               </a:rPr>
               <a:t>01</a:t>
             </a:r>
@@ -13729,11 +13729,11 @@
             <a:r>
               <a:rPr lang="en-US" sz="1500" b="1" dirty="0">
                 <a:solidFill>
-                  <a:srgbClr val="F5F5F0"/>
-                </a:solidFill>
-                <a:latin typeface="Noto Sans JP" pitchFamily="34" charset="0"/>
-                <a:ea typeface="Noto Sans JP" pitchFamily="34" charset="-122"/>
-                <a:cs typeface="Noto Sans JP" pitchFamily="34" charset="-120"/>
+                  <a:srgbClr val="16181D"/>
+                </a:solidFill>
+                <a:latin typeface="BIZ UDPGothic" pitchFamily="34" charset="0"/>
+                <a:ea typeface="BIZ UDPGothic" pitchFamily="34" charset="-122"/>
+                <a:cs typeface="BIZ UDPGothic" pitchFamily="34" charset="-120"/>
               </a:rPr>
               <a:t>「伝統文化保護特別枠」の創設</a:t>
             </a:r>
@@ -13771,13 +13771,13 @@
             <a:r>
               <a:rPr lang="en-US" sz="1150" dirty="0">
                 <a:solidFill>
-                  <a:srgbClr val="F5F5F0">
+                  <a:srgbClr val="16181D">
                     <a:alpha val="85000"/>
                   </a:srgbClr>
                 </a:solidFill>
-                <a:latin typeface="Noto Sans JP" pitchFamily="34" charset="0"/>
-                <a:ea typeface="Noto Sans JP" pitchFamily="34" charset="-122"/>
-                <a:cs typeface="Noto Sans JP" pitchFamily="34" charset="-120"/>
+                <a:latin typeface="BIZ UDPGothic" pitchFamily="34" charset="0"/>
+                <a:ea typeface="BIZ UDPGothic" pitchFamily="34" charset="-122"/>
+                <a:cs typeface="BIZ UDPGothic" pitchFamily="34" charset="-120"/>
               </a:rPr>
               <a:t>伝統的工芸品220億円への拡充と、神社仏閣・伝統芸能の予算を恒久財源として法律に明記する。</a:t>
             </a:r>
@@ -13812,11 +13812,11 @@
             <a:r>
               <a:rPr lang="en-US" sz="2200" b="1" dirty="0">
                 <a:solidFill>
-                  <a:srgbClr val="D62828"/>
+                  <a:srgbClr val="C8161D"/>
                 </a:solidFill>
                 <a:latin typeface="Arial" pitchFamily="34" charset="0"/>
-                <a:ea typeface="Arial" pitchFamily="34" charset="-122"/>
-                <a:cs typeface="Arial" pitchFamily="34" charset="-120"/>
+                <a:ea typeface="BIZ UDPGothic" pitchFamily="34" charset="-122"/>
+                <a:cs typeface="BIZ UDPGothic" pitchFamily="34" charset="-120"/>
               </a:rPr>
               <a:t>02</a:t>
             </a:r>
@@ -13851,11 +13851,11 @@
             <a:r>
               <a:rPr lang="en-US" sz="1500" b="1" dirty="0">
                 <a:solidFill>
-                  <a:srgbClr val="F5F5F0"/>
-                </a:solidFill>
-                <a:latin typeface="Noto Sans JP" pitchFamily="34" charset="0"/>
-                <a:ea typeface="Noto Sans JP" pitchFamily="34" charset="-122"/>
-                <a:cs typeface="Noto Sans JP" pitchFamily="34" charset="-120"/>
+                  <a:srgbClr val="16181D"/>
+                </a:solidFill>
+                <a:latin typeface="BIZ UDPGothic" pitchFamily="34" charset="0"/>
+                <a:ea typeface="BIZ UDPGothic" pitchFamily="34" charset="-122"/>
+                <a:cs typeface="BIZ UDPGothic" pitchFamily="34" charset="-120"/>
               </a:rPr>
               <a:t>「プロジェクト単位審査基準」の策定</a:t>
             </a:r>
@@ -13893,13 +13893,13 @@
             <a:r>
               <a:rPr lang="en-US" sz="1150" dirty="0">
                 <a:solidFill>
-                  <a:srgbClr val="F5F5F0">
+                  <a:srgbClr val="16181D">
                     <a:alpha val="85000"/>
                   </a:srgbClr>
                 </a:solidFill>
-                <a:latin typeface="Noto Sans JP" pitchFamily="34" charset="0"/>
-                <a:ea typeface="Noto Sans JP" pitchFamily="34" charset="-122"/>
-                <a:cs typeface="Noto Sans JP" pitchFamily="34" charset="-120"/>
+                <a:latin typeface="BIZ UDPGothic" pitchFamily="34" charset="0"/>
+                <a:ea typeface="BIZ UDPGothic" pitchFamily="34" charset="-122"/>
+                <a:cs typeface="BIZ UDPGothic" pitchFamily="34" charset="-120"/>
               </a:rPr>
               <a:t>フロンティア投資の対象技術領域リストと、業種を問わない審査ルールをつくる。大学寄付の税制優遇も拡充する。</a:t>
             </a:r>
@@ -13934,13 +13934,13 @@
             <a:r>
               <a:rPr lang="en-US" sz="800" dirty="0">
                 <a:solidFill>
-                  <a:srgbClr val="F5F5F0">
+                  <a:srgbClr val="16181D">
                     <a:alpha val="40000"/>
                   </a:srgbClr>
                 </a:solidFill>
                 <a:latin typeface="Arial" pitchFamily="34" charset="0"/>
-                <a:ea typeface="Arial" pitchFamily="34" charset="-122"/>
-                <a:cs typeface="Arial" pitchFamily="34" charset="-120"/>
+                <a:ea typeface="BIZ UDPGothic" pitchFamily="34" charset="-122"/>
+                <a:cs typeface="BIZ UDPGothic" pitchFamily="34" charset="-120"/>
               </a:rPr>
               <a:t>REBOOT JAPAN ── 政策提言プラットフォーム</a:t>
             </a:r>
@@ -13975,13 +13975,13 @@
             <a:r>
               <a:rPr lang="en-US" sz="800" dirty="0">
                 <a:solidFill>
-                  <a:srgbClr val="F5F5F0">
+                  <a:srgbClr val="16181D">
                     <a:alpha val="40000"/>
                   </a:srgbClr>
                 </a:solidFill>
                 <a:latin typeface="Arial" pitchFamily="34" charset="0"/>
-                <a:ea typeface="Arial" pitchFamily="34" charset="-122"/>
-                <a:cs typeface="Arial" pitchFamily="34" charset="-120"/>
+                <a:ea typeface="BIZ UDPGothic" pitchFamily="34" charset="-122"/>
+                <a:cs typeface="BIZ UDPGothic" pitchFamily="34" charset="-120"/>
               </a:rPr>
               <a:t>24</a:t>
             </a:r>
@@ -14003,7 +14003,7 @@
     <p:bg>
       <p:bgPr>
         <a:solidFill>
-          <a:srgbClr val="0A0A0A"/>
+          <a:srgbClr val="F5F6F8"/>
         </a:solidFill>
       </p:bgPr>
     </p:bg>
@@ -14048,11 +14048,11 @@
             <a:r>
               <a:rPr lang="en-US" sz="1200" b="1" spc="200" kern="0" dirty="0">
                 <a:solidFill>
-                  <a:srgbClr val="D62828"/>
+                  <a:srgbClr val="C8161D"/>
                 </a:solidFill>
                 <a:latin typeface="Arial" pitchFamily="34" charset="0"/>
-                <a:ea typeface="Arial" pitchFamily="34" charset="-122"/>
-                <a:cs typeface="Arial" pitchFamily="34" charset="-120"/>
+                <a:ea typeface="BIZ UDPGothic" pitchFamily="34" charset="-122"/>
+                <a:cs typeface="BIZ UDPGothic" pitchFamily="34" charset="-120"/>
               </a:rPr>
               <a:t>ROADMAP</a:t>
             </a:r>
@@ -14090,11 +14090,11 @@
             <a:r>
               <a:rPr lang="en-US" sz="2600" b="1" dirty="0">
                 <a:solidFill>
-                  <a:srgbClr val="F5F5F0"/>
-                </a:solidFill>
-                <a:latin typeface="Noto Sans JP" pitchFamily="34" charset="0"/>
-                <a:ea typeface="Noto Sans JP" pitchFamily="34" charset="-122"/>
-                <a:cs typeface="Noto Sans JP" pitchFamily="34" charset="-120"/>
+                  <a:srgbClr val="16181D"/>
+                </a:solidFill>
+                <a:latin typeface="BIZ UDPGothic" pitchFamily="34" charset="0"/>
+                <a:ea typeface="BIZ UDPGothic" pitchFamily="34" charset="-122"/>
+                <a:cs typeface="BIZ UDPGothic" pitchFamily="34" charset="-120"/>
               </a:rPr>
               <a:t>実行ロードマップ：3年目以降</a:t>
             </a:r>
@@ -14129,11 +14129,11 @@
             <a:r>
               <a:rPr lang="en-US" sz="2200" b="1" dirty="0">
                 <a:solidFill>
-                  <a:srgbClr val="D62828"/>
+                  <a:srgbClr val="C8161D"/>
                 </a:solidFill>
                 <a:latin typeface="Arial" pitchFamily="34" charset="0"/>
-                <a:ea typeface="Arial" pitchFamily="34" charset="-122"/>
-                <a:cs typeface="Arial" pitchFamily="34" charset="-120"/>
+                <a:ea typeface="BIZ UDPGothic" pitchFamily="34" charset="-122"/>
+                <a:cs typeface="BIZ UDPGothic" pitchFamily="34" charset="-120"/>
               </a:rPr>
               <a:t>01</a:t>
             </a:r>
@@ -14168,11 +14168,11 @@
             <a:r>
               <a:rPr lang="en-US" sz="1500" b="1" dirty="0">
                 <a:solidFill>
-                  <a:srgbClr val="F5F5F0"/>
-                </a:solidFill>
-                <a:latin typeface="Noto Sans JP" pitchFamily="34" charset="0"/>
-                <a:ea typeface="Noto Sans JP" pitchFamily="34" charset="-122"/>
-                <a:cs typeface="Noto Sans JP" pitchFamily="34" charset="-120"/>
+                  <a:srgbClr val="16181D"/>
+                </a:solidFill>
+                <a:latin typeface="BIZ UDPGothic" pitchFamily="34" charset="0"/>
+                <a:ea typeface="BIZ UDPGothic" pitchFamily="34" charset="-122"/>
+                <a:cs typeface="BIZ UDPGothic" pitchFamily="34" charset="-120"/>
               </a:rPr>
               <a:t>「10年後未来創出ファンド」の本格運用</a:t>
             </a:r>
@@ -14210,13 +14210,13 @@
             <a:r>
               <a:rPr lang="en-US" sz="1150" dirty="0">
                 <a:solidFill>
-                  <a:srgbClr val="F5F5F0">
+                  <a:srgbClr val="16181D">
                     <a:alpha val="85000"/>
                   </a:srgbClr>
                 </a:solidFill>
-                <a:latin typeface="Noto Sans JP" pitchFamily="34" charset="0"/>
-                <a:ea typeface="Noto Sans JP" pitchFamily="34" charset="-122"/>
-                <a:cs typeface="Noto Sans JP" pitchFamily="34" charset="-120"/>
+                <a:latin typeface="BIZ UDPGothic" pitchFamily="34" charset="0"/>
+                <a:ea typeface="BIZ UDPGothic" pitchFamily="34" charset="-122"/>
+                <a:cs typeface="BIZ UDPGothic" pitchFamily="34" charset="-120"/>
               </a:rPr>
               <a:t>未来都市・フィジカルAI・海洋資源等の対象プロジェクトを選定し、投資を開始する。</a:t>
             </a:r>
@@ -14251,11 +14251,11 @@
             <a:r>
               <a:rPr lang="en-US" sz="2200" b="1" dirty="0">
                 <a:solidFill>
-                  <a:srgbClr val="D62828"/>
+                  <a:srgbClr val="C8161D"/>
                 </a:solidFill>
                 <a:latin typeface="Arial" pitchFamily="34" charset="0"/>
-                <a:ea typeface="Arial" pitchFamily="34" charset="-122"/>
-                <a:cs typeface="Arial" pitchFamily="34" charset="-120"/>
+                <a:ea typeface="BIZ UDPGothic" pitchFamily="34" charset="-122"/>
+                <a:cs typeface="BIZ UDPGothic" pitchFamily="34" charset="-120"/>
               </a:rPr>
               <a:t>02</a:t>
             </a:r>
@@ -14290,11 +14290,11 @@
             <a:r>
               <a:rPr lang="en-US" sz="1500" b="1" dirty="0">
                 <a:solidFill>
-                  <a:srgbClr val="F5F5F0"/>
-                </a:solidFill>
-                <a:latin typeface="Noto Sans JP" pitchFamily="34" charset="0"/>
-                <a:ea typeface="Noto Sans JP" pitchFamily="34" charset="-122"/>
-                <a:cs typeface="Noto Sans JP" pitchFamily="34" charset="-120"/>
+                  <a:srgbClr val="16181D"/>
+                </a:solidFill>
+                <a:latin typeface="BIZ UDPGothic" pitchFamily="34" charset="0"/>
+                <a:ea typeface="BIZ UDPGothic" pitchFamily="34" charset="-122"/>
+                <a:cs typeface="BIZ UDPGothic" pitchFamily="34" charset="-120"/>
               </a:rPr>
               <a:t>Made in Japan加点審査・再就職支援の稼働</a:t>
             </a:r>
@@ -14332,13 +14332,13 @@
             <a:r>
               <a:rPr lang="en-US" sz="1150" dirty="0">
                 <a:solidFill>
-                  <a:srgbClr val="F5F5F0">
+                  <a:srgbClr val="16181D">
                     <a:alpha val="85000"/>
                   </a:srgbClr>
                 </a:solidFill>
-                <a:latin typeface="Noto Sans JP" pitchFamily="34" charset="0"/>
-                <a:ea typeface="Noto Sans JP" pitchFamily="34" charset="-122"/>
-                <a:cs typeface="Noto Sans JP" pitchFamily="34" charset="-120"/>
+                <a:latin typeface="BIZ UDPGothic" pitchFamily="34" charset="0"/>
+                <a:ea typeface="BIZ UDPGothic" pitchFamily="34" charset="-122"/>
+                <a:cs typeface="BIZ UDPGothic" pitchFamily="34" charset="-120"/>
               </a:rPr>
               <a:t>国内調達比率に応じた加点審査と、離職後再就職支援の実施体制を本格始動させる。</a:t>
             </a:r>
@@ -14373,13 +14373,13 @@
             <a:r>
               <a:rPr lang="en-US" sz="800" dirty="0">
                 <a:solidFill>
-                  <a:srgbClr val="F5F5F0">
+                  <a:srgbClr val="16181D">
                     <a:alpha val="40000"/>
                   </a:srgbClr>
                 </a:solidFill>
                 <a:latin typeface="Arial" pitchFamily="34" charset="0"/>
-                <a:ea typeface="Arial" pitchFamily="34" charset="-122"/>
-                <a:cs typeface="Arial" pitchFamily="34" charset="-120"/>
+                <a:ea typeface="BIZ UDPGothic" pitchFamily="34" charset="-122"/>
+                <a:cs typeface="BIZ UDPGothic" pitchFamily="34" charset="-120"/>
               </a:rPr>
               <a:t>REBOOT JAPAN ── 政策提言プラットフォーム</a:t>
             </a:r>
@@ -14414,13 +14414,13 @@
             <a:r>
               <a:rPr lang="en-US" sz="800" dirty="0">
                 <a:solidFill>
-                  <a:srgbClr val="F5F5F0">
+                  <a:srgbClr val="16181D">
                     <a:alpha val="40000"/>
                   </a:srgbClr>
                 </a:solidFill>
                 <a:latin typeface="Arial" pitchFamily="34" charset="0"/>
-                <a:ea typeface="Arial" pitchFamily="34" charset="-122"/>
-                <a:cs typeface="Arial" pitchFamily="34" charset="-120"/>
+                <a:ea typeface="BIZ UDPGothic" pitchFamily="34" charset="-122"/>
+                <a:cs typeface="BIZ UDPGothic" pitchFamily="34" charset="-120"/>
               </a:rPr>
               <a:t>25</a:t>
             </a:r>
@@ -14442,7 +14442,7 @@
     <p:bg>
       <p:bgPr>
         <a:solidFill>
-          <a:srgbClr val="0A0A0A"/>
+          <a:srgbClr val="F5F6F8"/>
         </a:solidFill>
       </p:bgPr>
     </p:bg>
@@ -14487,11 +14487,11 @@
             <a:r>
               <a:rPr lang="en-US" sz="1200" b="1" spc="200" kern="0" dirty="0">
                 <a:solidFill>
-                  <a:srgbClr val="D62828"/>
+                  <a:srgbClr val="C8161D"/>
                 </a:solidFill>
                 <a:latin typeface="Arial" pitchFamily="34" charset="0"/>
-                <a:ea typeface="Arial" pitchFamily="34" charset="-122"/>
-                <a:cs typeface="Arial" pitchFamily="34" charset="-120"/>
+                <a:ea typeface="BIZ UDPGothic" pitchFamily="34" charset="-122"/>
+                <a:cs typeface="BIZ UDPGothic" pitchFamily="34" charset="-120"/>
               </a:rPr>
               <a:t>OUTCOME</a:t>
             </a:r>
@@ -14529,11 +14529,11 @@
             <a:r>
               <a:rPr lang="en-US" sz="2600" b="1" dirty="0">
                 <a:solidFill>
-                  <a:srgbClr val="F5F5F0"/>
-                </a:solidFill>
-                <a:latin typeface="Noto Sans JP" pitchFamily="34" charset="0"/>
-                <a:ea typeface="Noto Sans JP" pitchFamily="34" charset="-122"/>
-                <a:cs typeface="Noto Sans JP" pitchFamily="34" charset="-120"/>
+                  <a:srgbClr val="16181D"/>
+                </a:solidFill>
+                <a:latin typeface="BIZ UDPGothic" pitchFamily="34" charset="0"/>
+                <a:ea typeface="BIZ UDPGothic" pitchFamily="34" charset="-122"/>
+                <a:cs typeface="BIZ UDPGothic" pitchFamily="34" charset="-120"/>
               </a:rPr>
               <a:t>この提言で何が変わるか</a:t>
             </a:r>
@@ -14568,11 +14568,11 @@
             <a:r>
               <a:rPr lang="en-US" sz="2200" b="1" dirty="0">
                 <a:solidFill>
-                  <a:srgbClr val="D62828"/>
+                  <a:srgbClr val="C8161D"/>
                 </a:solidFill>
                 <a:latin typeface="Arial" pitchFamily="34" charset="0"/>
-                <a:ea typeface="Arial" pitchFamily="34" charset="-122"/>
-                <a:cs typeface="Arial" pitchFamily="34" charset="-120"/>
+                <a:ea typeface="BIZ UDPGothic" pitchFamily="34" charset="-122"/>
+                <a:cs typeface="BIZ UDPGothic" pitchFamily="34" charset="-120"/>
               </a:rPr>
               <a:t>01</a:t>
             </a:r>
@@ -14607,11 +14607,11 @@
             <a:r>
               <a:rPr lang="en-US" sz="1500" b="1" dirty="0">
                 <a:solidFill>
-                  <a:srgbClr val="F5F5F0"/>
-                </a:solidFill>
-                <a:latin typeface="Noto Sans JP" pitchFamily="34" charset="0"/>
-                <a:ea typeface="Noto Sans JP" pitchFamily="34" charset="-122"/>
-                <a:cs typeface="Noto Sans JP" pitchFamily="34" charset="-120"/>
+                  <a:srgbClr val="16181D"/>
+                </a:solidFill>
+                <a:latin typeface="BIZ UDPGothic" pitchFamily="34" charset="0"/>
+                <a:ea typeface="BIZ UDPGothic" pitchFamily="34" charset="-122"/>
+                <a:cs typeface="BIZ UDPGothic" pitchFamily="34" charset="-120"/>
               </a:rPr>
               <a:t>毎年4,000億円規模のお金が「未来」に向かう</a:t>
             </a:r>
@@ -14649,13 +14649,13 @@
             <a:r>
               <a:rPr lang="en-US" sz="1150" dirty="0">
                 <a:solidFill>
-                  <a:srgbClr val="F5F5F0">
+                  <a:srgbClr val="16181D">
                     <a:alpha val="85000"/>
                   </a:srgbClr>
                 </a:solidFill>
-                <a:latin typeface="Noto Sans JP" pitchFamily="34" charset="0"/>
-                <a:ea typeface="Noto Sans JP" pitchFamily="34" charset="-122"/>
-                <a:cs typeface="Noto Sans JP" pitchFamily="34" charset="-120"/>
+                <a:latin typeface="BIZ UDPGothic" pitchFamily="34" charset="0"/>
+                <a:ea typeface="BIZ UDPGothic" pitchFamily="34" charset="-122"/>
+                <a:cs typeface="BIZ UDPGothic" pitchFamily="34" charset="-120"/>
               </a:rPr>
               <a:t>延命のための補助金ではなく、量子・宇宙・海洋資源等への投資に変わる。</a:t>
             </a:r>
@@ -14690,11 +14690,11 @@
             <a:r>
               <a:rPr lang="en-US" sz="2200" b="1" dirty="0">
                 <a:solidFill>
-                  <a:srgbClr val="D62828"/>
+                  <a:srgbClr val="C8161D"/>
                 </a:solidFill>
                 <a:latin typeface="Arial" pitchFamily="34" charset="0"/>
-                <a:ea typeface="Arial" pitchFamily="34" charset="-122"/>
-                <a:cs typeface="Arial" pitchFamily="34" charset="-120"/>
+                <a:ea typeface="BIZ UDPGothic" pitchFamily="34" charset="-122"/>
+                <a:cs typeface="BIZ UDPGothic" pitchFamily="34" charset="-120"/>
               </a:rPr>
               <a:t>02</a:t>
             </a:r>
@@ -14729,11 +14729,11 @@
             <a:r>
               <a:rPr lang="en-US" sz="1500" b="1" dirty="0">
                 <a:solidFill>
-                  <a:srgbClr val="F5F5F0"/>
-                </a:solidFill>
-                <a:latin typeface="Noto Sans JP" pitchFamily="34" charset="0"/>
-                <a:ea typeface="Noto Sans JP" pitchFamily="34" charset="-122"/>
-                <a:cs typeface="Noto Sans JP" pitchFamily="34" charset="-120"/>
+                  <a:srgbClr val="16181D"/>
+                </a:solidFill>
+                <a:latin typeface="BIZ UDPGothic" pitchFamily="34" charset="0"/>
+                <a:ea typeface="BIZ UDPGothic" pitchFamily="34" charset="-122"/>
+                <a:cs typeface="BIZ UDPGothic" pitchFamily="34" charset="-120"/>
               </a:rPr>
               <a:t>会社ではなく「挑戦」が評価される</a:t>
             </a:r>
@@ -14771,13 +14771,13 @@
             <a:r>
               <a:rPr lang="en-US" sz="1150" dirty="0">
                 <a:solidFill>
-                  <a:srgbClr val="F5F5F0">
+                  <a:srgbClr val="16181D">
                     <a:alpha val="85000"/>
                   </a:srgbClr>
                 </a:solidFill>
-                <a:latin typeface="Noto Sans JP" pitchFamily="34" charset="0"/>
-                <a:ea typeface="Noto Sans JP" pitchFamily="34" charset="-122"/>
-                <a:cs typeface="Noto Sans JP" pitchFamily="34" charset="-120"/>
+                <a:latin typeface="BIZ UDPGothic" pitchFamily="34" charset="0"/>
+                <a:ea typeface="BIZ UDPGothic" pitchFamily="34" charset="-122"/>
+                <a:cs typeface="BIZ UDPGothic" pitchFamily="34" charset="-120"/>
               </a:rPr>
               <a:t>業種に関係なく、フロンティア技術に挑むプロジェクトなら誰でも対象になる。</a:t>
             </a:r>
@@ -14812,11 +14812,11 @@
             <a:r>
               <a:rPr lang="en-US" sz="2200" b="1" dirty="0">
                 <a:solidFill>
-                  <a:srgbClr val="D62828"/>
+                  <a:srgbClr val="C8161D"/>
                 </a:solidFill>
                 <a:latin typeface="Arial" pitchFamily="34" charset="0"/>
-                <a:ea typeface="Arial" pitchFamily="34" charset="-122"/>
-                <a:cs typeface="Arial" pitchFamily="34" charset="-120"/>
+                <a:ea typeface="BIZ UDPGothic" pitchFamily="34" charset="-122"/>
+                <a:cs typeface="BIZ UDPGothic" pitchFamily="34" charset="-120"/>
               </a:rPr>
               <a:t>03</a:t>
             </a:r>
@@ -14851,11 +14851,11 @@
             <a:r>
               <a:rPr lang="en-US" sz="1500" b="1" dirty="0">
                 <a:solidFill>
-                  <a:srgbClr val="F5F5F0"/>
-                </a:solidFill>
-                <a:latin typeface="Noto Sans JP" pitchFamily="34" charset="0"/>
-                <a:ea typeface="Noto Sans JP" pitchFamily="34" charset="-122"/>
-                <a:cs typeface="Noto Sans JP" pitchFamily="34" charset="-120"/>
+                  <a:srgbClr val="16181D"/>
+                </a:solidFill>
+                <a:latin typeface="BIZ UDPGothic" pitchFamily="34" charset="0"/>
+                <a:ea typeface="BIZ UDPGothic" pitchFamily="34" charset="-122"/>
+                <a:cs typeface="BIZ UDPGothic" pitchFamily="34" charset="-120"/>
               </a:rPr>
               <a:t>伝統文化は恒久的に守られる</a:t>
             </a:r>
@@ -14893,13 +14893,13 @@
             <a:r>
               <a:rPr lang="en-US" sz="1150" dirty="0">
                 <a:solidFill>
-                  <a:srgbClr val="F5F5F0">
+                  <a:srgbClr val="16181D">
                     <a:alpha val="85000"/>
                   </a:srgbClr>
                 </a:solidFill>
-                <a:latin typeface="Noto Sans JP" pitchFamily="34" charset="0"/>
-                <a:ea typeface="Noto Sans JP" pitchFamily="34" charset="-122"/>
-                <a:cs typeface="Noto Sans JP" pitchFamily="34" charset="-120"/>
+                <a:latin typeface="BIZ UDPGothic" pitchFamily="34" charset="0"/>
+                <a:ea typeface="BIZ UDPGothic" pitchFamily="34" charset="-122"/>
+                <a:cs typeface="BIZ UDPGothic" pitchFamily="34" charset="-120"/>
               </a:rPr>
               <a:t>工芸・神社仏閣・伝統芸能への支援が、毎年の予算争いから切り離される。</a:t>
             </a:r>
@@ -14934,13 +14934,13 @@
             <a:r>
               <a:rPr lang="en-US" sz="800" dirty="0">
                 <a:solidFill>
-                  <a:srgbClr val="F5F5F0">
+                  <a:srgbClr val="16181D">
                     <a:alpha val="40000"/>
                   </a:srgbClr>
                 </a:solidFill>
                 <a:latin typeface="Arial" pitchFamily="34" charset="0"/>
-                <a:ea typeface="Arial" pitchFamily="34" charset="-122"/>
-                <a:cs typeface="Arial" pitchFamily="34" charset="-120"/>
+                <a:ea typeface="BIZ UDPGothic" pitchFamily="34" charset="-122"/>
+                <a:cs typeface="BIZ UDPGothic" pitchFamily="34" charset="-120"/>
               </a:rPr>
               <a:t>REBOOT JAPAN ── 政策提言プラットフォーム</a:t>
             </a:r>
@@ -14975,13 +14975,13 @@
             <a:r>
               <a:rPr lang="en-US" sz="800" dirty="0">
                 <a:solidFill>
-                  <a:srgbClr val="F5F5F0">
+                  <a:srgbClr val="16181D">
                     <a:alpha val="40000"/>
                   </a:srgbClr>
                 </a:solidFill>
                 <a:latin typeface="Arial" pitchFamily="34" charset="0"/>
-                <a:ea typeface="Arial" pitchFamily="34" charset="-122"/>
-                <a:cs typeface="Arial" pitchFamily="34" charset="-120"/>
+                <a:ea typeface="BIZ UDPGothic" pitchFamily="34" charset="-122"/>
+                <a:cs typeface="BIZ UDPGothic" pitchFamily="34" charset="-120"/>
               </a:rPr>
               <a:t>26</a:t>
             </a:r>
@@ -15003,7 +15003,7 @@
     <p:bg>
       <p:bgPr>
         <a:solidFill>
-          <a:srgbClr val="0A0A0A"/>
+          <a:srgbClr val="F5F6F8"/>
         </a:solidFill>
       </p:bgPr>
     </p:bg>
@@ -15048,11 +15048,11 @@
             <a:r>
               <a:rPr lang="en-US" sz="1200" b="1" spc="200" kern="0" dirty="0">
                 <a:solidFill>
-                  <a:srgbClr val="D62828"/>
+                  <a:srgbClr val="C8161D"/>
                 </a:solidFill>
                 <a:latin typeface="Arial" pitchFamily="34" charset="0"/>
-                <a:ea typeface="Arial" pitchFamily="34" charset="-122"/>
-                <a:cs typeface="Arial" pitchFamily="34" charset="-120"/>
+                <a:ea typeface="BIZ UDPGothic" pitchFamily="34" charset="-122"/>
+                <a:cs typeface="BIZ UDPGothic" pitchFamily="34" charset="-120"/>
               </a:rPr>
               <a:t>REMAINING ISSUES</a:t>
             </a:r>
@@ -15090,11 +15090,11 @@
             <a:r>
               <a:rPr lang="en-US" sz="2600" b="1" dirty="0">
                 <a:solidFill>
-                  <a:srgbClr val="F5F5F0"/>
-                </a:solidFill>
-                <a:latin typeface="Noto Sans JP" pitchFamily="34" charset="0"/>
-                <a:ea typeface="Noto Sans JP" pitchFamily="34" charset="-122"/>
-                <a:cs typeface="Noto Sans JP" pitchFamily="34" charset="-120"/>
+                  <a:srgbClr val="16181D"/>
+                </a:solidFill>
+                <a:latin typeface="BIZ UDPGothic" pitchFamily="34" charset="0"/>
+                <a:ea typeface="BIZ UDPGothic" pitchFamily="34" charset="-122"/>
+                <a:cs typeface="BIZ UDPGothic" pitchFamily="34" charset="-120"/>
               </a:rPr>
               <a:t>これから詰める課題</a:t>
             </a:r>
@@ -15129,11 +15129,11 @@
             <a:r>
               <a:rPr lang="en-US" sz="2200" b="1" dirty="0">
                 <a:solidFill>
-                  <a:srgbClr val="D62828"/>
+                  <a:srgbClr val="C8161D"/>
                 </a:solidFill>
                 <a:latin typeface="Arial" pitchFamily="34" charset="0"/>
-                <a:ea typeface="Arial" pitchFamily="34" charset="-122"/>
-                <a:cs typeface="Arial" pitchFamily="34" charset="-120"/>
+                <a:ea typeface="BIZ UDPGothic" pitchFamily="34" charset="-122"/>
+                <a:cs typeface="BIZ UDPGothic" pitchFamily="34" charset="-120"/>
               </a:rPr>
               <a:t>01</a:t>
             </a:r>
@@ -15168,11 +15168,11 @@
             <a:r>
               <a:rPr lang="en-US" sz="1500" b="1" dirty="0">
                 <a:solidFill>
-                  <a:srgbClr val="F5F5F0"/>
-                </a:solidFill>
-                <a:latin typeface="Noto Sans JP" pitchFamily="34" charset="0"/>
-                <a:ea typeface="Noto Sans JP" pitchFamily="34" charset="-122"/>
-                <a:cs typeface="Noto Sans JP" pitchFamily="34" charset="-120"/>
+                  <a:srgbClr val="16181D"/>
+                </a:solidFill>
+                <a:latin typeface="BIZ UDPGothic" pitchFamily="34" charset="0"/>
+                <a:ea typeface="BIZ UDPGothic" pitchFamily="34" charset="-122"/>
+                <a:cs typeface="BIZ UDPGothic" pitchFamily="34" charset="-120"/>
               </a:rPr>
               <a:t>伝統芸能予算の具体額の精査</a:t>
             </a:r>
@@ -15210,13 +15210,13 @@
             <a:r>
               <a:rPr lang="en-US" sz="1150" dirty="0">
                 <a:solidFill>
-                  <a:srgbClr val="F5F5F0">
+                  <a:srgbClr val="16181D">
                     <a:alpha val="85000"/>
                   </a:srgbClr>
                 </a:solidFill>
-                <a:latin typeface="Noto Sans JP" pitchFamily="34" charset="0"/>
-                <a:ea typeface="Noto Sans JP" pitchFamily="34" charset="-122"/>
-                <a:cs typeface="Noto Sans JP" pitchFamily="34" charset="-120"/>
+                <a:latin typeface="BIZ UDPGothic" pitchFamily="34" charset="0"/>
+                <a:ea typeface="BIZ UDPGothic" pitchFamily="34" charset="-122"/>
+                <a:cs typeface="BIZ UDPGothic" pitchFamily="34" charset="-120"/>
               </a:rPr>
               <a:t>現状は複数制度に分散しており、恒久財源化する具体的な金額をこれから積み上げる必要がある。</a:t>
             </a:r>
@@ -15251,11 +15251,11 @@
             <a:r>
               <a:rPr lang="en-US" sz="2200" b="1" dirty="0">
                 <a:solidFill>
-                  <a:srgbClr val="D62828"/>
+                  <a:srgbClr val="C8161D"/>
                 </a:solidFill>
                 <a:latin typeface="Arial" pitchFamily="34" charset="0"/>
-                <a:ea typeface="Arial" pitchFamily="34" charset="-122"/>
-                <a:cs typeface="Arial" pitchFamily="34" charset="-120"/>
+                <a:ea typeface="BIZ UDPGothic" pitchFamily="34" charset="-122"/>
+                <a:cs typeface="BIZ UDPGothic" pitchFamily="34" charset="-120"/>
               </a:rPr>
               <a:t>02</a:t>
             </a:r>
@@ -15290,11 +15290,11 @@
             <a:r>
               <a:rPr lang="en-US" sz="1500" b="1" dirty="0">
                 <a:solidFill>
-                  <a:srgbClr val="F5F5F0"/>
-                </a:solidFill>
-                <a:latin typeface="Noto Sans JP" pitchFamily="34" charset="0"/>
-                <a:ea typeface="Noto Sans JP" pitchFamily="34" charset="-122"/>
-                <a:cs typeface="Noto Sans JP" pitchFamily="34" charset="-120"/>
+                  <a:srgbClr val="16181D"/>
+                </a:solidFill>
+                <a:latin typeface="BIZ UDPGothic" pitchFamily="34" charset="0"/>
+                <a:ea typeface="BIZ UDPGothic" pitchFamily="34" charset="-122"/>
+                <a:cs typeface="BIZ UDPGothic" pitchFamily="34" charset="-120"/>
               </a:rPr>
               <a:t>特定求職者雇用開発助成金の内訳精査</a:t>
             </a:r>
@@ -15332,13 +15332,13 @@
             <a:r>
               <a:rPr lang="en-US" sz="1150" dirty="0">
                 <a:solidFill>
-                  <a:srgbClr val="F5F5F0">
+                  <a:srgbClr val="16181D">
                     <a:alpha val="85000"/>
                   </a:srgbClr>
                 </a:solidFill>
-                <a:latin typeface="Noto Sans JP" pitchFamily="34" charset="0"/>
-                <a:ea typeface="Noto Sans JP" pitchFamily="34" charset="-122"/>
-                <a:cs typeface="Noto Sans JP" pitchFamily="34" charset="-120"/>
+                <a:latin typeface="BIZ UDPGothic" pitchFamily="34" charset="0"/>
+                <a:ea typeface="BIZ UDPGothic" pitchFamily="34" charset="-122"/>
+                <a:cs typeface="BIZ UDPGothic" pitchFamily="34" charset="-120"/>
               </a:rPr>
               <a:t>障害者雇用分と一般雇用分の公式な内訳データがなく、正確な削減額の確定が必要。</a:t>
             </a:r>
@@ -15373,11 +15373,11 @@
             <a:r>
               <a:rPr lang="en-US" sz="2200" b="1" dirty="0">
                 <a:solidFill>
-                  <a:srgbClr val="D62828"/>
+                  <a:srgbClr val="C8161D"/>
                 </a:solidFill>
                 <a:latin typeface="Arial" pitchFamily="34" charset="0"/>
-                <a:ea typeface="Arial" pitchFamily="34" charset="-122"/>
-                <a:cs typeface="Arial" pitchFamily="34" charset="-120"/>
+                <a:ea typeface="BIZ UDPGothic" pitchFamily="34" charset="-122"/>
+                <a:cs typeface="BIZ UDPGothic" pitchFamily="34" charset="-120"/>
               </a:rPr>
               <a:t>03</a:t>
             </a:r>
@@ -15412,11 +15412,11 @@
             <a:r>
               <a:rPr lang="en-US" sz="1500" b="1" dirty="0">
                 <a:solidFill>
-                  <a:srgbClr val="F5F5F0"/>
-                </a:solidFill>
-                <a:latin typeface="Noto Sans JP" pitchFamily="34" charset="0"/>
-                <a:ea typeface="Noto Sans JP" pitchFamily="34" charset="-122"/>
-                <a:cs typeface="Noto Sans JP" pitchFamily="34" charset="-120"/>
+                  <a:srgbClr val="16181D"/>
+                </a:solidFill>
+                <a:latin typeface="BIZ UDPGothic" pitchFamily="34" charset="0"/>
+                <a:ea typeface="BIZ UDPGothic" pitchFamily="34" charset="-122"/>
+                <a:cs typeface="BIZ UDPGothic" pitchFamily="34" charset="-120"/>
               </a:rPr>
               <a:t>Made in Japan加点方式の補助率設計</a:t>
             </a:r>
@@ -15454,13 +15454,13 @@
             <a:r>
               <a:rPr lang="en-US" sz="1150" dirty="0">
                 <a:solidFill>
-                  <a:srgbClr val="F5F5F0">
+                  <a:srgbClr val="16181D">
                     <a:alpha val="85000"/>
                   </a:srgbClr>
                 </a:solidFill>
-                <a:latin typeface="Noto Sans JP" pitchFamily="34" charset="0"/>
-                <a:ea typeface="Noto Sans JP" pitchFamily="34" charset="-122"/>
-                <a:cs typeface="Noto Sans JP" pitchFamily="34" charset="-120"/>
+                <a:latin typeface="BIZ UDPGothic" pitchFamily="34" charset="0"/>
+                <a:ea typeface="BIZ UDPGothic" pitchFamily="34" charset="-122"/>
+                <a:cs typeface="BIZ UDPGothic" pitchFamily="34" charset="-120"/>
               </a:rPr>
               <a:t>国内調達比率と補助率上乗せ幅の具体的な数式をこれから設計する。</a:t>
             </a:r>
@@ -15495,13 +15495,13 @@
             <a:r>
               <a:rPr lang="en-US" sz="800" dirty="0">
                 <a:solidFill>
-                  <a:srgbClr val="F5F5F0">
+                  <a:srgbClr val="16181D">
                     <a:alpha val="40000"/>
                   </a:srgbClr>
                 </a:solidFill>
                 <a:latin typeface="Arial" pitchFamily="34" charset="0"/>
-                <a:ea typeface="Arial" pitchFamily="34" charset="-122"/>
-                <a:cs typeface="Arial" pitchFamily="34" charset="-120"/>
+                <a:ea typeface="BIZ UDPGothic" pitchFamily="34" charset="-122"/>
+                <a:cs typeface="BIZ UDPGothic" pitchFamily="34" charset="-120"/>
               </a:rPr>
               <a:t>REBOOT JAPAN ── 政策提言プラットフォーム</a:t>
             </a:r>
@@ -15536,13 +15536,13 @@
             <a:r>
               <a:rPr lang="en-US" sz="800" dirty="0">
                 <a:solidFill>
-                  <a:srgbClr val="F5F5F0">
+                  <a:srgbClr val="16181D">
                     <a:alpha val="40000"/>
                   </a:srgbClr>
                 </a:solidFill>
                 <a:latin typeface="Arial" pitchFamily="34" charset="0"/>
-                <a:ea typeface="Arial" pitchFamily="34" charset="-122"/>
-                <a:cs typeface="Arial" pitchFamily="34" charset="-120"/>
+                <a:ea typeface="BIZ UDPGothic" pitchFamily="34" charset="-122"/>
+                <a:cs typeface="BIZ UDPGothic" pitchFamily="34" charset="-120"/>
               </a:rPr>
               <a:t>27</a:t>
             </a:r>
@@ -15564,7 +15564,7 @@
     <p:bg>
       <p:bgPr>
         <a:solidFill>
-          <a:srgbClr val="0A0A0A"/>
+          <a:srgbClr val="F5F6F8"/>
         </a:solidFill>
       </p:bgPr>
     </p:bg>
@@ -15609,11 +15609,11 @@
             <a:r>
               <a:rPr lang="en-US" sz="1200" b="1" spc="200" kern="0" dirty="0">
                 <a:solidFill>
-                  <a:srgbClr val="D62828"/>
+                  <a:srgbClr val="C8161D"/>
                 </a:solidFill>
                 <a:latin typeface="Arial" pitchFamily="34" charset="0"/>
-                <a:ea typeface="Arial" pitchFamily="34" charset="-122"/>
-                <a:cs typeface="Arial" pitchFamily="34" charset="-120"/>
+                <a:ea typeface="BIZ UDPGothic" pitchFamily="34" charset="-122"/>
+                <a:cs typeface="BIZ UDPGothic" pitchFamily="34" charset="-120"/>
               </a:rPr>
               <a:t>REBOOT JAPAN ── 提言013　まとめ</a:t>
             </a:r>
@@ -15651,11 +15651,11 @@
             <a:r>
               <a:rPr lang="en-US" sz="3000" b="1" dirty="0">
                 <a:solidFill>
-                  <a:srgbClr val="F5F5F0"/>
-                </a:solidFill>
-                <a:latin typeface="Noto Sans JP" pitchFamily="34" charset="0"/>
-                <a:ea typeface="Noto Sans JP" pitchFamily="34" charset="-122"/>
-                <a:cs typeface="Noto Sans JP" pitchFamily="34" charset="-120"/>
+                  <a:srgbClr val="16181D"/>
+                </a:solidFill>
+                <a:latin typeface="BIZ UDPGothic" pitchFamily="34" charset="0"/>
+                <a:ea typeface="BIZ UDPGothic" pitchFamily="34" charset="-122"/>
+                <a:cs typeface="BIZ UDPGothic" pitchFamily="34" charset="-120"/>
               </a:rPr>
               <a:t>補助金を、</a:t>
             </a:r>
@@ -15671,11 +15671,11 @@
             <a:r>
               <a:rPr lang="en-US" sz="3000" b="1" dirty="0">
                 <a:solidFill>
-                  <a:srgbClr val="F5F5F0"/>
-                </a:solidFill>
-                <a:latin typeface="Noto Sans JP" pitchFamily="34" charset="0"/>
-                <a:ea typeface="Noto Sans JP" pitchFamily="34" charset="-122"/>
-                <a:cs typeface="Noto Sans JP" pitchFamily="34" charset="-120"/>
+                  <a:srgbClr val="16181D"/>
+                </a:solidFill>
+                <a:latin typeface="BIZ UDPGothic" pitchFamily="34" charset="0"/>
+                <a:ea typeface="BIZ UDPGothic" pitchFamily="34" charset="-122"/>
+                <a:cs typeface="BIZ UDPGothic" pitchFamily="34" charset="-120"/>
               </a:rPr>
               <a:t>「過去の救済」から</a:t>
             </a:r>
@@ -15691,11 +15691,11 @@
             <a:r>
               <a:rPr lang="en-US" sz="3000" b="1" dirty="0">
                 <a:solidFill>
-                  <a:srgbClr val="F5F5F0"/>
-                </a:solidFill>
-                <a:latin typeface="Noto Sans JP" pitchFamily="34" charset="0"/>
-                <a:ea typeface="Noto Sans JP" pitchFamily="34" charset="-122"/>
-                <a:cs typeface="Noto Sans JP" pitchFamily="34" charset="-120"/>
+                  <a:srgbClr val="16181D"/>
+                </a:solidFill>
+                <a:latin typeface="BIZ UDPGothic" pitchFamily="34" charset="0"/>
+                <a:ea typeface="BIZ UDPGothic" pitchFamily="34" charset="-122"/>
+                <a:cs typeface="BIZ UDPGothic" pitchFamily="34" charset="-120"/>
               </a:rPr>
               <a:t>「未来への投資」へ。</a:t>
             </a:r>
@@ -15730,11 +15730,11 @@
             <a:r>
               <a:rPr lang="en-US" sz="2200" b="1" dirty="0">
                 <a:solidFill>
-                  <a:srgbClr val="D62828"/>
+                  <a:srgbClr val="C8161D"/>
                 </a:solidFill>
                 <a:latin typeface="Arial" pitchFamily="34" charset="0"/>
-                <a:ea typeface="Arial" pitchFamily="34" charset="-122"/>
-                <a:cs typeface="Arial" pitchFamily="34" charset="-120"/>
+                <a:ea typeface="BIZ UDPGothic" pitchFamily="34" charset="-122"/>
+                <a:cs typeface="BIZ UDPGothic" pitchFamily="34" charset="-120"/>
               </a:rPr>
               <a:t>01</a:t>
             </a:r>
@@ -15769,11 +15769,11 @@
             <a:r>
               <a:rPr lang="en-US" sz="1500" b="1" dirty="0">
                 <a:solidFill>
-                  <a:srgbClr val="F5F5F0"/>
-                </a:solidFill>
-                <a:latin typeface="Noto Sans JP" pitchFamily="34" charset="0"/>
-                <a:ea typeface="Noto Sans JP" pitchFamily="34" charset="-122"/>
-                <a:cs typeface="Noto Sans JP" pitchFamily="34" charset="-120"/>
+                  <a:srgbClr val="16181D"/>
+                </a:solidFill>
+                <a:latin typeface="BIZ UDPGothic" pitchFamily="34" charset="0"/>
+                <a:ea typeface="BIZ UDPGothic" pitchFamily="34" charset="-122"/>
+                <a:cs typeface="BIZ UDPGothic" pitchFamily="34" charset="-120"/>
               </a:rPr>
               <a:t>レガシー補助金は全廃し、浮いた約4,000億円は未来への投資へ</a:t>
             </a:r>
@@ -15808,11 +15808,11 @@
             <a:r>
               <a:rPr lang="en-US" sz="2200" b="1" dirty="0">
                 <a:solidFill>
-                  <a:srgbClr val="D62828"/>
+                  <a:srgbClr val="C8161D"/>
                 </a:solidFill>
                 <a:latin typeface="Arial" pitchFamily="34" charset="0"/>
-                <a:ea typeface="Arial" pitchFamily="34" charset="-122"/>
-                <a:cs typeface="Arial" pitchFamily="34" charset="-120"/>
+                <a:ea typeface="BIZ UDPGothic" pitchFamily="34" charset="-122"/>
+                <a:cs typeface="BIZ UDPGothic" pitchFamily="34" charset="-120"/>
               </a:rPr>
               <a:t>02</a:t>
             </a:r>
@@ -15847,11 +15847,11 @@
             <a:r>
               <a:rPr lang="en-US" sz="1500" b="1" dirty="0">
                 <a:solidFill>
-                  <a:srgbClr val="F5F5F0"/>
-                </a:solidFill>
-                <a:latin typeface="Noto Sans JP" pitchFamily="34" charset="0"/>
-                <a:ea typeface="Noto Sans JP" pitchFamily="34" charset="-122"/>
-                <a:cs typeface="Noto Sans JP" pitchFamily="34" charset="-120"/>
+                  <a:srgbClr val="16181D"/>
+                </a:solidFill>
+                <a:latin typeface="BIZ UDPGothic" pitchFamily="34" charset="0"/>
+                <a:ea typeface="BIZ UDPGothic" pitchFamily="34" charset="-122"/>
+                <a:cs typeface="BIZ UDPGothic" pitchFamily="34" charset="-120"/>
               </a:rPr>
               <a:t>賃上げ紐づけの成長投資補助金は、離職後の再就職支援に転換</a:t>
             </a:r>
@@ -15886,11 +15886,11 @@
             <a:r>
               <a:rPr lang="en-US" sz="2200" b="1" dirty="0">
                 <a:solidFill>
-                  <a:srgbClr val="D62828"/>
+                  <a:srgbClr val="C8161D"/>
                 </a:solidFill>
                 <a:latin typeface="Arial" pitchFamily="34" charset="0"/>
-                <a:ea typeface="Arial" pitchFamily="34" charset="-122"/>
-                <a:cs typeface="Arial" pitchFamily="34" charset="-120"/>
+                <a:ea typeface="BIZ UDPGothic" pitchFamily="34" charset="-122"/>
+                <a:cs typeface="BIZ UDPGothic" pitchFamily="34" charset="-120"/>
               </a:rPr>
               <a:t>03</a:t>
             </a:r>
@@ -15925,11 +15925,11 @@
             <a:r>
               <a:rPr lang="en-US" sz="1500" b="1" dirty="0">
                 <a:solidFill>
-                  <a:srgbClr val="F5F5F0"/>
-                </a:solidFill>
-                <a:latin typeface="Noto Sans JP" pitchFamily="34" charset="0"/>
-                <a:ea typeface="Noto Sans JP" pitchFamily="34" charset="-122"/>
-                <a:cs typeface="Noto Sans JP" pitchFamily="34" charset="-120"/>
+                  <a:srgbClr val="16181D"/>
+                </a:solidFill>
+                <a:latin typeface="BIZ UDPGothic" pitchFamily="34" charset="0"/>
+                <a:ea typeface="BIZ UDPGothic" pitchFamily="34" charset="-122"/>
+                <a:cs typeface="BIZ UDPGothic" pitchFamily="34" charset="-120"/>
               </a:rPr>
               <a:t>伝統文化には恒久財源を保証し、国民負担の純増は209億円にとどめる</a:t>
             </a:r>
@@ -15964,13 +15964,13 @@
             <a:r>
               <a:rPr lang="en-US" sz="800" dirty="0">
                 <a:solidFill>
-                  <a:srgbClr val="F5F5F0">
+                  <a:srgbClr val="16181D">
                     <a:alpha val="40000"/>
                   </a:srgbClr>
                 </a:solidFill>
                 <a:latin typeface="Arial" pitchFamily="34" charset="0"/>
-                <a:ea typeface="Arial" pitchFamily="34" charset="-122"/>
-                <a:cs typeface="Arial" pitchFamily="34" charset="-120"/>
+                <a:ea typeface="BIZ UDPGothic" pitchFamily="34" charset="-122"/>
+                <a:cs typeface="BIZ UDPGothic" pitchFamily="34" charset="-120"/>
               </a:rPr>
               <a:t>REBOOT JAPAN ── 政策提言プラットフォーム</a:t>
             </a:r>
@@ -16005,13 +16005,13 @@
             <a:r>
               <a:rPr lang="en-US" sz="800" dirty="0">
                 <a:solidFill>
-                  <a:srgbClr val="F5F5F0">
+                  <a:srgbClr val="16181D">
                     <a:alpha val="40000"/>
                   </a:srgbClr>
                 </a:solidFill>
                 <a:latin typeface="Arial" pitchFamily="34" charset="0"/>
-                <a:ea typeface="Arial" pitchFamily="34" charset="-122"/>
-                <a:cs typeface="Arial" pitchFamily="34" charset="-120"/>
+                <a:ea typeface="BIZ UDPGothic" pitchFamily="34" charset="-122"/>
+                <a:cs typeface="BIZ UDPGothic" pitchFamily="34" charset="-120"/>
               </a:rPr>
               <a:t>28</a:t>
             </a:r>
@@ -16033,7 +16033,7 @@
     <p:bg>
       <p:bgPr>
         <a:solidFill>
-          <a:srgbClr val="0A0A0A"/>
+          <a:srgbClr val="F5F6F8"/>
         </a:solidFill>
       </p:bgPr>
     </p:bg>
@@ -16078,11 +16078,11 @@
             <a:r>
               <a:rPr lang="en-US" sz="1200" b="1" spc="200" kern="0" dirty="0">
                 <a:solidFill>
-                  <a:srgbClr val="D62828"/>
+                  <a:srgbClr val="C8161D"/>
                 </a:solidFill>
                 <a:latin typeface="Arial" pitchFamily="34" charset="0"/>
-                <a:ea typeface="Arial" pitchFamily="34" charset="-122"/>
-                <a:cs typeface="Arial" pitchFamily="34" charset="-120"/>
+                <a:ea typeface="BIZ UDPGothic" pitchFamily="34" charset="-122"/>
+                <a:cs typeface="BIZ UDPGothic" pitchFamily="34" charset="-120"/>
               </a:rPr>
               <a:t>BASICS</a:t>
             </a:r>
@@ -16120,11 +16120,11 @@
             <a:r>
               <a:rPr lang="en-US" sz="2600" b="1" dirty="0">
                 <a:solidFill>
-                  <a:srgbClr val="F5F5F0"/>
-                </a:solidFill>
-                <a:latin typeface="Noto Sans JP" pitchFamily="34" charset="0"/>
-                <a:ea typeface="Noto Sans JP" pitchFamily="34" charset="-122"/>
-                <a:cs typeface="Noto Sans JP" pitchFamily="34" charset="-120"/>
+                  <a:srgbClr val="16181D"/>
+                </a:solidFill>
+                <a:latin typeface="BIZ UDPGothic" pitchFamily="34" charset="0"/>
+                <a:ea typeface="BIZ UDPGothic" pitchFamily="34" charset="-122"/>
+                <a:cs typeface="BIZ UDPGothic" pitchFamily="34" charset="-120"/>
               </a:rPr>
               <a:t>そもそも「補助金」って何？</a:t>
             </a:r>
@@ -16162,13 +16162,13 @@
             <a:r>
               <a:rPr lang="en-US" sz="1350" dirty="0">
                 <a:solidFill>
-                  <a:srgbClr val="F5F5F0">
+                  <a:srgbClr val="16181D">
                     <a:alpha val="90000"/>
                   </a:srgbClr>
                 </a:solidFill>
-                <a:latin typeface="Noto Sans JP" pitchFamily="34" charset="0"/>
-                <a:ea typeface="Noto Sans JP" pitchFamily="34" charset="-122"/>
-                <a:cs typeface="Noto Sans JP" pitchFamily="34" charset="-120"/>
+                <a:latin typeface="BIZ UDPGothic" pitchFamily="34" charset="0"/>
+                <a:ea typeface="BIZ UDPGothic" pitchFamily="34" charset="-122"/>
+                <a:cs typeface="BIZ UDPGothic" pitchFamily="34" charset="-120"/>
               </a:rPr>
               <a:t>国が、企業の活動を応援するために配る「返さなくていいお金」。財源は私たちの税金。</a:t>
             </a:r>
@@ -16193,11 +16193,11 @@
             </a:avLst>
           </a:prstGeom>
           <a:solidFill>
-            <a:srgbClr val="1A1A1A"/>
+            <a:srgbClr val="FFFFFF"/>
           </a:solidFill>
           <a:ln w="12700">
             <a:solidFill>
-              <a:srgbClr val="2E2E2E"/>
+              <a:srgbClr val="DDE0E6"/>
             </a:solidFill>
             <a:prstDash val="solid"/>
           </a:ln>
@@ -16273,11 +16273,11 @@
             <a:r>
               <a:rPr lang="en-US" sz="1300" b="1" dirty="0">
                 <a:solidFill>
-                  <a:srgbClr val="D62828"/>
-                </a:solidFill>
-                <a:latin typeface="Noto Sans JP" pitchFamily="34" charset="0"/>
-                <a:ea typeface="Noto Sans JP" pitchFamily="34" charset="-122"/>
-                <a:cs typeface="Noto Sans JP" pitchFamily="34" charset="-120"/>
+                  <a:srgbClr val="C8161D"/>
+                </a:solidFill>
+                <a:latin typeface="BIZ UDPGothic" pitchFamily="34" charset="0"/>
+                <a:ea typeface="BIZ UDPGothic" pitchFamily="34" charset="-122"/>
+                <a:cs typeface="BIZ UDPGothic" pitchFamily="34" charset="-120"/>
               </a:rPr>
               <a:t>たとえば</a:t>
             </a:r>
@@ -16315,13 +16315,13 @@
             <a:r>
               <a:rPr lang="en-US" sz="1200" dirty="0">
                 <a:solidFill>
-                  <a:srgbClr val="F5F5F0">
+                  <a:srgbClr val="16181D">
                     <a:alpha val="90000"/>
                   </a:srgbClr>
                 </a:solidFill>
-                <a:latin typeface="Noto Sans JP" pitchFamily="34" charset="0"/>
-                <a:ea typeface="Noto Sans JP" pitchFamily="34" charset="-122"/>
-                <a:cs typeface="Noto Sans JP" pitchFamily="34" charset="-120"/>
+                <a:latin typeface="BIZ UDPGothic" pitchFamily="34" charset="0"/>
+                <a:ea typeface="BIZ UDPGothic" pitchFamily="34" charset="-122"/>
+                <a:cs typeface="BIZ UDPGothic" pitchFamily="34" charset="-120"/>
               </a:rPr>
               <a:t>工場に新しい機械を入れるとき、費用の一部を国が肩代わりしてくれる制度。</a:t>
             </a:r>
@@ -16346,11 +16346,11 @@
             </a:avLst>
           </a:prstGeom>
           <a:solidFill>
-            <a:srgbClr val="1A1A1A"/>
+            <a:srgbClr val="FFFFFF"/>
           </a:solidFill>
           <a:ln w="19050">
             <a:solidFill>
-              <a:srgbClr val="D62828"/>
+              <a:srgbClr val="C8161D"/>
             </a:solidFill>
             <a:prstDash val="solid"/>
           </a:ln>
@@ -16426,11 +16426,11 @@
             <a:r>
               <a:rPr lang="en-US" sz="1300" b="1" dirty="0">
                 <a:solidFill>
-                  <a:srgbClr val="D62828"/>
-                </a:solidFill>
-                <a:latin typeface="Noto Sans JP" pitchFamily="34" charset="0"/>
-                <a:ea typeface="Noto Sans JP" pitchFamily="34" charset="-122"/>
-                <a:cs typeface="Noto Sans JP" pitchFamily="34" charset="-120"/>
+                  <a:srgbClr val="C8161D"/>
+                </a:solidFill>
+                <a:latin typeface="BIZ UDPGothic" pitchFamily="34" charset="0"/>
+                <a:ea typeface="BIZ UDPGothic" pitchFamily="34" charset="-122"/>
+                <a:cs typeface="BIZ UDPGothic" pitchFamily="34" charset="-120"/>
               </a:rPr>
               <a:t>何が問題？</a:t>
             </a:r>
@@ -16468,13 +16468,13 @@
             <a:r>
               <a:rPr lang="en-US" sz="1200" dirty="0">
                 <a:solidFill>
-                  <a:srgbClr val="F5F5F0">
+                  <a:srgbClr val="16181D">
                     <a:alpha val="90000"/>
                   </a:srgbClr>
                 </a:solidFill>
-                <a:latin typeface="Noto Sans JP" pitchFamily="34" charset="0"/>
-                <a:ea typeface="Noto Sans JP" pitchFamily="34" charset="-122"/>
-                <a:cs typeface="Noto Sans JP" pitchFamily="34" charset="-120"/>
+                <a:latin typeface="BIZ UDPGothic" pitchFamily="34" charset="0"/>
+                <a:ea typeface="BIZ UDPGothic" pitchFamily="34" charset="-122"/>
+                <a:cs typeface="BIZ UDPGothic" pitchFamily="34" charset="-120"/>
               </a:rPr>
               <a:t>「なぜこの補助金を出すのか」が曖昧なまま配り続けると、本当に必要なところにお金が届かなくなる。</a:t>
             </a:r>
@@ -16509,13 +16509,13 @@
             <a:r>
               <a:rPr lang="en-US" sz="800" dirty="0">
                 <a:solidFill>
-                  <a:srgbClr val="F5F5F0">
+                  <a:srgbClr val="16181D">
                     <a:alpha val="40000"/>
                   </a:srgbClr>
                 </a:solidFill>
                 <a:latin typeface="Arial" pitchFamily="34" charset="0"/>
-                <a:ea typeface="Arial" pitchFamily="34" charset="-122"/>
-                <a:cs typeface="Arial" pitchFamily="34" charset="-120"/>
+                <a:ea typeface="BIZ UDPGothic" pitchFamily="34" charset="-122"/>
+                <a:cs typeface="BIZ UDPGothic" pitchFamily="34" charset="-120"/>
               </a:rPr>
               <a:t>REBOOT JAPAN ── 政策提言プラットフォーム</a:t>
             </a:r>
@@ -16550,13 +16550,13 @@
             <a:r>
               <a:rPr lang="en-US" sz="800" dirty="0">
                 <a:solidFill>
-                  <a:srgbClr val="F5F5F0">
+                  <a:srgbClr val="16181D">
                     <a:alpha val="40000"/>
                   </a:srgbClr>
                 </a:solidFill>
                 <a:latin typeface="Arial" pitchFamily="34" charset="0"/>
-                <a:ea typeface="Arial" pitchFamily="34" charset="-122"/>
-                <a:cs typeface="Arial" pitchFamily="34" charset="-120"/>
+                <a:ea typeface="BIZ UDPGothic" pitchFamily="34" charset="-122"/>
+                <a:cs typeface="BIZ UDPGothic" pitchFamily="34" charset="-120"/>
               </a:rPr>
               <a:t>3</a:t>
             </a:r>
@@ -16578,7 +16578,7 @@
     <p:bg>
       <p:bgPr>
         <a:solidFill>
-          <a:srgbClr val="0A0A0A"/>
+          <a:srgbClr val="F5F6F8"/>
         </a:solidFill>
       </p:bgPr>
     </p:bg>
@@ -16623,11 +16623,11 @@
             <a:r>
               <a:rPr lang="en-US" sz="1200" b="1" spc="200" kern="0" dirty="0">
                 <a:solidFill>
-                  <a:srgbClr val="D62828"/>
+                  <a:srgbClr val="C8161D"/>
                 </a:solidFill>
                 <a:latin typeface="Arial" pitchFamily="34" charset="0"/>
-                <a:ea typeface="Arial" pitchFamily="34" charset="-122"/>
-                <a:cs typeface="Arial" pitchFamily="34" charset="-120"/>
+                <a:ea typeface="BIZ UDPGothic" pitchFamily="34" charset="-122"/>
+                <a:cs typeface="BIZ UDPGothic" pitchFamily="34" charset="-120"/>
               </a:rPr>
               <a:t>OVERVIEW</a:t>
             </a:r>
@@ -16665,11 +16665,11 @@
             <a:r>
               <a:rPr lang="en-US" sz="2600" b="1" dirty="0">
                 <a:solidFill>
-                  <a:srgbClr val="F5F5F0"/>
-                </a:solidFill>
-                <a:latin typeface="Noto Sans JP" pitchFamily="34" charset="0"/>
-                <a:ea typeface="Noto Sans JP" pitchFamily="34" charset="-122"/>
-                <a:cs typeface="Noto Sans JP" pitchFamily="34" charset="-120"/>
+                  <a:srgbClr val="16181D"/>
+                </a:solidFill>
+                <a:latin typeface="BIZ UDPGothic" pitchFamily="34" charset="0"/>
+                <a:ea typeface="BIZ UDPGothic" pitchFamily="34" charset="-122"/>
+                <a:cs typeface="BIZ UDPGothic" pitchFamily="34" charset="-120"/>
               </a:rPr>
               <a:t>この提言の全体像：5つの柱</a:t>
             </a:r>
@@ -16694,11 +16694,11 @@
             </a:avLst>
           </a:prstGeom>
           <a:solidFill>
-            <a:srgbClr val="1A1A1A"/>
+            <a:srgbClr val="FFFFFF"/>
           </a:solidFill>
           <a:ln w="12700">
             <a:solidFill>
-              <a:srgbClr val="2E2E2E"/>
+              <a:srgbClr val="DDE0E6"/>
             </a:solidFill>
             <a:prstDash val="solid"/>
           </a:ln>
@@ -16777,11 +16777,11 @@
             <a:r>
               <a:rPr lang="en-US" sz="1250" b="1" dirty="0">
                 <a:solidFill>
-                  <a:srgbClr val="F5F5F0"/>
-                </a:solidFill>
-                <a:latin typeface="Noto Sans JP" pitchFamily="34" charset="0"/>
-                <a:ea typeface="Noto Sans JP" pitchFamily="34" charset="-122"/>
-                <a:cs typeface="Noto Sans JP" pitchFamily="34" charset="-120"/>
+                  <a:srgbClr val="16181D"/>
+                </a:solidFill>
+                <a:latin typeface="BIZ UDPGothic" pitchFamily="34" charset="0"/>
+                <a:ea typeface="BIZ UDPGothic" pitchFamily="34" charset="-122"/>
+                <a:cs typeface="BIZ UDPGothic" pitchFamily="34" charset="-120"/>
               </a:rPr>
               <a:t>① 未来への</a:t>
             </a:r>
@@ -16797,11 +16797,11 @@
             <a:r>
               <a:rPr lang="en-US" sz="1250" b="1" dirty="0">
                 <a:solidFill>
-                  <a:srgbClr val="F5F5F0"/>
-                </a:solidFill>
-                <a:latin typeface="Noto Sans JP" pitchFamily="34" charset="0"/>
-                <a:ea typeface="Noto Sans JP" pitchFamily="34" charset="-122"/>
-                <a:cs typeface="Noto Sans JP" pitchFamily="34" charset="-120"/>
+                  <a:srgbClr val="16181D"/>
+                </a:solidFill>
+                <a:latin typeface="BIZ UDPGothic" pitchFamily="34" charset="0"/>
+                <a:ea typeface="BIZ UDPGothic" pitchFamily="34" charset="-122"/>
+                <a:cs typeface="BIZ UDPGothic" pitchFamily="34" charset="-120"/>
               </a:rPr>
               <a:t>集中投資</a:t>
             </a:r>
@@ -16839,13 +16839,13 @@
             <a:r>
               <a:rPr lang="en-US" sz="950" dirty="0">
                 <a:solidFill>
-                  <a:srgbClr val="F5F5F0">
+                  <a:srgbClr val="16181D">
                     <a:alpha val="75000"/>
                   </a:srgbClr>
                 </a:solidFill>
-                <a:latin typeface="Noto Sans JP" pitchFamily="34" charset="0"/>
-                <a:ea typeface="Noto Sans JP" pitchFamily="34" charset="-122"/>
-                <a:cs typeface="Noto Sans JP" pitchFamily="34" charset="-120"/>
+                <a:latin typeface="BIZ UDPGothic" pitchFamily="34" charset="0"/>
+                <a:ea typeface="BIZ UDPGothic" pitchFamily="34" charset="-122"/>
+                <a:cs typeface="BIZ UDPGothic" pitchFamily="34" charset="-120"/>
               </a:rPr>
               <a:t>量子・宇宙・海洋資源等に補助金を絞る</a:t>
             </a:r>
@@ -16870,11 +16870,11 @@
             </a:avLst>
           </a:prstGeom>
           <a:solidFill>
-            <a:srgbClr val="1A1A1A"/>
+            <a:srgbClr val="FFFFFF"/>
           </a:solidFill>
           <a:ln w="12700">
             <a:solidFill>
-              <a:srgbClr val="2E2E2E"/>
+              <a:srgbClr val="DDE0E6"/>
             </a:solidFill>
             <a:prstDash val="solid"/>
           </a:ln>
@@ -16953,11 +16953,11 @@
             <a:r>
               <a:rPr lang="en-US" sz="1250" b="1" dirty="0">
                 <a:solidFill>
-                  <a:srgbClr val="F5F5F0"/>
-                </a:solidFill>
-                <a:latin typeface="Noto Sans JP" pitchFamily="34" charset="0"/>
-                <a:ea typeface="Noto Sans JP" pitchFamily="34" charset="-122"/>
-                <a:cs typeface="Noto Sans JP" pitchFamily="34" charset="-120"/>
+                  <a:srgbClr val="16181D"/>
+                </a:solidFill>
+                <a:latin typeface="BIZ UDPGothic" pitchFamily="34" charset="0"/>
+                <a:ea typeface="BIZ UDPGothic" pitchFamily="34" charset="-122"/>
+                <a:cs typeface="BIZ UDPGothic" pitchFamily="34" charset="-120"/>
               </a:rPr>
               <a:t>② 古い補助金</a:t>
             </a:r>
@@ -16973,11 +16973,11 @@
             <a:r>
               <a:rPr lang="en-US" sz="1250" b="1" dirty="0">
                 <a:solidFill>
-                  <a:srgbClr val="F5F5F0"/>
-                </a:solidFill>
-                <a:latin typeface="Noto Sans JP" pitchFamily="34" charset="0"/>
-                <a:ea typeface="Noto Sans JP" pitchFamily="34" charset="-122"/>
-                <a:cs typeface="Noto Sans JP" pitchFamily="34" charset="-120"/>
+                  <a:srgbClr val="16181D"/>
+                </a:solidFill>
+                <a:latin typeface="BIZ UDPGothic" pitchFamily="34" charset="0"/>
+                <a:ea typeface="BIZ UDPGothic" pitchFamily="34" charset="-122"/>
+                <a:cs typeface="BIZ UDPGothic" pitchFamily="34" charset="-120"/>
               </a:rPr>
               <a:t>の全廃</a:t>
             </a:r>
@@ -17015,13 +17015,13 @@
             <a:r>
               <a:rPr lang="en-US" sz="950" dirty="0">
                 <a:solidFill>
-                  <a:srgbClr val="F5F5F0">
+                  <a:srgbClr val="16181D">
                     <a:alpha val="75000"/>
                   </a:srgbClr>
                 </a:solidFill>
-                <a:latin typeface="Noto Sans JP" pitchFamily="34" charset="0"/>
-                <a:ea typeface="Noto Sans JP" pitchFamily="34" charset="-122"/>
-                <a:cs typeface="Noto Sans JP" pitchFamily="34" charset="-120"/>
+                <a:latin typeface="BIZ UDPGothic" pitchFamily="34" charset="0"/>
+                <a:ea typeface="BIZ UDPGothic" pitchFamily="34" charset="-122"/>
+                <a:cs typeface="BIZ UDPGothic" pitchFamily="34" charset="-120"/>
               </a:rPr>
               <a:t>成熟業界向けの汎用プログラムをやめる</a:t>
             </a:r>
@@ -17046,11 +17046,11 @@
             </a:avLst>
           </a:prstGeom>
           <a:solidFill>
-            <a:srgbClr val="1A1A1A"/>
+            <a:srgbClr val="FFFFFF"/>
           </a:solidFill>
           <a:ln w="12700">
             <a:solidFill>
-              <a:srgbClr val="2E2E2E"/>
+              <a:srgbClr val="DDE0E6"/>
             </a:solidFill>
             <a:prstDash val="solid"/>
           </a:ln>
@@ -17129,11 +17129,11 @@
             <a:r>
               <a:rPr lang="en-US" sz="1250" b="1" dirty="0">
                 <a:solidFill>
-                  <a:srgbClr val="F5F5F0"/>
-                </a:solidFill>
-                <a:latin typeface="Noto Sans JP" pitchFamily="34" charset="0"/>
-                <a:ea typeface="Noto Sans JP" pitchFamily="34" charset="-122"/>
-                <a:cs typeface="Noto Sans JP" pitchFamily="34" charset="-120"/>
+                  <a:srgbClr val="16181D"/>
+                </a:solidFill>
+                <a:latin typeface="BIZ UDPGothic" pitchFamily="34" charset="0"/>
+                <a:ea typeface="BIZ UDPGothic" pitchFamily="34" charset="-122"/>
+                <a:cs typeface="BIZ UDPGothic" pitchFamily="34" charset="-120"/>
               </a:rPr>
               <a:t>③ 伝統文化を</a:t>
             </a:r>
@@ -17149,11 +17149,11 @@
             <a:r>
               <a:rPr lang="en-US" sz="1250" b="1" dirty="0">
                 <a:solidFill>
-                  <a:srgbClr val="F5F5F0"/>
-                </a:solidFill>
-                <a:latin typeface="Noto Sans JP" pitchFamily="34" charset="0"/>
-                <a:ea typeface="Noto Sans JP" pitchFamily="34" charset="-122"/>
-                <a:cs typeface="Noto Sans JP" pitchFamily="34" charset="-120"/>
+                  <a:srgbClr val="16181D"/>
+                </a:solidFill>
+                <a:latin typeface="BIZ UDPGothic" pitchFamily="34" charset="0"/>
+                <a:ea typeface="BIZ UDPGothic" pitchFamily="34" charset="-122"/>
+                <a:cs typeface="BIZ UDPGothic" pitchFamily="34" charset="-120"/>
               </a:rPr>
               <a:t>恒久保護</a:t>
             </a:r>
@@ -17191,13 +17191,13 @@
             <a:r>
               <a:rPr lang="en-US" sz="950" dirty="0">
                 <a:solidFill>
-                  <a:srgbClr val="F5F5F0">
+                  <a:srgbClr val="16181D">
                     <a:alpha val="75000"/>
                   </a:srgbClr>
                 </a:solidFill>
-                <a:latin typeface="Noto Sans JP" pitchFamily="34" charset="0"/>
-                <a:ea typeface="Noto Sans JP" pitchFamily="34" charset="-122"/>
-                <a:cs typeface="Noto Sans JP" pitchFamily="34" charset="-120"/>
+                <a:latin typeface="BIZ UDPGothic" pitchFamily="34" charset="0"/>
+                <a:ea typeface="BIZ UDPGothic" pitchFamily="34" charset="-122"/>
+                <a:cs typeface="BIZ UDPGothic" pitchFamily="34" charset="-120"/>
               </a:rPr>
               <a:t>工芸・神社仏閣・伝統芸能を守り抜く</a:t>
             </a:r>
@@ -17222,11 +17222,11 @@
             </a:avLst>
           </a:prstGeom>
           <a:solidFill>
-            <a:srgbClr val="1A1A1A"/>
+            <a:srgbClr val="FFFFFF"/>
           </a:solidFill>
           <a:ln w="12700">
             <a:solidFill>
-              <a:srgbClr val="2E2E2E"/>
+              <a:srgbClr val="DDE0E6"/>
             </a:solidFill>
             <a:prstDash val="solid"/>
           </a:ln>
@@ -17305,11 +17305,11 @@
             <a:r>
               <a:rPr lang="en-US" sz="1250" b="1" dirty="0">
                 <a:solidFill>
-                  <a:srgbClr val="F5F5F0"/>
-                </a:solidFill>
-                <a:latin typeface="Noto Sans JP" pitchFamily="34" charset="0"/>
-                <a:ea typeface="Noto Sans JP" pitchFamily="34" charset="-122"/>
-                <a:cs typeface="Noto Sans JP" pitchFamily="34" charset="-120"/>
+                  <a:srgbClr val="16181D"/>
+                </a:solidFill>
+                <a:latin typeface="BIZ UDPGothic" pitchFamily="34" charset="0"/>
+                <a:ea typeface="BIZ UDPGothic" pitchFamily="34" charset="-122"/>
+                <a:cs typeface="BIZ UDPGothic" pitchFamily="34" charset="-120"/>
               </a:rPr>
               <a:t>④ 3つの</a:t>
             </a:r>
@@ -17325,11 +17325,11 @@
             <a:r>
               <a:rPr lang="en-US" sz="1250" b="1" dirty="0">
                 <a:solidFill>
-                  <a:srgbClr val="F5F5F0"/>
-                </a:solidFill>
-                <a:latin typeface="Noto Sans JP" pitchFamily="34" charset="0"/>
-                <a:ea typeface="Noto Sans JP" pitchFamily="34" charset="-122"/>
-                <a:cs typeface="Noto Sans JP" pitchFamily="34" charset="-120"/>
+                  <a:srgbClr val="16181D"/>
+                </a:solidFill>
+                <a:latin typeface="BIZ UDPGothic" pitchFamily="34" charset="0"/>
+                <a:ea typeface="BIZ UDPGothic" pitchFamily="34" charset="-122"/>
+                <a:cs typeface="BIZ UDPGothic" pitchFamily="34" charset="-120"/>
               </a:rPr>
               <a:t>厳しいルール</a:t>
             </a:r>
@@ -17367,13 +17367,13 @@
             <a:r>
               <a:rPr lang="en-US" sz="950" dirty="0">
                 <a:solidFill>
-                  <a:srgbClr val="F5F5F0">
+                  <a:srgbClr val="16181D">
                     <a:alpha val="75000"/>
                   </a:srgbClr>
                 </a:solidFill>
-                <a:latin typeface="Noto Sans JP" pitchFamily="34" charset="0"/>
-                <a:ea typeface="Noto Sans JP" pitchFamily="34" charset="-122"/>
-                <a:cs typeface="Noto Sans JP" pitchFamily="34" charset="-120"/>
+                <a:latin typeface="BIZ UDPGothic" pitchFamily="34" charset="0"/>
+                <a:ea typeface="BIZ UDPGothic" pitchFamily="34" charset="-122"/>
+                <a:cs typeface="BIZ UDPGothic" pitchFamily="34" charset="-120"/>
               </a:rPr>
               <a:t>調達・倒産回避・雇用支援に制約</a:t>
             </a:r>
@@ -17398,11 +17398,11 @@
             </a:avLst>
           </a:prstGeom>
           <a:solidFill>
-            <a:srgbClr val="1A1A1A"/>
+            <a:srgbClr val="FFFFFF"/>
           </a:solidFill>
           <a:ln w="12700">
             <a:solidFill>
-              <a:srgbClr val="2E2E2E"/>
+              <a:srgbClr val="DDE0E6"/>
             </a:solidFill>
             <a:prstDash val="solid"/>
           </a:ln>
@@ -17481,11 +17481,11 @@
             <a:r>
               <a:rPr lang="en-US" sz="1250" b="1" dirty="0">
                 <a:solidFill>
-                  <a:srgbClr val="F5F5F0"/>
-                </a:solidFill>
-                <a:latin typeface="Noto Sans JP" pitchFamily="34" charset="0"/>
-                <a:ea typeface="Noto Sans JP" pitchFamily="34" charset="-122"/>
-                <a:cs typeface="Noto Sans JP" pitchFamily="34" charset="-120"/>
+                  <a:srgbClr val="16181D"/>
+                </a:solidFill>
+                <a:latin typeface="BIZ UDPGothic" pitchFamily="34" charset="0"/>
+                <a:ea typeface="BIZ UDPGothic" pitchFamily="34" charset="-122"/>
+                <a:cs typeface="BIZ UDPGothic" pitchFamily="34" charset="-120"/>
               </a:rPr>
               <a:t>⑤ 再就職</a:t>
             </a:r>
@@ -17501,11 +17501,11 @@
             <a:r>
               <a:rPr lang="en-US" sz="1250" b="1" dirty="0">
                 <a:solidFill>
-                  <a:srgbClr val="F5F5F0"/>
-                </a:solidFill>
-                <a:latin typeface="Noto Sans JP" pitchFamily="34" charset="0"/>
-                <a:ea typeface="Noto Sans JP" pitchFamily="34" charset="-122"/>
-                <a:cs typeface="Noto Sans JP" pitchFamily="34" charset="-120"/>
+                  <a:srgbClr val="16181D"/>
+                </a:solidFill>
+                <a:latin typeface="BIZ UDPGothic" pitchFamily="34" charset="0"/>
+                <a:ea typeface="BIZ UDPGothic" pitchFamily="34" charset="-122"/>
+                <a:cs typeface="BIZ UDPGothic" pitchFamily="34" charset="-120"/>
               </a:rPr>
               <a:t>支援の新設</a:t>
             </a:r>
@@ -17543,13 +17543,13 @@
             <a:r>
               <a:rPr lang="en-US" sz="950" dirty="0">
                 <a:solidFill>
-                  <a:srgbClr val="F5F5F0">
+                  <a:srgbClr val="16181D">
                     <a:alpha val="75000"/>
                   </a:srgbClr>
                 </a:solidFill>
-                <a:latin typeface="Noto Sans JP" pitchFamily="34" charset="0"/>
-                <a:ea typeface="Noto Sans JP" pitchFamily="34" charset="-122"/>
-                <a:cs typeface="Noto Sans JP" pitchFamily="34" charset="-120"/>
+                <a:latin typeface="BIZ UDPGothic" pitchFamily="34" charset="0"/>
+                <a:ea typeface="BIZ UDPGothic" pitchFamily="34" charset="-122"/>
+                <a:cs typeface="BIZ UDPGothic" pitchFamily="34" charset="-120"/>
               </a:rPr>
               <a:t>離職後の労働移動を国が支える</a:t>
             </a:r>
@@ -17584,13 +17584,13 @@
             <a:r>
               <a:rPr lang="en-US" sz="800" dirty="0">
                 <a:solidFill>
-                  <a:srgbClr val="F5F5F0">
+                  <a:srgbClr val="16181D">
                     <a:alpha val="40000"/>
                   </a:srgbClr>
                 </a:solidFill>
                 <a:latin typeface="Arial" pitchFamily="34" charset="0"/>
-                <a:ea typeface="Arial" pitchFamily="34" charset="-122"/>
-                <a:cs typeface="Arial" pitchFamily="34" charset="-120"/>
+                <a:ea typeface="BIZ UDPGothic" pitchFamily="34" charset="-122"/>
+                <a:cs typeface="BIZ UDPGothic" pitchFamily="34" charset="-120"/>
               </a:rPr>
               <a:t>REBOOT JAPAN ── 政策提言プラットフォーム</a:t>
             </a:r>
@@ -17625,13 +17625,13 @@
             <a:r>
               <a:rPr lang="en-US" sz="800" dirty="0">
                 <a:solidFill>
-                  <a:srgbClr val="F5F5F0">
+                  <a:srgbClr val="16181D">
                     <a:alpha val="40000"/>
                   </a:srgbClr>
                 </a:solidFill>
                 <a:latin typeface="Arial" pitchFamily="34" charset="0"/>
-                <a:ea typeface="Arial" pitchFamily="34" charset="-122"/>
-                <a:cs typeface="Arial" pitchFamily="34" charset="-120"/>
+                <a:ea typeface="BIZ UDPGothic" pitchFamily="34" charset="-122"/>
+                <a:cs typeface="BIZ UDPGothic" pitchFamily="34" charset="-120"/>
               </a:rPr>
               <a:t>4</a:t>
             </a:r>
@@ -17653,7 +17653,7 @@
     <p:bg>
       <p:bgPr>
         <a:solidFill>
-          <a:srgbClr val="0A0A0A"/>
+          <a:srgbClr val="F5F6F8"/>
         </a:solidFill>
       </p:bgPr>
     </p:bg>
@@ -17698,11 +17698,11 @@
             <a:r>
               <a:rPr lang="en-US" sz="1200" b="1" spc="200" kern="0" dirty="0">
                 <a:solidFill>
-                  <a:srgbClr val="D62828"/>
+                  <a:srgbClr val="C8161D"/>
                 </a:solidFill>
                 <a:latin typeface="Arial" pitchFamily="34" charset="0"/>
-                <a:ea typeface="Arial" pitchFamily="34" charset="-122"/>
-                <a:cs typeface="Arial" pitchFamily="34" charset="-120"/>
+                <a:ea typeface="BIZ UDPGothic" pitchFamily="34" charset="-122"/>
+                <a:cs typeface="BIZ UDPGothic" pitchFamily="34" charset="-120"/>
               </a:rPr>
               <a:t>PILLAR 01</a:t>
             </a:r>
@@ -17740,11 +17740,11 @@
             <a:r>
               <a:rPr lang="en-US" sz="2600" b="1" dirty="0">
                 <a:solidFill>
-                  <a:srgbClr val="F5F5F0"/>
-                </a:solidFill>
-                <a:latin typeface="Noto Sans JP" pitchFamily="34" charset="0"/>
-                <a:ea typeface="Noto Sans JP" pitchFamily="34" charset="-122"/>
-                <a:cs typeface="Noto Sans JP" pitchFamily="34" charset="-120"/>
+                  <a:srgbClr val="16181D"/>
+                </a:solidFill>
+                <a:latin typeface="BIZ UDPGothic" pitchFamily="34" charset="0"/>
+                <a:ea typeface="BIZ UDPGothic" pitchFamily="34" charset="-122"/>
+                <a:cs typeface="BIZ UDPGothic" pitchFamily="34" charset="-120"/>
               </a:rPr>
               <a:t>未来をつくる投資に絞る</a:t>
             </a:r>
@@ -17782,13 +17782,13 @@
             <a:r>
               <a:rPr lang="en-US" sz="1350" dirty="0">
                 <a:solidFill>
-                  <a:srgbClr val="F5F5F0">
+                  <a:srgbClr val="16181D">
                     <a:alpha val="90000"/>
                   </a:srgbClr>
                 </a:solidFill>
-                <a:latin typeface="Noto Sans JP" pitchFamily="34" charset="0"/>
-                <a:ea typeface="Noto Sans JP" pitchFamily="34" charset="-122"/>
-                <a:cs typeface="Noto Sans JP" pitchFamily="34" charset="-120"/>
+                <a:latin typeface="BIZ UDPGothic" pitchFamily="34" charset="0"/>
+                <a:ea typeface="BIZ UDPGothic" pitchFamily="34" charset="-122"/>
+                <a:cs typeface="BIZ UDPGothic" pitchFamily="34" charset="-120"/>
               </a:rPr>
               <a:t>研究や設備投資への補助金は、10年後の日本の競争力を決める分野だけに集中させる。</a:t>
             </a:r>
@@ -17813,11 +17813,11 @@
             </a:avLst>
           </a:prstGeom>
           <a:solidFill>
-            <a:srgbClr val="1A1A1A"/>
+            <a:srgbClr val="FFFFFF"/>
           </a:solidFill>
           <a:ln w="12700">
             <a:solidFill>
-              <a:srgbClr val="2E2E2E"/>
+              <a:srgbClr val="DDE0E6"/>
             </a:solidFill>
             <a:prstDash val="solid"/>
           </a:ln>
@@ -17893,11 +17893,11 @@
             <a:r>
               <a:rPr lang="en-US" sz="1500" b="1" dirty="0">
                 <a:solidFill>
-                  <a:srgbClr val="F5F5F0"/>
-                </a:solidFill>
-                <a:latin typeface="Noto Sans JP" pitchFamily="34" charset="0"/>
-                <a:ea typeface="Noto Sans JP" pitchFamily="34" charset="-122"/>
-                <a:cs typeface="Noto Sans JP" pitchFamily="34" charset="-120"/>
+                  <a:srgbClr val="16181D"/>
+                </a:solidFill>
+                <a:latin typeface="BIZ UDPGothic" pitchFamily="34" charset="0"/>
+                <a:ea typeface="BIZ UDPGothic" pitchFamily="34" charset="-122"/>
+                <a:cs typeface="BIZ UDPGothic" pitchFamily="34" charset="-120"/>
               </a:rPr>
               <a:t>象徴的な例：トヨタ「ウーブン・シティ」</a:t>
             </a:r>
@@ -17935,13 +17935,13 @@
             <a:r>
               <a:rPr lang="en-US" sz="1250" dirty="0">
                 <a:solidFill>
-                  <a:srgbClr val="F5F5F0">
+                  <a:srgbClr val="16181D">
                     <a:alpha val="90000"/>
                   </a:srgbClr>
                 </a:solidFill>
-                <a:latin typeface="Noto Sans JP" pitchFamily="34" charset="0"/>
-                <a:ea typeface="Noto Sans JP" pitchFamily="34" charset="-122"/>
-                <a:cs typeface="Noto Sans JP" pitchFamily="34" charset="-120"/>
+                <a:latin typeface="BIZ UDPGothic" pitchFamily="34" charset="0"/>
+                <a:ea typeface="BIZ UDPGothic" pitchFamily="34" charset="-122"/>
+                <a:cs typeface="BIZ UDPGothic" pitchFamily="34" charset="-120"/>
               </a:rPr>
               <a:t>AI・ロボット・自動運転・水素エネルギーなどを一つの街でまとめて試す、実験都市プロジェクト。こうした「未来を実際につくってみる」大型プロジェクトに、国のお金を集中的に投じる。</a:t>
             </a:r>
@@ -17976,13 +17976,13 @@
             <a:r>
               <a:rPr lang="en-US" sz="800" dirty="0">
                 <a:solidFill>
-                  <a:srgbClr val="F5F5F0">
+                  <a:srgbClr val="16181D">
                     <a:alpha val="40000"/>
                   </a:srgbClr>
                 </a:solidFill>
                 <a:latin typeface="Arial" pitchFamily="34" charset="0"/>
-                <a:ea typeface="Arial" pitchFamily="34" charset="-122"/>
-                <a:cs typeface="Arial" pitchFamily="34" charset="-120"/>
+                <a:ea typeface="BIZ UDPGothic" pitchFamily="34" charset="-122"/>
+                <a:cs typeface="BIZ UDPGothic" pitchFamily="34" charset="-120"/>
               </a:rPr>
               <a:t>REBOOT JAPAN ── 政策提言プラットフォーム</a:t>
             </a:r>
@@ -18017,13 +18017,13 @@
             <a:r>
               <a:rPr lang="en-US" sz="800" dirty="0">
                 <a:solidFill>
-                  <a:srgbClr val="F5F5F0">
+                  <a:srgbClr val="16181D">
                     <a:alpha val="40000"/>
                   </a:srgbClr>
                 </a:solidFill>
                 <a:latin typeface="Arial" pitchFamily="34" charset="0"/>
-                <a:ea typeface="Arial" pitchFamily="34" charset="-122"/>
-                <a:cs typeface="Arial" pitchFamily="34" charset="-120"/>
+                <a:ea typeface="BIZ UDPGothic" pitchFamily="34" charset="-122"/>
+                <a:cs typeface="BIZ UDPGothic" pitchFamily="34" charset="-120"/>
               </a:rPr>
               <a:t>5</a:t>
             </a:r>
@@ -18045,7 +18045,7 @@
     <p:bg>
       <p:bgPr>
         <a:solidFill>
-          <a:srgbClr val="0A0A0A"/>
+          <a:srgbClr val="F5F6F8"/>
         </a:solidFill>
       </p:bgPr>
     </p:bg>
@@ -18090,11 +18090,11 @@
             <a:r>
               <a:rPr lang="en-US" sz="1200" b="1" spc="200" kern="0" dirty="0">
                 <a:solidFill>
-                  <a:srgbClr val="D62828"/>
+                  <a:srgbClr val="C8161D"/>
                 </a:solidFill>
                 <a:latin typeface="Arial" pitchFamily="34" charset="0"/>
-                <a:ea typeface="Arial" pitchFamily="34" charset="-122"/>
-                <a:cs typeface="Arial" pitchFamily="34" charset="-120"/>
+                <a:ea typeface="BIZ UDPGothic" pitchFamily="34" charset="-122"/>
+                <a:cs typeface="BIZ UDPGothic" pitchFamily="34" charset="-120"/>
               </a:rPr>
               <a:t>PILLAR 01 — DETAIL</a:t>
             </a:r>
@@ -18132,11 +18132,11 @@
             <a:r>
               <a:rPr lang="en-US" sz="2300" b="1" dirty="0">
                 <a:solidFill>
-                  <a:srgbClr val="F5F5F0"/>
-                </a:solidFill>
-                <a:latin typeface="Noto Sans JP" pitchFamily="34" charset="0"/>
-                <a:ea typeface="Noto Sans JP" pitchFamily="34" charset="-122"/>
-                <a:cs typeface="Noto Sans JP" pitchFamily="34" charset="-120"/>
+                  <a:srgbClr val="16181D"/>
+                </a:solidFill>
+                <a:latin typeface="BIZ UDPGothic" pitchFamily="34" charset="0"/>
+                <a:ea typeface="BIZ UDPGothic" pitchFamily="34" charset="-122"/>
+                <a:cs typeface="BIZ UDPGothic" pitchFamily="34" charset="-120"/>
               </a:rPr>
               <a:t>対象になる4つの技術（やさしく解説）</a:t>
             </a:r>
@@ -18161,11 +18161,11 @@
             </a:avLst>
           </a:prstGeom>
           <a:solidFill>
-            <a:srgbClr val="1A1A1A"/>
+            <a:srgbClr val="FFFFFF"/>
           </a:solidFill>
           <a:ln w="12700">
             <a:solidFill>
-              <a:srgbClr val="2E2E2E"/>
+              <a:srgbClr val="DDE0E6"/>
             </a:solidFill>
             <a:prstDash val="solid"/>
           </a:ln>
@@ -18244,11 +18244,11 @@
             <a:r>
               <a:rPr lang="en-US" sz="1250" b="1" dirty="0">
                 <a:solidFill>
-                  <a:srgbClr val="F5F5F0"/>
-                </a:solidFill>
-                <a:latin typeface="Noto Sans JP" pitchFamily="34" charset="0"/>
-                <a:ea typeface="Noto Sans JP" pitchFamily="34" charset="-122"/>
-                <a:cs typeface="Noto Sans JP" pitchFamily="34" charset="-120"/>
+                  <a:srgbClr val="16181D"/>
+                </a:solidFill>
+                <a:latin typeface="BIZ UDPGothic" pitchFamily="34" charset="0"/>
+                <a:ea typeface="BIZ UDPGothic" pitchFamily="34" charset="-122"/>
+                <a:cs typeface="BIZ UDPGothic" pitchFamily="34" charset="-120"/>
               </a:rPr>
               <a:t>海底レアアース</a:t>
             </a:r>
@@ -18264,11 +18264,11 @@
             <a:r>
               <a:rPr lang="en-US" sz="1250" b="1" dirty="0">
                 <a:solidFill>
-                  <a:srgbClr val="F5F5F0"/>
-                </a:solidFill>
-                <a:latin typeface="Noto Sans JP" pitchFamily="34" charset="0"/>
-                <a:ea typeface="Noto Sans JP" pitchFamily="34" charset="-122"/>
-                <a:cs typeface="Noto Sans JP" pitchFamily="34" charset="-120"/>
+                  <a:srgbClr val="16181D"/>
+                </a:solidFill>
+                <a:latin typeface="BIZ UDPGothic" pitchFamily="34" charset="0"/>
+                <a:ea typeface="BIZ UDPGothic" pitchFamily="34" charset="-122"/>
+                <a:cs typeface="BIZ UDPGothic" pitchFamily="34" charset="-120"/>
               </a:rPr>
               <a:t>・海洋資源</a:t>
             </a:r>
@@ -18306,13 +18306,13 @@
             <a:r>
               <a:rPr lang="en-US" sz="950" dirty="0">
                 <a:solidFill>
-                  <a:srgbClr val="F5F5F0">
+                  <a:srgbClr val="16181D">
                     <a:alpha val="75000"/>
                   </a:srgbClr>
                 </a:solidFill>
-                <a:latin typeface="Noto Sans JP" pitchFamily="34" charset="0"/>
-                <a:ea typeface="Noto Sans JP" pitchFamily="34" charset="-122"/>
-                <a:cs typeface="Noto Sans JP" pitchFamily="34" charset="-120"/>
+                <a:latin typeface="BIZ UDPGothic" pitchFamily="34" charset="0"/>
+                <a:ea typeface="BIZ UDPGothic" pitchFamily="34" charset="-122"/>
+                <a:cs typeface="BIZ UDPGothic" pitchFamily="34" charset="-120"/>
               </a:rPr>
               <a:t>スマホや電池に欠かせない金属を、海の底から自分の国で確保する</a:t>
             </a:r>
@@ -18337,11 +18337,11 @@
             </a:avLst>
           </a:prstGeom>
           <a:solidFill>
-            <a:srgbClr val="1A1A1A"/>
+            <a:srgbClr val="FFFFFF"/>
           </a:solidFill>
           <a:ln w="12700">
             <a:solidFill>
-              <a:srgbClr val="2E2E2E"/>
+              <a:srgbClr val="DDE0E6"/>
             </a:solidFill>
             <a:prstDash val="solid"/>
           </a:ln>
@@ -18420,11 +18420,11 @@
             <a:r>
               <a:rPr lang="en-US" sz="1250" b="1" dirty="0">
                 <a:solidFill>
-                  <a:srgbClr val="F5F5F0"/>
-                </a:solidFill>
-                <a:latin typeface="Noto Sans JP" pitchFamily="34" charset="0"/>
-                <a:ea typeface="Noto Sans JP" pitchFamily="34" charset="-122"/>
-                <a:cs typeface="Noto Sans JP" pitchFamily="34" charset="-120"/>
+                  <a:srgbClr val="16181D"/>
+                </a:solidFill>
+                <a:latin typeface="BIZ UDPGothic" pitchFamily="34" charset="0"/>
+                <a:ea typeface="BIZ UDPGothic" pitchFamily="34" charset="-122"/>
+                <a:cs typeface="BIZ UDPGothic" pitchFamily="34" charset="-120"/>
               </a:rPr>
               <a:t>量子</a:t>
             </a:r>
@@ -18440,11 +18440,11 @@
             <a:r>
               <a:rPr lang="en-US" sz="1250" b="1" dirty="0">
                 <a:solidFill>
-                  <a:srgbClr val="F5F5F0"/>
-                </a:solidFill>
-                <a:latin typeface="Noto Sans JP" pitchFamily="34" charset="0"/>
-                <a:ea typeface="Noto Sans JP" pitchFamily="34" charset="-122"/>
-                <a:cs typeface="Noto Sans JP" pitchFamily="34" charset="-120"/>
+                  <a:srgbClr val="16181D"/>
+                </a:solidFill>
+                <a:latin typeface="BIZ UDPGothic" pitchFamily="34" charset="0"/>
+                <a:ea typeface="BIZ UDPGothic" pitchFamily="34" charset="-122"/>
+                <a:cs typeface="BIZ UDPGothic" pitchFamily="34" charset="-120"/>
               </a:rPr>
               <a:t>コンピュータ</a:t>
             </a:r>
@@ -18482,13 +18482,13 @@
             <a:r>
               <a:rPr lang="en-US" sz="950" dirty="0">
                 <a:solidFill>
-                  <a:srgbClr val="F5F5F0">
+                  <a:srgbClr val="16181D">
                     <a:alpha val="75000"/>
                   </a:srgbClr>
                 </a:solidFill>
-                <a:latin typeface="Noto Sans JP" pitchFamily="34" charset="0"/>
-                <a:ea typeface="Noto Sans JP" pitchFamily="34" charset="-122"/>
-                <a:cs typeface="Noto Sans JP" pitchFamily="34" charset="-120"/>
+                <a:latin typeface="BIZ UDPGothic" pitchFamily="34" charset="0"/>
+                <a:ea typeface="BIZ UDPGothic" pitchFamily="34" charset="-122"/>
+                <a:cs typeface="BIZ UDPGothic" pitchFamily="34" charset="-120"/>
               </a:rPr>
               <a:t>今までのコンピュータよりずっと速く計算できる、次世代の計算機</a:t>
             </a:r>
@@ -18513,11 +18513,11 @@
             </a:avLst>
           </a:prstGeom>
           <a:solidFill>
-            <a:srgbClr val="1A1A1A"/>
+            <a:srgbClr val="FFFFFF"/>
           </a:solidFill>
           <a:ln w="12700">
             <a:solidFill>
-              <a:srgbClr val="2E2E2E"/>
+              <a:srgbClr val="DDE0E6"/>
             </a:solidFill>
             <a:prstDash val="solid"/>
           </a:ln>
@@ -18596,11 +18596,11 @@
             <a:r>
               <a:rPr lang="en-US" sz="1250" b="1" dirty="0">
                 <a:solidFill>
-                  <a:srgbClr val="F5F5F0"/>
-                </a:solidFill>
-                <a:latin typeface="Noto Sans JP" pitchFamily="34" charset="0"/>
-                <a:ea typeface="Noto Sans JP" pitchFamily="34" charset="-122"/>
-                <a:cs typeface="Noto Sans JP" pitchFamily="34" charset="-120"/>
+                  <a:srgbClr val="16181D"/>
+                </a:solidFill>
+                <a:latin typeface="BIZ UDPGothic" pitchFamily="34" charset="0"/>
+                <a:ea typeface="BIZ UDPGothic" pitchFamily="34" charset="-122"/>
+                <a:cs typeface="BIZ UDPGothic" pitchFamily="34" charset="-120"/>
               </a:rPr>
               <a:t>宇宙開発</a:t>
             </a:r>
@@ -18616,11 +18616,11 @@
             <a:r>
               <a:rPr lang="en-US" sz="1250" b="1" dirty="0">
                 <a:solidFill>
-                  <a:srgbClr val="F5F5F0"/>
-                </a:solidFill>
-                <a:latin typeface="Noto Sans JP" pitchFamily="34" charset="0"/>
-                <a:ea typeface="Noto Sans JP" pitchFamily="34" charset="-122"/>
-                <a:cs typeface="Noto Sans JP" pitchFamily="34" charset="-120"/>
+                  <a:srgbClr val="16181D"/>
+                </a:solidFill>
+                <a:latin typeface="BIZ UDPGothic" pitchFamily="34" charset="0"/>
+                <a:ea typeface="BIZ UDPGothic" pitchFamily="34" charset="-122"/>
+                <a:cs typeface="BIZ UDPGothic" pitchFamily="34" charset="-120"/>
               </a:rPr>
               <a:t>・宇宙インフラ</a:t>
             </a:r>
@@ -18658,13 +18658,13 @@
             <a:r>
               <a:rPr lang="en-US" sz="950" dirty="0">
                 <a:solidFill>
-                  <a:srgbClr val="F5F5F0">
+                  <a:srgbClr val="16181D">
                     <a:alpha val="75000"/>
                   </a:srgbClr>
                 </a:solidFill>
-                <a:latin typeface="Noto Sans JP" pitchFamily="34" charset="0"/>
-                <a:ea typeface="Noto Sans JP" pitchFamily="34" charset="-122"/>
-                <a:cs typeface="Noto Sans JP" pitchFamily="34" charset="-120"/>
+                <a:latin typeface="BIZ UDPGothic" pitchFamily="34" charset="0"/>
+                <a:ea typeface="BIZ UDPGothic" pitchFamily="34" charset="-122"/>
+                <a:cs typeface="BIZ UDPGothic" pitchFamily="34" charset="-120"/>
               </a:rPr>
               <a:t>ロケットや人工衛星など、宇宙で活動するための技術</a:t>
             </a:r>
@@ -18689,11 +18689,11 @@
             </a:avLst>
           </a:prstGeom>
           <a:solidFill>
-            <a:srgbClr val="1A1A1A"/>
+            <a:srgbClr val="FFFFFF"/>
           </a:solidFill>
           <a:ln w="12700">
             <a:solidFill>
-              <a:srgbClr val="2E2E2E"/>
+              <a:srgbClr val="DDE0E6"/>
             </a:solidFill>
             <a:prstDash val="solid"/>
           </a:ln>
@@ -18772,11 +18772,11 @@
             <a:r>
               <a:rPr lang="en-US" sz="1250" b="1" dirty="0">
                 <a:solidFill>
-                  <a:srgbClr val="F5F5F0"/>
-                </a:solidFill>
-                <a:latin typeface="Noto Sans JP" pitchFamily="34" charset="0"/>
-                <a:ea typeface="Noto Sans JP" pitchFamily="34" charset="-122"/>
-                <a:cs typeface="Noto Sans JP" pitchFamily="34" charset="-120"/>
+                  <a:srgbClr val="16181D"/>
+                </a:solidFill>
+                <a:latin typeface="BIZ UDPGothic" pitchFamily="34" charset="0"/>
+                <a:ea typeface="BIZ UDPGothic" pitchFamily="34" charset="-122"/>
+                <a:cs typeface="BIZ UDPGothic" pitchFamily="34" charset="-120"/>
               </a:rPr>
               <a:t>フィジカルAI</a:t>
             </a:r>
@@ -18814,13 +18814,13 @@
             <a:r>
               <a:rPr lang="en-US" sz="950" dirty="0">
                 <a:solidFill>
-                  <a:srgbClr val="F5F5F0">
+                  <a:srgbClr val="16181D">
                     <a:alpha val="75000"/>
                   </a:srgbClr>
                 </a:solidFill>
-                <a:latin typeface="Noto Sans JP" pitchFamily="34" charset="0"/>
-                <a:ea typeface="Noto Sans JP" pitchFamily="34" charset="-122"/>
-                <a:cs typeface="Noto Sans JP" pitchFamily="34" charset="-120"/>
+                <a:latin typeface="BIZ UDPGothic" pitchFamily="34" charset="0"/>
+                <a:ea typeface="BIZ UDPGothic" pitchFamily="34" charset="-122"/>
+                <a:cs typeface="BIZ UDPGothic" pitchFamily="34" charset="-120"/>
               </a:rPr>
               <a:t>工場や道路など、実際の世界で動くロボットの「頭脳」になるAI</a:t>
             </a:r>
@@ -18855,13 +18855,13 @@
             <a:r>
               <a:rPr lang="en-US" sz="800" dirty="0">
                 <a:solidFill>
-                  <a:srgbClr val="F5F5F0">
+                  <a:srgbClr val="16181D">
                     <a:alpha val="40000"/>
                   </a:srgbClr>
                 </a:solidFill>
                 <a:latin typeface="Arial" pitchFamily="34" charset="0"/>
-                <a:ea typeface="Arial" pitchFamily="34" charset="-122"/>
-                <a:cs typeface="Arial" pitchFamily="34" charset="-120"/>
+                <a:ea typeface="BIZ UDPGothic" pitchFamily="34" charset="-122"/>
+                <a:cs typeface="BIZ UDPGothic" pitchFamily="34" charset="-120"/>
               </a:rPr>
               <a:t>REBOOT JAPAN ── 政策提言プラットフォーム</a:t>
             </a:r>
@@ -18896,13 +18896,13 @@
             <a:r>
               <a:rPr lang="en-US" sz="800" dirty="0">
                 <a:solidFill>
-                  <a:srgbClr val="F5F5F0">
+                  <a:srgbClr val="16181D">
                     <a:alpha val="40000"/>
                   </a:srgbClr>
                 </a:solidFill>
                 <a:latin typeface="Arial" pitchFamily="34" charset="0"/>
-                <a:ea typeface="Arial" pitchFamily="34" charset="-122"/>
-                <a:cs typeface="Arial" pitchFamily="34" charset="-120"/>
+                <a:ea typeface="BIZ UDPGothic" pitchFamily="34" charset="-122"/>
+                <a:cs typeface="BIZ UDPGothic" pitchFamily="34" charset="-120"/>
               </a:rPr>
               <a:t>6</a:t>
             </a:r>
@@ -18924,7 +18924,7 @@
     <p:bg>
       <p:bgPr>
         <a:solidFill>
-          <a:srgbClr val="0A0A0A"/>
+          <a:srgbClr val="F5F6F8"/>
         </a:solidFill>
       </p:bgPr>
     </p:bg>
@@ -18969,11 +18969,11 @@
             <a:r>
               <a:rPr lang="en-US" sz="1200" b="1" spc="200" kern="0" dirty="0">
                 <a:solidFill>
-                  <a:srgbClr val="D62828"/>
+                  <a:srgbClr val="C8161D"/>
                 </a:solidFill>
                 <a:latin typeface="Arial" pitchFamily="34" charset="0"/>
-                <a:ea typeface="Arial" pitchFamily="34" charset="-122"/>
-                <a:cs typeface="Arial" pitchFamily="34" charset="-120"/>
+                <a:ea typeface="BIZ UDPGothic" pitchFamily="34" charset="-122"/>
+                <a:cs typeface="BIZ UDPGothic" pitchFamily="34" charset="-120"/>
               </a:rPr>
               <a:t>PILLAR 01 — DETAIL</a:t>
             </a:r>
@@ -19011,11 +19011,11 @@
             <a:r>
               <a:rPr lang="en-US" sz="2600" b="1" dirty="0">
                 <a:solidFill>
-                  <a:srgbClr val="F5F5F0"/>
-                </a:solidFill>
-                <a:latin typeface="Noto Sans JP" pitchFamily="34" charset="0"/>
-                <a:ea typeface="Noto Sans JP" pitchFamily="34" charset="-122"/>
-                <a:cs typeface="Noto Sans JP" pitchFamily="34" charset="-120"/>
+                  <a:srgbClr val="16181D"/>
+                </a:solidFill>
+                <a:latin typeface="BIZ UDPGothic" pitchFamily="34" charset="0"/>
+                <a:ea typeface="BIZ UDPGothic" pitchFamily="34" charset="-122"/>
+                <a:cs typeface="BIZ UDPGothic" pitchFamily="34" charset="-120"/>
               </a:rPr>
               <a:t>審査は「会社」ではなく「プロジェクト」で</a:t>
             </a:r>
@@ -19053,13 +19053,13 @@
             <a:r>
               <a:rPr lang="en-US" sz="1350" dirty="0">
                 <a:solidFill>
-                  <a:srgbClr val="F5F5F0">
+                  <a:srgbClr val="16181D">
                     <a:alpha val="90000"/>
                   </a:srgbClr>
                 </a:solidFill>
-                <a:latin typeface="Noto Sans JP" pitchFamily="34" charset="0"/>
-                <a:ea typeface="Noto Sans JP" pitchFamily="34" charset="-122"/>
-                <a:cs typeface="Noto Sans JP" pitchFamily="34" charset="-120"/>
+                <a:latin typeface="BIZ UDPGothic" pitchFamily="34" charset="0"/>
+                <a:ea typeface="BIZ UDPGothic" pitchFamily="34" charset="-122"/>
+                <a:cs typeface="BIZ UDPGothic" pitchFamily="34" charset="-120"/>
               </a:rPr>
               <a:t>「この会社はレガシーか未来か」ではなく、「この投資が対象の技術に当てはまるか」だけで判定する。</a:t>
             </a:r>
@@ -19084,11 +19084,11 @@
             </a:avLst>
           </a:prstGeom>
           <a:solidFill>
-            <a:srgbClr val="1A1A1A"/>
+            <a:srgbClr val="FFFFFF"/>
           </a:solidFill>
           <a:ln w="12700">
             <a:solidFill>
-              <a:srgbClr val="2E2E2E"/>
+              <a:srgbClr val="DDE0E6"/>
             </a:solidFill>
             <a:prstDash val="solid"/>
           </a:ln>
@@ -19164,11 +19164,11 @@
             <a:r>
               <a:rPr lang="en-US" sz="1300" b="1" dirty="0">
                 <a:solidFill>
-                  <a:srgbClr val="F5F5F0"/>
-                </a:solidFill>
-                <a:latin typeface="Noto Sans JP" pitchFamily="34" charset="0"/>
-                <a:ea typeface="Noto Sans JP" pitchFamily="34" charset="-122"/>
-                <a:cs typeface="Noto Sans JP" pitchFamily="34" charset="-120"/>
+                  <a:srgbClr val="16181D"/>
+                </a:solidFill>
+                <a:latin typeface="BIZ UDPGothic" pitchFamily="34" charset="0"/>
+                <a:ea typeface="BIZ UDPGothic" pitchFamily="34" charset="-122"/>
+                <a:cs typeface="BIZ UDPGothic" pitchFamily="34" charset="-120"/>
               </a:rPr>
               <a:t>タクシー会社が自動運転に投資</a:t>
             </a:r>
@@ -19206,13 +19206,13 @@
             <a:r>
               <a:rPr lang="en-US" sz="1150" dirty="0">
                 <a:solidFill>
-                  <a:srgbClr val="F5F5F0">
+                  <a:srgbClr val="16181D">
                     <a:alpha val="85000"/>
                   </a:srgbClr>
                 </a:solidFill>
-                <a:latin typeface="Noto Sans JP" pitchFamily="34" charset="0"/>
-                <a:ea typeface="Noto Sans JP" pitchFamily="34" charset="-122"/>
-                <a:cs typeface="Noto Sans JP" pitchFamily="34" charset="-120"/>
+                <a:latin typeface="BIZ UDPGothic" pitchFamily="34" charset="0"/>
+                <a:ea typeface="BIZ UDPGothic" pitchFamily="34" charset="-122"/>
+                <a:cs typeface="BIZ UDPGothic" pitchFamily="34" charset="-120"/>
               </a:rPr>
               <a:t>業種は「レガシー」でも、プロジェクトがフィジカルAI領域に当てはまるので対象になる。</a:t>
             </a:r>
@@ -19237,11 +19237,11 @@
             </a:avLst>
           </a:prstGeom>
           <a:solidFill>
-            <a:srgbClr val="1A1A1A"/>
+            <a:srgbClr val="FFFFFF"/>
           </a:solidFill>
           <a:ln w="12700">
             <a:solidFill>
-              <a:srgbClr val="2E2E2E"/>
+              <a:srgbClr val="DDE0E6"/>
             </a:solidFill>
             <a:prstDash val="solid"/>
           </a:ln>
@@ -19317,11 +19317,11 @@
             <a:r>
               <a:rPr lang="en-US" sz="1300" b="1" dirty="0">
                 <a:solidFill>
-                  <a:srgbClr val="F5F5F0"/>
-                </a:solidFill>
-                <a:latin typeface="Noto Sans JP" pitchFamily="34" charset="0"/>
-                <a:ea typeface="Noto Sans JP" pitchFamily="34" charset="-122"/>
-                <a:cs typeface="Noto Sans JP" pitchFamily="34" charset="-120"/>
+                  <a:srgbClr val="16181D"/>
+                </a:solidFill>
+                <a:latin typeface="BIZ UDPGothic" pitchFamily="34" charset="0"/>
+                <a:ea typeface="BIZ UDPGothic" pitchFamily="34" charset="-122"/>
+                <a:cs typeface="BIZ UDPGothic" pitchFamily="34" charset="-120"/>
               </a:rPr>
               <a:t>大企業が普通の工場を増設</a:t>
             </a:r>
@@ -19359,13 +19359,13 @@
             <a:r>
               <a:rPr lang="en-US" sz="1150" dirty="0">
                 <a:solidFill>
-                  <a:srgbClr val="F5F5F0">
+                  <a:srgbClr val="16181D">
                     <a:alpha val="85000"/>
                   </a:srgbClr>
                 </a:solidFill>
-                <a:latin typeface="Noto Sans JP" pitchFamily="34" charset="0"/>
-                <a:ea typeface="Noto Sans JP" pitchFamily="34" charset="-122"/>
-                <a:cs typeface="Noto Sans JP" pitchFamily="34" charset="-120"/>
+                <a:latin typeface="BIZ UDPGothic" pitchFamily="34" charset="0"/>
+                <a:ea typeface="BIZ UDPGothic" pitchFamily="34" charset="-122"/>
+                <a:cs typeface="BIZ UDPGothic" pitchFamily="34" charset="-120"/>
               </a:rPr>
               <a:t>会社としては有名でも、対象の技術領域に当てはまらないプロジェクトなら対象外になる。</a:t>
             </a:r>
@@ -19400,13 +19400,13 @@
             <a:r>
               <a:rPr lang="en-US" sz="800" dirty="0">
                 <a:solidFill>
-                  <a:srgbClr val="F5F5F0">
+                  <a:srgbClr val="16181D">
                     <a:alpha val="40000"/>
                   </a:srgbClr>
                 </a:solidFill>
                 <a:latin typeface="Arial" pitchFamily="34" charset="0"/>
-                <a:ea typeface="Arial" pitchFamily="34" charset="-122"/>
-                <a:cs typeface="Arial" pitchFamily="34" charset="-120"/>
+                <a:ea typeface="BIZ UDPGothic" pitchFamily="34" charset="-122"/>
+                <a:cs typeface="BIZ UDPGothic" pitchFamily="34" charset="-120"/>
               </a:rPr>
               <a:t>REBOOT JAPAN ── 政策提言プラットフォーム</a:t>
             </a:r>
@@ -19441,13 +19441,13 @@
             <a:r>
               <a:rPr lang="en-US" sz="800" dirty="0">
                 <a:solidFill>
-                  <a:srgbClr val="F5F5F0">
+                  <a:srgbClr val="16181D">
                     <a:alpha val="40000"/>
                   </a:srgbClr>
                 </a:solidFill>
                 <a:latin typeface="Arial" pitchFamily="34" charset="0"/>
-                <a:ea typeface="Arial" pitchFamily="34" charset="-122"/>
-                <a:cs typeface="Arial" pitchFamily="34" charset="-120"/>
+                <a:ea typeface="BIZ UDPGothic" pitchFamily="34" charset="-122"/>
+                <a:cs typeface="BIZ UDPGothic" pitchFamily="34" charset="-120"/>
               </a:rPr>
               <a:t>7</a:t>
             </a:r>
@@ -19469,7 +19469,7 @@
     <p:bg>
       <p:bgPr>
         <a:solidFill>
-          <a:srgbClr val="0A0A0A"/>
+          <a:srgbClr val="F5F6F8"/>
         </a:solidFill>
       </p:bgPr>
     </p:bg>
@@ -19514,11 +19514,11 @@
             <a:r>
               <a:rPr lang="en-US" sz="1200" b="1" spc="200" kern="0" dirty="0">
                 <a:solidFill>
-                  <a:srgbClr val="D62828"/>
+                  <a:srgbClr val="C8161D"/>
                 </a:solidFill>
                 <a:latin typeface="Arial" pitchFamily="34" charset="0"/>
-                <a:ea typeface="Arial" pitchFamily="34" charset="-122"/>
-                <a:cs typeface="Arial" pitchFamily="34" charset="-120"/>
+                <a:ea typeface="BIZ UDPGothic" pitchFamily="34" charset="-122"/>
+                <a:cs typeface="BIZ UDPGothic" pitchFamily="34" charset="-120"/>
               </a:rPr>
               <a:t>PILLAR 02</a:t>
             </a:r>
@@ -19556,11 +19556,11 @@
             <a:r>
               <a:rPr lang="en-US" sz="2600" b="1" dirty="0">
                 <a:solidFill>
-                  <a:srgbClr val="F5F5F0"/>
-                </a:solidFill>
-                <a:latin typeface="Noto Sans JP" pitchFamily="34" charset="0"/>
-                <a:ea typeface="Noto Sans JP" pitchFamily="34" charset="-122"/>
-                <a:cs typeface="Noto Sans JP" pitchFamily="34" charset="-120"/>
+                  <a:srgbClr val="16181D"/>
+                </a:solidFill>
+                <a:latin typeface="BIZ UDPGothic" pitchFamily="34" charset="0"/>
+                <a:ea typeface="BIZ UDPGothic" pitchFamily="34" charset="-122"/>
+                <a:cs typeface="BIZ UDPGothic" pitchFamily="34" charset="-120"/>
               </a:rPr>
               <a:t>古い業界向けの補助金はやめる</a:t>
             </a:r>
@@ -19598,13 +19598,13 @@
             <a:r>
               <a:rPr lang="en-US" sz="1350" dirty="0">
                 <a:solidFill>
-                  <a:srgbClr val="F5F5F0">
+                  <a:srgbClr val="16181D">
                     <a:alpha val="90000"/>
                   </a:srgbClr>
                 </a:solidFill>
-                <a:latin typeface="Noto Sans JP" pitchFamily="34" charset="0"/>
-                <a:ea typeface="Noto Sans JP" pitchFamily="34" charset="-122"/>
-                <a:cs typeface="Noto Sans JP" pitchFamily="34" charset="-120"/>
+                <a:latin typeface="BIZ UDPGothic" pitchFamily="34" charset="0"/>
+                <a:ea typeface="BIZ UDPGothic" pitchFamily="34" charset="-122"/>
+                <a:cs typeface="BIZ UDPGothic" pitchFamily="34" charset="-120"/>
               </a:rPr>
               <a:t>「タクシー・鉄鋼・造船・化学が対象」ではなく、成熟した市場を延命させるプログラムそのものを一律で廃止する。</a:t>
             </a:r>
@@ -19629,11 +19629,11 @@
             </a:avLst>
           </a:prstGeom>
           <a:solidFill>
-            <a:srgbClr val="1A1A1A"/>
+            <a:srgbClr val="FFFFFF"/>
           </a:solidFill>
           <a:ln w="12700">
             <a:solidFill>
-              <a:srgbClr val="2E2E2E"/>
+              <a:srgbClr val="DDE0E6"/>
             </a:solidFill>
             <a:prstDash val="solid"/>
           </a:ln>
@@ -19709,11 +19709,11 @@
             <a:r>
               <a:rPr lang="en-US" sz="1500" b="1" dirty="0">
                 <a:solidFill>
-                  <a:srgbClr val="F5F5F0"/>
-                </a:solidFill>
-                <a:latin typeface="Noto Sans JP" pitchFamily="34" charset="0"/>
-                <a:ea typeface="Noto Sans JP" pitchFamily="34" charset="-122"/>
-                <a:cs typeface="Noto Sans JP" pitchFamily="34" charset="-120"/>
+                  <a:srgbClr val="16181D"/>
+                </a:solidFill>
+                <a:latin typeface="BIZ UDPGothic" pitchFamily="34" charset="0"/>
+                <a:ea typeface="BIZ UDPGothic" pitchFamily="34" charset="-122"/>
+                <a:cs typeface="BIZ UDPGothic" pitchFamily="34" charset="-120"/>
               </a:rPr>
               <a:t>なぜやめるのか</a:t>
             </a:r>
@@ -19751,13 +19751,13 @@
             <a:r>
               <a:rPr lang="en-US" sz="1250" dirty="0">
                 <a:solidFill>
-                  <a:srgbClr val="F5F5F0">
+                  <a:srgbClr val="16181D">
                     <a:alpha val="90000"/>
                   </a:srgbClr>
                 </a:solidFill>
-                <a:latin typeface="Noto Sans JP" pitchFamily="34" charset="0"/>
-                <a:ea typeface="Noto Sans JP" pitchFamily="34" charset="-122"/>
-                <a:cs typeface="Noto Sans JP" pitchFamily="34" charset="-120"/>
+                <a:latin typeface="BIZ UDPGothic" pitchFamily="34" charset="0"/>
+                <a:ea typeface="BIZ UDPGothic" pitchFamily="34" charset="-122"/>
+                <a:cs typeface="BIZ UDPGothic" pitchFamily="34" charset="-120"/>
               </a:rPr>
               <a:t>すでに市場が確立している業界に国のお金を出し続けると、本来なら起きるはずの事業再編やM&amp;A、自力での構造改革が先送りされてしまう。自活すべき業界への国費投入はゼロにする。</a:t>
             </a:r>
@@ -19792,13 +19792,13 @@
             <a:r>
               <a:rPr lang="en-US" sz="800" dirty="0">
                 <a:solidFill>
-                  <a:srgbClr val="F5F5F0">
+                  <a:srgbClr val="16181D">
                     <a:alpha val="40000"/>
                   </a:srgbClr>
                 </a:solidFill>
                 <a:latin typeface="Arial" pitchFamily="34" charset="0"/>
-                <a:ea typeface="Arial" pitchFamily="34" charset="-122"/>
-                <a:cs typeface="Arial" pitchFamily="34" charset="-120"/>
+                <a:ea typeface="BIZ UDPGothic" pitchFamily="34" charset="-122"/>
+                <a:cs typeface="BIZ UDPGothic" pitchFamily="34" charset="-120"/>
               </a:rPr>
               <a:t>REBOOT JAPAN ── 政策提言プラットフォーム</a:t>
             </a:r>
@@ -19833,13 +19833,13 @@
             <a:r>
               <a:rPr lang="en-US" sz="800" dirty="0">
                 <a:solidFill>
-                  <a:srgbClr val="F5F5F0">
+                  <a:srgbClr val="16181D">
                     <a:alpha val="40000"/>
                   </a:srgbClr>
                 </a:solidFill>
                 <a:latin typeface="Arial" pitchFamily="34" charset="0"/>
-                <a:ea typeface="Arial" pitchFamily="34" charset="-122"/>
-                <a:cs typeface="Arial" pitchFamily="34" charset="-120"/>
+                <a:ea typeface="BIZ UDPGothic" pitchFamily="34" charset="-122"/>
+                <a:cs typeface="BIZ UDPGothic" pitchFamily="34" charset="-120"/>
               </a:rPr>
               <a:t>8</a:t>
             </a:r>
@@ -19861,7 +19861,7 @@
     <p:bg>
       <p:bgPr>
         <a:solidFill>
-          <a:srgbClr val="0A0A0A"/>
+          <a:srgbClr val="F5F6F8"/>
         </a:solidFill>
       </p:bgPr>
     </p:bg>
@@ -19906,11 +19906,11 @@
             <a:r>
               <a:rPr lang="en-US" sz="1200" b="1" spc="200" kern="0" dirty="0">
                 <a:solidFill>
-                  <a:srgbClr val="D62828"/>
+                  <a:srgbClr val="C8161D"/>
                 </a:solidFill>
                 <a:latin typeface="Arial" pitchFamily="34" charset="0"/>
-                <a:ea typeface="Arial" pitchFamily="34" charset="-122"/>
-                <a:cs typeface="Arial" pitchFamily="34" charset="-120"/>
+                <a:ea typeface="BIZ UDPGothic" pitchFamily="34" charset="-122"/>
+                <a:cs typeface="BIZ UDPGothic" pitchFamily="34" charset="-120"/>
               </a:rPr>
               <a:t>PILLAR 02 — DETAIL</a:t>
             </a:r>
@@ -19948,11 +19948,11 @@
             <a:r>
               <a:rPr lang="en-US" sz="2400" b="1" dirty="0">
                 <a:solidFill>
-                  <a:srgbClr val="F5F5F0"/>
-                </a:solidFill>
-                <a:latin typeface="Noto Sans JP" pitchFamily="34" charset="0"/>
-                <a:ea typeface="Noto Sans JP" pitchFamily="34" charset="-122"/>
-                <a:cs typeface="Noto Sans JP" pitchFamily="34" charset="-120"/>
+                  <a:srgbClr val="16181D"/>
+                </a:solidFill>
+                <a:latin typeface="BIZ UDPGothic" pitchFamily="34" charset="0"/>
+                <a:ea typeface="BIZ UDPGothic" pitchFamily="34" charset="-122"/>
+                <a:cs typeface="BIZ UDPGothic" pitchFamily="34" charset="-120"/>
               </a:rPr>
               <a:t>具体的にやめる4つの制度</a:t>
             </a:r>
@@ -19999,25 +19999,25 @@
                       <a:r>
                         <a:rPr lang="en-US" sz="1200" b="1" dirty="0">
                           <a:solidFill>
-                            <a:srgbClr val="F5F5F0"/>
+                            <a:srgbClr val="FFFFFF"/>
                           </a:solidFill>
-                          <a:latin typeface="Noto Sans JP" pitchFamily="34" charset="0"/>
-                          <a:ea typeface="Noto Sans JP" pitchFamily="34" charset="-122"/>
-                          <a:cs typeface="Noto Sans JP" pitchFamily="34" charset="-120"/>
+                          <a:latin typeface="BIZ UDPGothic" pitchFamily="34" charset="0"/>
+                          <a:ea typeface="BIZ UDPGothic" pitchFamily="34" charset="-122"/>
+                          <a:cs typeface="BIZ UDPGothic" pitchFamily="34" charset="-120"/>
                         </a:rPr>
                         <a:t>制度名</a:t>
                       </a:r>
                       <a:endParaRPr lang="en-US" sz="1200" dirty="0">
-                        <a:latin typeface="Noto Sans JP" charset="0"/>
-                        <a:ea typeface="Noto Sans JP" charset="0"/>
-                        <a:cs typeface="Noto Sans JP" charset="0"/>
+                        <a:latin typeface="BIZ UDPGothic" charset="0"/>
+                        <a:ea typeface="BIZ UDPGothic" charset="0"/>
+                        <a:cs typeface="BIZ UDPGothic" charset="0"/>
                       </a:endParaRPr>
                     </a:p>
                   </a:txBody>
                   <a:tcPr marL="101600" marR="101600" marT="50800" marB="50800" anchor="ctr">
                     <a:lnL w="6350" cap="flat" cmpd="sng" algn="ctr">
                       <a:solidFill>
-                        <a:srgbClr val="2E2E2E"/>
+                        <a:srgbClr val="DDE0E6"/>
                       </a:solidFill>
                       <a:prstDash val="solid"/>
                       <a:round/>
@@ -20026,7 +20026,7 @@
                     </a:lnL>
                     <a:lnR w="6350" cap="flat" cmpd="sng" algn="ctr">
                       <a:solidFill>
-                        <a:srgbClr val="2E2E2E"/>
+                        <a:srgbClr val="DDE0E6"/>
                       </a:solidFill>
                       <a:prstDash val="solid"/>
                       <a:round/>
@@ -20035,7 +20035,7 @@
                     </a:lnR>
                     <a:lnT w="6350" cap="flat" cmpd="sng" algn="ctr">
                       <a:solidFill>
-                        <a:srgbClr val="2E2E2E"/>
+                        <a:srgbClr val="DDE0E6"/>
                       </a:solidFill>
                       <a:prstDash val="solid"/>
                       <a:round/>
@@ -20044,7 +20044,7 @@
                     </a:lnT>
                     <a:lnB w="6350" cap="flat" cmpd="sng" algn="ctr">
                       <a:solidFill>
-                        <a:srgbClr val="2E2E2E"/>
+                        <a:srgbClr val="DDE0E6"/>
                       </a:solidFill>
                       <a:prstDash val="solid"/>
                       <a:round/>
@@ -20052,7 +20052,7 @@
                       <a:tailEnd type="none" w="med" len="med"/>
                     </a:lnB>
                     <a:solidFill>
-                      <a:srgbClr val="D62828"/>
+                      <a:srgbClr val="C8161D"/>
                     </a:solidFill>
                   </a:tcPr>
                 </a:tc>
@@ -20067,25 +20067,25 @@
                       <a:r>
                         <a:rPr lang="en-US" sz="1200" b="1" dirty="0">
                           <a:solidFill>
-                            <a:srgbClr val="F5F5F0"/>
+                            <a:srgbClr val="FFFFFF"/>
                           </a:solidFill>
-                          <a:latin typeface="Noto Sans JP" pitchFamily="34" charset="0"/>
-                          <a:ea typeface="Noto Sans JP" pitchFamily="34" charset="-122"/>
-                          <a:cs typeface="Noto Sans JP" pitchFamily="34" charset="-120"/>
+                          <a:latin typeface="BIZ UDPGothic" pitchFamily="34" charset="0"/>
+                          <a:ea typeface="BIZ UDPGothic" pitchFamily="34" charset="-122"/>
+                          <a:cs typeface="BIZ UDPGothic" pitchFamily="34" charset="-120"/>
                         </a:rPr>
                         <a:t>現在の予算規模</a:t>
                       </a:r>
                       <a:endParaRPr lang="en-US" sz="1200" dirty="0">
-                        <a:latin typeface="Noto Sans JP" charset="0"/>
-                        <a:ea typeface="Noto Sans JP" charset="0"/>
-                        <a:cs typeface="Noto Sans JP" charset="0"/>
+                        <a:latin typeface="BIZ UDPGothic" charset="0"/>
+                        <a:ea typeface="BIZ UDPGothic" charset="0"/>
+                        <a:cs typeface="BIZ UDPGothic" charset="0"/>
                       </a:endParaRPr>
                     </a:p>
                   </a:txBody>
                   <a:tcPr marL="101600" marR="101600" marT="50800" marB="50800" anchor="ctr">
                     <a:lnL w="6350" cap="flat" cmpd="sng" algn="ctr">
                       <a:solidFill>
-                        <a:srgbClr val="2E2E2E"/>
+                        <a:srgbClr val="DDE0E6"/>
                       </a:solidFill>
                       <a:prstDash val="solid"/>
                       <a:round/>
@@ -20094,7 +20094,7 @@
                     </a:lnL>
                     <a:lnR w="6350" cap="flat" cmpd="sng" algn="ctr">
                       <a:solidFill>
-                        <a:srgbClr val="2E2E2E"/>
+                        <a:srgbClr val="DDE0E6"/>
                       </a:solidFill>
                       <a:prstDash val="solid"/>
                       <a:round/>
@@ -20103,7 +20103,7 @@
                     </a:lnR>
                     <a:lnT w="6350" cap="flat" cmpd="sng" algn="ctr">
                       <a:solidFill>
-                        <a:srgbClr val="2E2E2E"/>
+                        <a:srgbClr val="DDE0E6"/>
                       </a:solidFill>
                       <a:prstDash val="solid"/>
                       <a:round/>
@@ -20112,7 +20112,7 @@
                     </a:lnT>
                     <a:lnB w="6350" cap="flat" cmpd="sng" algn="ctr">
                       <a:solidFill>
-                        <a:srgbClr val="2E2E2E"/>
+                        <a:srgbClr val="DDE0E6"/>
                       </a:solidFill>
                       <a:prstDash val="solid"/>
                       <a:round/>
@@ -20120,7 +20120,7 @@
                       <a:tailEnd type="none" w="med" len="med"/>
                     </a:lnB>
                     <a:solidFill>
-                      <a:srgbClr val="D62828"/>
+                      <a:srgbClr val="C8161D"/>
                     </a:solidFill>
                   </a:tcPr>
                 </a:tc>
@@ -20135,25 +20135,25 @@
                       <a:r>
                         <a:rPr lang="en-US" sz="1200" b="1" dirty="0">
                           <a:solidFill>
-                            <a:srgbClr val="F5F5F0"/>
+                            <a:srgbClr val="FFFFFF"/>
                           </a:solidFill>
-                          <a:latin typeface="Noto Sans JP" pitchFamily="34" charset="0"/>
-                          <a:ea typeface="Noto Sans JP" pitchFamily="34" charset="-122"/>
-                          <a:cs typeface="Noto Sans JP" pitchFamily="34" charset="-120"/>
+                          <a:latin typeface="BIZ UDPGothic" pitchFamily="34" charset="0"/>
+                          <a:ea typeface="BIZ UDPGothic" pitchFamily="34" charset="-122"/>
+                          <a:cs typeface="BIZ UDPGothic" pitchFamily="34" charset="-120"/>
                         </a:rPr>
                         <a:t>やめる理由</a:t>
                       </a:r>
                       <a:endParaRPr lang="en-US" sz="1200" dirty="0">
-                        <a:latin typeface="Noto Sans JP" charset="0"/>
-                        <a:ea typeface="Noto Sans JP" charset="0"/>
-                        <a:cs typeface="Noto Sans JP" charset="0"/>
+                        <a:latin typeface="BIZ UDPGothic" charset="0"/>
+                        <a:ea typeface="BIZ UDPGothic" charset="0"/>
+                        <a:cs typeface="BIZ UDPGothic" charset="0"/>
                       </a:endParaRPr>
                     </a:p>
                   </a:txBody>
                   <a:tcPr marL="101600" marR="101600" marT="50800" marB="50800" anchor="ctr">
                     <a:lnL w="6350" cap="flat" cmpd="sng" algn="ctr">
                       <a:solidFill>
-                        <a:srgbClr val="2E2E2E"/>
+                        <a:srgbClr val="DDE0E6"/>
                       </a:solidFill>
                       <a:prstDash val="solid"/>
                       <a:round/>
@@ -20162,7 +20162,7 @@
                     </a:lnL>
                     <a:lnR w="6350" cap="flat" cmpd="sng" algn="ctr">
                       <a:solidFill>
-                        <a:srgbClr val="2E2E2E"/>
+                        <a:srgbClr val="DDE0E6"/>
                       </a:solidFill>
                       <a:prstDash val="solid"/>
                       <a:round/>
@@ -20171,7 +20171,7 @@
                     </a:lnR>
                     <a:lnT w="6350" cap="flat" cmpd="sng" algn="ctr">
                       <a:solidFill>
-                        <a:srgbClr val="2E2E2E"/>
+                        <a:srgbClr val="DDE0E6"/>
                       </a:solidFill>
                       <a:prstDash val="solid"/>
                       <a:round/>
@@ -20180,7 +20180,7 @@
                     </a:lnT>
                     <a:lnB w="6350" cap="flat" cmpd="sng" algn="ctr">
                       <a:solidFill>
-                        <a:srgbClr val="2E2E2E"/>
+                        <a:srgbClr val="DDE0E6"/>
                       </a:solidFill>
                       <a:prstDash val="solid"/>
                       <a:round/>
@@ -20188,7 +20188,7 @@
                       <a:tailEnd type="none" w="med" len="med"/>
                     </a:lnB>
                     <a:solidFill>
-                      <a:srgbClr val="D62828"/>
+                      <a:srgbClr val="C8161D"/>
                     </a:solidFill>
                   </a:tcPr>
                 </a:tc>
@@ -20205,25 +20205,25 @@
                       <a:r>
                         <a:rPr lang="en-US" sz="1150" dirty="0">
                           <a:solidFill>
-                            <a:srgbClr val="F5F5F0"/>
+                            <a:srgbClr val="16181D"/>
                           </a:solidFill>
-                          <a:latin typeface="Noto Sans JP" pitchFamily="34" charset="0"/>
-                          <a:ea typeface="Noto Sans JP" pitchFamily="34" charset="-122"/>
-                          <a:cs typeface="Noto Sans JP" pitchFamily="34" charset="-120"/>
+                          <a:latin typeface="BIZ UDPGothic" pitchFamily="34" charset="0"/>
+                          <a:ea typeface="BIZ UDPGothic" pitchFamily="34" charset="-122"/>
+                          <a:cs typeface="BIZ UDPGothic" pitchFamily="34" charset="-120"/>
                         </a:rPr>
                         <a:t>ものづくり・IT導入・持続化補助金</a:t>
                       </a:r>
                       <a:endParaRPr lang="en-US" sz="1150" dirty="0">
-                        <a:latin typeface="Noto Sans JP" charset="0"/>
-                        <a:ea typeface="Noto Sans JP" charset="0"/>
-                        <a:cs typeface="Noto Sans JP" charset="0"/>
+                        <a:latin typeface="BIZ UDPGothic" charset="0"/>
+                        <a:ea typeface="BIZ UDPGothic" charset="0"/>
+                        <a:cs typeface="BIZ UDPGothic" charset="0"/>
                       </a:endParaRPr>
                     </a:p>
                   </a:txBody>
                   <a:tcPr marL="101600" marR="101600" marT="50800" marB="50800" anchor="ctr">
                     <a:lnL w="6350" cap="flat" cmpd="sng" algn="ctr">
                       <a:solidFill>
-                        <a:srgbClr val="2E2E2E"/>
+                        <a:srgbClr val="DDE0E6"/>
                       </a:solidFill>
                       <a:prstDash val="solid"/>
                       <a:round/>
@@ -20232,7 +20232,7 @@
                     </a:lnL>
                     <a:lnR w="6350" cap="flat" cmpd="sng" algn="ctr">
                       <a:solidFill>
-                        <a:srgbClr val="2E2E2E"/>
+                        <a:srgbClr val="DDE0E6"/>
                       </a:solidFill>
                       <a:prstDash val="solid"/>
                       <a:round/>
@@ -20241,7 +20241,7 @@
                     </a:lnR>
                     <a:lnT w="6350" cap="flat" cmpd="sng" algn="ctr">
                       <a:solidFill>
-                        <a:srgbClr val="2E2E2E"/>
+                        <a:srgbClr val="DDE0E6"/>
                       </a:solidFill>
                       <a:prstDash val="solid"/>
                       <a:round/>
@@ -20250,7 +20250,7 @@
                     </a:lnT>
                     <a:lnB w="6350" cap="flat" cmpd="sng" algn="ctr">
                       <a:solidFill>
-                        <a:srgbClr val="2E2E2E"/>
+                        <a:srgbClr val="DDE0E6"/>
                       </a:solidFill>
                       <a:prstDash val="solid"/>
                       <a:round/>
@@ -20258,7 +20258,7 @@
                       <a:tailEnd type="none" w="med" len="med"/>
                     </a:lnB>
                     <a:solidFill>
-                      <a:srgbClr val="1A1A1A"/>
+                      <a:srgbClr val="FFFFFF"/>
                     </a:solidFill>
                   </a:tcPr>
                 </a:tc>
@@ -20273,25 +20273,25 @@
                       <a:r>
                         <a:rPr lang="en-US" sz="1150" dirty="0">
                           <a:solidFill>
-                            <a:srgbClr val="F5F5F0"/>
+                            <a:srgbClr val="16181D"/>
                           </a:solidFill>
-                          <a:latin typeface="Noto Sans JP" pitchFamily="34" charset="0"/>
-                          <a:ea typeface="Noto Sans JP" pitchFamily="34" charset="-122"/>
-                          <a:cs typeface="Noto Sans JP" pitchFamily="34" charset="-120"/>
+                          <a:latin typeface="BIZ UDPGothic" pitchFamily="34" charset="0"/>
+                          <a:ea typeface="BIZ UDPGothic" pitchFamily="34" charset="-122"/>
+                          <a:cs typeface="BIZ UDPGothic" pitchFamily="34" charset="-120"/>
                         </a:rPr>
                         <a:t>3,400億円</a:t>
                       </a:r>
                       <a:endParaRPr lang="en-US" sz="1150" dirty="0">
-                        <a:latin typeface="Noto Sans JP" charset="0"/>
-                        <a:ea typeface="Noto Sans JP" charset="0"/>
-                        <a:cs typeface="Noto Sans JP" charset="0"/>
+                        <a:latin typeface="BIZ UDPGothic" charset="0"/>
+                        <a:ea typeface="BIZ UDPGothic" charset="0"/>
+                        <a:cs typeface="BIZ UDPGothic" charset="0"/>
                       </a:endParaRPr>
                     </a:p>
                   </a:txBody>
                   <a:tcPr marL="101600" marR="101600" marT="50800" marB="50800" anchor="ctr">
                     <a:lnL w="6350" cap="flat" cmpd="sng" algn="ctr">
                       <a:solidFill>
-                        <a:srgbClr val="2E2E2E"/>
+                        <a:srgbClr val="DDE0E6"/>
                       </a:solidFill>
                       <a:prstDash val="solid"/>
                       <a:round/>
@@ -20300,7 +20300,7 @@
                     </a:lnL>
                     <a:lnR w="6350" cap="flat" cmpd="sng" algn="ctr">
                       <a:solidFill>
-                        <a:srgbClr val="2E2E2E"/>
+                        <a:srgbClr val="DDE0E6"/>
                       </a:solidFill>
                       <a:prstDash val="solid"/>
                       <a:round/>
@@ -20309,7 +20309,7 @@
                     </a:lnR>
                     <a:lnT w="6350" cap="flat" cmpd="sng" algn="ctr">
                       <a:solidFill>
-                        <a:srgbClr val="2E2E2E"/>
+                        <a:srgbClr val="DDE0E6"/>
                       </a:solidFill>
                       <a:prstDash val="solid"/>
                       <a:round/>
@@ -20318,7 +20318,7 @@
                     </a:lnT>
                     <a:lnB w="6350" cap="flat" cmpd="sng" algn="ctr">
                       <a:solidFill>
-                        <a:srgbClr val="2E2E2E"/>
+                        <a:srgbClr val="DDE0E6"/>
                       </a:solidFill>
                       <a:prstDash val="solid"/>
                       <a:round/>
@@ -20326,7 +20326,7 @@
                       <a:tailEnd type="none" w="med" len="med"/>
                     </a:lnB>
                     <a:solidFill>
-                      <a:srgbClr val="1A1A1A"/>
+                      <a:srgbClr val="FFFFFF"/>
                     </a:solidFill>
                   </a:tcPr>
                 </a:tc>
@@ -20341,25 +20341,25 @@
                       <a:r>
                         <a:rPr lang="en-US" sz="1150" dirty="0">
                           <a:solidFill>
-                            <a:srgbClr val="F5F5F0"/>
+                            <a:srgbClr val="16181D"/>
                           </a:solidFill>
-                          <a:latin typeface="Noto Sans JP" pitchFamily="34" charset="0"/>
-                          <a:ea typeface="Noto Sans JP" pitchFamily="34" charset="-122"/>
-                          <a:cs typeface="Noto Sans JP" pitchFamily="34" charset="-120"/>
+                          <a:latin typeface="BIZ UDPGothic" pitchFamily="34" charset="0"/>
+                          <a:ea typeface="BIZ UDPGothic" pitchFamily="34" charset="-122"/>
+                          <a:cs typeface="BIZ UDPGothic" pitchFamily="34" charset="-120"/>
                         </a:rPr>
                         <a:t>成熟市場向けの汎用支援</a:t>
                       </a:r>
                       <a:endParaRPr lang="en-US" sz="1150" dirty="0">
-                        <a:latin typeface="Noto Sans JP" charset="0"/>
-                        <a:ea typeface="Noto Sans JP" charset="0"/>
-                        <a:cs typeface="Noto Sans JP" charset="0"/>
+                        <a:latin typeface="BIZ UDPGothic" charset="0"/>
+                        <a:ea typeface="BIZ UDPGothic" charset="0"/>
+                        <a:cs typeface="BIZ UDPGothic" charset="0"/>
                       </a:endParaRPr>
                     </a:p>
                   </a:txBody>
                   <a:tcPr marL="101600" marR="101600" marT="50800" marB="50800" anchor="ctr">
                     <a:lnL w="6350" cap="flat" cmpd="sng" algn="ctr">
                       <a:solidFill>
-                        <a:srgbClr val="2E2E2E"/>
+                        <a:srgbClr val="DDE0E6"/>
                       </a:solidFill>
                       <a:prstDash val="solid"/>
                       <a:round/>
@@ -20368,7 +20368,7 @@
                     </a:lnL>
                     <a:lnR w="6350" cap="flat" cmpd="sng" algn="ctr">
                       <a:solidFill>
-                        <a:srgbClr val="2E2E2E"/>
+                        <a:srgbClr val="DDE0E6"/>
                       </a:solidFill>
                       <a:prstDash val="solid"/>
                       <a:round/>
@@ -20377,7 +20377,7 @@
                     </a:lnR>
                     <a:lnT w="6350" cap="flat" cmpd="sng" algn="ctr">
                       <a:solidFill>
-                        <a:srgbClr val="2E2E2E"/>
+                        <a:srgbClr val="DDE0E6"/>
                       </a:solidFill>
                       <a:prstDash val="solid"/>
                       <a:round/>
@@ -20386,7 +20386,7 @@
                     </a:lnT>
                     <a:lnB w="6350" cap="flat" cmpd="sng" algn="ctr">
                       <a:solidFill>
-                        <a:srgbClr val="2E2E2E"/>
+                        <a:srgbClr val="DDE0E6"/>
                       </a:solidFill>
                       <a:prstDash val="solid"/>
                       <a:round/>
@@ -20394,7 +20394,7 @@
                       <a:tailEnd type="none" w="med" len="med"/>
                     </a:lnB>
                     <a:solidFill>
-                      <a:srgbClr val="1A1A1A"/>
+                      <a:srgbClr val="FFFFFF"/>
                     </a:solidFill>
                   </a:tcPr>
                 </a:tc>
@@ -20411,25 +20411,25 @@
                       <a:r>
                         <a:rPr lang="en-US" sz="1150" dirty="0">
                           <a:solidFill>
-                            <a:srgbClr val="F5F5F0"/>
+                            <a:srgbClr val="16181D"/>
                           </a:solidFill>
-                          <a:latin typeface="Noto Sans JP" pitchFamily="34" charset="0"/>
-                          <a:ea typeface="Noto Sans JP" pitchFamily="34" charset="-122"/>
-                          <a:cs typeface="Noto Sans JP" pitchFamily="34" charset="-120"/>
+                          <a:latin typeface="BIZ UDPGothic" pitchFamily="34" charset="0"/>
+                          <a:ea typeface="BIZ UDPGothic" pitchFamily="34" charset="-122"/>
+                          <a:cs typeface="BIZ UDPGothic" pitchFamily="34" charset="-120"/>
                         </a:rPr>
                         <a:t>雇用調整助成金</a:t>
                       </a:r>
                       <a:endParaRPr lang="en-US" sz="1150" dirty="0">
-                        <a:latin typeface="Noto Sans JP" charset="0"/>
-                        <a:ea typeface="Noto Sans JP" charset="0"/>
-                        <a:cs typeface="Noto Sans JP" charset="0"/>
+                        <a:latin typeface="BIZ UDPGothic" charset="0"/>
+                        <a:ea typeface="BIZ UDPGothic" charset="0"/>
+                        <a:cs typeface="BIZ UDPGothic" charset="0"/>
                       </a:endParaRPr>
                     </a:p>
                   </a:txBody>
                   <a:tcPr marL="101600" marR="101600" marT="50800" marB="50800" anchor="ctr">
                     <a:lnL w="6350" cap="flat" cmpd="sng" algn="ctr">
                       <a:solidFill>
-                        <a:srgbClr val="2E2E2E"/>
+                        <a:srgbClr val="DDE0E6"/>
                       </a:solidFill>
                       <a:prstDash val="solid"/>
                       <a:round/>
@@ -20438,7 +20438,7 @@
                     </a:lnL>
                     <a:lnR w="6350" cap="flat" cmpd="sng" algn="ctr">
                       <a:solidFill>
-                        <a:srgbClr val="2E2E2E"/>
+                        <a:srgbClr val="DDE0E6"/>
                       </a:solidFill>
                       <a:prstDash val="solid"/>
                       <a:round/>
@@ -20447,7 +20447,7 @@
                     </a:lnR>
                     <a:lnT w="6350" cap="flat" cmpd="sng" algn="ctr">
                       <a:solidFill>
-                        <a:srgbClr val="2E2E2E"/>
+                        <a:srgbClr val="DDE0E6"/>
                       </a:solidFill>
                       <a:prstDash val="solid"/>
                       <a:round/>
@@ -20456,7 +20456,7 @@
                     </a:lnT>
                     <a:lnB w="6350" cap="flat" cmpd="sng" algn="ctr">
                       <a:solidFill>
-                        <a:srgbClr val="2E2E2E"/>
+                        <a:srgbClr val="DDE0E6"/>
                       </a:solidFill>
                       <a:prstDash val="solid"/>
                       <a:round/>
@@ -20464,7 +20464,7 @@
                       <a:tailEnd type="none" w="med" len="med"/>
                     </a:lnB>
                     <a:solidFill>
-                      <a:srgbClr val="151515"/>
+                      <a:srgbClr val="FFFFFF"/>
                     </a:solidFill>
                   </a:tcPr>
                 </a:tc>
@@ -20479,25 +20479,25 @@
                       <a:r>
                         <a:rPr lang="en-US" sz="1150" dirty="0">
                           <a:solidFill>
-                            <a:srgbClr val="F5F5F0"/>
+                            <a:srgbClr val="16181D"/>
                           </a:solidFill>
-                          <a:latin typeface="Noto Sans JP" pitchFamily="34" charset="0"/>
-                          <a:ea typeface="Noto Sans JP" pitchFamily="34" charset="-122"/>
-                          <a:cs typeface="Noto Sans JP" pitchFamily="34" charset="-120"/>
+                          <a:latin typeface="BIZ UDPGothic" pitchFamily="34" charset="0"/>
+                          <a:ea typeface="BIZ UDPGothic" pitchFamily="34" charset="-122"/>
+                          <a:cs typeface="BIZ UDPGothic" pitchFamily="34" charset="-120"/>
                         </a:rPr>
                         <a:t>145億円</a:t>
                       </a:r>
                       <a:endParaRPr lang="en-US" sz="1150" dirty="0">
-                        <a:latin typeface="Noto Sans JP" charset="0"/>
-                        <a:ea typeface="Noto Sans JP" charset="0"/>
-                        <a:cs typeface="Noto Sans JP" charset="0"/>
+                        <a:latin typeface="BIZ UDPGothic" charset="0"/>
+                        <a:ea typeface="BIZ UDPGothic" charset="0"/>
+                        <a:cs typeface="BIZ UDPGothic" charset="0"/>
                       </a:endParaRPr>
                     </a:p>
                   </a:txBody>
                   <a:tcPr marL="101600" marR="101600" marT="50800" marB="50800" anchor="ctr">
                     <a:lnL w="6350" cap="flat" cmpd="sng" algn="ctr">
                       <a:solidFill>
-                        <a:srgbClr val="2E2E2E"/>
+                        <a:srgbClr val="DDE0E6"/>
                       </a:solidFill>
                       <a:prstDash val="solid"/>
                       <a:round/>
@@ -20506,7 +20506,7 @@
                     </a:lnL>
                     <a:lnR w="6350" cap="flat" cmpd="sng" algn="ctr">
                       <a:solidFill>
-                        <a:srgbClr val="2E2E2E"/>
+                        <a:srgbClr val="DDE0E6"/>
                       </a:solidFill>
                       <a:prstDash val="solid"/>
                       <a:round/>
@@ -20515,7 +20515,7 @@
                     </a:lnR>
                     <a:lnT w="6350" cap="flat" cmpd="sng" algn="ctr">
                       <a:solidFill>
-                        <a:srgbClr val="2E2E2E"/>
+                        <a:srgbClr val="DDE0E6"/>
                       </a:solidFill>
                       <a:prstDash val="solid"/>
                       <a:round/>
@@ -20524,7 +20524,7 @@
                     </a:lnT>
                     <a:lnB w="6350" cap="flat" cmpd="sng" algn="ctr">
                       <a:solidFill>
-                        <a:srgbClr val="2E2E2E"/>
+                        <a:srgbClr val="DDE0E6"/>
                       </a:solidFill>
                       <a:prstDash val="solid"/>
                       <a:round/>
@@ -20532,7 +20532,7 @@
                       <a:tailEnd type="none" w="med" len="med"/>
                     </a:lnB>
                     <a:solidFill>
-                      <a:srgbClr val="151515"/>
+                      <a:srgbClr val="FFFFFF"/>
                     </a:solidFill>
                   </a:tcPr>
                 </a:tc>
@@ -20547,25 +20547,25 @@
                       <a:r>
                         <a:rPr lang="en-US" sz="1150" dirty="0">
                           <a:solidFill>
-                            <a:srgbClr val="F5F5F0"/>
+                            <a:srgbClr val="16181D"/>
                           </a:solidFill>
-                          <a:latin typeface="Noto Sans JP" pitchFamily="34" charset="0"/>
-                          <a:ea typeface="Noto Sans JP" pitchFamily="34" charset="-122"/>
-                          <a:cs typeface="Noto Sans JP" pitchFamily="34" charset="-120"/>
+                          <a:latin typeface="BIZ UDPGothic" pitchFamily="34" charset="0"/>
+                          <a:ea typeface="BIZ UDPGothic" pitchFamily="34" charset="-122"/>
+                          <a:cs typeface="BIZ UDPGothic" pitchFamily="34" charset="-120"/>
                         </a:rPr>
                         <a:t>一般的な雇用維持は対象外に</a:t>
                       </a:r>
                       <a:endParaRPr lang="en-US" sz="1150" dirty="0">
-                        <a:latin typeface="Noto Sans JP" charset="0"/>
-                        <a:ea typeface="Noto Sans JP" charset="0"/>
-                        <a:cs typeface="Noto Sans JP" charset="0"/>
+                        <a:latin typeface="BIZ UDPGothic" charset="0"/>
+                        <a:ea typeface="BIZ UDPGothic" charset="0"/>
+                        <a:cs typeface="BIZ UDPGothic" charset="0"/>
                       </a:endParaRPr>
                     </a:p>
                   </a:txBody>
                   <a:tcPr marL="101600" marR="101600" marT="50800" marB="50800" anchor="ctr">
                     <a:lnL w="6350" cap="flat" cmpd="sng" algn="ctr">
                       <a:solidFill>
-                        <a:srgbClr val="2E2E2E"/>
+                        <a:srgbClr val="DDE0E6"/>
                       </a:solidFill>
                       <a:prstDash val="solid"/>
                       <a:round/>
@@ -20574,7 +20574,7 @@
                     </a:lnL>
                     <a:lnR w="6350" cap="flat" cmpd="sng" algn="ctr">
                       <a:solidFill>
-                        <a:srgbClr val="2E2E2E"/>
+                        <a:srgbClr val="DDE0E6"/>
                       </a:solidFill>
                       <a:prstDash val="solid"/>
                       <a:round/>
@@ -20583,7 +20583,7 @@
                     </a:lnR>
                     <a:lnT w="6350" cap="flat" cmpd="sng" algn="ctr">
                       <a:solidFill>
-                        <a:srgbClr val="2E2E2E"/>
+                        <a:srgbClr val="DDE0E6"/>
                       </a:solidFill>
                       <a:prstDash val="solid"/>
                       <a:round/>
@@ -20592,7 +20592,7 @@
                     </a:lnT>
                     <a:lnB w="6350" cap="flat" cmpd="sng" algn="ctr">
                       <a:solidFill>
-                        <a:srgbClr val="2E2E2E"/>
+                        <a:srgbClr val="DDE0E6"/>
                       </a:solidFill>
                       <a:prstDash val="solid"/>
                       <a:round/>
@@ -20600,7 +20600,7 @@
                       <a:tailEnd type="none" w="med" len="med"/>
                     </a:lnB>
                     <a:solidFill>
-                      <a:srgbClr val="151515"/>
+                      <a:srgbClr val="FFFFFF"/>
                     </a:solidFill>
                   </a:tcPr>
                 </a:tc>
@@ -20617,25 +20617,25 @@
                       <a:r>
                         <a:rPr lang="en-US" sz="1150" dirty="0">
                           <a:solidFill>
-                            <a:srgbClr val="F5F5F0"/>
+                            <a:srgbClr val="16181D"/>
                           </a:solidFill>
-                          <a:latin typeface="Noto Sans JP" pitchFamily="34" charset="0"/>
-                          <a:ea typeface="Noto Sans JP" pitchFamily="34" charset="-122"/>
-                          <a:cs typeface="Noto Sans JP" pitchFamily="34" charset="-120"/>
+                          <a:latin typeface="BIZ UDPGothic" pitchFamily="34" charset="0"/>
+                          <a:ea typeface="BIZ UDPGothic" pitchFamily="34" charset="-122"/>
+                          <a:cs typeface="BIZ UDPGothic" pitchFamily="34" charset="-120"/>
                         </a:rPr>
                         <a:t>特定求職者雇用開発助成金（一般分）</a:t>
                       </a:r>
                       <a:endParaRPr lang="en-US" sz="1150" dirty="0">
-                        <a:latin typeface="Noto Sans JP" charset="0"/>
-                        <a:ea typeface="Noto Sans JP" charset="0"/>
-                        <a:cs typeface="Noto Sans JP" charset="0"/>
+                        <a:latin typeface="BIZ UDPGothic" charset="0"/>
+                        <a:ea typeface="BIZ UDPGothic" charset="0"/>
+                        <a:cs typeface="BIZ UDPGothic" charset="0"/>
                       </a:endParaRPr>
                     </a:p>
                   </a:txBody>
                   <a:tcPr marL="101600" marR="101600" marT="50800" marB="50800" anchor="ctr">
                     <a:lnL w="6350" cap="flat" cmpd="sng" algn="ctr">
                       <a:solidFill>
-                        <a:srgbClr val="2E2E2E"/>
+                        <a:srgbClr val="DDE0E6"/>
                       </a:solidFill>
                       <a:prstDash val="solid"/>
                       <a:round/>
@@ -20644,7 +20644,7 @@
                     </a:lnL>
                     <a:lnR w="6350" cap="flat" cmpd="sng" algn="ctr">
                       <a:solidFill>
-                        <a:srgbClr val="2E2E2E"/>
+                        <a:srgbClr val="DDE0E6"/>
                       </a:solidFill>
                       <a:prstDash val="solid"/>
                       <a:round/>
@@ -20653,7 +20653,7 @@
                     </a:lnR>
                     <a:lnT w="6350" cap="flat" cmpd="sng" algn="ctr">
                       <a:solidFill>
-                        <a:srgbClr val="2E2E2E"/>
+                        <a:srgbClr val="DDE0E6"/>
                       </a:solidFill>
                       <a:prstDash val="solid"/>
                       <a:round/>
@@ -20662,7 +20662,7 @@
                     </a:lnT>
                     <a:lnB w="6350" cap="flat" cmpd="sng" algn="ctr">
                       <a:solidFill>
-                        <a:srgbClr val="2E2E2E"/>
+                        <a:srgbClr val="DDE0E6"/>
                       </a:solidFill>
                       <a:prstDash val="solid"/>
                       <a:round/>
@@ -20670,7 +20670,7 @@
                       <a:tailEnd type="none" w="med" len="med"/>
                     </a:lnB>
                     <a:solidFill>
-                      <a:srgbClr val="1A1A1A"/>
+                      <a:srgbClr val="FFFFFF"/>
                     </a:solidFill>
                   </a:tcPr>
                 </a:tc>
@@ -20685,25 +20685,25 @@
                       <a:r>
                         <a:rPr lang="en-US" sz="1150" dirty="0">
                           <a:solidFill>
-                            <a:srgbClr val="F5F5F0"/>
+                            <a:srgbClr val="16181D"/>
                           </a:solidFill>
-                          <a:latin typeface="Noto Sans JP" pitchFamily="34" charset="0"/>
-                          <a:ea typeface="Noto Sans JP" pitchFamily="34" charset="-122"/>
-                          <a:cs typeface="Noto Sans JP" pitchFamily="34" charset="-120"/>
+                          <a:latin typeface="BIZ UDPGothic" pitchFamily="34" charset="0"/>
+                          <a:ea typeface="BIZ UDPGothic" pitchFamily="34" charset="-122"/>
+                          <a:cs typeface="BIZ UDPGothic" pitchFamily="34" charset="-120"/>
                         </a:rPr>
                         <a:t>486.7億円（上限）</a:t>
                       </a:r>
                       <a:endParaRPr lang="en-US" sz="1150" dirty="0">
-                        <a:latin typeface="Noto Sans JP" charset="0"/>
-                        <a:ea typeface="Noto Sans JP" charset="0"/>
-                        <a:cs typeface="Noto Sans JP" charset="0"/>
+                        <a:latin typeface="BIZ UDPGothic" charset="0"/>
+                        <a:ea typeface="BIZ UDPGothic" charset="0"/>
+                        <a:cs typeface="BIZ UDPGothic" charset="0"/>
                       </a:endParaRPr>
                     </a:p>
                   </a:txBody>
                   <a:tcPr marL="101600" marR="101600" marT="50800" marB="50800" anchor="ctr">
                     <a:lnL w="6350" cap="flat" cmpd="sng" algn="ctr">
                       <a:solidFill>
-                        <a:srgbClr val="2E2E2E"/>
+                        <a:srgbClr val="DDE0E6"/>
                       </a:solidFill>
                       <a:prstDash val="solid"/>
                       <a:round/>
@@ -20712,7 +20712,7 @@
                     </a:lnL>
                     <a:lnR w="6350" cap="flat" cmpd="sng" algn="ctr">
                       <a:solidFill>
-                        <a:srgbClr val="2E2E2E"/>
+                        <a:srgbClr val="DDE0E6"/>
                       </a:solidFill>
                       <a:prstDash val="solid"/>
                       <a:round/>
@@ -20721,7 +20721,7 @@
                     </a:lnR>
                     <a:lnT w="6350" cap="flat" cmpd="sng" algn="ctr">
                       <a:solidFill>
-                        <a:srgbClr val="2E2E2E"/>
+                        <a:srgbClr val="DDE0E6"/>
                       </a:solidFill>
                       <a:prstDash val="solid"/>
                       <a:round/>
@@ -20730,7 +20730,7 @@
                     </a:lnT>
                     <a:lnB w="6350" cap="flat" cmpd="sng" algn="ctr">
                       <a:solidFill>
-                        <a:srgbClr val="2E2E2E"/>
+                        <a:srgbClr val="DDE0E6"/>
                       </a:solidFill>
                       <a:prstDash val="solid"/>
                       <a:round/>
@@ -20738,7 +20738,7 @@
                       <a:tailEnd type="none" w="med" len="med"/>
                     </a:lnB>
                     <a:solidFill>
-                      <a:srgbClr val="1A1A1A"/>
+                      <a:srgbClr val="FFFFFF"/>
                     </a:solidFill>
                   </a:tcPr>
                 </a:tc>
@@ -20753,25 +20753,25 @@
                       <a:r>
                         <a:rPr lang="en-US" sz="1150" dirty="0">
                           <a:solidFill>
-                            <a:srgbClr val="F5F5F0"/>
+                            <a:srgbClr val="16181D"/>
                           </a:solidFill>
-                          <a:latin typeface="Noto Sans JP" pitchFamily="34" charset="0"/>
-                          <a:ea typeface="Noto Sans JP" pitchFamily="34" charset="-122"/>
-                          <a:cs typeface="Noto Sans JP" pitchFamily="34" charset="-120"/>
+                          <a:latin typeface="BIZ UDPGothic" pitchFamily="34" charset="0"/>
+                          <a:ea typeface="BIZ UDPGothic" pitchFamily="34" charset="-122"/>
+                          <a:cs typeface="BIZ UDPGothic" pitchFamily="34" charset="-120"/>
                         </a:rPr>
                         <a:t>障害者雇用分のみ存続</a:t>
                       </a:r>
                       <a:endParaRPr lang="en-US" sz="1150" dirty="0">
-                        <a:latin typeface="Noto Sans JP" charset="0"/>
-                        <a:ea typeface="Noto Sans JP" charset="0"/>
-                        <a:cs typeface="Noto Sans JP" charset="0"/>
+                        <a:latin typeface="BIZ UDPGothic" charset="0"/>
+                        <a:ea typeface="BIZ UDPGothic" charset="0"/>
+                        <a:cs typeface="BIZ UDPGothic" charset="0"/>
                       </a:endParaRPr>
                     </a:p>
                   </a:txBody>
                   <a:tcPr marL="101600" marR="101600" marT="50800" marB="50800" anchor="ctr">
                     <a:lnL w="6350" cap="flat" cmpd="sng" algn="ctr">
                       <a:solidFill>
-                        <a:srgbClr val="2E2E2E"/>
+                        <a:srgbClr val="DDE0E6"/>
                       </a:solidFill>
                       <a:prstDash val="solid"/>
                       <a:round/>
@@ -20780,7 +20780,7 @@
                     </a:lnL>
                     <a:lnR w="6350" cap="flat" cmpd="sng" algn="ctr">
                       <a:solidFill>
-                        <a:srgbClr val="2E2E2E"/>
+                        <a:srgbClr val="DDE0E6"/>
                       </a:solidFill>
                       <a:prstDash val="solid"/>
                       <a:round/>
@@ -20789,7 +20789,7 @@
                     </a:lnR>
                     <a:lnT w="6350" cap="flat" cmpd="sng" algn="ctr">
                       <a:solidFill>
-                        <a:srgbClr val="2E2E2E"/>
+                        <a:srgbClr val="DDE0E6"/>
                       </a:solidFill>
                       <a:prstDash val="solid"/>
                       <a:round/>
@@ -20798,7 +20798,7 @@
                     </a:lnT>
                     <a:lnB w="6350" cap="flat" cmpd="sng" algn="ctr">
                       <a:solidFill>
-                        <a:srgbClr val="2E2E2E"/>
+                        <a:srgbClr val="DDE0E6"/>
                       </a:solidFill>
                       <a:prstDash val="solid"/>
                       <a:round/>
@@ -20806,7 +20806,7 @@
                       <a:tailEnd type="none" w="med" len="med"/>
                     </a:lnB>
                     <a:solidFill>
-                      <a:srgbClr val="1A1A1A"/>
+                      <a:srgbClr val="FFFFFF"/>
                     </a:solidFill>
                   </a:tcPr>
                 </a:tc>
@@ -20823,25 +20823,25 @@
                       <a:r>
                         <a:rPr lang="en-US" sz="1150" dirty="0">
                           <a:solidFill>
-                            <a:srgbClr val="F5F5F0"/>
+                            <a:srgbClr val="16181D"/>
                           </a:solidFill>
-                          <a:latin typeface="Noto Sans JP" pitchFamily="34" charset="0"/>
-                          <a:ea typeface="Noto Sans JP" pitchFamily="34" charset="-122"/>
-                          <a:cs typeface="Noto Sans JP" pitchFamily="34" charset="-120"/>
+                          <a:latin typeface="BIZ UDPGothic" pitchFamily="34" charset="0"/>
+                          <a:ea typeface="BIZ UDPGothic" pitchFamily="34" charset="-122"/>
+                          <a:cs typeface="BIZ UDPGothic" pitchFamily="34" charset="-120"/>
                         </a:rPr>
                         <a:t>中小企業信用補完制度関連補助事業</a:t>
                       </a:r>
                       <a:endParaRPr lang="en-US" sz="1150" dirty="0">
-                        <a:latin typeface="Noto Sans JP" charset="0"/>
-                        <a:ea typeface="Noto Sans JP" charset="0"/>
-                        <a:cs typeface="Noto Sans JP" charset="0"/>
+                        <a:latin typeface="BIZ UDPGothic" charset="0"/>
+                        <a:ea typeface="BIZ UDPGothic" charset="0"/>
+                        <a:cs typeface="BIZ UDPGothic" charset="0"/>
                       </a:endParaRPr>
                     </a:p>
                   </a:txBody>
                   <a:tcPr marL="101600" marR="101600" marT="50800" marB="50800" anchor="ctr">
                     <a:lnL w="6350" cap="flat" cmpd="sng" algn="ctr">
                       <a:solidFill>
-                        <a:srgbClr val="2E2E2E"/>
+                        <a:srgbClr val="DDE0E6"/>
                       </a:solidFill>
                       <a:prstDash val="solid"/>
                       <a:round/>
@@ -20850,7 +20850,7 @@
                     </a:lnL>
                     <a:lnR w="6350" cap="flat" cmpd="sng" algn="ctr">
                       <a:solidFill>
-                        <a:srgbClr val="2E2E2E"/>
+                        <a:srgbClr val="DDE0E6"/>
                       </a:solidFill>
                       <a:prstDash val="solid"/>
                       <a:round/>
@@ -20859,7 +20859,7 @@
                     </a:lnR>
                     <a:lnT w="6350" cap="flat" cmpd="sng" algn="ctr">
                       <a:solidFill>
-                        <a:srgbClr val="2E2E2E"/>
+                        <a:srgbClr val="DDE0E6"/>
                       </a:solidFill>
                       <a:prstDash val="solid"/>
                       <a:round/>
@@ -20868,7 +20868,7 @@
                     </a:lnT>
                     <a:lnB w="6350" cap="flat" cmpd="sng" algn="ctr">
                       <a:solidFill>
-                        <a:srgbClr val="2E2E2E"/>
+                        <a:srgbClr val="DDE0E6"/>
                       </a:solidFill>
                       <a:prstDash val="solid"/>
                       <a:round/>
@@ -20876,7 +20876,7 @@
                       <a:tailEnd type="none" w="med" len="med"/>
                     </a:lnB>
                     <a:solidFill>
-                      <a:srgbClr val="151515"/>
+                      <a:srgbClr val="FFFFFF"/>
                     </a:solidFill>
                   </a:tcPr>
                 </a:tc>
@@ -20891,25 +20891,25 @@
                       <a:r>
                         <a:rPr lang="en-US" sz="1150" dirty="0">
                           <a:solidFill>
-                            <a:srgbClr val="F5F5F0"/>
+                            <a:srgbClr val="16181D"/>
                           </a:solidFill>
-                          <a:latin typeface="Noto Sans JP" pitchFamily="34" charset="0"/>
-                          <a:ea typeface="Noto Sans JP" pitchFamily="34" charset="-122"/>
-                          <a:cs typeface="Noto Sans JP" pitchFamily="34" charset="-120"/>
+                          <a:latin typeface="BIZ UDPGothic" pitchFamily="34" charset="0"/>
+                          <a:ea typeface="BIZ UDPGothic" pitchFamily="34" charset="-122"/>
+                          <a:cs typeface="BIZ UDPGothic" pitchFamily="34" charset="-120"/>
                         </a:rPr>
                         <a:t>32億円</a:t>
                       </a:r>
                       <a:endParaRPr lang="en-US" sz="1150" dirty="0">
-                        <a:latin typeface="Noto Sans JP" charset="0"/>
-                        <a:ea typeface="Noto Sans JP" charset="0"/>
-                        <a:cs typeface="Noto Sans JP" charset="0"/>
+                        <a:latin typeface="BIZ UDPGothic" charset="0"/>
+                        <a:ea typeface="BIZ UDPGothic" charset="0"/>
+                        <a:cs typeface="BIZ UDPGothic" charset="0"/>
                       </a:endParaRPr>
                     </a:p>
                   </a:txBody>
                   <a:tcPr marL="101600" marR="101600" marT="50800" marB="50800" anchor="ctr">
                     <a:lnL w="6350" cap="flat" cmpd="sng" algn="ctr">
                       <a:solidFill>
-                        <a:srgbClr val="2E2E2E"/>
+                        <a:srgbClr val="DDE0E6"/>
                       </a:solidFill>
                       <a:prstDash val="solid"/>
                       <a:round/>
@@ -20918,7 +20918,7 @@
                     </a:lnL>
                     <a:lnR w="6350" cap="flat" cmpd="sng" algn="ctr">
                       <a:solidFill>
-                        <a:srgbClr val="2E2E2E"/>
+                        <a:srgbClr val="DDE0E6"/>
                       </a:solidFill>
                       <a:prstDash val="solid"/>
                       <a:round/>
@@ -20927,7 +20927,7 @@
                     </a:lnR>
                     <a:lnT w="6350" cap="flat" cmpd="sng" algn="ctr">
                       <a:solidFill>
-                        <a:srgbClr val="2E2E2E"/>
+                        <a:srgbClr val="DDE0E6"/>
                       </a:solidFill>
                       <a:prstDash val="solid"/>
                       <a:round/>
@@ -20936,7 +20936,7 @@
                     </a:lnT>
                     <a:lnB w="6350" cap="flat" cmpd="sng" algn="ctr">
                       <a:solidFill>
-                        <a:srgbClr val="2E2E2E"/>
+                        <a:srgbClr val="DDE0E6"/>
                       </a:solidFill>
                       <a:prstDash val="solid"/>
                       <a:round/>
@@ -20944,7 +20944,7 @@
                       <a:tailEnd type="none" w="med" len="med"/>
                     </a:lnB>
                     <a:solidFill>
-                      <a:srgbClr val="151515"/>
+                      <a:srgbClr val="FFFFFF"/>
                     </a:solidFill>
                   </a:tcPr>
                 </a:tc>
@@ -20959,25 +20959,25 @@
                       <a:r>
                         <a:rPr lang="en-US" sz="1150" dirty="0">
                           <a:solidFill>
-                            <a:srgbClr val="F5F5F0"/>
+                            <a:srgbClr val="16181D"/>
                           </a:solidFill>
-                          <a:latin typeface="Noto Sans JP" pitchFamily="34" charset="0"/>
-                          <a:ea typeface="Noto Sans JP" pitchFamily="34" charset="-122"/>
-                          <a:cs typeface="Noto Sans JP" pitchFamily="34" charset="-120"/>
+                          <a:latin typeface="BIZ UDPGothic" pitchFamily="34" charset="0"/>
+                          <a:ea typeface="BIZ UDPGothic" pitchFamily="34" charset="-122"/>
+                          <a:cs typeface="BIZ UDPGothic" pitchFamily="34" charset="-120"/>
                         </a:rPr>
                         <a:t>倒産回避目的の支援は廃止</a:t>
                       </a:r>
                       <a:endParaRPr lang="en-US" sz="1150" dirty="0">
-                        <a:latin typeface="Noto Sans JP" charset="0"/>
-                        <a:ea typeface="Noto Sans JP" charset="0"/>
-                        <a:cs typeface="Noto Sans JP" charset="0"/>
+                        <a:latin typeface="BIZ UDPGothic" charset="0"/>
+                        <a:ea typeface="BIZ UDPGothic" charset="0"/>
+                        <a:cs typeface="BIZ UDPGothic" charset="0"/>
                       </a:endParaRPr>
                     </a:p>
                   </a:txBody>
                   <a:tcPr marL="101600" marR="101600" marT="50800" marB="50800" anchor="ctr">
                     <a:lnL w="6350" cap="flat" cmpd="sng" algn="ctr">
                       <a:solidFill>
-                        <a:srgbClr val="2E2E2E"/>
+                        <a:srgbClr val="DDE0E6"/>
                       </a:solidFill>
                       <a:prstDash val="solid"/>
                       <a:round/>
@@ -20986,7 +20986,7 @@
                     </a:lnL>
                     <a:lnR w="6350" cap="flat" cmpd="sng" algn="ctr">
                       <a:solidFill>
-                        <a:srgbClr val="2E2E2E"/>
+                        <a:srgbClr val="DDE0E6"/>
                       </a:solidFill>
                       <a:prstDash val="solid"/>
                       <a:round/>
@@ -20995,7 +20995,7 @@
                     </a:lnR>
                     <a:lnT w="6350" cap="flat" cmpd="sng" algn="ctr">
                       <a:solidFill>
-                        <a:srgbClr val="2E2E2E"/>
+                        <a:srgbClr val="DDE0E6"/>
                       </a:solidFill>
                       <a:prstDash val="solid"/>
                       <a:round/>
@@ -21004,7 +21004,7 @@
                     </a:lnT>
                     <a:lnB w="6350" cap="flat" cmpd="sng" algn="ctr">
                       <a:solidFill>
-                        <a:srgbClr val="2E2E2E"/>
+                        <a:srgbClr val="DDE0E6"/>
                       </a:solidFill>
                       <a:prstDash val="solid"/>
                       <a:round/>
@@ -21012,7 +21012,7 @@
                       <a:tailEnd type="none" w="med" len="med"/>
                     </a:lnB>
                     <a:solidFill>
-                      <a:srgbClr val="151515"/>
+                      <a:srgbClr val="FFFFFF"/>
                     </a:solidFill>
                   </a:tcPr>
                 </a:tc>
@@ -21048,11 +21048,11 @@
             <a:r>
               <a:rPr lang="en-US" sz="1300" b="1" dirty="0">
                 <a:solidFill>
-                  <a:srgbClr val="D62828"/>
-                </a:solidFill>
-                <a:latin typeface="Noto Sans JP" pitchFamily="34" charset="0"/>
-                <a:ea typeface="Noto Sans JP" pitchFamily="34" charset="-122"/>
-                <a:cs typeface="Noto Sans JP" pitchFamily="34" charset="-120"/>
+                  <a:srgbClr val="C8161D"/>
+                </a:solidFill>
+                <a:latin typeface="BIZ UDPGothic" pitchFamily="34" charset="0"/>
+                <a:ea typeface="BIZ UDPGothic" pitchFamily="34" charset="-122"/>
+                <a:cs typeface="BIZ UDPGothic" pitchFamily="34" charset="-120"/>
               </a:rPr>
               <a:t>合計 約4,064億円 を④の柱（未来への投資）へ振り替える</a:t>
             </a:r>
@@ -21087,13 +21087,13 @@
             <a:r>
               <a:rPr lang="en-US" sz="800" dirty="0">
                 <a:solidFill>
-                  <a:srgbClr val="F5F5F0">
+                  <a:srgbClr val="16181D">
                     <a:alpha val="40000"/>
                   </a:srgbClr>
                 </a:solidFill>
                 <a:latin typeface="Arial" pitchFamily="34" charset="0"/>
-                <a:ea typeface="Arial" pitchFamily="34" charset="-122"/>
-                <a:cs typeface="Arial" pitchFamily="34" charset="-120"/>
+                <a:ea typeface="BIZ UDPGothic" pitchFamily="34" charset="-122"/>
+                <a:cs typeface="BIZ UDPGothic" pitchFamily="34" charset="-120"/>
               </a:rPr>
               <a:t>REBOOT JAPAN ── 政策提言プラットフォーム</a:t>
             </a:r>
@@ -21128,13 +21128,13 @@
             <a:r>
               <a:rPr lang="en-US" sz="800" dirty="0">
                 <a:solidFill>
-                  <a:srgbClr val="F5F5F0">
+                  <a:srgbClr val="16181D">
                     <a:alpha val="40000"/>
                   </a:srgbClr>
                 </a:solidFill>
                 <a:latin typeface="Arial" pitchFamily="34" charset="0"/>
-                <a:ea typeface="Arial" pitchFamily="34" charset="-122"/>
-                <a:cs typeface="Arial" pitchFamily="34" charset="-120"/>
+                <a:ea typeface="BIZ UDPGothic" pitchFamily="34" charset="-122"/>
+                <a:cs typeface="BIZ UDPGothic" pitchFamily="34" charset="-120"/>
               </a:rPr>
               <a:t>9</a:t>
             </a:r>
